--- a/course/lectures/act-1-foundations/05-specification/slides/1-5-Specification.pptx
+++ b/course/lectures/act-1-foundations/05-specification/slides/1-5-Specification.pptx
@@ -11,6 +11,7 @@
     <p:sldId id="517" r:id="rId2"/>
     <p:sldId id="738" r:id="rId3"/>
     <p:sldId id="651" r:id="rId4"/>
+    <p:sldId id="758" r:id="rId36"/>
     <p:sldId id="744" r:id="rId5"/>
     <p:sldId id="729" r:id="rId6"/>
     <p:sldId id="745" r:id="rId7"/>
@@ -1641,7 +1642,7 @@
           <a:p>
             <a:r>
               <a:rPr lang="en-US" dirty="0"/>
-              <a:t>None of them is a tier or a refinement of another. They are peers. They join through shared concepts: an observation, a night, an advisory. That shared vocabulary is what lets the four views describe one system without any of them being complete.</a:t>
+              <a:t>None of them is a tier or a refinement of another. They are peers. They join through shared concepts: an observation, a night, an advisory. That shared vocabulary is what lets the three views describe one system without any of them being complete.</a:t>
             </a:r>
           </a:p>
           <a:p>
@@ -1816,7 +1817,7 @@
           <a:p>
             <a:r>
               <a:rPr lang="en-US" dirty="0"/>
-              <a:t>Two things to notice. First, the obligations bound a region; they do not select a point. The realizations inside that intersection can differ substantially and all remain acceptable. Part II calls those remaining choices degrees of freedom, and a tolerance is what bounds the permitted variation.</a:t>
+              <a:t>Two things to notice. First, the obligations bound a region; they do not select a point. The realizations inside that intersection can differ substantially and all remain acceptable. MAGE Part II calls those remaining choices degrees of freedom, and a tolerance is what bounds the permitted variation.</a:t>
             </a:r>
           </a:p>
           <a:p>
@@ -1899,7 +1900,7 @@
           <a:p>
             <a:r>
               <a:rPr lang="en-US" dirty="0"/>
-              <a:t>Part II's diagnostic is the useful one to give students. If a proposed realization would provoke not that, then some consequential boundary remains, whether or not anyone has written it down. The choice was never wholly free.</a:t>
+              <a:t>MAGE Part II's diagnostic is the useful one to give students. If a proposed realization would provoke not that, then some consequential boundary remains, whether or not anyone has written it down. The choice was never wholly free.</a:t>
             </a:r>
           </a:p>
           <a:p>
@@ -1985,7 +1986,7 @@
           <a:p>
             <a:r>
               <a:rPr lang="en-US" sz="1200" dirty="0"/>
-              <a:t>- Load time: free if it is comfort, tacit or an obligation if someone decides while waiting.</a:t>
+              <a:t>- Load time: free if it is comfort, tacit or an obligation if the delay causes users to abandon the operation, retry, or otherwise changes their experience.</a:t>
             </a:r>
           </a:p>
           <a:p>
@@ -2030,7 +2031,7 @@
           <a:p>
             <a:r>
               <a:rPr lang="en-US" sz="1200" dirty="0"/>
-              <a:t>One minute alone, then two with a neighbour. Argue for a classification, then say what the system would have to be for you to change your mind.</a:t>
+              <a:t>One minute alone, then two with a neighbour. Argue for a classification, then say what additional context would change your classification.</a:t>
             </a:r>
           </a:p>
           <a:p>
@@ -2503,7 +2504,7 @@
           <a:p>
             <a:r>
               <a:rPr lang="en-US" sz="1200" dirty="0"/>
-              <a:t>Read the boxed rule aloud as one sentence and stop. If students remember one artifact from this lecture, it should be this box and the degrees-of-freedom figure.</a:t>
+              <a:t>Read the three rules slowly and stop. They are the practical synthesis of the lecture. If students remember one artifact from this lecture, it should be this box and the degrees-of-freedom figure.</a:t>
             </a:r>
           </a:p>
           <a:p>
@@ -2765,11 +2766,58 @@
           <a:p>
             <a:r>
               <a:rPr lang="en-US" sz="1200" dirty="0"/>
-              <a:t>Section one. We have the model. Now the first question: what does specification actually add to a requirement?</a:t>
+              <a:t>Section one. The opening slide gave us a model of moving from requirements to acceptable realizations. Now we ask the first question: what does specification add?</a:t>
             </a:r>
           </a:p>
           <a:p>
             <a:endParaRPr lang="en-US" sz="1200"/>
+          </a:p>
+        </p:txBody>
+      </p:sp>
+    </p:spTree>
+  </p:cSld>
+  <p:clrMapOvr>
+    <a:masterClrMapping/>
+  </p:clrMapOvr>
+</p:notes>
+</file>
+
+<file path=ppt/notesSlides/notesSlide30.xml><?xml version="1.0" encoding="utf-8"?>
+<p:notes xmlns:a="http://schemas.openxmlformats.org/drawingml/2006/main" xmlns:r="http://schemas.openxmlformats.org/officeDocument/2006/relationships" xmlns:p="http://schemas.openxmlformats.org/presentationml/2006/main">
+  <p:cSld>
+    <p:spTree>
+      <p:nvGrpSpPr>
+        <p:cNvPr id="1" name=""/>
+        <p:cNvGrpSpPr/>
+        <p:nvPr/>
+      </p:nvGrpSpPr>
+      <p:grpSpPr>
+        <a:xfrm>
+          <a:off x="0" y="0"/>
+          <a:ext cx="0" cy="0"/>
+          <a:chOff x="0" y="0"/>
+          <a:chExt cx="0" cy="0"/>
+        </a:xfrm>
+      </p:grpSpPr>
+      <p:sp>
+        <p:nvSpPr>
+          <p:cNvPr id="2" name="Notes Placeholder 1"/>
+          <p:cNvSpPr>
+            <a:spLocks noGrp="1"/>
+          </p:cNvSpPr>
+          <p:nvPr>
+            <p:ph type="body" idx="1"/>
+          </p:nvPr>
+        </p:nvSpPr>
+        <p:spPr/>
+        <p:txBody>
+          <a:bodyPr/>
+          <a:lstStyle/>
+          <a:p>
+            <a:r>
+              <a:rPr lang="en-US" sz="1200" dirty="0"/>
+              <a:t>This system is fictional. We will use it throughout the lecture because it is complicated enough to have real specification questions, but small enough that we can keep the whole problem in our heads. These are its requirements. Notice that they sound perfectly reasonable. The question for today is whether they are enough.</a:t>
+            </a:r>
           </a:p>
         </p:txBody>
       </p:sp>
@@ -2856,6 +2904,12 @@
           </a:p>
           <a:p>
             <a:endParaRPr lang="en-US" sz="1200"/>
+          </a:p>
+          <a:p>
+            <a:r>
+              <a:rPr lang="en-US" sz="1200" dirty="0"/>
+              <a:t>We will use this Sleep Advisor app as a running example throughout the lecture.</a:t>
+            </a:r>
           </a:p>
           <a:p>
             <a:r>
@@ -8809,7 +8863,7 @@
                   <a:srgbClr val="8E6F3E"/>
                 </a:solidFill>
               </a:rPr>
-              <a:t>FULL OFP</a:t>
+              <a:t>FULL OPERATIONAL FLIGHT PROGRAM (OFP)</a:t>
             </a:r>
           </a:p>
         </p:txBody>
@@ -11833,7 +11887,7 @@
             </a:pPr>
             <a:r>
               <a:rPr lang="en-US" b="1" dirty="0"/>
-              <a:t>State models expose legal behavior</a:t>
+              <a:t>State models expose allowable behavior</a:t>
             </a:r>
           </a:p>
         </p:txBody>
@@ -14202,7 +14256,22 @@
                   <a:srgbClr val="FFFFFF"/>
                 </a:solidFill>
               </a:rPr>
-              <a:t>consequential obligations, made explicit</a:t>
+              <a:t>consequential obligations</a:t>
+            </a:r>
+            <a:br>
+              <a:rPr lang="en-US" sz="2000" b="0" i="0" dirty="0">
+                <a:solidFill>
+                  <a:srgbClr val="FFFFFF"/>
+                </a:solidFill>
+              </a:rPr>
+            </a:br>
+            <a:r>
+              <a:rPr lang="en-US" sz="2000" b="0" i="0" dirty="0">
+                <a:solidFill>
+                  <a:srgbClr val="FFFFFF"/>
+                </a:solidFill>
+              </a:rPr>
+              <a:t>made explicit</a:t>
             </a:r>
           </a:p>
         </p:txBody>
@@ -15760,7 +15829,7 @@
         </p:nvSpPr>
         <p:spPr>
           <a:xfrm>
-            <a:off x="635000" y="800100"/>
+            <a:off x="635000" y="914400"/>
             <a:ext cx="3048000" cy="279400"/>
           </a:xfrm>
           <a:prstGeom prst="rect">
@@ -15813,7 +15882,7 @@
         </p:blipFill>
         <p:spPr>
           <a:xfrm>
-            <a:off x="279400" y="800100"/>
+            <a:off x="279400" y="914400"/>
             <a:ext cx="279400" cy="279400"/>
           </a:xfrm>
           <a:prstGeom prst="rect">
@@ -20099,45 +20168,6 @@
           </a:p>
         </p:txBody>
       </p:sp>
-      <p:sp>
-        <p:nvSpPr>
-          <p:cNvPr id="71" name="T71"/>
-          <p:cNvSpPr txBox="1"/>
-          <p:nvPr/>
-        </p:nvSpPr>
-        <p:spPr>
-          <a:xfrm>
-            <a:off x="279400" y="5080000"/>
-            <a:ext cx="8559800" cy="1143000"/>
-          </a:xfrm>
-          <a:prstGeom prst="rect">
-            <a:avLst/>
-          </a:prstGeom>
-          <a:noFill/>
-          <a:ln>
-            <a:noFill/>
-          </a:ln>
-        </p:spPr>
-        <p:txBody>
-          <a:bodyPr wrap="square" lIns="0" tIns="0" rIns="0" bIns="0" anchor="t">
-            <a:normAutofit/>
-          </a:bodyPr>
-          <a:lstStyle/>
-          <a:p>
-            <a:pPr algn="ctr">
-              <a:buNone/>
-            </a:pPr>
-            <a:r>
-              <a:rPr lang="en-US" sz="2400" b="1" i="0" dirty="0">
-                <a:solidFill>
-                  <a:srgbClr val="000000"/>
-                </a:solidFill>
-              </a:rPr>
-              <a:t>The boundary was in your head, never in the artifact.</a:t>
-            </a:r>
-          </a:p>
-        </p:txBody>
-      </p:sp>
     </p:spTree>
     <p:extLst>
       <p:ext uri="{BB962C8B-B14F-4D97-AF65-F5344CB8AC3E}">
@@ -23138,6 +23168,758 @@
 </p:sld>
 </file>
 
+<file path=ppt/slides/slide30.xml><?xml version="1.0" encoding="utf-8"?>
+<p:sld xmlns:a="http://schemas.openxmlformats.org/drawingml/2006/main" xmlns:r="http://schemas.openxmlformats.org/officeDocument/2006/relationships" xmlns:p="http://schemas.openxmlformats.org/presentationml/2006/main">
+  <p:cSld>
+    <p:spTree>
+      <p:nvGrpSpPr>
+        <p:cNvPr id="1" name=""/>
+        <p:cNvGrpSpPr/>
+        <p:nvPr/>
+      </p:nvGrpSpPr>
+      <p:grpSpPr>
+        <a:xfrm>
+          <a:off x="0" y="0"/>
+          <a:ext cx="0" cy="0"/>
+          <a:chOff x="0" y="0"/>
+          <a:chExt cx="0" cy="0"/>
+        </a:xfrm>
+      </p:grpSpPr>
+      <p:sp>
+        <p:nvSpPr>
+          <p:cNvPr id="3" name="Title 2"/>
+          <p:cNvSpPr>
+            <a:spLocks noGrp="1"/>
+          </p:cNvSpPr>
+          <p:nvPr>
+            <p:ph type="title"/>
+          </p:nvPr>
+        </p:nvSpPr>
+        <p:spPr/>
+        <p:txBody>
+          <a:bodyPr>
+            <a:normAutofit/>
+          </a:bodyPr>
+          <a:lstStyle/>
+          <a:p>
+            <a:pPr algn="l">
+              <a:buNone/>
+            </a:pPr>
+            <a:r>
+              <a:rPr lang="en-US" sz="3000" b="1" i="0" dirty="0">
+                <a:solidFill>
+                  <a:srgbClr val="000000"/>
+                </a:solidFill>
+              </a:rPr>
+              <a:t>Running example: Sleep Advisor</a:t>
+            </a:r>
+          </a:p>
+        </p:txBody>
+      </p:sp>
+      <p:sp>
+        <p:nvSpPr>
+          <p:cNvPr id="4" name="Slide Number Placeholder 3"/>
+          <p:cNvSpPr>
+            <a:spLocks noGrp="1"/>
+          </p:cNvSpPr>
+          <p:nvPr>
+            <p:ph type="sldNum" sz="quarter" idx="4"/>
+          </p:nvPr>
+        </p:nvSpPr>
+        <p:spPr/>
+        <p:txBody>
+          <a:bodyPr/>
+          <a:lstStyle/>
+          <a:p>
+            <a:fld id="{1A2B3C4D-5E6F-7A8B-9C0D-1E2F3A4B5C6D}" type="slidenum">
+              <a:rPr lang="en-US" smtClean="0"/>
+              <a:t>4</a:t>
+            </a:fld>
+            <a:endParaRPr lang="en-US"/>
+          </a:p>
+        </p:txBody>
+      </p:sp>
+      <p:sp>
+        <p:nvSpPr>
+          <p:cNvPr id="100" name="Phone"/>
+          <p:cNvSpPr/>
+          <p:nvPr/>
+        </p:nvSpPr>
+        <p:spPr>
+          <a:xfrm>
+            <a:off x="558800" y="1229360"/>
+            <a:ext cx="2209800" cy="3200400"/>
+          </a:xfrm>
+          <a:prstGeom prst="roundRect">
+            <a:avLst>
+              <a:gd name="adj" fmla="val 8000"/>
+            </a:avLst>
+          </a:prstGeom>
+          <a:solidFill>
+            <a:srgbClr val="FFFFFF"/>
+          </a:solidFill>
+          <a:ln w="28575">
+            <a:solidFill>
+              <a:srgbClr val="8E6F3E"/>
+            </a:solidFill>
+          </a:ln>
+        </p:spPr>
+        <p:txBody>
+          <a:bodyPr wrap="square" lIns="109728" tIns="82296" rIns="109728" bIns="82296" anchor="t">
+            <a:normAutofit/>
+          </a:bodyPr>
+          <a:lstStyle/>
+          <a:p>
+            <a:endParaRPr/>
+          </a:p>
+        </p:txBody>
+      </p:sp>
+      <p:sp>
+        <p:nvSpPr>
+          <p:cNvPr id="101" name="HomeBar"/>
+          <p:cNvSpPr/>
+          <p:nvPr/>
+        </p:nvSpPr>
+        <p:spPr>
+          <a:xfrm>
+            <a:off x="1320800" y="4172585"/>
+            <a:ext cx="685800" cy="57150"/>
+          </a:xfrm>
+          <a:prstGeom prst="roundRect">
+            <a:avLst>
+              <a:gd name="adj" fmla="val 50000"/>
+            </a:avLst>
+          </a:prstGeom>
+          <a:solidFill>
+            <a:srgbClr val="C9B991"/>
+          </a:solidFill>
+          <a:ln>
+            <a:noFill/>
+          </a:ln>
+        </p:spPr>
+        <p:txBody>
+          <a:bodyPr/>
+          <a:lstStyle/>
+          <a:p>
+            <a:endParaRPr/>
+          </a:p>
+        </p:txBody>
+      </p:sp>
+      <p:pic>
+        <p:nvPicPr>
+          <p:cNvPr id="102" name="AppIcon" descr="Sleep Advisor app icon: gold crescent moon and sleep waveform on a dark rounded tile"/>
+          <p:cNvPicPr>
+            <a:picLocks noChangeAspect="1"/>
+          </p:cNvPicPr>
+          <p:nvPr/>
+        </p:nvPicPr>
+        <p:blipFill>
+          <a:blip r:embed="rId3"/>
+          <a:stretch>
+            <a:fillRect/>
+          </a:stretch>
+        </p:blipFill>
+        <p:spPr>
+          <a:xfrm>
+            <a:off x="1054100" y="1629410"/>
+            <a:ext cx="1219200" cy="1219200"/>
+          </a:xfrm>
+          <a:prstGeom prst="rect">
+            <a:avLst/>
+          </a:prstGeom>
+        </p:spPr>
+      </p:pic>
+      <p:sp>
+        <p:nvSpPr>
+          <p:cNvPr id="105" name="ScreenBar1"/>
+          <p:cNvSpPr/>
+          <p:nvPr/>
+        </p:nvSpPr>
+        <p:spPr>
+          <a:xfrm>
+            <a:off x="711200" y="3397250"/>
+            <a:ext cx="1905000" cy="114300"/>
+          </a:xfrm>
+          <a:prstGeom prst="roundRect">
+            <a:avLst>
+              <a:gd name="adj" fmla="val 50000"/>
+            </a:avLst>
+          </a:prstGeom>
+          <a:solidFill>
+            <a:srgbClr val="F5F1E8"/>
+          </a:solidFill>
+          <a:ln w="9525">
+            <a:solidFill>
+              <a:srgbClr val="C9B991"/>
+            </a:solidFill>
+          </a:ln>
+        </p:spPr>
+        <p:txBody>
+          <a:bodyPr/>
+          <a:lstStyle/>
+          <a:p>
+            <a:endParaRPr/>
+          </a:p>
+        </p:txBody>
+      </p:sp>
+      <p:sp>
+        <p:nvSpPr>
+          <p:cNvPr id="106" name="ScreenBar2"/>
+          <p:cNvSpPr/>
+          <p:nvPr/>
+        </p:nvSpPr>
+        <p:spPr>
+          <a:xfrm>
+            <a:off x="711200" y="3648710"/>
+            <a:ext cx="1524000" cy="114300"/>
+          </a:xfrm>
+          <a:prstGeom prst="roundRect">
+            <a:avLst>
+              <a:gd name="adj" fmla="val 50000"/>
+            </a:avLst>
+          </a:prstGeom>
+          <a:solidFill>
+            <a:srgbClr val="F5F1E8"/>
+          </a:solidFill>
+          <a:ln w="9525">
+            <a:solidFill>
+              <a:srgbClr val="C9B991"/>
+            </a:solidFill>
+          </a:ln>
+        </p:spPr>
+        <p:txBody>
+          <a:bodyPr/>
+          <a:lstStyle/>
+          <a:p>
+            <a:endParaRPr/>
+          </a:p>
+        </p:txBody>
+      </p:sp>
+      <p:sp>
+        <p:nvSpPr>
+          <p:cNvPr id="107" name="ScreenBar3"/>
+          <p:cNvSpPr/>
+          <p:nvPr/>
+        </p:nvSpPr>
+        <p:spPr>
+          <a:xfrm>
+            <a:off x="711200" y="3900170"/>
+            <a:ext cx="1714500" cy="114300"/>
+          </a:xfrm>
+          <a:prstGeom prst="roundRect">
+            <a:avLst>
+              <a:gd name="adj" fmla="val 50000"/>
+            </a:avLst>
+          </a:prstGeom>
+          <a:solidFill>
+            <a:srgbClr val="F5F1E8"/>
+          </a:solidFill>
+          <a:ln w="9525">
+            <a:solidFill>
+              <a:srgbClr val="C9B991"/>
+            </a:solidFill>
+          </a:ln>
+        </p:spPr>
+        <p:txBody>
+          <a:bodyPr/>
+          <a:lstStyle/>
+          <a:p>
+            <a:endParaRPr/>
+          </a:p>
+        </p:txBody>
+      </p:sp>
+      <p:sp>
+        <p:nvSpPr>
+          <p:cNvPr id="103" name="Wordmark"/>
+          <p:cNvSpPr txBox="1"/>
+          <p:nvPr/>
+        </p:nvSpPr>
+        <p:spPr>
+          <a:xfrm>
+            <a:off x="609600" y="2940050"/>
+            <a:ext cx="2108200" cy="274320"/>
+          </a:xfrm>
+          <a:prstGeom prst="rect">
+            <a:avLst/>
+          </a:prstGeom>
+          <a:noFill/>
+          <a:ln>
+            <a:noFill/>
+          </a:ln>
+        </p:spPr>
+        <p:txBody>
+          <a:bodyPr lIns="0" tIns="0" rIns="0" bIns="0" anchor="ctr">
+            <a:noAutofit/>
+          </a:bodyPr>
+          <a:lstStyle/>
+          <a:p>
+            <a:pPr algn="ctr">
+              <a:buNone/>
+            </a:pPr>
+            <a:r>
+              <a:rPr lang="en-US" sz="1400" b="1" spc="120" dirty="0">
+                <a:solidFill>
+                  <a:srgbClr val="8E6F3E"/>
+                </a:solidFill>
+              </a:rPr>
+              <a:t>SLEEP ADVISOR</a:t>
+            </a:r>
+          </a:p>
+        </p:txBody>
+      </p:sp>
+      <p:sp>
+        <p:nvSpPr>
+          <p:cNvPr id="104" name="AppDesc"/>
+          <p:cNvSpPr txBox="1"/>
+          <p:nvPr/>
+        </p:nvSpPr>
+        <p:spPr>
+          <a:xfrm>
+            <a:off x="279400" y="4632960"/>
+            <a:ext cx="2781300" cy="731520"/>
+          </a:xfrm>
+          <a:prstGeom prst="rect">
+            <a:avLst/>
+          </a:prstGeom>
+          <a:noFill/>
+          <a:ln>
+            <a:noFill/>
+          </a:ln>
+        </p:spPr>
+        <p:txBody>
+          <a:bodyPr lIns="0" tIns="0" rIns="0" bIns="0" anchor="t">
+            <a:noAutofit/>
+          </a:bodyPr>
+          <a:lstStyle/>
+          <a:p>
+            <a:pPr algn="l">
+              <a:buNone/>
+            </a:pPr>
+            <a:r>
+              <a:rPr lang="en-US" sz="1300" b="0" i="0" dirty="0">
+                <a:solidFill>
+                  <a:srgbClr val="000000"/>
+                </a:solidFill>
+              </a:rPr>
+              <a:t>A hypothetical app that learns a user's normal sleep patterns and helps them notice potentially important changes.</a:t>
+            </a:r>
+          </a:p>
+        </p:txBody>
+      </p:sp>
+      <p:sp>
+        <p:nvSpPr>
+          <p:cNvPr id="110" name="ReqR1"/>
+          <p:cNvSpPr/>
+          <p:nvPr/>
+        </p:nvSpPr>
+        <p:spPr>
+          <a:xfrm>
+            <a:off x="3175000" y="939800"/>
+            <a:ext cx="5664200" cy="616857"/>
+          </a:xfrm>
+          <a:prstGeom prst="rect">
+            <a:avLst/>
+          </a:prstGeom>
+          <a:solidFill>
+            <a:srgbClr val="F5F1E8"/>
+          </a:solidFill>
+          <a:ln w="12700">
+            <a:solidFill>
+              <a:srgbClr val="C9B991"/>
+            </a:solidFill>
+          </a:ln>
+        </p:spPr>
+        <p:txBody>
+          <a:bodyPr wrap="square" lIns="109728" tIns="82296" rIns="109728" bIns="82296" anchor="ctr">
+            <a:normAutofit/>
+          </a:bodyPr>
+          <a:lstStyle/>
+          <a:p>
+            <a:pPr algn="l">
+              <a:buNone/>
+            </a:pPr>
+            <a:r>
+              <a:rPr lang="en-US" sz="1500" b="1" i="0" dirty="0">
+                <a:solidFill>
+                  <a:srgbClr val="8E6F3E"/>
+                </a:solidFill>
+              </a:rPr>
+              <a:t>R1</a:t>
+            </a:r>
+            <a:r>
+              <a:rPr lang="en-US" sz="1500" b="0" i="0" dirty="0">
+                <a:solidFill>
+                  <a:srgbClr val="000000"/>
+                </a:solidFill>
+              </a:rPr>
+              <a:t>  Track the user's sleep each night.</a:t>
+            </a:r>
+          </a:p>
+        </p:txBody>
+      </p:sp>
+      <p:sp>
+        <p:nvSpPr>
+          <p:cNvPr id="111" name="ReqR2"/>
+          <p:cNvSpPr/>
+          <p:nvPr/>
+        </p:nvSpPr>
+        <p:spPr>
+          <a:xfrm>
+            <a:off x="3175000" y="1648097"/>
+            <a:ext cx="5664200" cy="616857"/>
+          </a:xfrm>
+          <a:prstGeom prst="rect">
+            <a:avLst/>
+          </a:prstGeom>
+          <a:solidFill>
+            <a:srgbClr val="F5F1E8"/>
+          </a:solidFill>
+          <a:ln w="12700">
+            <a:solidFill>
+              <a:srgbClr val="C9B991"/>
+            </a:solidFill>
+          </a:ln>
+        </p:spPr>
+        <p:txBody>
+          <a:bodyPr wrap="square" lIns="109728" tIns="82296" rIns="109728" bIns="82296" anchor="ctr">
+            <a:normAutofit/>
+          </a:bodyPr>
+          <a:lstStyle/>
+          <a:p>
+            <a:pPr algn="l">
+              <a:buNone/>
+            </a:pPr>
+            <a:r>
+              <a:rPr lang="en-US" sz="1500" b="1" i="0" dirty="0">
+                <a:solidFill>
+                  <a:srgbClr val="8E6F3E"/>
+                </a:solidFill>
+              </a:rPr>
+              <a:t>R2</a:t>
+            </a:r>
+            <a:r>
+              <a:rPr lang="en-US" sz="1500" b="0" i="0" dirty="0">
+                <a:solidFill>
+                  <a:srgbClr val="000000"/>
+                </a:solidFill>
+              </a:rPr>
+              <a:t>  Learn what constitutes a normal sleep pattern for the user.</a:t>
+            </a:r>
+          </a:p>
+        </p:txBody>
+      </p:sp>
+      <p:sp>
+        <p:nvSpPr>
+          <p:cNvPr id="112" name="ReqR3"/>
+          <p:cNvSpPr/>
+          <p:nvPr/>
+        </p:nvSpPr>
+        <p:spPr>
+          <a:xfrm>
+            <a:off x="3175000" y="2356394"/>
+            <a:ext cx="5664200" cy="616857"/>
+          </a:xfrm>
+          <a:prstGeom prst="rect">
+            <a:avLst/>
+          </a:prstGeom>
+          <a:solidFill>
+            <a:srgbClr val="F5F1E8"/>
+          </a:solidFill>
+          <a:ln w="12700">
+            <a:solidFill>
+              <a:srgbClr val="C9B991"/>
+            </a:solidFill>
+          </a:ln>
+        </p:spPr>
+        <p:txBody>
+          <a:bodyPr wrap="square" lIns="109728" tIns="82296" rIns="109728" bIns="82296" anchor="ctr">
+            <a:normAutofit/>
+          </a:bodyPr>
+          <a:lstStyle/>
+          <a:p>
+            <a:pPr algn="l">
+              <a:buNone/>
+            </a:pPr>
+            <a:r>
+              <a:rPr lang="en-US" sz="1500" b="1" i="0" dirty="0">
+                <a:solidFill>
+                  <a:srgbClr val="8E6F3E"/>
+                </a:solidFill>
+              </a:rPr>
+              <a:t>R3</a:t>
+            </a:r>
+            <a:r>
+              <a:rPr lang="en-US" sz="1500" b="0" i="0" dirty="0">
+                <a:solidFill>
+                  <a:srgbClr val="000000"/>
+                </a:solidFill>
+              </a:rPr>
+              <a:t>  Identify meaningful departures from the user's normal pattern.</a:t>
+            </a:r>
+          </a:p>
+        </p:txBody>
+      </p:sp>
+      <p:sp>
+        <p:nvSpPr>
+          <p:cNvPr id="113" name="ReqR4"/>
+          <p:cNvSpPr/>
+          <p:nvPr/>
+        </p:nvSpPr>
+        <p:spPr>
+          <a:xfrm>
+            <a:off x="3175000" y="3064691"/>
+            <a:ext cx="5664200" cy="616857"/>
+          </a:xfrm>
+          <a:prstGeom prst="rect">
+            <a:avLst/>
+          </a:prstGeom>
+          <a:solidFill>
+            <a:srgbClr val="F5F1E8"/>
+          </a:solidFill>
+          <a:ln w="12700">
+            <a:solidFill>
+              <a:srgbClr val="C9B991"/>
+            </a:solidFill>
+          </a:ln>
+        </p:spPr>
+        <p:txBody>
+          <a:bodyPr wrap="square" lIns="109728" tIns="82296" rIns="109728" bIns="82296" anchor="ctr">
+            <a:normAutofit/>
+          </a:bodyPr>
+          <a:lstStyle/>
+          <a:p>
+            <a:pPr algn="l">
+              <a:buNone/>
+            </a:pPr>
+            <a:r>
+              <a:rPr lang="en-US" sz="1500" b="1" i="0" dirty="0">
+                <a:solidFill>
+                  <a:srgbClr val="8E6F3E"/>
+                </a:solidFill>
+              </a:rPr>
+              <a:t>R4</a:t>
+            </a:r>
+            <a:r>
+              <a:rPr lang="en-US" sz="1500" b="0" i="0" dirty="0">
+                <a:solidFill>
+                  <a:srgbClr val="000000"/>
+                </a:solidFill>
+              </a:rPr>
+              <a:t>  Alert the user when their sleep pattern suggests illness.</a:t>
+            </a:r>
+          </a:p>
+        </p:txBody>
+      </p:sp>
+      <p:sp>
+        <p:nvSpPr>
+          <p:cNvPr id="114" name="ReqR5"/>
+          <p:cNvSpPr/>
+          <p:nvPr/>
+        </p:nvSpPr>
+        <p:spPr>
+          <a:xfrm>
+            <a:off x="3175000" y="3772988"/>
+            <a:ext cx="5664200" cy="616857"/>
+          </a:xfrm>
+          <a:prstGeom prst="rect">
+            <a:avLst/>
+          </a:prstGeom>
+          <a:solidFill>
+            <a:srgbClr val="F5F1E8"/>
+          </a:solidFill>
+          <a:ln w="12700">
+            <a:solidFill>
+              <a:srgbClr val="C9B991"/>
+            </a:solidFill>
+          </a:ln>
+        </p:spPr>
+        <p:txBody>
+          <a:bodyPr wrap="square" lIns="109728" tIns="82296" rIns="109728" bIns="82296" anchor="ctr">
+            <a:normAutofit/>
+          </a:bodyPr>
+          <a:lstStyle/>
+          <a:p>
+            <a:pPr algn="l">
+              <a:buNone/>
+            </a:pPr>
+            <a:r>
+              <a:rPr lang="en-US" sz="1500" b="1" i="0" dirty="0">
+                <a:solidFill>
+                  <a:srgbClr val="8E6F3E"/>
+                </a:solidFill>
+              </a:rPr>
+              <a:t>R5</a:t>
+            </a:r>
+            <a:r>
+              <a:rPr lang="en-US" sz="1500" b="0" i="0" dirty="0">
+                <a:solidFill>
+                  <a:srgbClr val="000000"/>
+                </a:solidFill>
+              </a:rPr>
+              <a:t>  Adapt when the user's normal sleep pattern changes.</a:t>
+            </a:r>
+          </a:p>
+        </p:txBody>
+      </p:sp>
+      <p:sp>
+        <p:nvSpPr>
+          <p:cNvPr id="115" name="ReqR6"/>
+          <p:cNvSpPr/>
+          <p:nvPr/>
+        </p:nvSpPr>
+        <p:spPr>
+          <a:xfrm>
+            <a:off x="3175000" y="4481285"/>
+            <a:ext cx="5664200" cy="616857"/>
+          </a:xfrm>
+          <a:prstGeom prst="rect">
+            <a:avLst/>
+          </a:prstGeom>
+          <a:solidFill>
+            <a:srgbClr val="F5F1E8"/>
+          </a:solidFill>
+          <a:ln w="12700">
+            <a:solidFill>
+              <a:srgbClr val="C9B991"/>
+            </a:solidFill>
+          </a:ln>
+        </p:spPr>
+        <p:txBody>
+          <a:bodyPr wrap="square" lIns="109728" tIns="82296" rIns="109728" bIns="82296" anchor="ctr">
+            <a:normAutofit/>
+          </a:bodyPr>
+          <a:lstStyle/>
+          <a:p>
+            <a:pPr algn="l">
+              <a:buNone/>
+            </a:pPr>
+            <a:r>
+              <a:rPr lang="en-US" sz="1500" b="1" i="0" dirty="0">
+                <a:solidFill>
+                  <a:srgbClr val="8E6F3E"/>
+                </a:solidFill>
+              </a:rPr>
+              <a:t>R6</a:t>
+            </a:r>
+            <a:r>
+              <a:rPr lang="en-US" sz="1500" b="0" i="0" dirty="0">
+                <a:solidFill>
+                  <a:srgbClr val="000000"/>
+                </a:solidFill>
+              </a:rPr>
+              <a:t>  Provide the user with a weekly summary of their sleep.</a:t>
+            </a:r>
+          </a:p>
+        </p:txBody>
+      </p:sp>
+      <p:sp>
+        <p:nvSpPr>
+          <p:cNvPr id="116" name="ReqR7"/>
+          <p:cNvSpPr/>
+          <p:nvPr/>
+        </p:nvSpPr>
+        <p:spPr>
+          <a:xfrm>
+            <a:off x="3175000" y="5189582"/>
+            <a:ext cx="5664200" cy="616857"/>
+          </a:xfrm>
+          <a:prstGeom prst="rect">
+            <a:avLst/>
+          </a:prstGeom>
+          <a:solidFill>
+            <a:srgbClr val="F5F1E8"/>
+          </a:solidFill>
+          <a:ln w="12700">
+            <a:solidFill>
+              <a:srgbClr val="C9B991"/>
+            </a:solidFill>
+          </a:ln>
+        </p:spPr>
+        <p:txBody>
+          <a:bodyPr wrap="square" lIns="109728" tIns="82296" rIns="109728" bIns="82296" anchor="ctr">
+            <a:normAutofit/>
+          </a:bodyPr>
+          <a:lstStyle/>
+          <a:p>
+            <a:pPr algn="l">
+              <a:buNone/>
+            </a:pPr>
+            <a:r>
+              <a:rPr lang="en-US" sz="1500" b="1" i="0" dirty="0">
+                <a:solidFill>
+                  <a:srgbClr val="8E6F3E"/>
+                </a:solidFill>
+              </a:rPr>
+              <a:t>R7</a:t>
+            </a:r>
+            <a:r>
+              <a:rPr lang="en-US" sz="1500" b="0" i="0" dirty="0">
+                <a:solidFill>
+                  <a:srgbClr val="000000"/>
+                </a:solidFill>
+              </a:rPr>
+              <a:t>  Let the user share a weekly sleep summary with their doctor.</a:t>
+            </a:r>
+          </a:p>
+        </p:txBody>
+      </p:sp>
+      <p:sp>
+        <p:nvSpPr>
+          <p:cNvPr id="120" name="Band"/>
+          <p:cNvSpPr/>
+          <p:nvPr/>
+        </p:nvSpPr>
+        <p:spPr>
+          <a:xfrm>
+            <a:off x="279400" y="5943600"/>
+            <a:ext cx="8559800" cy="502920"/>
+          </a:xfrm>
+          <a:prstGeom prst="rect">
+            <a:avLst/>
+          </a:prstGeom>
+          <a:solidFill>
+            <a:srgbClr val="8E6F3E"/>
+          </a:solidFill>
+          <a:ln>
+            <a:noFill/>
+          </a:ln>
+        </p:spPr>
+        <p:txBody>
+          <a:bodyPr wrap="square" lIns="109728" tIns="82296" rIns="109728" bIns="82296" anchor="ctr">
+            <a:normAutofit/>
+          </a:bodyPr>
+          <a:lstStyle/>
+          <a:p>
+            <a:pPr algn="ctr">
+              <a:buNone/>
+            </a:pPr>
+            <a:r>
+              <a:rPr lang="en-US" sz="2000" b="0" i="0" dirty="0">
+                <a:solidFill>
+                  <a:srgbClr val="FFFFFF"/>
+                </a:solidFill>
+              </a:rPr>
+              <a:t>These say what we want. </a:t>
+            </a:r>
+            <a:r>
+              <a:rPr lang="en-US" sz="2000" b="1" i="0" dirty="0">
+                <a:solidFill>
+                  <a:srgbClr val="FFFFFF"/>
+                </a:solidFill>
+              </a:rPr>
+              <a:t>They do not yet say enough to build it.</a:t>
+            </a:r>
+          </a:p>
+        </p:txBody>
+      </p:sp>
+    </p:spTree>
+  </p:cSld>
+  <p:clrMapOvr>
+    <a:masterClrMapping/>
+  </p:clrMapOvr>
+</p:sld>
+</file>
+
 <file path=ppt/slides/slide4.xml><?xml version="1.0" encoding="utf-8"?>
 <p:sld xmlns:a="http://schemas.openxmlformats.org/drawingml/2006/main" xmlns:r="http://schemas.openxmlformats.org/officeDocument/2006/relationships" xmlns:p="http://schemas.openxmlformats.org/presentationml/2006/main">
   <p:cSld>
@@ -24174,6 +24956,335 @@
   <p:clrMapOvr>
     <a:masterClrMapping/>
   </p:clrMapOvr>
+  <p:timing>
+    <p:tnLst>
+      <p:par>
+        <p:cTn id="1" dur="indefinite" restart="never" nodeType="tmRoot">
+          <p:childTnLst>
+            <p:seq concurrent="1" nextAc="seek">
+              <p:cTn id="2" dur="indefinite" nodeType="mainSeq">
+                <p:childTnLst>
+                  <p:par>
+                    <p:cTn id="3" fill="hold">
+                      <p:stCondLst>
+                        <p:cond delay="indefinite"/>
+                      </p:stCondLst>
+                      <p:childTnLst>
+                        <p:par>
+                          <p:cTn id="4" fill="hold">
+                            <p:stCondLst>
+                              <p:cond delay="0"/>
+                            </p:stCondLst>
+                            <p:childTnLst>
+                              <p:par>
+                                <p:cTn id="5" presetID="10" presetClass="entr" presetSubtype="0" fill="hold" nodeType="clickEffect">
+                                  <p:stCondLst>
+                                    <p:cond delay="0"/>
+                                  </p:stCondLst>
+                                  <p:childTnLst>
+                                    <p:set>
+                                      <p:cBhvr>
+                                        <p:cTn id="6" dur="1" fill="hold">
+                                          <p:stCondLst>
+                                            <p:cond delay="0"/>
+                                          </p:stCondLst>
+                                        </p:cTn>
+                                        <p:tgtEl>
+                                          <p:spTgt spid="60"/>
+                                        </p:tgtEl>
+                                        <p:attrNameLst>
+                                          <p:attrName>style.visibility</p:attrName>
+                                        </p:attrNameLst>
+                                      </p:cBhvr>
+                                      <p:to>
+                                        <p:strVal val="visible"/>
+                                      </p:to>
+                                    </p:set>
+                                    <p:animEffect transition="in" filter="fade">
+                                      <p:cBhvr>
+                                        <p:cTn id="7" dur="400"/>
+                                        <p:tgtEl>
+                                          <p:spTgt spid="60"/>
+                                        </p:tgtEl>
+                                      </p:cBhvr>
+                                    </p:animEffect>
+                                  </p:childTnLst>
+                                </p:cTn>
+                              </p:par>
+                            </p:childTnLst>
+                          </p:cTn>
+                        </p:par>
+                      </p:childTnLst>
+                    </p:cTn>
+                  </p:par>
+                  <p:par>
+                    <p:cTn id="8" fill="hold">
+                      <p:stCondLst>
+                        <p:cond delay="indefinite"/>
+                      </p:stCondLst>
+                      <p:childTnLst>
+                        <p:par>
+                          <p:cTn id="9" fill="hold">
+                            <p:stCondLst>
+                              <p:cond delay="0"/>
+                            </p:stCondLst>
+                            <p:childTnLst>
+                              <p:par>
+                                <p:cTn id="10" presetID="10" presetClass="entr" presetSubtype="0" fill="hold" nodeType="clickEffect">
+                                  <p:stCondLst>
+                                    <p:cond delay="0"/>
+                                  </p:stCondLst>
+                                  <p:childTnLst>
+                                    <p:set>
+                                      <p:cBhvr>
+                                        <p:cTn id="11" dur="1" fill="hold">
+                                          <p:stCondLst>
+                                            <p:cond delay="0"/>
+                                          </p:stCondLst>
+                                        </p:cTn>
+                                        <p:tgtEl>
+                                          <p:spTgt spid="61"/>
+                                        </p:tgtEl>
+                                        <p:attrNameLst>
+                                          <p:attrName>style.visibility</p:attrName>
+                                        </p:attrNameLst>
+                                      </p:cBhvr>
+                                      <p:to>
+                                        <p:strVal val="visible"/>
+                                      </p:to>
+                                    </p:set>
+                                    <p:animEffect transition="in" filter="fade">
+                                      <p:cBhvr>
+                                        <p:cTn id="12" dur="400"/>
+                                        <p:tgtEl>
+                                          <p:spTgt spid="61"/>
+                                        </p:tgtEl>
+                                      </p:cBhvr>
+                                    </p:animEffect>
+                                  </p:childTnLst>
+                                </p:cTn>
+                              </p:par>
+                              <p:par>
+                                <p:cTn id="13" presetID="10" presetClass="entr" presetSubtype="0" fill="hold" nodeType="withEffect">
+                                  <p:stCondLst>
+                                    <p:cond delay="0"/>
+                                  </p:stCondLst>
+                                  <p:childTnLst>
+                                    <p:set>
+                                      <p:cBhvr>
+                                        <p:cTn id="14" dur="1" fill="hold">
+                                          <p:stCondLst>
+                                            <p:cond delay="0"/>
+                                          </p:stCondLst>
+                                        </p:cTn>
+                                        <p:tgtEl>
+                                          <p:spTgt spid="62"/>
+                                        </p:tgtEl>
+                                        <p:attrNameLst>
+                                          <p:attrName>style.visibility</p:attrName>
+                                        </p:attrNameLst>
+                                      </p:cBhvr>
+                                      <p:to>
+                                        <p:strVal val="visible"/>
+                                      </p:to>
+                                    </p:set>
+                                    <p:animEffect transition="in" filter="fade">
+                                      <p:cBhvr>
+                                        <p:cTn id="15" dur="400"/>
+                                        <p:tgtEl>
+                                          <p:spTgt spid="62"/>
+                                        </p:tgtEl>
+                                      </p:cBhvr>
+                                    </p:animEffect>
+                                  </p:childTnLst>
+                                </p:cTn>
+                              </p:par>
+                            </p:childTnLst>
+                          </p:cTn>
+                        </p:par>
+                      </p:childTnLst>
+                    </p:cTn>
+                  </p:par>
+                  <p:par>
+                    <p:cTn id="16" fill="hold">
+                      <p:stCondLst>
+                        <p:cond delay="indefinite"/>
+                      </p:stCondLst>
+                      <p:childTnLst>
+                        <p:par>
+                          <p:cTn id="17" fill="hold">
+                            <p:stCondLst>
+                              <p:cond delay="0"/>
+                            </p:stCondLst>
+                            <p:childTnLst>
+                              <p:par>
+                                <p:cTn id="18" presetID="10" presetClass="entr" presetSubtype="0" fill="hold" nodeType="clickEffect">
+                                  <p:stCondLst>
+                                    <p:cond delay="0"/>
+                                  </p:stCondLst>
+                                  <p:childTnLst>
+                                    <p:set>
+                                      <p:cBhvr>
+                                        <p:cTn id="19" dur="1" fill="hold">
+                                          <p:stCondLst>
+                                            <p:cond delay="0"/>
+                                          </p:stCondLst>
+                                        </p:cTn>
+                                        <p:tgtEl>
+                                          <p:spTgt spid="63"/>
+                                        </p:tgtEl>
+                                        <p:attrNameLst>
+                                          <p:attrName>style.visibility</p:attrName>
+                                        </p:attrNameLst>
+                                      </p:cBhvr>
+                                      <p:to>
+                                        <p:strVal val="visible"/>
+                                      </p:to>
+                                    </p:set>
+                                    <p:animEffect transition="in" filter="fade">
+                                      <p:cBhvr>
+                                        <p:cTn id="20" dur="400"/>
+                                        <p:tgtEl>
+                                          <p:spTgt spid="63"/>
+                                        </p:tgtEl>
+                                      </p:cBhvr>
+                                    </p:animEffect>
+                                  </p:childTnLst>
+                                </p:cTn>
+                              </p:par>
+                              <p:par>
+                                <p:cTn id="21" presetID="10" presetClass="entr" presetSubtype="0" fill="hold" nodeType="withEffect">
+                                  <p:stCondLst>
+                                    <p:cond delay="0"/>
+                                  </p:stCondLst>
+                                  <p:childTnLst>
+                                    <p:set>
+                                      <p:cBhvr>
+                                        <p:cTn id="22" dur="1" fill="hold">
+                                          <p:stCondLst>
+                                            <p:cond delay="0"/>
+                                          </p:stCondLst>
+                                        </p:cTn>
+                                        <p:tgtEl>
+                                          <p:spTgt spid="64"/>
+                                        </p:tgtEl>
+                                        <p:attrNameLst>
+                                          <p:attrName>style.visibility</p:attrName>
+                                        </p:attrNameLst>
+                                      </p:cBhvr>
+                                      <p:to>
+                                        <p:strVal val="visible"/>
+                                      </p:to>
+                                    </p:set>
+                                    <p:animEffect transition="in" filter="fade">
+                                      <p:cBhvr>
+                                        <p:cTn id="23" dur="400"/>
+                                        <p:tgtEl>
+                                          <p:spTgt spid="64"/>
+                                        </p:tgtEl>
+                                      </p:cBhvr>
+                                    </p:animEffect>
+                                  </p:childTnLst>
+                                </p:cTn>
+                              </p:par>
+                              <p:par>
+                                <p:cTn id="24" presetID="10" presetClass="entr" presetSubtype="0" fill="hold" nodeType="withEffect">
+                                  <p:stCondLst>
+                                    <p:cond delay="0"/>
+                                  </p:stCondLst>
+                                  <p:childTnLst>
+                                    <p:set>
+                                      <p:cBhvr>
+                                        <p:cTn id="25" dur="1" fill="hold">
+                                          <p:stCondLst>
+                                            <p:cond delay="0"/>
+                                          </p:stCondLst>
+                                        </p:cTn>
+                                        <p:tgtEl>
+                                          <p:spTgt spid="65"/>
+                                        </p:tgtEl>
+                                        <p:attrNameLst>
+                                          <p:attrName>style.visibility</p:attrName>
+                                        </p:attrNameLst>
+                                      </p:cBhvr>
+                                      <p:to>
+                                        <p:strVal val="visible"/>
+                                      </p:to>
+                                    </p:set>
+                                    <p:animEffect transition="in" filter="fade">
+                                      <p:cBhvr>
+                                        <p:cTn id="26" dur="400"/>
+                                        <p:tgtEl>
+                                          <p:spTgt spid="65"/>
+                                        </p:tgtEl>
+                                      </p:cBhvr>
+                                    </p:animEffect>
+                                  </p:childTnLst>
+                                </p:cTn>
+                              </p:par>
+                              <p:par>
+                                <p:cTn id="27" presetID="10" presetClass="entr" presetSubtype="0" fill="hold" nodeType="withEffect">
+                                  <p:stCondLst>
+                                    <p:cond delay="0"/>
+                                  </p:stCondLst>
+                                  <p:childTnLst>
+                                    <p:set>
+                                      <p:cBhvr>
+                                        <p:cTn id="28" dur="1" fill="hold">
+                                          <p:stCondLst>
+                                            <p:cond delay="0"/>
+                                          </p:stCondLst>
+                                        </p:cTn>
+                                        <p:tgtEl>
+                                          <p:spTgt spid="66"/>
+                                        </p:tgtEl>
+                                        <p:attrNameLst>
+                                          <p:attrName>style.visibility</p:attrName>
+                                        </p:attrNameLst>
+                                      </p:cBhvr>
+                                      <p:to>
+                                        <p:strVal val="visible"/>
+                                      </p:to>
+                                    </p:set>
+                                    <p:animEffect transition="in" filter="fade">
+                                      <p:cBhvr>
+                                        <p:cTn id="29" dur="400"/>
+                                        <p:tgtEl>
+                                          <p:spTgt spid="66"/>
+                                        </p:tgtEl>
+                                      </p:cBhvr>
+                                    </p:animEffect>
+                                  </p:childTnLst>
+                                </p:cTn>
+                              </p:par>
+                            </p:childTnLst>
+                          </p:cTn>
+                        </p:par>
+                      </p:childTnLst>
+                    </p:cTn>
+                  </p:par>
+                </p:childTnLst>
+              </p:cTn>
+              <p:prevCondLst>
+                <p:cond evt="onPrev" delay="0">
+                  <p:tgtEl>
+                    <p:sldTgt/>
+                  </p:tgtEl>
+                </p:cond>
+              </p:prevCondLst>
+              <p:nextCondLst>
+                <p:cond evt="onNext" delay="0">
+                  <p:tgtEl>
+                    <p:sldTgt/>
+                  </p:tgtEl>
+                </p:cond>
+              </p:nextCondLst>
+            </p:seq>
+          </p:childTnLst>
+        </p:cTn>
+      </p:par>
+    </p:tnLst>
+  </p:timing>
 </p:sld>
 </file>
 
@@ -25120,7 +26231,7 @@
                   <a:srgbClr val="000000"/>
                 </a:solidFill>
               </a:rPr>
-              <a:t>What must it do?</a:t>
+              <a:t>What must the app do?</a:t>
             </a:r>
           </a:p>
         </p:txBody>
@@ -25179,7 +26290,7 @@
                   <a:srgbClr val="000000"/>
                 </a:solidFill>
               </a:rPr>
-              <a:t>What is missing?</a:t>
+              <a:t>What facts are missing?</a:t>
             </a:r>
           </a:p>
         </p:txBody>
@@ -25238,7 +26349,7 @@
                   <a:srgbClr val="000000"/>
                 </a:solidFill>
               </a:rPr>
-              <a:t>What can stay open?</a:t>
+              <a:t>What can remain unspecified?</a:t>
             </a:r>
           </a:p>
         </p:txBody>

--- a/course/lectures/act-1-foundations/05-specification/slides/1-5-Specification.pptx
+++ b/course/lectures/act-1-foundations/05-specification/slides/1-5-Specification.pptx
@@ -1264,32 +1264,31 @@
           <a:lstStyle/>
           <a:p>
             <a:r>
-              <a:rPr lang="en-US" dirty="0"/>
-              <a:t>First representation. The question is what may happen next.</a:t>
-            </a:r>
-          </a:p>
-          <a:p>
-            <a:r>
-              <a:rPr lang="en-US" dirty="0"/>
-              <a:t>A state model answers it by naming the situations the system may occupy and the transitions between them. Everything else about the system is suppressed.</a:t>
-            </a:r>
-          </a:p>
-          <a:p>
-            <a:r>
-              <a:rPr lang="en-US" dirty="0"/>
-              <a:t>Ask the class two questions against the diagram. Can STEADY go directly back to LEARNING? Can an advisory be issued while the system is rebaselining? Both are answerable here, and neither is answerable from prose about nightly comparison.</a:t>
-            </a:r>
-          </a:p>
-          <a:p>
-            <a:r>
-              <a:rPr lang="en-US" dirty="0"/>
-              <a:t>That is the whole point. The obligation existed before the diagram. The diagram makes it expressible, so it can be checked.</a:t>
-            </a:r>
-          </a:p>
-          <a:p>
-            <a:r>
-              <a:rPr lang="en-US" dirty="0"/>
-              <a:t>Notice what we are not saying: not where the state is stored, not which component owns the transition, not how it is persisted. Those are design decisions and they are next week.</a:t>
+              <a:t>Go back to the requirements we started with. R2 says the app must learn what is normal. R3 says it must identify meaningful departures. R5 says it must adapt when normal changes. Those requirements tell us what the product must accomplish, but they do not yet tell an implementor what behavioral situations the system recognizes or which transitions are allowable.</a:t>
+            </a:r>
+          </a:p>
+          <a:p/>
+          <a:p>
+            <a:r>
+              <a:t>Suppose our specification makes those obligations concrete with this state model. Now we can ask a question that was difficult to answer from the requirements alone: what may happen next?</a:t>
+            </a:r>
+          </a:p>
+          <a:p/>
+          <a:p>
+            <a:r>
+              <a:t>Ask the class two questions against the diagram. Can MONITORING go directly back to LEARNING? Can an advisory be issued while the system is rebaselining? Both are answerable here, and neither is answerable from prose about nightly comparison. The representation makes those questions answerable.</a:t>
+            </a:r>
+          </a:p>
+          <a:p/>
+          <a:p>
+            <a:r>
+              <a:t>The obligation existed before the diagram. The diagram makes it expressible, so it can be checked.</a:t>
+            </a:r>
+          </a:p>
+          <a:p/>
+          <a:p>
+            <a:r>
+              <a:t>Notice what this model deliberately does not say: where the state is stored, which component owns it, or how transitions are implemented. Those choices are not needed to answer today's question.</a:t>
             </a:r>
           </a:p>
         </p:txBody>
@@ -1347,32 +1346,25 @@
           <a:lstStyle/>
           <a:p>
             <a:r>
-              <a:rPr lang="en-US" dirty="0"/>
-              <a:t>Second representation, and it is behavioral too, which is exactly why it is worth a separate slide.</a:t>
-            </a:r>
-          </a:p>
-          <a:p>
-            <a:r>
-              <a:rPr lang="en-US" dirty="0"/>
-              <a:t>The state model answered which situations the system may occupy. This one answers a different question: what must happen before what.</a:t>
-            </a:r>
-          </a:p>
-          <a:p>
-            <a:r>
-              <a:rPr lang="en-US" dirty="0"/>
-              <a:t>Read the chain: observations recorded, night classified, compared with the baseline, advisory issued at wake. Now read the dashed path. Going straight from raw observations to an advisory is an ordering the specification forbids, and that is a claim you can only state once ordering is in the representation.</a:t>
-            </a:r>
-          </a:p>
-          <a:p>
-            <a:r>
-              <a:rPr lang="en-US" dirty="0"/>
-              <a:t>So the example invariant: do not issue an advisory until the night's observations have been classified.</a:t>
-            </a:r>
-          </a:p>
-          <a:p>
-            <a:r>
-              <a:rPr lang="en-US" dirty="0"/>
-              <a:t>Two behavioral views coexist because they answer different questions. Neither subsumes the other, and neither says anything about how the work is divided into components.</a:t>
+              <a:t>Now hold the Sleep Advisor fixed and change the engineering question. R1 says to track sleep, R3 says to identify departures, and R4 says to alert the user. The requirements do not establish every allowable ordering among those activities. Suppose the specification adds this ordering constraint.</a:t>
+            </a:r>
+          </a:p>
+          <a:p/>
+          <a:p>
+            <a:r>
+              <a:t>Read the chain: observations recorded, night classified, compared with the baseline, advisory issued at wake. Now read the dashed path. Going straight from raw observations to an advisory is an ordering this specification forbids, and that is a claim you can only state once ordering is in the representation.</a:t>
+            </a:r>
+          </a:p>
+          <a:p/>
+          <a:p>
+            <a:r>
+              <a:t>So the example invariant: do not issue an advisory until the night's observations have been classified. The requirements gave us the obligations; this representation makes a consequential ordering decision explicit. Nothing in R1 through R4 forces exactly this ordering — it is a specification choice.</a:t>
+            </a:r>
+          </a:p>
+          <a:p/>
+          <a:p>
+            <a:r>
+              <a:t>The state model answered which situations the system may occupy. This view answers what must happen before what. Two behavioral views coexist because they answer different questions. Neither subsumes the other, and neither says anything about how the work is divided into components.</a:t>
             </a:r>
           </a:p>
         </p:txBody>
@@ -1430,32 +1422,25 @@
           <a:lstStyle/>
           <a:p>
             <a:r>
-              <a:rPr lang="en-US" dirty="0"/>
-              <a:t>Fourth representation, and the one that needs a boundary drawn carefully.</a:t>
-            </a:r>
-          </a:p>
-          <a:p>
-            <a:r>
-              <a:rPr lang="en-US" dirty="0"/>
-              <a:t>A schema is specification-level when it constrains the information crossing the machine boundary: what a weekly summary must contain for anyone to accept it as a weekly summary.</a:t>
-            </a:r>
-          </a:p>
-          <a:p>
-            <a:r>
-              <a:rPr lang="en-US" dirty="0"/>
-              <a:t>Required fields, types, cardinality, ranges, referential relationships. The invariant here is a cardinality claim: exactly seven nightly entries. A schema makes that constraint explicit enough to check systematically.</a:t>
-            </a:r>
-          </a:p>
-          <a:p>
-            <a:r>
-              <a:rPr lang="en-US" dirty="0"/>
-              <a:t>What this is not: a component or dependency diagram. Which parts exist, and which may depend on which, is architecture. We are still describing what an acceptable realization must accept and produce, not how it is built.</a:t>
-            </a:r>
-          </a:p>
-          <a:p>
-            <a:r>
-              <a:rPr lang="en-US" dirty="0"/>
-              <a:t>That distinction is worth saying out loud, because both are drawn as boxes and lines.</a:t>
+              <a:t>Now take R6: provide the user with a weekly sleep summary. That tells us something important about the product, but it does not yet tell an implementor — or another system consuming the summary — what constitutes a valid weekly summary.</a:t>
+            </a:r>
+          </a:p>
+          <a:p/>
+          <a:p>
+            <a:r>
+              <a:t>Suppose the specification defines that boundary object with this schema. A schema is specification-level when it constrains the information crossing the machine boundary: what a weekly summary must contain for anyone to accept it as a weekly summary.</a:t>
+            </a:r>
+          </a:p>
+          <a:p/>
+          <a:p>
+            <a:r>
+              <a:t>Required fields, types, cardinality, ranges, referential relationships. The invariant here is a cardinality claim: exactly seven nightly entries. A schema makes that constraint explicit enough to check systematically. R6 requires a weekly summary. The schema specifies what must cross the boundary for something to count as one.</a:t>
+            </a:r>
+          </a:p>
+          <a:p/>
+          <a:p>
+            <a:r>
+              <a:t>What this is not: a component or dependency diagram. Which parts exist, and which may depend on which, is architecture. We are still describing what an acceptable realization must accept and produce, not how it is built. That distinction is worth saying out loud, because both are drawn as boxes and lines.</a:t>
             </a:r>
           </a:p>
         </p:txBody>
@@ -1635,31 +1620,36 @@
           <a:lstStyle/>
           <a:p>
             <a:r>
-              <a:rPr lang="en-US" dirty="0"/>
               <a:t>Now put the three together. Same system, three representations, three different questions answered.</a:t>
             </a:r>
           </a:p>
-          <a:p>
-            <a:r>
-              <a:rPr lang="en-US" dirty="0"/>
+          <a:p/>
+          <a:p>
+            <a:r>
               <a:t>None of them is a tier or a refinement of another. They are peers. They join through shared concepts: an observation, a night, an advisory. That shared vocabulary is what lets the three views describe one system without any of them being complete.</a:t>
             </a:r>
           </a:p>
-          <a:p>
-            <a:r>
-              <a:rPr lang="en-US" dirty="0"/>
+          <a:p/>
+          <a:p>
+            <a:r>
+              <a:t>All three views elaborate requirements from the same seven-line requirements set we saw at the beginning.</a:t>
+            </a:r>
+          </a:p>
+          <a:p/>
+          <a:p>
+            <a:r>
               <a:t>So the closing claim of this section: no single representation needs to say everything. Use the view that makes the consequential property expressible.</a:t>
             </a:r>
           </a:p>
-          <a:p>
-            <a:r>
-              <a:rPr lang="en-US" dirty="0"/>
+          <a:p/>
+          <a:p>
+            <a:r>
               <a:t>And the reason this matters beyond today: the system did not change across those four slides. The engineering question changed, so the model changed.</a:t>
             </a:r>
           </a:p>
-          <a:p>
-            <a:r>
-              <a:rPr lang="en-US" dirty="0"/>
+          <a:p/>
+          <a:p>
+            <a:r>
               <a:t>Next week the questions change again, to how the system should be structured, and the useful views will change with them. Same move, different questions.</a:t>
             </a:r>
           </a:p>
@@ -1958,93 +1948,62 @@
           <a:lstStyle/>
           <a:p>
             <a:r>
-              <a:rPr lang="en-US" sz="1200" dirty="0"/>
               <a:t>5 minutes — Force engineering judgment rather than vocabulary recall.</a:t>
             </a:r>
           </a:p>
-          <a:p>
-            <a:endParaRPr lang="en-US" sz="1200"/>
-          </a:p>
-          <a:p>
-            <a:r>
-              <a:rPr lang="en-US" sz="1200" dirty="0"/>
+          <a:p/>
+          <a:p>
+            <a:r>
               <a:t>- Hold the timing. Cut the share short rather than letting it run; the disagreement is the point, not resolving it.</a:t>
             </a:r>
           </a:p>
-          <a:p>
-            <a:endParaRPr lang="en-US" sz="1200"/>
-          </a:p>
-          <a:p>
-            <a:r>
-              <a:rPr lang="en-US" sz="1200" dirty="0"/>
+          <a:p/>
+          <a:p>
+            <a:r>
               <a:t>- Banner colour: usually free — unless colour-blind users or a clinic house style make it consequential. Then tacit.</a:t>
             </a:r>
           </a:p>
-          <a:p>
-            <a:endParaRPr lang="en-US" sz="1200"/>
-          </a:p>
-          <a:p>
-            <a:r>
-              <a:rPr lang="en-US" sz="1200" dirty="0"/>
-              <a:t>- Load time: free if it is comfort, tacit or an obligation if the delay causes users to abandon the operation, retry, or otherwise changes their experience.</a:t>
-            </a:r>
-          </a:p>
-          <a:p>
-            <a:endParaRPr lang="en-US" sz="1200"/>
-          </a:p>
-          <a:p>
-            <a:r>
-              <a:rPr lang="en-US" sz="1200" dirty="0"/>
+          <a:p/>
+          <a:p>
+            <a:r>
+              <a:t>- Detection sensitivity: the clearest UNKNOWN candidate. We may not yet know what tradeoff users will tolerate between missed events and false alarms. The response is not to invent a number because a specification needs one. The response may be to learn.</a:t>
+            </a:r>
+          </a:p>
+          <a:p/>
+          <a:p>
+            <a:r>
               <a:t>- Database: usually free — unless hosting location is regulated, in which case tacit.</a:t>
             </a:r>
           </a:p>
-          <a:p>
-            <a:endParaRPr lang="en-US" sz="1200"/>
-          </a:p>
-          <a:p>
-            <a:r>
-              <a:rPr lang="en-US" sz="1200" dirty="0"/>
+          <a:p/>
+          <a:p>
+            <a:r>
               <a:t>- Bounced mail: almost always tacit, and the most interesting one. Nobody wrote down that the user must find out.</a:t>
             </a:r>
           </a:p>
-          <a:p>
-            <a:endParaRPr lang="en-US" sz="1200"/>
-          </a:p>
-          <a:p>
-            <a:r>
-              <a:rPr lang="en-US" sz="1200" dirty="0"/>
+          <a:p/>
+          <a:p>
+            <a:r>
               <a:t>- Ask what the system would have to be for them to change their answer. That question is the learning objective.</a:t>
             </a:r>
           </a:p>
-          <a:p>
-            <a:endParaRPr lang="en-US" sz="1200"/>
-          </a:p>
-          <a:p>
-            <a:r>
-              <a:rPr lang="en-US" sz="1200" dirty="0"/>
+          <a:p/>
+          <a:p>
+            <a:r>
               <a:t>=====</a:t>
             </a:r>
           </a:p>
-          <a:p>
-            <a:endParaRPr lang="en-US" sz="1200"/>
-          </a:p>
-          <a:p>
-            <a:r>
-              <a:rPr lang="en-US" sz="1200" dirty="0"/>
+          <a:p/>
+          <a:p>
+            <a:r>
               <a:t>One minute alone, then two with a neighbour. Argue for a classification, then say what additional context would change your classification.</a:t>
             </a:r>
           </a:p>
-          <a:p>
-            <a:endParaRPr lang="en-US" sz="1200"/>
-          </a:p>
-          <a:p>
-            <a:r>
-              <a:rPr lang="en-US" sz="1200" dirty="0"/>
+          <a:p/>
+          <a:p>
+            <a:r>
               <a:t>Take answers on the last one first — it produces the strongest disagreement. Then close: where you disagreed is where the engineering is. The label depends on what the system owes people, not on the words in the document.</a:t>
             </a:r>
-          </a:p>
-          <a:p>
-            <a:endParaRPr lang="en-US" sz="1200"/>
           </a:p>
         </p:txBody>
       </p:sp>
@@ -2089,79 +2048,60 @@
           <a:lstStyle/>
           <a:p>
             <a:r>
-              <a:rPr lang="en-US" sz="1200" dirty="0"/>
               <a:t>2.5 minutes — Show that agents change the economics of omitted context, not the nature of specification.</a:t>
             </a:r>
           </a:p>
-          <a:p>
-            <a:endParaRPr lang="en-US" sz="1200"/>
-          </a:p>
-          <a:p>
-            <a:r>
-              <a:rPr lang="en-US" sz="1200" dirty="0"/>
+          <a:p/>
+          <a:p>
+            <a:r>
               <a:t>- This slide is about the TACIT category specifically. The general freedom argument is already made; do not repeat it.</a:t>
             </a:r>
           </a:p>
-          <a:p>
-            <a:endParaRPr lang="en-US" sz="1200"/>
-          </a:p>
-          <a:p>
-            <a:r>
-              <a:rPr lang="en-US" sz="1200" dirty="0"/>
+          <a:p/>
+          <a:p>
+            <a:r>
               <a:t>- Candidate D callback: the specification appears to permit D, an agent builds it, a human objects — and the objection IS the unrepresented obligation.</a:t>
             </a:r>
           </a:p>
-          <a:p>
-            <a:endParaRPr lang="en-US" sz="1200"/>
-          </a:p>
-          <a:p>
-            <a:r>
-              <a:rPr lang="en-US" sz="1200" dirty="0"/>
+          <a:p/>
+          <a:p>
+            <a:r>
               <a:t>- Keep it concrete and lightly funny. Avoid generic AI alarmism.</a:t>
             </a:r>
           </a:p>
-          <a:p>
-            <a:endParaRPr lang="en-US" sz="1200"/>
-          </a:p>
-          <a:p>
-            <a:r>
-              <a:rPr lang="en-US" sz="1200" dirty="0"/>
+          <a:p/>
+          <a:p>
+            <a:r>
               <a:t>=====</a:t>
             </a:r>
           </a:p>
-          <a:p>
-            <a:endParaRPr lang="en-US" sz="1200"/>
-          </a:p>
-          <a:p>
-            <a:r>
-              <a:rPr lang="en-US" sz="1200" dirty="0"/>
-              <a:t>Same requirement. A teammate who sits near you gets a bounced mail and tells the user, because obviously. An agent gets a bounced mail, logs a warning, and returns success. Nothing in R7 forbids that.</a:t>
-            </a:r>
-          </a:p>
-          <a:p>
-            <a:endParaRPr lang="en-US" sz="1200"/>
-          </a:p>
-          <a:p>
-            <a:r>
-              <a:rPr lang="en-US" sz="1200" dirty="0"/>
+          <a:p/>
+          <a:p>
+            <a:r>
+              <a:t>Return to R7 one last time. Earlier you tried to decide what an implementor would need to know. Here is what happens when one of those consequential facts stays in someone's head.</a:t>
+            </a:r>
+          </a:p>
+          <a:p/>
+          <a:p>
+            <a:r>
+              <a:t>A teammate who sits near you gets a bounced mail and tells the user, because obviously. An agent gets a bounced mail, logs a warning, and returns success. Nothing in R7 forbids that.</a:t>
+            </a:r>
+          </a:p>
+          <a:p/>
+          <a:p>
+            <a:r>
               <a:t>That objection — obviously not that — is the sound of an obligation nobody externalised. It was real; it just was not written anywhere.</a:t>
             </a:r>
           </a:p>
-          <a:p>
-            <a:endParaRPr lang="en-US" sz="1200"/>
-          </a:p>
-          <a:p>
-            <a:r>
-              <a:rPr lang="en-US" sz="1200" dirty="0"/>
+          <a:p/>
+          <a:p>
+            <a:r>
               <a:t>The agent is not stupid, it is unopinionated. It will pick a locally plausible point in the apparent realization space every time you leave one open. A human who shares your context reconstructed the missing constraint for free — and we never noticed we were relying on that.</a:t>
             </a:r>
           </a:p>
-          <a:p>
-            <a:endParaRPr lang="en-US" sz="1200"/>
-          </a:p>
-          <a:p>
-            <a:r>
-              <a:rPr lang="en-US" dirty="0"/>
+          <a:p/>
+          <a:p>
+            <a:r>
               <a:t>Say aloud rather than showing: the agent does not share the team's unstated context, and what changed is the cost of leaving context unsaid.</a:t>
             </a:r>
           </a:p>
@@ -2291,93 +2231,62 @@
           <a:lstStyle/>
           <a:p>
             <a:r>
-              <a:rPr lang="en-US" sz="1200" dirty="0"/>
               <a:t>2.5 minutes — Convert iteration from a scheduling habit into an epistemic claim.</a:t>
             </a:r>
           </a:p>
-          <a:p>
-            <a:endParaRPr lang="en-US" sz="1200"/>
-          </a:p>
-          <a:p>
-            <a:r>
-              <a:rPr lang="en-US" sz="1200" dirty="0"/>
+          <a:p/>
+          <a:p>
+            <a:r>
               <a:t>- Second half of a pair with the not-constrained-is-not-free slide: that carried the principle, this is the story. Tell it once.</a:t>
             </a:r>
           </a:p>
-          <a:p>
-            <a:endParaRPr lang="en-US" sz="1200"/>
-          </a:p>
-          <a:p>
-            <a:r>
-              <a:rPr lang="en-US" sz="1200" dirty="0"/>
-              <a:t>- Frame as movement through the model: we picked a realization inside the acceptable set, use showed the boundary was drawn wrong, and the fix was a new obligation, not a bug fix.</a:t>
-            </a:r>
-          </a:p>
-          <a:p>
-            <a:endParaRPr lang="en-US" sz="1200"/>
-          </a:p>
-          <a:p>
-            <a:r>
-              <a:rPr lang="en-US" sz="1200" dirty="0"/>
-              <a:t>- Do NOT claim nobody could have anticipated it. Someone could. The defensible claim is that use is what made it salient.</a:t>
-            </a:r>
-          </a:p>
-          <a:p>
-            <a:endParaRPr lang="en-US" sz="1200"/>
-          </a:p>
-          <a:p>
-            <a:r>
-              <a:rPr lang="en-US" sz="1200" dirty="0"/>
-              <a:t>- REBASELINE on the state slide was already the second version of that model.</a:t>
-            </a:r>
-          </a:p>
-          <a:p>
-            <a:endParaRPr lang="en-US" sz="1200"/>
-          </a:p>
-          <a:p>
-            <a:r>
-              <a:rPr lang="en-US" sz="1200" dirty="0"/>
+          <a:p/>
+          <a:p>
+            <a:r>
+              <a:t>- This is the UNKNOWN case: the requirement (R5) was known from the beginning; the right specification of it was not.</a:t>
+            </a:r>
+          </a:p>
+          <a:p/>
+          <a:p>
+            <a:r>
+              <a:t>- The state model already made REBASELINING explicit; this story is about learning that the boundary we specified for it was drawn wrong.</a:t>
+            </a:r>
+          </a:p>
+          <a:p/>
+          <a:p>
+            <a:r>
               <a:t>=====</a:t>
             </a:r>
           </a:p>
-          <a:p>
-            <a:endParaRPr lang="en-US" sz="1200"/>
-          </a:p>
-          <a:p>
-            <a:r>
-              <a:rPr lang="en-US" sz="1200" dirty="0"/>
-              <a:t>We specified a baseline captured at install. We built it. It worked for most people. Illustrative scenario rather than a reported cohort: imagine users who receive an illness advisory every morning for months, because a pregnancy shifts a baseline permanently.</a:t>
-            </a:r>
-          </a:p>
-          <a:p>
-            <a:endParaRPr lang="en-US" sz="1200"/>
-          </a:p>
-          <a:p>
-            <a:r>
-              <a:rPr lang="en-US" sz="1200" dirty="0"/>
-              <a:t>The learning was not "we had a bug". The code did exactly what the specification said. The specification had no concept of a user whose normal changes.</a:t>
-            </a:r>
-          </a:p>
-          <a:p>
-            <a:endParaRPr lang="en-US" sz="1200"/>
-          </a:p>
-          <a:p>
-            <a:r>
-              <a:rPr lang="en-US" sz="1200" dirty="0"/>
-              <a:t>Someone could have anticipated that, and plenty of people would say so afterwards. The honest and more useful claim is weaker: the case became salient through use.</a:t>
-            </a:r>
-          </a:p>
-          <a:p>
-            <a:endParaRPr lang="en-US" sz="1200"/>
-          </a:p>
-          <a:p>
-            <a:r>
-              <a:rPr lang="en-US" sz="1200" dirty="0"/>
-              <a:t>Do not let this become anti-specification. Three of the four things we specified were right and stayed right. One was incomplete in a way observation revealed. The lesson is about which decisions to hold open.</a:t>
-            </a:r>
-          </a:p>
-          <a:p>
-            <a:endParaRPr lang="en-US" sz="1200"/>
+          <a:p/>
+          <a:p>
+            <a:r>
+              <a:t>Go back to R5. We knew from the beginning that the app must adapt when a user's normal changes. So the problem here is not that we forgot the requirement.</a:t>
+            </a:r>
+          </a:p>
+          <a:p/>
+          <a:p>
+            <a:r>
+              <a:t>The problem is that knowing the requirement does not mean we already know the right specification. Suppose we decide that a sufficiently persistent shift should cause the system to establish a new baseline. We build that rule and put it into use.</a:t>
+            </a:r>
+          </a:p>
+          <a:p/>
+          <a:p>
+            <a:r>
+              <a:t>Then observation teaches us that persistence alone does not capture the distinction we actually care about. The implementation may have done exactly what the specification required. What changed was our understanding of the acceptable boundary.</a:t>
+            </a:r>
+          </a:p>
+          <a:p/>
+          <a:p>
+            <a:r>
+              <a:t>This is the UNKNOWN case from a few slides ago. The answer was not to specify harder before we had evidence. We specified enough to proceed, built, observed, and learned.</a:t>
+            </a:r>
+          </a:p>
+          <a:p/>
+          <a:p>
+            <a:r>
+              <a:t>Do not turn this into an anti-specification argument. R5 remained valid. What changed was our specification of how that requirement should be realized.</a:t>
+            </a:r>
           </a:p>
         </p:txBody>
       </p:sp>
@@ -2562,129 +2471,86 @@
           <a:lstStyle/>
           <a:p>
             <a:r>
-              <a:rPr lang="en-US" sz="1200" dirty="0"/>
               <a:t>2 minutes — Close by locating today inside the course, and correct the ladder misconception.</a:t>
             </a:r>
           </a:p>
-          <a:p>
-            <a:endParaRPr lang="en-US" sz="1200"/>
-          </a:p>
-          <a:p>
-            <a:r>
-              <a:rPr lang="en-US" sz="1200" dirty="0"/>
+          <a:p/>
+          <a:p>
+            <a:r>
               <a:t>- It is the model from slide 2, extended forward. Students should recognise it instantly.</a:t>
             </a:r>
           </a:p>
-          <a:p>
-            <a:endParaRPr lang="en-US" sz="1200"/>
-          </a:p>
-          <a:p>
-            <a:r>
-              <a:rPr lang="en-US" sz="1200" dirty="0"/>
+          <a:p/>
+          <a:p>
+            <a:r>
               <a:t>- Architecture and design hang under A, not under SPECIFICATION. That is the argument.</a:t>
             </a:r>
           </a:p>
-          <a:p>
-            <a:endParaRPr lang="en-US" sz="1200"/>
-          </a:p>
-          <a:p>
-            <a:r>
-              <a:rPr lang="en-US" sz="1200" dirty="0"/>
+          <a:p/>
+          <a:p>
+            <a:r>
               <a:t>- Students picture requirements to design as one ladder of increasing detail. If architecture were more specification, every architectural decision would be an obligation on the implementor — which is not how anyone works.</a:t>
             </a:r>
           </a:p>
-          <a:p>
-            <a:endParaRPr lang="en-US" sz="1200"/>
-          </a:p>
-          <a:p>
-            <a:r>
-              <a:rPr lang="en-US" sz="1200" dirty="0"/>
+          <a:p/>
+          <a:p>
+            <a:r>
               <a:t>- If over time: skip the second build and say the closing line.</a:t>
             </a:r>
           </a:p>
-          <a:p>
-            <a:endParaRPr lang="en-US" sz="1200"/>
-          </a:p>
-          <a:p>
-            <a:r>
-              <a:rPr lang="en-US" sz="1200" dirty="0"/>
+          <a:p/>
+          <a:p>
+            <a:r>
               <a:t>- Check: can they say why requirements alone may not be buildable, what a specification adds, why more than one representation, what a degree of freedom is, why unspecified is not free, why not specify everything, and how iteration discovers specification?</a:t>
             </a:r>
           </a:p>
-          <a:p>
-            <a:endParaRPr lang="en-US" sz="1200"/>
-          </a:p>
-          <a:p>
-            <a:r>
-              <a:rPr lang="en-US" sz="1200" dirty="0"/>
+          <a:p/>
+          <a:p>
+            <a:r>
               <a:t>=====</a:t>
             </a:r>
           </a:p>
-          <a:p>
-            <a:endParaRPr lang="en-US" sz="1200"/>
-          </a:p>
-          <a:p>
-            <a:r>
-              <a:rPr lang="en-US" sz="1200" dirty="0"/>
-              <a:t>We opened with this picture and we are closing with it. Requirements: what should be true. Specification: which realizations we are willing to accept.</a:t>
-            </a:r>
-          </a:p>
-          <a:p>
-            <a:endParaRPr lang="en-US" sz="1200"/>
-          </a:p>
-          <a:p>
-            <a:r>
-              <a:rPr lang="en-US" sz="1200" dirty="0"/>
+          <a:p/>
+          <a:p>
+            <a:r>
+              <a:t>We opened with this picture and we are closing with it. Requirements: what should be true. Specification: which realizations we are willing to accept. R4 allowed Builds A, B, and C until we stated more obligations. R6 became concrete when we defined the weekly-summary boundary. R5 remained a requirement even when use taught us to revise the specification.</a:t>
+            </a:r>
+          </a:p>
+          <a:p/>
+          <a:p>
+            <a:r>
               <a:t>ANIMATE</a:t>
             </a:r>
           </a:p>
-          <a:p>
-            <a:endParaRPr lang="en-US" sz="1200"/>
-          </a:p>
-          <a:p>
-            <a:r>
-              <a:rPr lang="en-US" sz="1200" dirty="0"/>
+          <a:p/>
+          <a:p>
+            <a:r>
               <a:t>Architecture asks how the system is structured. Design asks how each part is realised inside. Both hang under one candidate.</a:t>
             </a:r>
           </a:p>
-          <a:p>
-            <a:endParaRPr lang="en-US" sz="1200"/>
-          </a:p>
-          <a:p>
-            <a:r>
-              <a:rPr lang="en-US" sz="1200" dirty="0"/>
+          <a:p/>
+          <a:p>
+            <a:r>
               <a:t>ANIMATE</a:t>
             </a:r>
           </a:p>
-          <a:p>
-            <a:endParaRPr lang="en-US" sz="1200"/>
-          </a:p>
-          <a:p>
-            <a:r>
-              <a:rPr lang="en-US" sz="1200" dirty="0"/>
+          <a:p/>
+          <a:p>
+            <a:r>
               <a:t>They are mostly choices inside the acceptable space rather than further specification, though a specification can reach them, as the A-7E subset requirement did. We pick one of the systems the specification was already willing to accept, and then decide how to structure and build it.</a:t>
             </a:r>
           </a:p>
-          <a:p>
-            <a:endParaRPr lang="en-US" sz="1200"/>
-          </a:p>
-          <a:p>
-            <a:r>
-              <a:rPr lang="en-US" sz="1200" dirty="0"/>
+          <a:p/>
+          <a:p>
+            <a:r>
               <a:t>Today we asked what makes a realization acceptable. Next we start choosing how one of those systems should be structured.</a:t>
             </a:r>
           </a:p>
-          <a:p>
-            <a:endParaRPr lang="en-US" sz="1200"/>
-          </a:p>
-          <a:p>
-            <a:r>
-              <a:rPr lang="en-US" sz="1200" dirty="0"/>
+          <a:p/>
+          <a:p>
+            <a:r>
               <a:t>Constrain what matters. Leave acceptable alternatives open. Explore what you do not yet understand.</a:t>
             </a:r>
-          </a:p>
-          <a:p>
-            <a:endParaRPr lang="en-US" sz="1200"/>
           </a:p>
         </p:txBody>
       </p:sp>
@@ -2862,81 +2728,50 @@
           <a:lstStyle/>
           <a:p>
             <a:r>
-              <a:rPr lang="en-US" sz="1200" dirty="0"/>
-              <a:t>2 minutes — Make the gap between having a requirement and being able to build the right thing concrete.</a:t>
-            </a:r>
-          </a:p>
-          <a:p>
-            <a:endParaRPr lang="en-US" sz="1200"/>
-          </a:p>
-          <a:p>
-            <a:r>
-              <a:rPr lang="en-US" sz="1200" dirty="0"/>
+              <a:t>2 minutes — Show that reasonable requirements can still admit substantially different realizations.</a:t>
+            </a:r>
+          </a:p>
+          <a:p/>
+          <a:p>
+            <a:r>
               <a:t>- Slide 2 already framed the model; do not re-explain it. This slide makes the abstract arrow concrete.</a:t>
             </a:r>
           </a:p>
-          <a:p>
-            <a:endParaRPr lang="en-US" sz="1200"/>
-          </a:p>
-          <a:p>
-            <a:r>
-              <a:rPr lang="en-US" sz="1200" dirty="0"/>
-              <a:t>- Name these Build A, B and C out loud. The letters carry to slide 19, where they die one at a time.</a:t>
-            </a:r>
-          </a:p>
-          <a:p>
-            <a:endParaRPr lang="en-US" sz="1200"/>
-          </a:p>
-          <a:p>
-            <a:r>
-              <a:rPr lang="en-US" sz="1200" dirty="0"/>
+          <a:p/>
+          <a:p>
+            <a:r>
+              <a:t>- Name these Build A, B and C out loud. The letters carry through the lecture; later slides eliminate them one at a time.</a:t>
+            </a:r>
+          </a:p>
+          <a:p/>
+          <a:p>
+            <a:r>
               <a:t>- Ask the closing question and take two answers before moving on.</a:t>
             </a:r>
           </a:p>
-          <a:p>
-            <a:endParaRPr lang="en-US" sz="1200"/>
-          </a:p>
-          <a:p>
-            <a:r>
-              <a:rPr lang="en-US" sz="1200" dirty="0"/>
+          <a:p/>
+          <a:p>
+            <a:r>
               <a:t>=====</a:t>
             </a:r>
           </a:p>
-          <a:p>
-            <a:endParaRPr lang="en-US" sz="1200"/>
-          </a:p>
-          <a:p>
-            <a:r>
-              <a:rPr lang="en-US" sz="1200" dirty="0"/>
-              <a:t>We will use this Sleep Advisor app as a running example throughout the lecture.</a:t>
-            </a:r>
-          </a:p>
-          <a:p>
-            <a:r>
-              <a:rPr lang="en-US" sz="1200" dirty="0"/>
-              <a:t>Three teams get R4 and read it carefully. Team A captures a baseline once, at install, and compares last night to it, every morning. Team B keeps a rolling thirty-day baseline and sends a weekly digest. Team C runs a heart-rate variability model and only speaks up above ninety percent confidence.</a:t>
-            </a:r>
-          </a:p>
-          <a:p>
-            <a:endParaRPr lang="en-US" sz="1200"/>
-          </a:p>
-          <a:p>
-            <a:r>
-              <a:rPr lang="en-US" sz="1200" dirty="0"/>
+          <a:p/>
+          <a:p>
+            <a:r>
+              <a:t>Take just one of those requirements: R4. Three teams receive exactly that sentence and nothing more. Team A captures a baseline once, at install, and compares last night to it, every morning. Team B keeps a rolling thirty-day baseline and sends a weekly digest. Team C runs a heart-rate variability model and only speaks up above ninety percent confidence.</a:t>
+            </a:r>
+          </a:p>
+          <a:p/>
+          <a:p>
+            <a:r>
               <a:t>Every one of those satisfies the sentence. None of them is the same product. A user would notice immediately which one they had.</a:t>
             </a:r>
           </a:p>
-          <a:p>
-            <a:endParaRPr lang="en-US" sz="1200"/>
-          </a:p>
-          <a:p>
-            <a:r>
-              <a:rPr lang="en-US" sz="1200" dirty="0"/>
+          <a:p/>
+          <a:p>
+            <a:r>
               <a:t>So which differences did we actually mean to constrain? That question is what specification is for, and it is the rest of the hour.</a:t>
             </a:r>
-          </a:p>
-          <a:p>
-            <a:endParaRPr lang="en-US" sz="1200"/>
           </a:p>
         </p:txBody>
       </p:sp>
@@ -3192,93 +3027,62 @@
           <a:lstStyle/>
           <a:p>
             <a:r>
-              <a:rPr lang="en-US" sz="1200" dirty="0"/>
               <a:t>5 minutes — Students discover that omissions differ in kind before we give them the vocabulary.</a:t>
             </a:r>
           </a:p>
-          <a:p>
-            <a:endParaRPr lang="en-US" sz="1200"/>
-          </a:p>
-          <a:p>
-            <a:r>
-              <a:rPr lang="en-US" sz="1200" dirty="0"/>
+          <a:p/>
+          <a:p>
+            <a:r>
               <a:t>- Hold the timing firmly: 1 think, 2 pair, 2 share. Do not let the share run — the payoff is three slides away.</a:t>
             </a:r>
           </a:p>
-          <a:p>
-            <a:endParaRPr lang="en-US" sz="1200"/>
-          </a:p>
-          <a:p>
-            <a:r>
-              <a:rPr lang="en-US" sz="1200" dirty="0"/>
+          <a:p/>
+          <a:p>
+            <a:r>
               <a:t>- Likely answers to Q1: send it, let them pick a doctor, pick a format. Q2: consent, retention, revocation, what counts as a summary, what if sending fails. Q3: transport, file format, styling.</a:t>
             </a:r>
           </a:p>
-          <a:p>
-            <a:endParaRPr lang="en-US" sz="1200"/>
-          </a:p>
-          <a:p>
-            <a:r>
-              <a:rPr lang="en-US" sz="1200" dirty="0"/>
+          <a:p/>
+          <a:p>
+            <a:r>
               <a:t>- Do NOT introduce unknown / tacit / free here. Students must wrestle with the question first.</a:t>
             </a:r>
           </a:p>
-          <a:p>
-            <a:endParaRPr lang="en-US" sz="1200"/>
-          </a:p>
-          <a:p>
-            <a:r>
-              <a:rPr lang="en-US" sz="1200" dirty="0"/>
+          <a:p/>
+          <a:p>
+            <a:r>
               <a:t>- Close with the line on screen; that is the transition, not a summary.</a:t>
             </a:r>
           </a:p>
-          <a:p>
-            <a:endParaRPr lang="en-US" sz="1200"/>
-          </a:p>
-          <a:p>
-            <a:r>
-              <a:rPr lang="en-US" sz="1200" dirty="0"/>
+          <a:p/>
+          <a:p>
+            <a:r>
               <a:t>=====</a:t>
             </a:r>
           </a:p>
-          <a:p>
-            <a:endParaRPr lang="en-US" sz="1200"/>
-          </a:p>
-          <a:p>
-            <a:r>
-              <a:rPr lang="en-US" sz="1200" dirty="0"/>
-              <a:t>You are handing R7 to someone who has never met the user and cannot ask you anything. One minute alone: write what the implementation must do, then everything you would still need to know.</a:t>
-            </a:r>
-          </a:p>
-          <a:p>
-            <a:endParaRPr lang="en-US" sz="1200"/>
-          </a:p>
-          <a:p>
-            <a:r>
-              <a:rPr lang="en-US" sz="1200" dirty="0"/>
+          <a:p/>
+          <a:p>
+            <a:r>
+              <a:t>Now take another requirement from the same system: R7. Imagine handing exactly this requirement to an implementor who has never met the user and cannot ask you anything. One minute alone: write what the implementation must do, then everything you would still need to know.</a:t>
+            </a:r>
+          </a:p>
+          <a:p/>
+          <a:p>
+            <a:r>
               <a:t>Now two minutes with a neighbour. Compare your missing-facts lists and mark the ones you would be content to let the implementor decide.</a:t>
             </a:r>
           </a:p>
-          <a:p>
-            <a:endParaRPr lang="en-US" sz="1200"/>
-          </a:p>
-          <a:p>
-            <a:r>
-              <a:rPr lang="en-US" sz="1200" dirty="0"/>
+          <a:p/>
+          <a:p>
+            <a:r>
               <a:t>Take three or four answers. Push on any two people who disagreed about whether something could be left open — that disagreement is the seed of the next section.</a:t>
             </a:r>
           </a:p>
-          <a:p>
-            <a:endParaRPr lang="en-US" sz="1200"/>
-          </a:p>
-          <a:p>
-            <a:r>
-              <a:rPr lang="en-US" sz="1200" dirty="0"/>
+          <a:p/>
+          <a:p>
+            <a:r>
               <a:t>Then close: notice that not every missing fact has the same status. Some you could answer today and did not. Some we do not yet know how to answer. Some you genuinely do not care about. We will come back to that.</a:t>
             </a:r>
-          </a:p>
-          <a:p>
-            <a:endParaRPr lang="en-US" sz="1200"/>
           </a:p>
         </p:txBody>
       </p:sp>
@@ -7327,6 +7131,485 @@
           <p:cNvPr id="3" name="Title 2">
             <a:extLst>
               <a:ext uri="{FF2B5EF4-FFF2-40B4-BE49-F238E27FC236}">
+                <a16:creationId xmlns:a16="http://schemas.microsoft.com/office/drawing/2014/main" id="{742BD16B-B74A-660F-AAAE-24045A33683D}"/>
+              </a:ext>
+            </a:extLst>
+          </p:cNvPr>
+          <p:cNvSpPr>
+            <a:spLocks noGrp="1"/>
+          </p:cNvSpPr>
+          <p:nvPr>
+            <p:ph type="title"/>
+          </p:nvPr>
+        </p:nvSpPr>
+        <p:spPr/>
+        <p:txBody>
+          <a:bodyPr>
+            <a:normAutofit fontScale="90000"/>
+          </a:bodyPr>
+          <a:lstStyle/>
+          <a:p>
+            <a:pPr>
+              <a:buNone/>
+            </a:pPr>
+            <a:r>
+              <a:rPr lang="en-US" b="1" dirty="0"/>
+              <a:t>A real software specification: the A-7E aircraft</a:t>
+            </a:r>
+          </a:p>
+        </p:txBody>
+      </p:sp>
+      <p:sp>
+        <p:nvSpPr>
+          <p:cNvPr id="4" name="Slide Number Placeholder 3">
+            <a:extLst>
+              <a:ext uri="{FF2B5EF4-FFF2-40B4-BE49-F238E27FC236}">
+                <a16:creationId xmlns:a16="http://schemas.microsoft.com/office/drawing/2014/main" id="{24CAFB3C-B634-E09C-E7C6-7A9A685898FD}"/>
+              </a:ext>
+            </a:extLst>
+          </p:cNvPr>
+          <p:cNvSpPr>
+            <a:spLocks noGrp="1"/>
+          </p:cNvSpPr>
+          <p:nvPr>
+            <p:ph type="sldNum" sz="quarter" idx="4"/>
+          </p:nvPr>
+        </p:nvSpPr>
+        <p:spPr/>
+        <p:txBody>
+          <a:bodyPr/>
+          <a:lstStyle/>
+          <a:p>
+            <a:fld id="{B7EB45DA-9A0D-DC49-8E02-F30A5DDC21C3}" type="slidenum">
+              <a:rPr lang="en-US" smtClean="0"/>
+              <a:t>9</a:t>
+            </a:fld>
+            <a:endParaRPr lang="en-US"/>
+          </a:p>
+        </p:txBody>
+      </p:sp>
+      <p:sp>
+        <p:nvSpPr>
+          <p:cNvPr id="201" name="Kicker"/>
+          <p:cNvSpPr txBox="1"/>
+          <p:nvPr/>
+        </p:nvSpPr>
+        <p:spPr>
+          <a:xfrm>
+            <a:off x="279400" y="812800"/>
+            <a:ext cx="5969000" cy="279400"/>
+          </a:xfrm>
+          <a:prstGeom prst="rect">
+            <a:avLst/>
+          </a:prstGeom>
+          <a:noFill/>
+          <a:ln>
+            <a:noFill/>
+          </a:ln>
+        </p:spPr>
+        <p:txBody>
+          <a:bodyPr lIns="0" tIns="91440" rIns="0" bIns="91440" anchor="t">
+            <a:noAutofit/>
+          </a:bodyPr>
+          <a:lstStyle/>
+          <a:p>
+            <a:pPr>
+              <a:buNone/>
+            </a:pPr>
+            <a:r>
+              <a:rPr lang="en-US" sz="1400" b="1" dirty="0">
+                <a:solidFill>
+                  <a:srgbClr val="8E6F3E"/>
+                </a:solidFill>
+              </a:rPr>
+              <a:t>Alspaugh et al., 1992 · Software Requirements for the A-7E Aircraft</a:t>
+            </a:r>
+          </a:p>
+        </p:txBody>
+      </p:sp>
+      <p:sp>
+        <p:nvSpPr>
+          <p:cNvPr id="202" name="CaseLabel"/>
+          <p:cNvSpPr txBox="1"/>
+          <p:nvPr/>
+        </p:nvSpPr>
+        <p:spPr>
+          <a:xfrm>
+            <a:off x="6350000" y="812800"/>
+            <a:ext cx="2489200" cy="279400"/>
+          </a:xfrm>
+          <a:prstGeom prst="rect">
+            <a:avLst/>
+          </a:prstGeom>
+          <a:noFill/>
+          <a:ln>
+            <a:noFill/>
+          </a:ln>
+        </p:spPr>
+        <p:txBody>
+          <a:bodyPr lIns="0" tIns="91440" rIns="0" bIns="91440" anchor="t">
+            <a:noAutofit/>
+          </a:bodyPr>
+          <a:lstStyle/>
+          <a:p>
+            <a:pPr algn="r">
+              <a:buNone/>
+            </a:pPr>
+            <a:r>
+              <a:rPr lang="en-US" sz="1200" b="1" spc="100" dirty="0">
+                <a:solidFill>
+                  <a:srgbClr val="8E6F3E"/>
+                </a:solidFill>
+              </a:rPr>
+              <a:t>A-7E CASE · 1 OF 5</a:t>
+            </a:r>
+          </a:p>
+        </p:txBody>
+      </p:sp>
+      <p:sp>
+        <p:nvSpPr>
+          <p:cNvPr id="203" name="Point"/>
+          <p:cNvSpPr txBox="1"/>
+          <p:nvPr/>
+        </p:nvSpPr>
+        <p:spPr>
+          <a:xfrm>
+            <a:off x="279400" y="1576556"/>
+            <a:ext cx="4267200" cy="1219200"/>
+          </a:xfrm>
+          <a:prstGeom prst="rect">
+            <a:avLst/>
+          </a:prstGeom>
+          <a:noFill/>
+          <a:ln>
+            <a:noFill/>
+          </a:ln>
+        </p:spPr>
+        <p:txBody>
+          <a:bodyPr lIns="0" tIns="91440" rIns="0" bIns="91440" anchor="t">
+            <a:noAutofit/>
+          </a:bodyPr>
+          <a:lstStyle/>
+          <a:p>
+            <a:pPr>
+              <a:buNone/>
+            </a:pPr>
+            <a:r>
+              <a:rPr lang="en-US" sz="2000" b="1" dirty="0">
+                <a:solidFill>
+                  <a:srgbClr val="1A1A1A"/>
+                </a:solidFill>
+              </a:rPr>
+              <a:t>A substantial specification of externally visible behavior</a:t>
+            </a:r>
+          </a:p>
+          <a:p>
+            <a:pPr>
+              <a:spcBef>
+                <a:spcPts val="300"/>
+              </a:spcBef>
+              <a:buNone/>
+            </a:pPr>
+            <a:r>
+              <a:rPr lang="en-US" sz="1600" dirty="0">
+                <a:solidFill>
+                  <a:srgbClr val="555960"/>
+                </a:solidFill>
+              </a:rPr>
+              <a:t>472 pages · nine chapters</a:t>
+            </a:r>
+          </a:p>
+        </p:txBody>
+      </p:sp>
+      <p:sp>
+        <p:nvSpPr>
+          <p:cNvPr id="204" name="Point"/>
+          <p:cNvSpPr txBox="1"/>
+          <p:nvPr/>
+        </p:nvSpPr>
+        <p:spPr>
+          <a:xfrm>
+            <a:off x="279400" y="2973556"/>
+            <a:ext cx="4267200" cy="1219200"/>
+          </a:xfrm>
+          <a:prstGeom prst="rect">
+            <a:avLst/>
+          </a:prstGeom>
+          <a:noFill/>
+          <a:ln>
+            <a:noFill/>
+          </a:ln>
+        </p:spPr>
+        <p:txBody>
+          <a:bodyPr lIns="0" tIns="91440" rIns="0" bIns="91440" anchor="t">
+            <a:noAutofit/>
+          </a:bodyPr>
+          <a:lstStyle/>
+          <a:p>
+            <a:pPr>
+              <a:buNone/>
+            </a:pPr>
+            <a:r>
+              <a:rPr lang="en-US" sz="2000" b="1" dirty="0">
+                <a:solidFill>
+                  <a:srgbClr val="1A1A1A"/>
+                </a:solidFill>
+              </a:rPr>
+              <a:t>Multiple representations</a:t>
+            </a:r>
+          </a:p>
+          <a:p>
+            <a:pPr>
+              <a:spcBef>
+                <a:spcPts val="300"/>
+              </a:spcBef>
+              <a:buNone/>
+            </a:pPr>
+            <a:r>
+              <a:rPr lang="en-US" sz="1600" dirty="0">
+                <a:solidFill>
+                  <a:srgbClr val="555960"/>
+                </a:solidFill>
+              </a:rPr>
+              <a:t>prose · defined data · tables · modes · timing constraints</a:t>
+            </a:r>
+          </a:p>
+        </p:txBody>
+      </p:sp>
+      <p:sp>
+        <p:nvSpPr>
+          <p:cNvPr id="205" name="Point"/>
+          <p:cNvSpPr txBox="1"/>
+          <p:nvPr/>
+        </p:nvSpPr>
+        <p:spPr>
+          <a:xfrm>
+            <a:off x="279400" y="4370556"/>
+            <a:ext cx="4267200" cy="889000"/>
+          </a:xfrm>
+          <a:prstGeom prst="rect">
+            <a:avLst/>
+          </a:prstGeom>
+          <a:noFill/>
+          <a:ln>
+            <a:noFill/>
+          </a:ln>
+        </p:spPr>
+        <p:txBody>
+          <a:bodyPr lIns="0" tIns="91440" rIns="0" bIns="91440" anchor="t">
+            <a:noAutofit/>
+          </a:bodyPr>
+          <a:lstStyle/>
+          <a:p>
+            <a:pPr>
+              <a:buNone/>
+            </a:pPr>
+            <a:r>
+              <a:rPr lang="en-US" sz="2000" b="1" dirty="0">
+                <a:solidFill>
+                  <a:srgbClr val="1A1A1A"/>
+                </a:solidFill>
+              </a:rPr>
+              <a:t>Deliberately avoids unnecessary implementation decisions</a:t>
+            </a:r>
+          </a:p>
+        </p:txBody>
+      </p:sp>
+      <p:sp>
+        <p:nvSpPr>
+          <p:cNvPr id="206" name="DocPage"/>
+          <p:cNvSpPr txBox="1"/>
+          <p:nvPr/>
+        </p:nvSpPr>
+        <p:spPr>
+          <a:xfrm>
+            <a:off x="4775200" y="1474956"/>
+            <a:ext cx="4064000" cy="4140200"/>
+          </a:xfrm>
+          <a:prstGeom prst="rect">
+            <a:avLst/>
+          </a:prstGeom>
+          <a:solidFill>
+            <a:srgbClr val="FFFFFF"/>
+          </a:solidFill>
+          <a:ln w="9525">
+            <a:solidFill>
+              <a:srgbClr val="BFB8A8"/>
+            </a:solidFill>
+          </a:ln>
+        </p:spPr>
+        <p:txBody>
+          <a:bodyPr lIns="182880" tIns="91440" rIns="182880" bIns="91440" anchor="ctr">
+            <a:noAutofit/>
+          </a:bodyPr>
+          <a:lstStyle/>
+          <a:p>
+            <a:pPr algn="ctr">
+              <a:buNone/>
+            </a:pPr>
+            <a:r>
+              <a:rPr lang="en-US" sz="1100" b="1" spc="120" dirty="0">
+                <a:solidFill>
+                  <a:srgbClr val="3A3A3A"/>
+                </a:solidFill>
+                <a:latin typeface="Times New Roman"/>
+              </a:rPr>
+              <a:t>NAVAL RESEARCH LABORATORY</a:t>
+            </a:r>
+          </a:p>
+          <a:p>
+            <a:pPr algn="ctr">
+              <a:spcBef>
+                <a:spcPts val="200"/>
+              </a:spcBef>
+              <a:buNone/>
+            </a:pPr>
+            <a:r>
+              <a:rPr lang="en-US" sz="1000" dirty="0">
+                <a:solidFill>
+                  <a:srgbClr val="555960"/>
+                </a:solidFill>
+                <a:latin typeface="Times New Roman"/>
+              </a:rPr>
+              <a:t>Washington, DC 20375-5000  ·  NRL/FR/5530-92-9194</a:t>
+            </a:r>
+          </a:p>
+          <a:p>
+            <a:pPr algn="ctr">
+              <a:spcBef>
+                <a:spcPts val="900"/>
+              </a:spcBef>
+              <a:buNone/>
+            </a:pPr>
+            <a:r>
+              <a:rPr lang="en-US" sz="1700" b="1" dirty="0">
+                <a:solidFill>
+                  <a:srgbClr val="1A1A1A"/>
+                </a:solidFill>
+                <a:latin typeface="Times New Roman"/>
+              </a:rPr>
+              <a:t>Software Requirements for the A-7E Aircraft</a:t>
+            </a:r>
+          </a:p>
+          <a:p>
+            <a:pPr algn="ctr">
+              <a:spcBef>
+                <a:spcPts val="700"/>
+              </a:spcBef>
+              <a:buNone/>
+            </a:pPr>
+            <a:r>
+              <a:rPr lang="en-US" sz="1100" dirty="0">
+                <a:solidFill>
+                  <a:srgbClr val="3A3A3A"/>
+                </a:solidFill>
+                <a:latin typeface="Times New Roman"/>
+              </a:rPr>
+              <a:t>Thomas A. Alspaugh, Stuart R. Faulk, Kathryn Heninger Britton, R. Alan Parker, David L. Parnas, and John E. Shore</a:t>
+            </a:r>
+          </a:p>
+          <a:p>
+            <a:pPr algn="ctr">
+              <a:spcBef>
+                <a:spcPts val="600"/>
+              </a:spcBef>
+              <a:buNone/>
+            </a:pPr>
+            <a:r>
+              <a:rPr lang="en-US" sz="1100" i="1" dirty="0">
+                <a:solidFill>
+                  <a:srgbClr val="555960"/>
+                </a:solidFill>
+                <a:latin typeface="Times New Roman"/>
+              </a:rPr>
+              <a:t>Human Computer Interaction Laboratory Branch</a:t>
+            </a:r>
+          </a:p>
+          <a:p>
+            <a:pPr algn="ctr">
+              <a:buNone/>
+            </a:pPr>
+            <a:r>
+              <a:rPr lang="en-US" sz="1100" i="1" dirty="0">
+                <a:solidFill>
+                  <a:srgbClr val="555960"/>
+                </a:solidFill>
+                <a:latin typeface="Times New Roman"/>
+              </a:rPr>
+              <a:t>Information Technology Division</a:t>
+            </a:r>
+          </a:p>
+          <a:p>
+            <a:pPr algn="ctr">
+              <a:spcBef>
+                <a:spcPts val="600"/>
+              </a:spcBef>
+              <a:buNone/>
+            </a:pPr>
+            <a:r>
+              <a:rPr lang="en-US" sz="1100" dirty="0">
+                <a:solidFill>
+                  <a:srgbClr val="3A3A3A"/>
+                </a:solidFill>
+                <a:latin typeface="Times New Roman"/>
+              </a:rPr>
+              <a:t>August 31, 1992</a:t>
+            </a:r>
+          </a:p>
+          <a:p>
+            <a:pPr algn="ctr">
+              <a:spcBef>
+                <a:spcPts val="900"/>
+              </a:spcBef>
+              <a:buNone/>
+            </a:pPr>
+            <a:r>
+              <a:rPr lang="en-US" sz="1000" dirty="0">
+                <a:solidFill>
+                  <a:srgbClr val="555960"/>
+                </a:solidFill>
+                <a:latin typeface="Times New Roman"/>
+              </a:rPr>
+              <a:t>Approved for public release; distribution unlimited.</a:t>
+            </a:r>
+          </a:p>
+        </p:txBody>
+      </p:sp>
+    </p:spTree>
+    <p:extLst>
+      <p:ext uri="{BB962C8B-B14F-4D97-AF65-F5344CB8AC3E}">
+        <p14:creationId xmlns:p14="http://schemas.microsoft.com/office/powerpoint/2010/main" val="1222234180"/>
+      </p:ext>
+    </p:extLst>
+  </p:cSld>
+  <p:clrMapOvr>
+    <a:masterClrMapping/>
+  </p:clrMapOvr>
+</p:sld>
+</file>
+
+<file path=ppt/slides/slide11.xml><?xml version="1.0" encoding="utf-8"?>
+<p:sld xmlns:a="http://schemas.openxmlformats.org/drawingml/2006/main" xmlns:r="http://schemas.openxmlformats.org/officeDocument/2006/relationships" xmlns:p="http://schemas.openxmlformats.org/presentationml/2006/main">
+  <p:cSld>
+    <p:spTree>
+      <p:nvGrpSpPr>
+        <p:cNvPr id="1" name=""/>
+        <p:cNvGrpSpPr/>
+        <p:nvPr/>
+      </p:nvGrpSpPr>
+      <p:grpSpPr>
+        <a:xfrm>
+          <a:off x="0" y="0"/>
+          <a:ext cx="0" cy="0"/>
+          <a:chOff x="0" y="0"/>
+          <a:chExt cx="0" cy="0"/>
+        </a:xfrm>
+      </p:grpSpPr>
+      <p:sp>
+        <p:nvSpPr>
+          <p:cNvPr id="3" name="Title 2">
+            <a:extLst>
+              <a:ext uri="{FF2B5EF4-FFF2-40B4-BE49-F238E27FC236}">
                 <a16:creationId xmlns:a16="http://schemas.microsoft.com/office/drawing/2014/main" id="{BF3C11C8-9472-02DC-70F4-102C0A54C594}"/>
               </a:ext>
             </a:extLst>
@@ -7994,7 +8277,7 @@
 </p:sld>
 </file>
 
-<file path=ppt/slides/slide11.xml><?xml version="1.0" encoding="utf-8"?>
+<file path=ppt/slides/slide12.xml><?xml version="1.0" encoding="utf-8"?>
 <p:sld xmlns:a="http://schemas.openxmlformats.org/drawingml/2006/main" xmlns:r="http://schemas.openxmlformats.org/officeDocument/2006/relationships" xmlns:p="http://schemas.openxmlformats.org/presentationml/2006/main">
   <p:cSld>
     <p:spTree>
@@ -8479,7 +8762,7 @@
 </p:sld>
 </file>
 
-<file path=ppt/slides/slide12.xml><?xml version="1.0" encoding="utf-8"?>
+<file path=ppt/slides/slide13.xml><?xml version="1.0" encoding="utf-8"?>
 <p:sld xmlns:a="http://schemas.openxmlformats.org/drawingml/2006/main" xmlns:r="http://schemas.openxmlformats.org/officeDocument/2006/relationships" xmlns:p="http://schemas.openxmlformats.org/presentationml/2006/main">
   <p:cSld>
     <p:spTree>
@@ -9145,7 +9428,7 @@
 </p:sld>
 </file>
 
-<file path=ppt/slides/slide13.xml><?xml version="1.0" encoding="utf-8"?>
+<file path=ppt/slides/slide14.xml><?xml version="1.0" encoding="utf-8"?>
 <p:sld xmlns:a="http://schemas.openxmlformats.org/drawingml/2006/main" xmlns:r="http://schemas.openxmlformats.org/officeDocument/2006/relationships" xmlns:p="http://schemas.openxmlformats.org/presentationml/2006/main">
   <p:cSld>
     <p:spTree>
@@ -9742,7 +10025,7 @@
 </p:sld>
 </file>
 
-<file path=ppt/slides/slide14.xml><?xml version="1.0" encoding="utf-8"?>
+<file path=ppt/slides/slide15.xml><?xml version="1.0" encoding="utf-8"?>
 <p:sld xmlns:a="http://schemas.openxmlformats.org/drawingml/2006/main" xmlns:r="http://schemas.openxmlformats.org/officeDocument/2006/relationships" xmlns:p="http://schemas.openxmlformats.org/presentationml/2006/main">
   <p:cSld>
     <p:spTree>
@@ -10155,7 +10438,7 @@
 </p:sld>
 </file>
 
-<file path=ppt/slides/slide15.xml><?xml version="1.0" encoding="utf-8"?>
+<file path=ppt/slides/slide16.xml><?xml version="1.0" encoding="utf-8"?>
 <p:sld xmlns:a="http://schemas.openxmlformats.org/drawingml/2006/main" xmlns:r="http://schemas.openxmlformats.org/officeDocument/2006/relationships" xmlns:p="http://schemas.openxmlformats.org/presentationml/2006/main">
   <p:cSld>
     <p:spTree>
@@ -10750,7 +11033,7 @@
 </p:sld>
 </file>
 
-<file path=ppt/slides/slide16.xml><?xml version="1.0" encoding="utf-8"?>
+<file path=ppt/slides/slide17.xml><?xml version="1.0" encoding="utf-8"?>
 <p:sld xmlns:a="http://schemas.openxmlformats.org/drawingml/2006/main" xmlns:r="http://schemas.openxmlformats.org/officeDocument/2006/relationships" xmlns:p="http://schemas.openxmlformats.org/presentationml/2006/main">
   <p:cSld>
     <p:spTree>
@@ -11842,833 +12125,6 @@
 </p:sld>
 </file>
 
-<file path=ppt/slides/slide17.xml><?xml version="1.0" encoding="utf-8"?>
-<p:sld xmlns:a="http://schemas.openxmlformats.org/drawingml/2006/main" xmlns:r="http://schemas.openxmlformats.org/officeDocument/2006/relationships" xmlns:p="http://schemas.openxmlformats.org/presentationml/2006/main">
-  <p:cSld>
-    <p:spTree>
-      <p:nvGrpSpPr>
-        <p:cNvPr id="1" name=""/>
-        <p:cNvGrpSpPr/>
-        <p:nvPr/>
-      </p:nvGrpSpPr>
-      <p:grpSpPr>
-        <a:xfrm>
-          <a:off x="0" y="0"/>
-          <a:ext cx="0" cy="0"/>
-          <a:chOff x="0" y="0"/>
-          <a:chExt cx="0" cy="0"/>
-        </a:xfrm>
-      </p:grpSpPr>
-      <p:sp>
-        <p:nvSpPr>
-          <p:cNvPr id="3" name="Title 2">
-            <a:extLst>
-              <a:ext uri="{FF2B5EF4-FFF2-40B4-BE49-F238E27FC236}">
-                <a16:creationId xmlns:a16="http://schemas.microsoft.com/office/drawing/2014/main" id="{D5C36C6D-9165-1334-94FE-8FDD6F8781D1}"/>
-              </a:ext>
-            </a:extLst>
-          </p:cNvPr>
-          <p:cNvSpPr>
-            <a:spLocks noGrp="1"/>
-          </p:cNvSpPr>
-          <p:nvPr>
-            <p:ph type="title"/>
-          </p:nvPr>
-        </p:nvSpPr>
-        <p:spPr/>
-        <p:txBody>
-          <a:bodyPr>
-            <a:normAutofit fontScale="90000"/>
-          </a:bodyPr>
-          <a:lstStyle/>
-          <a:p>
-            <a:pPr>
-              <a:buNone/>
-            </a:pPr>
-            <a:r>
-              <a:rPr lang="en-US" b="1" dirty="0"/>
-              <a:t>State models expose allowable behavior</a:t>
-            </a:r>
-          </a:p>
-        </p:txBody>
-      </p:sp>
-      <p:sp>
-        <p:nvSpPr>
-          <p:cNvPr id="4" name="Slide Number Placeholder 3">
-            <a:extLst>
-              <a:ext uri="{FF2B5EF4-FFF2-40B4-BE49-F238E27FC236}">
-                <a16:creationId xmlns:a16="http://schemas.microsoft.com/office/drawing/2014/main" id="{CD21DD71-8A21-2B33-F824-922672B061F7}"/>
-              </a:ext>
-            </a:extLst>
-          </p:cNvPr>
-          <p:cNvSpPr>
-            <a:spLocks noGrp="1"/>
-          </p:cNvSpPr>
-          <p:nvPr>
-            <p:ph type="sldNum" sz="quarter" idx="4"/>
-          </p:nvPr>
-        </p:nvSpPr>
-        <p:spPr/>
-        <p:txBody>
-          <a:bodyPr/>
-          <a:lstStyle/>
-          <a:p>
-            <a:fld id="{B7EB45DA-9A0D-DC49-8E02-F30A5DDC21C3}" type="slidenum">
-              <a:rPr lang="en-US" smtClean="0"/>
-              <a:t>17</a:t>
-            </a:fld>
-            <a:endParaRPr lang="en-US"/>
-          </a:p>
-        </p:txBody>
-      </p:sp>
-      <p:sp>
-        <p:nvSpPr>
-          <p:cNvPr id="1001" name="Kicker"/>
-          <p:cNvSpPr txBox="1"/>
-          <p:nvPr/>
-        </p:nvSpPr>
-        <p:spPr>
-          <a:xfrm>
-            <a:off x="635000" y="812800"/>
-            <a:ext cx="5588000" cy="279400"/>
-          </a:xfrm>
-          <a:prstGeom prst="rect">
-            <a:avLst/>
-          </a:prstGeom>
-          <a:noFill/>
-          <a:ln>
-            <a:noFill/>
-          </a:ln>
-        </p:spPr>
-        <p:txBody>
-          <a:bodyPr lIns="0" tIns="68580" rIns="114300" bIns="68580" anchor="t">
-            <a:noAutofit/>
-          </a:bodyPr>
-          <a:lstStyle/>
-          <a:p>
-            <a:pPr>
-              <a:buNone/>
-            </a:pPr>
-            <a:r>
-              <a:rPr lang="en-US" sz="1400" b="1" dirty="0">
-                <a:solidFill>
-                  <a:srgbClr val="8E6F3E"/>
-                </a:solidFill>
-              </a:rPr>
-              <a:t>Sleep advisor · finite-state view</a:t>
-            </a:r>
-          </a:p>
-        </p:txBody>
-      </p:sp>
-      <p:sp>
-        <p:nvSpPr>
-          <p:cNvPr id="1002" name="St"/>
-          <p:cNvSpPr txBox="1"/>
-          <p:nvPr/>
-        </p:nvSpPr>
-        <p:spPr>
-          <a:xfrm>
-            <a:off x="279400" y="1397000"/>
-            <a:ext cx="1524000" cy="558800"/>
-          </a:xfrm>
-          <a:prstGeom prst="rect">
-            <a:avLst/>
-          </a:prstGeom>
-          <a:solidFill>
-            <a:srgbClr val="F4EFE7"/>
-          </a:solidFill>
-          <a:ln w="9525">
-            <a:solidFill>
-              <a:srgbClr val="8E6F3E"/>
-            </a:solidFill>
-          </a:ln>
-        </p:spPr>
-        <p:txBody>
-          <a:bodyPr lIns="114300" tIns="68580" rIns="114300" bIns="68580" anchor="ctr">
-            <a:noAutofit/>
-          </a:bodyPr>
-          <a:lstStyle/>
-          <a:p>
-            <a:pPr algn="ctr">
-              <a:buNone/>
-            </a:pPr>
-            <a:r>
-              <a:rPr lang="en-US" sz="1500" b="1" dirty="0">
-                <a:solidFill>
-                  <a:srgbClr val="3A3A3A"/>
-                </a:solidFill>
-              </a:rPr>
-              <a:t>LEARNING</a:t>
-            </a:r>
-          </a:p>
-        </p:txBody>
-      </p:sp>
-      <p:sp>
-        <p:nvSpPr>
-          <p:cNvPr id="1003" name="St"/>
-          <p:cNvSpPr txBox="1"/>
-          <p:nvPr/>
-        </p:nvSpPr>
-        <p:spPr>
-          <a:xfrm>
-            <a:off x="2108200" y="1397000"/>
-            <a:ext cx="1524000" cy="558800"/>
-          </a:xfrm>
-          <a:prstGeom prst="rect">
-            <a:avLst/>
-          </a:prstGeom>
-          <a:solidFill>
-            <a:srgbClr val="F4EFE7"/>
-          </a:solidFill>
-          <a:ln w="9525">
-            <a:solidFill>
-              <a:srgbClr val="8E6F3E"/>
-            </a:solidFill>
-          </a:ln>
-        </p:spPr>
-        <p:txBody>
-          <a:bodyPr lIns="114300" tIns="68580" rIns="114300" bIns="68580" anchor="ctr">
-            <a:noAutofit/>
-          </a:bodyPr>
-          <a:lstStyle/>
-          <a:p>
-            <a:pPr algn="ctr">
-              <a:buNone/>
-            </a:pPr>
-            <a:r>
-              <a:rPr lang="en-US" sz="1500" b="1" dirty="0">
-                <a:solidFill>
-                  <a:srgbClr val="3A3A3A"/>
-                </a:solidFill>
-              </a:rPr>
-              <a:t>STEADY</a:t>
-            </a:r>
-          </a:p>
-        </p:txBody>
-      </p:sp>
-      <p:sp>
-        <p:nvSpPr>
-          <p:cNvPr id="1004" name="St"/>
-          <p:cNvSpPr txBox="1"/>
-          <p:nvPr/>
-        </p:nvSpPr>
-        <p:spPr>
-          <a:xfrm>
-            <a:off x="3937000" y="1397000"/>
-            <a:ext cx="1524000" cy="558800"/>
-          </a:xfrm>
-          <a:prstGeom prst="rect">
-            <a:avLst/>
-          </a:prstGeom>
-          <a:solidFill>
-            <a:srgbClr val="F4EFE7"/>
-          </a:solidFill>
-          <a:ln w="9525">
-            <a:solidFill>
-              <a:srgbClr val="8E6F3E"/>
-            </a:solidFill>
-          </a:ln>
-        </p:spPr>
-        <p:txBody>
-          <a:bodyPr lIns="114300" tIns="68580" rIns="114300" bIns="68580" anchor="ctr">
-            <a:noAutofit/>
-          </a:bodyPr>
-          <a:lstStyle/>
-          <a:p>
-            <a:pPr algn="ctr">
-              <a:buNone/>
-            </a:pPr>
-            <a:r>
-              <a:rPr lang="en-US" sz="1500" b="1" dirty="0">
-                <a:solidFill>
-                  <a:srgbClr val="3A3A3A"/>
-                </a:solidFill>
-              </a:rPr>
-              <a:t>SUSPECT</a:t>
-            </a:r>
-          </a:p>
-        </p:txBody>
-      </p:sp>
-      <p:sp>
-        <p:nvSpPr>
-          <p:cNvPr id="1005" name="St"/>
-          <p:cNvSpPr txBox="1"/>
-          <p:nvPr/>
-        </p:nvSpPr>
-        <p:spPr>
-          <a:xfrm>
-            <a:off x="3937000" y="2997200"/>
-            <a:ext cx="1524000" cy="558800"/>
-          </a:xfrm>
-          <a:prstGeom prst="rect">
-            <a:avLst/>
-          </a:prstGeom>
-          <a:solidFill>
-            <a:srgbClr val="8E6F3E"/>
-          </a:solidFill>
-          <a:ln>
-            <a:noFill/>
-          </a:ln>
-        </p:spPr>
-        <p:txBody>
-          <a:bodyPr lIns="114300" tIns="68580" rIns="114300" bIns="68580" anchor="ctr">
-            <a:noAutofit/>
-          </a:bodyPr>
-          <a:lstStyle/>
-          <a:p>
-            <a:pPr algn="ctr">
-              <a:buNone/>
-            </a:pPr>
-            <a:r>
-              <a:rPr lang="en-US" sz="1400" b="1" dirty="0">
-                <a:solidFill>
-                  <a:srgbClr val="FFFFFF"/>
-                </a:solidFill>
-              </a:rPr>
-              <a:t>REBASELINE</a:t>
-            </a:r>
-          </a:p>
-        </p:txBody>
-      </p:sp>
-      <p:sp>
-        <p:nvSpPr>
-          <p:cNvPr id="1018" name="Panel"/>
-          <p:cNvSpPr txBox="1"/>
-          <p:nvPr/>
-        </p:nvSpPr>
-        <p:spPr>
-          <a:xfrm>
-            <a:off x="5740400" y="1270000"/>
-            <a:ext cx="3098800" cy="3810000"/>
-          </a:xfrm>
-          <a:prstGeom prst="rect">
-            <a:avLst/>
-          </a:prstGeom>
-          <a:solidFill>
-            <a:srgbClr val="F9F6F1"/>
-          </a:solidFill>
-          <a:ln w="9525">
-            <a:solidFill>
-              <a:srgbClr val="C9C4BB"/>
-            </a:solidFill>
-          </a:ln>
-        </p:spPr>
-        <p:txBody>
-          <a:bodyPr lIns="114300" tIns="68580" rIns="114300" bIns="68580" anchor="t">
-            <a:noAutofit/>
-          </a:bodyPr>
-          <a:lstStyle/>
-          <a:p>
-            <a:pPr>
-              <a:buNone/>
-            </a:pPr>
-            <a:r>
-              <a:rPr lang="en-US" sz="1300" b="1" spc="80" dirty="0">
-                <a:solidFill>
-                  <a:srgbClr val="8E6F3E"/>
-                </a:solidFill>
-              </a:rPr>
-              <a:t>QUESTION</a:t>
-            </a:r>
-          </a:p>
-          <a:p>
-            <a:pPr>
-              <a:spcBef>
-                <a:spcPts val="200"/>
-              </a:spcBef>
-              <a:buNone/>
-            </a:pPr>
-            <a:r>
-              <a:rPr lang="en-US" sz="1700" dirty="0">
-                <a:solidFill>
-                  <a:srgbClr val="1A1A1A"/>
-                </a:solidFill>
-              </a:rPr>
-              <a:t>What may happen next?</a:t>
-            </a:r>
-          </a:p>
-          <a:p>
-            <a:pPr>
-              <a:spcBef>
-                <a:spcPts val="700"/>
-              </a:spcBef>
-              <a:buNone/>
-            </a:pPr>
-            <a:r>
-              <a:rPr lang="en-US" sz="1300" b="1" spc="80" dirty="0">
-                <a:solidFill>
-                  <a:srgbClr val="8E6F3E"/>
-                </a:solidFill>
-              </a:rPr>
-              <a:t>CONSTRAINABLE PROPERTIES</a:t>
-            </a:r>
-          </a:p>
-          <a:p>
-            <a:pPr>
-              <a:spcBef>
-                <a:spcPts val="250"/>
-              </a:spcBef>
-              <a:buNone/>
-            </a:pPr>
-            <a:r>
-              <a:rPr lang="en-US" sz="1500" dirty="0">
-                <a:solidFill>
-                  <a:srgbClr val="3A3A3A"/>
-                </a:solidFill>
-              </a:rPr>
-              <a:t>· legal states</a:t>
-            </a:r>
-          </a:p>
-          <a:p>
-            <a:pPr>
-              <a:spcBef>
-                <a:spcPts val="150"/>
-              </a:spcBef>
-              <a:buNone/>
-            </a:pPr>
-            <a:r>
-              <a:rPr lang="en-US" sz="1500" dirty="0">
-                <a:solidFill>
-                  <a:srgbClr val="3A3A3A"/>
-                </a:solidFill>
-              </a:rPr>
-              <a:t>· permitted transitions</a:t>
-            </a:r>
-          </a:p>
-          <a:p>
-            <a:pPr>
-              <a:spcBef>
-                <a:spcPts val="150"/>
-              </a:spcBef>
-              <a:buNone/>
-            </a:pPr>
-            <a:r>
-              <a:rPr lang="en-US" sz="1500" dirty="0">
-                <a:solidFill>
-                  <a:srgbClr val="3A3A3A"/>
-                </a:solidFill>
-              </a:rPr>
-              <a:t>· forbidden transitions</a:t>
-            </a:r>
-          </a:p>
-          <a:p>
-            <a:pPr>
-              <a:spcBef>
-                <a:spcPts val="150"/>
-              </a:spcBef>
-              <a:buNone/>
-            </a:pPr>
-            <a:r>
-              <a:rPr lang="en-US" sz="1500" dirty="0">
-                <a:solidFill>
-                  <a:srgbClr val="3A3A3A"/>
-                </a:solidFill>
-              </a:rPr>
-              <a:t>· conditions under which they occur</a:t>
-            </a:r>
-          </a:p>
-          <a:p>
-            <a:pPr>
-              <a:spcBef>
-                <a:spcPts val="700"/>
-              </a:spcBef>
-              <a:buNone/>
-            </a:pPr>
-            <a:r>
-              <a:rPr lang="en-US" sz="1300" b="1" spc="80" dirty="0">
-                <a:solidFill>
-                  <a:srgbClr val="8E6F3E"/>
-                </a:solidFill>
-              </a:rPr>
-              <a:t>EXAMPLE INVARIANT</a:t>
-            </a:r>
-          </a:p>
-          <a:p>
-            <a:pPr>
-              <a:spcBef>
-                <a:spcPts val="250"/>
-              </a:spcBef>
-              <a:buNone/>
-            </a:pPr>
-            <a:r>
-              <a:rPr lang="en-US" sz="1600" b="1" dirty="0">
-                <a:solidFill>
-                  <a:srgbClr val="1A1A1A"/>
-                </a:solidFill>
-              </a:rPr>
-              <a:t>An advisory may be issued only in STEADY or SUSPECT.</a:t>
-            </a:r>
-          </a:p>
-        </p:txBody>
-      </p:sp>
-      <p:sp>
-        <p:nvSpPr>
-          <p:cNvPr id="1020" name="Src"/>
-          <p:cNvSpPr txBox="1"/>
-          <p:nvPr/>
-        </p:nvSpPr>
-        <p:spPr>
-          <a:xfrm>
-            <a:off x="279400" y="6070600"/>
-            <a:ext cx="5969000" cy="254000"/>
-          </a:xfrm>
-          <a:prstGeom prst="rect">
-            <a:avLst/>
-          </a:prstGeom>
-          <a:noFill/>
-          <a:ln>
-            <a:noFill/>
-          </a:ln>
-        </p:spPr>
-        <p:txBody>
-          <a:bodyPr lIns="0" tIns="68580" rIns="114300" bIns="68580" anchor="t">
-            <a:noAutofit/>
-          </a:bodyPr>
-          <a:lstStyle/>
-          <a:p>
-            <a:pPr>
-              <a:buNone/>
-            </a:pPr>
-            <a:r>
-              <a:rPr lang="en-US" sz="1100" dirty="0">
-                <a:solidFill>
-                  <a:srgbClr val="555960"/>
-                </a:solidFill>
-              </a:rPr>
-              <a:t>Representation form: MAGE Part II, Figure 2.1-3, finite-state model</a:t>
-            </a:r>
-          </a:p>
-        </p:txBody>
-      </p:sp>
-      <p:cxnSp>
-        <p:nvCxnSpPr>
-          <p:cNvPr id="1101" name="Flow"/>
-          <p:cNvCxnSpPr/>
-          <p:nvPr/>
-        </p:nvCxnSpPr>
-        <p:spPr>
-          <a:xfrm>
-            <a:off x="1803400" y="1676400"/>
-            <a:ext cx="304800" cy="0"/>
-          </a:xfrm>
-          <a:prstGeom prst="line">
-            <a:avLst/>
-          </a:prstGeom>
-          <a:ln w="19050">
-            <a:solidFill>
-              <a:srgbClr val="8E6F3E"/>
-            </a:solidFill>
-            <a:tailEnd type="triangle"/>
-          </a:ln>
-        </p:spPr>
-      </p:cxnSp>
-      <p:cxnSp>
-        <p:nvCxnSpPr>
-          <p:cNvPr id="1102" name="Flow"/>
-          <p:cNvCxnSpPr/>
-          <p:nvPr/>
-        </p:nvCxnSpPr>
-        <p:spPr>
-          <a:xfrm>
-            <a:off x="3632200" y="1676400"/>
-            <a:ext cx="304800" cy="0"/>
-          </a:xfrm>
-          <a:prstGeom prst="line">
-            <a:avLst/>
-          </a:prstGeom>
-          <a:ln w="19050">
-            <a:solidFill>
-              <a:srgbClr val="8E6F3E"/>
-            </a:solidFill>
-            <a:tailEnd type="triangle"/>
-          </a:ln>
-        </p:spPr>
-      </p:cxnSp>
-      <p:sp>
-        <p:nvSpPr>
-          <p:cNvPr id="1103" name="Lb"/>
-          <p:cNvSpPr txBox="1"/>
-          <p:nvPr/>
-        </p:nvSpPr>
-        <p:spPr>
-          <a:xfrm>
-            <a:off x="1803400" y="1066800"/>
-            <a:ext cx="1905000" cy="254000"/>
-          </a:xfrm>
-          <a:prstGeom prst="rect">
-            <a:avLst/>
-          </a:prstGeom>
-          <a:noFill/>
-          <a:ln>
-            <a:noFill/>
-          </a:ln>
-        </p:spPr>
-        <p:txBody>
-          <a:bodyPr lIns="0" tIns="0" rIns="0" bIns="0" anchor="ctr">
-            <a:noAutofit/>
-          </a:bodyPr>
-          <a:lstStyle/>
-          <a:p>
-            <a:pPr algn="ctr">
-              <a:buNone/>
-            </a:pPr>
-            <a:r>
-              <a:rPr lang="en-US" sz="1300" dirty="0">
-                <a:solidFill>
-                  <a:srgbClr val="555960"/>
-                </a:solidFill>
-              </a:rPr>
-              <a:t>14 nights</a:t>
-            </a:r>
-          </a:p>
-        </p:txBody>
-      </p:sp>
-      <p:sp>
-        <p:nvSpPr>
-          <p:cNvPr id="1104" name="Lb"/>
-          <p:cNvSpPr txBox="1"/>
-          <p:nvPr/>
-        </p:nvSpPr>
-        <p:spPr>
-          <a:xfrm>
-            <a:off x="3632200" y="1066800"/>
-            <a:ext cx="1905000" cy="254000"/>
-          </a:xfrm>
-          <a:prstGeom prst="rect">
-            <a:avLst/>
-          </a:prstGeom>
-          <a:noFill/>
-          <a:ln>
-            <a:noFill/>
-          </a:ln>
-        </p:spPr>
-        <p:txBody>
-          <a:bodyPr lIns="0" tIns="0" rIns="0" bIns="0" anchor="ctr">
-            <a:noAutofit/>
-          </a:bodyPr>
-          <a:lstStyle/>
-          <a:p>
-            <a:pPr algn="ctr">
-              <a:buNone/>
-            </a:pPr>
-            <a:r>
-              <a:rPr lang="en-US" sz="1300" dirty="0">
-                <a:solidFill>
-                  <a:srgbClr val="555960"/>
-                </a:solidFill>
-              </a:rPr>
-              <a:t>over 2σ</a:t>
-            </a:r>
-          </a:p>
-        </p:txBody>
-      </p:sp>
-      <p:cxnSp>
-        <p:nvCxnSpPr>
-          <p:cNvPr id="1105" name="Flow"/>
-          <p:cNvCxnSpPr/>
-          <p:nvPr/>
-        </p:nvCxnSpPr>
-        <p:spPr>
-          <a:xfrm>
-            <a:off x="4699000" y="1955800"/>
-            <a:ext cx="0" cy="1041400"/>
-          </a:xfrm>
-          <a:prstGeom prst="line">
-            <a:avLst/>
-          </a:prstGeom>
-          <a:ln w="19050">
-            <a:solidFill>
-              <a:srgbClr val="8E6F3E"/>
-            </a:solidFill>
-            <a:tailEnd type="triangle"/>
-          </a:ln>
-        </p:spPr>
-      </p:cxnSp>
-      <p:sp>
-        <p:nvSpPr>
-          <p:cNvPr id="1106" name="Lb"/>
-          <p:cNvSpPr txBox="1"/>
-          <p:nvPr/>
-        </p:nvSpPr>
-        <p:spPr>
-          <a:xfrm>
-            <a:off x="4826000" y="2235200"/>
-            <a:ext cx="889000" cy="254000"/>
-          </a:xfrm>
-          <a:prstGeom prst="rect">
-            <a:avLst/>
-          </a:prstGeom>
-          <a:noFill/>
-          <a:ln>
-            <a:noFill/>
-          </a:ln>
-        </p:spPr>
-        <p:txBody>
-          <a:bodyPr lIns="0" tIns="0" rIns="0" bIns="0" anchor="ctr">
-            <a:noAutofit/>
-          </a:bodyPr>
-          <a:lstStyle/>
-          <a:p>
-            <a:pPr>
-              <a:buNone/>
-            </a:pPr>
-            <a:r>
-              <a:rPr lang="en-US" sz="1300" dirty="0">
-                <a:solidFill>
-                  <a:srgbClr val="555960"/>
-                </a:solidFill>
-              </a:rPr>
-              <a:t>30 nights</a:t>
-            </a:r>
-          </a:p>
-        </p:txBody>
-      </p:sp>
-      <p:cxnSp>
-        <p:nvCxnSpPr>
-          <p:cNvPr id="1107" name="Flow"/>
-          <p:cNvCxnSpPr/>
-          <p:nvPr/>
-        </p:nvCxnSpPr>
-        <p:spPr>
-          <a:xfrm>
-            <a:off x="4699000" y="3556000"/>
-            <a:ext cx="0" cy="279400"/>
-          </a:xfrm>
-          <a:prstGeom prst="line">
-            <a:avLst/>
-          </a:prstGeom>
-          <a:ln w="19050">
-            <a:solidFill>
-              <a:srgbClr val="8E6F3E"/>
-            </a:solidFill>
-          </a:ln>
-        </p:spPr>
-      </p:cxnSp>
-      <p:cxnSp>
-        <p:nvCxnSpPr>
-          <p:cNvPr id="1108" name="Flow"/>
-          <p:cNvCxnSpPr/>
-          <p:nvPr/>
-        </p:nvCxnSpPr>
-        <p:spPr>
-          <a:xfrm flipH="1">
-            <a:off x="2870200" y="3835400"/>
-            <a:ext cx="1828800" cy="0"/>
-          </a:xfrm>
-          <a:prstGeom prst="line">
-            <a:avLst/>
-          </a:prstGeom>
-          <a:ln w="19050">
-            <a:solidFill>
-              <a:srgbClr val="8E6F3E"/>
-            </a:solidFill>
-          </a:ln>
-        </p:spPr>
-      </p:cxnSp>
-      <p:cxnSp>
-        <p:nvCxnSpPr>
-          <p:cNvPr id="1109" name="Flow"/>
-          <p:cNvCxnSpPr/>
-          <p:nvPr/>
-        </p:nvCxnSpPr>
-        <p:spPr>
-          <a:xfrm flipV="1">
-            <a:off x="2870200" y="1955800"/>
-            <a:ext cx="0" cy="1879600"/>
-          </a:xfrm>
-          <a:prstGeom prst="line">
-            <a:avLst/>
-          </a:prstGeom>
-          <a:ln w="19050">
-            <a:solidFill>
-              <a:srgbClr val="8E6F3E"/>
-            </a:solidFill>
-            <a:tailEnd type="triangle"/>
-          </a:ln>
-        </p:spPr>
-      </p:cxnSp>
-      <p:sp>
-        <p:nvSpPr>
-          <p:cNvPr id="1110" name="Lb"/>
-          <p:cNvSpPr txBox="1"/>
-          <p:nvPr/>
-        </p:nvSpPr>
-        <p:spPr>
-          <a:xfrm>
-            <a:off x="2997200" y="3886200"/>
-            <a:ext cx="2032000" cy="254000"/>
-          </a:xfrm>
-          <a:prstGeom prst="rect">
-            <a:avLst/>
-          </a:prstGeom>
-          <a:noFill/>
-          <a:ln>
-            <a:noFill/>
-          </a:ln>
-        </p:spPr>
-        <p:txBody>
-          <a:bodyPr lIns="0" tIns="0" rIns="0" bIns="0" anchor="ctr">
-            <a:noAutofit/>
-          </a:bodyPr>
-          <a:lstStyle/>
-          <a:p>
-            <a:pPr>
-              <a:buNone/>
-            </a:pPr>
-            <a:r>
-              <a:rPr lang="en-US" sz="1300" dirty="0">
-                <a:solidFill>
-                  <a:srgbClr val="555960"/>
-                </a:solidFill>
-              </a:rPr>
-              <a:t>new baseline</a:t>
-            </a:r>
-          </a:p>
-        </p:txBody>
-      </p:sp>
-      <p:pic>
-        <p:nvPicPr>
-          <p:cNvPr id="1111" name="Graphic 1111" descr="Sleep Advisor running example"/>
-          <p:cNvPicPr>
-            <a:picLocks noChangeAspect="1"/>
-          </p:cNvPicPr>
-          <p:nvPr/>
-        </p:nvPicPr>
-        <p:blipFill>
-          <a:blip>
-            <a:extLst>
-              <a:ext uri="{96DAC541-7B7A-43D3-8B79-37D633B846F1}">
-                <asvg:svgBlip xmlns:asvg="http://schemas.microsoft.com/office/drawing/2016/SVG/main" r:embed="rId3"/>
-              </a:ext>
-            </a:extLst>
-          </a:blip>
-          <a:stretch>
-            <a:fillRect/>
-          </a:stretch>
-        </p:blipFill>
-        <p:spPr>
-          <a:xfrm>
-            <a:off x="279400" y="800100"/>
-            <a:ext cx="279400" cy="279400"/>
-          </a:xfrm>
-          <a:prstGeom prst="rect">
-            <a:avLst/>
-          </a:prstGeom>
-        </p:spPr>
-      </p:pic>
-    </p:spTree>
-    <p:extLst>
-      <p:ext uri="{BB962C8B-B14F-4D97-AF65-F5344CB8AC3E}">
-        <p14:creationId xmlns:p14="http://schemas.microsoft.com/office/powerpoint/2010/main" val="2557942607"/>
-      </p:ext>
-    </p:extLst>
-  </p:cSld>
-  <p:clrMapOvr>
-    <a:masterClrMapping/>
-  </p:clrMapOvr>
-</p:sld>
-</file>
-
 <file path=ppt/slides/slide18.xml><?xml version="1.0" encoding="utf-8"?>
 <p:sld xmlns:a="http://schemas.openxmlformats.org/drawingml/2006/main" xmlns:r="http://schemas.openxmlformats.org/officeDocument/2006/relationships" xmlns:p="http://schemas.openxmlformats.org/presentationml/2006/main">
   <p:cSld>
@@ -12691,7 +12147,7 @@
           <p:cNvPr id="3" name="Title 2">
             <a:extLst>
               <a:ext uri="{FF2B5EF4-FFF2-40B4-BE49-F238E27FC236}">
-                <a16:creationId xmlns:a16="http://schemas.microsoft.com/office/drawing/2014/main" id="{2DF60F6E-C9B1-1E9C-96AF-C50583935092}"/>
+                <a16:creationId xmlns:a16="http://schemas.microsoft.com/office/drawing/2014/main" id="{D5C36C6D-9165-1334-94FE-8FDD6F8781D1}"/>
               </a:ext>
             </a:extLst>
           </p:cNvPr>
@@ -12714,7 +12170,7 @@
             </a:pPr>
             <a:r>
               <a:rPr lang="en-US" b="1" dirty="0"/>
-              <a:t>Sequence and activity models expose ordering</a:t>
+              <a:t>State models expose allowable behavior</a:t>
             </a:r>
           </a:p>
         </p:txBody>
@@ -12724,7 +12180,7 @@
           <p:cNvPr id="4" name="Slide Number Placeholder 3">
             <a:extLst>
               <a:ext uri="{FF2B5EF4-FFF2-40B4-BE49-F238E27FC236}">
-                <a16:creationId xmlns:a16="http://schemas.microsoft.com/office/drawing/2014/main" id="{7B08B967-8335-AADD-8367-B66EA3BE2AC4}"/>
+                <a16:creationId xmlns:a16="http://schemas.microsoft.com/office/drawing/2014/main" id="{CD21DD71-8A21-2B33-F824-922672B061F7}"/>
               </a:ext>
             </a:extLst>
           </p:cNvPr>
@@ -12742,7 +12198,7 @@
           <a:p>
             <a:fld id="{B7EB45DA-9A0D-DC49-8E02-F30A5DDC21C3}" type="slidenum">
               <a:rPr lang="en-US" smtClean="0"/>
-              <a:t>18</a:t>
+              <a:t>17</a:t>
             </a:fld>
             <a:endParaRPr lang="en-US"/>
           </a:p>
@@ -12750,7 +12206,7 @@
       </p:sp>
       <p:sp>
         <p:nvSpPr>
-          <p:cNvPr id="1201" name="Kicker"/>
+          <p:cNvPr id="1001" name="Kicker"/>
           <p:cNvSpPr txBox="1"/>
           <p:nvPr/>
         </p:nvSpPr>
@@ -12768,7 +12224,7 @@
           </a:ln>
         </p:spPr>
         <p:txBody>
-          <a:bodyPr lIns="0" tIns="45720" rIns="114300" bIns="45720" anchor="t">
+          <a:bodyPr lIns="0" tIns="68580" rIns="114300" bIns="68580" anchor="t">
             <a:noAutofit/>
           </a:bodyPr>
           <a:lstStyle/>
@@ -12782,21 +12238,21 @@
                   <a:srgbClr val="8E6F3E"/>
                 </a:solidFill>
               </a:rPr>
-              <a:t>Sleep advisor · one night, activity view</a:t>
-            </a:r>
-          </a:p>
-        </p:txBody>
-      </p:sp>
-      <p:sp>
-        <p:nvSpPr>
-          <p:cNvPr id="1202" name="Act"/>
+              <a:t>Sleep Advisor · finite-state view</a:t>
+            </a:r>
+          </a:p>
+        </p:txBody>
+      </p:sp>
+      <p:sp>
+        <p:nvSpPr>
+          <p:cNvPr id="1002" name="St"/>
           <p:cNvSpPr txBox="1"/>
           <p:nvPr/>
         </p:nvSpPr>
         <p:spPr>
           <a:xfrm>
-            <a:off x="279400" y="1320800"/>
-            <a:ext cx="2921000" cy="558800"/>
+            <a:off x="279400" y="1397000"/>
+            <a:ext cx="1524000" cy="558800"/>
           </a:xfrm>
           <a:prstGeom prst="rect">
             <a:avLst/>
@@ -12811,7 +12267,7 @@
           </a:ln>
         </p:spPr>
         <p:txBody>
-          <a:bodyPr lIns="114300" tIns="45720" rIns="114300" bIns="45720" anchor="ctr">
+          <a:bodyPr lIns="114300" tIns="68580" rIns="114300" bIns="68580" anchor="ctr">
             <a:noAutofit/>
           </a:bodyPr>
           <a:lstStyle/>
@@ -12820,48 +12276,26 @@
               <a:buNone/>
             </a:pPr>
             <a:r>
-              <a:rPr lang="en-US" sz="1500" dirty="0">
+              <a:rPr lang="en-US" sz="1500" b="1" dirty="0">
                 <a:solidFill>
                   <a:srgbClr val="3A3A3A"/>
                 </a:solidFill>
               </a:rPr>
-              <a:t>Record the night's observations</a:t>
-            </a:r>
-          </a:p>
-        </p:txBody>
-      </p:sp>
-      <p:cxnSp>
-        <p:nvCxnSpPr>
-          <p:cNvPr id="1203" name="Flow"/>
-          <p:cNvCxnSpPr/>
-          <p:nvPr/>
-        </p:nvCxnSpPr>
-        <p:spPr>
-          <a:xfrm>
-            <a:off x="1739900" y="1879600"/>
-            <a:ext cx="0" cy="203200"/>
-          </a:xfrm>
-          <a:prstGeom prst="line">
-            <a:avLst/>
-          </a:prstGeom>
-          <a:ln w="19050">
-            <a:solidFill>
-              <a:srgbClr val="8E6F3E"/>
-            </a:solidFill>
-            <a:tailEnd type="triangle"/>
-          </a:ln>
-        </p:spPr>
-      </p:cxnSp>
-      <p:sp>
-        <p:nvSpPr>
-          <p:cNvPr id="1204" name="Act"/>
+              <a:t>LEARNING</a:t>
+            </a:r>
+          </a:p>
+        </p:txBody>
+      </p:sp>
+      <p:sp>
+        <p:nvSpPr>
+          <p:cNvPr id="1003" name="St"/>
           <p:cNvSpPr txBox="1"/>
           <p:nvPr/>
         </p:nvSpPr>
         <p:spPr>
           <a:xfrm>
-            <a:off x="279400" y="2082800"/>
-            <a:ext cx="2921000" cy="558800"/>
+            <a:off x="2108200" y="1397000"/>
+            <a:ext cx="1524000" cy="558800"/>
           </a:xfrm>
           <a:prstGeom prst="rect">
             <a:avLst/>
@@ -12876,7 +12310,7 @@
           </a:ln>
         </p:spPr>
         <p:txBody>
-          <a:bodyPr lIns="114300" tIns="45720" rIns="114300" bIns="45720" anchor="ctr">
+          <a:bodyPr lIns="114300" tIns="68580" rIns="114300" bIns="68580" anchor="ctr">
             <a:noAutofit/>
           </a:bodyPr>
           <a:lstStyle/>
@@ -12885,48 +12319,26 @@
               <a:buNone/>
             </a:pPr>
             <a:r>
-              <a:rPr lang="en-US" sz="1500" dirty="0">
+              <a:rPr lang="en-US" sz="1400" b="1" dirty="0">
                 <a:solidFill>
                   <a:srgbClr val="3A3A3A"/>
                 </a:solidFill>
               </a:rPr>
-              <a:t>Classify the night</a:t>
-            </a:r>
-          </a:p>
-        </p:txBody>
-      </p:sp>
-      <p:cxnSp>
-        <p:nvCxnSpPr>
-          <p:cNvPr id="1205" name="Flow"/>
-          <p:cNvCxnSpPr/>
-          <p:nvPr/>
-        </p:nvCxnSpPr>
-        <p:spPr>
-          <a:xfrm>
-            <a:off x="1739900" y="2641600"/>
-            <a:ext cx="0" cy="203200"/>
-          </a:xfrm>
-          <a:prstGeom prst="line">
-            <a:avLst/>
-          </a:prstGeom>
-          <a:ln w="19050">
-            <a:solidFill>
-              <a:srgbClr val="8E6F3E"/>
-            </a:solidFill>
-            <a:tailEnd type="triangle"/>
-          </a:ln>
-        </p:spPr>
-      </p:cxnSp>
-      <p:sp>
-        <p:nvSpPr>
-          <p:cNvPr id="1206" name="Act"/>
+              <a:t>MONITORING</a:t>
+            </a:r>
+          </a:p>
+        </p:txBody>
+      </p:sp>
+      <p:sp>
+        <p:nvSpPr>
+          <p:cNvPr id="1004" name="St"/>
           <p:cNvSpPr txBox="1"/>
           <p:nvPr/>
         </p:nvSpPr>
         <p:spPr>
           <a:xfrm>
-            <a:off x="279400" y="2844800"/>
-            <a:ext cx="2921000" cy="558800"/>
+            <a:off x="3937000" y="1397000"/>
+            <a:ext cx="1524000" cy="558800"/>
           </a:xfrm>
           <a:prstGeom prst="rect">
             <a:avLst/>
@@ -12941,7 +12353,7 @@
           </a:ln>
         </p:spPr>
         <p:txBody>
-          <a:bodyPr lIns="114300" tIns="45720" rIns="114300" bIns="45720" anchor="ctr">
+          <a:bodyPr lIns="114300" tIns="68580" rIns="114300" bIns="68580" anchor="ctr">
             <a:noAutofit/>
           </a:bodyPr>
           <a:lstStyle/>
@@ -12950,48 +12362,26 @@
               <a:buNone/>
             </a:pPr>
             <a:r>
-              <a:rPr lang="en-US" sz="1500" dirty="0">
+              <a:rPr lang="en-US" sz="1500" b="1" dirty="0">
                 <a:solidFill>
                   <a:srgbClr val="3A3A3A"/>
                 </a:solidFill>
               </a:rPr>
-              <a:t>Compare with the baseline</a:t>
-            </a:r>
-          </a:p>
-        </p:txBody>
-      </p:sp>
-      <p:cxnSp>
-        <p:nvCxnSpPr>
-          <p:cNvPr id="1207" name="Flow"/>
-          <p:cNvCxnSpPr/>
-          <p:nvPr/>
-        </p:nvCxnSpPr>
-        <p:spPr>
-          <a:xfrm>
-            <a:off x="1739900" y="3403600"/>
-            <a:ext cx="0" cy="203200"/>
-          </a:xfrm>
-          <a:prstGeom prst="line">
-            <a:avLst/>
-          </a:prstGeom>
-          <a:ln w="19050">
-            <a:solidFill>
-              <a:srgbClr val="8E6F3E"/>
-            </a:solidFill>
-            <a:tailEnd type="triangle"/>
-          </a:ln>
-        </p:spPr>
-      </p:cxnSp>
-      <p:sp>
-        <p:nvSpPr>
-          <p:cNvPr id="1208" name="Act"/>
+              <a:t>SUSPECT</a:t>
+            </a:r>
+          </a:p>
+        </p:txBody>
+      </p:sp>
+      <p:sp>
+        <p:nvSpPr>
+          <p:cNvPr id="1005" name="St"/>
           <p:cNvSpPr txBox="1"/>
           <p:nvPr/>
         </p:nvSpPr>
         <p:spPr>
           <a:xfrm>
-            <a:off x="279400" y="3606800"/>
-            <a:ext cx="2921000" cy="558800"/>
+            <a:off x="3937000" y="2997200"/>
+            <a:ext cx="1524000" cy="558800"/>
           </a:xfrm>
           <a:prstGeom prst="rect">
             <a:avLst/>
@@ -13004,7 +12394,7 @@
           </a:ln>
         </p:spPr>
         <p:txBody>
-          <a:bodyPr lIns="114300" tIns="45720" rIns="114300" bIns="45720" anchor="ctr">
+          <a:bodyPr lIns="114300" tIns="68580" rIns="114300" bIns="68580" anchor="ctr">
             <a:noAutofit/>
           </a:bodyPr>
           <a:lstStyle/>
@@ -13013,247 +12403,26 @@
               <a:buNone/>
             </a:pPr>
             <a:r>
-              <a:rPr lang="en-US" sz="1500" b="1" dirty="0">
+              <a:rPr lang="en-US" sz="1300" b="1" dirty="0">
                 <a:solidFill>
                   <a:srgbClr val="FFFFFF"/>
                 </a:solidFill>
               </a:rPr>
-              <a:t>Issue advisory at wake</a:t>
-            </a:r>
-          </a:p>
-        </p:txBody>
-      </p:sp>
-      <p:cxnSp>
-        <p:nvCxnSpPr>
-          <p:cNvPr id="1209" name="Flow"/>
-          <p:cNvCxnSpPr/>
-          <p:nvPr/>
-        </p:nvCxnSpPr>
-        <p:spPr>
-          <a:xfrm>
-            <a:off x="1739900" y="3403600"/>
-            <a:ext cx="0" cy="203200"/>
-          </a:xfrm>
-          <a:prstGeom prst="line">
-            <a:avLst/>
-          </a:prstGeom>
-          <a:ln w="19050">
-            <a:solidFill>
-              <a:srgbClr val="8E6F3E"/>
-            </a:solidFill>
-            <a:tailEnd type="triangle"/>
-          </a:ln>
-        </p:spPr>
-      </p:cxnSp>
-      <p:cxnSp>
-        <p:nvCxnSpPr>
-          <p:cNvPr id="1210" name="Flow"/>
-          <p:cNvCxnSpPr/>
-          <p:nvPr/>
-        </p:nvCxnSpPr>
-        <p:spPr>
-          <a:xfrm>
-            <a:off x="3200400" y="1600200"/>
-            <a:ext cx="558800" cy="0"/>
-          </a:xfrm>
-          <a:prstGeom prst="line">
-            <a:avLst/>
-          </a:prstGeom>
-          <a:ln w="19050">
-            <a:solidFill>
-              <a:srgbClr val="9B9B9B"/>
-            </a:solidFill>
-            <a:prstDash val="dash"/>
-          </a:ln>
-        </p:spPr>
-      </p:cxnSp>
-      <p:cxnSp>
-        <p:nvCxnSpPr>
-          <p:cNvPr id="1211" name="Flow"/>
-          <p:cNvCxnSpPr/>
-          <p:nvPr/>
-        </p:nvCxnSpPr>
-        <p:spPr>
-          <a:xfrm>
-            <a:off x="3759200" y="1600200"/>
-            <a:ext cx="0" cy="2286000"/>
-          </a:xfrm>
-          <a:prstGeom prst="line">
-            <a:avLst/>
-          </a:prstGeom>
-          <a:ln w="19050">
-            <a:solidFill>
-              <a:srgbClr val="9B9B9B"/>
-            </a:solidFill>
-            <a:prstDash val="dash"/>
-          </a:ln>
-        </p:spPr>
-      </p:cxnSp>
-      <p:cxnSp>
-        <p:nvCxnSpPr>
-          <p:cNvPr id="1212" name="Flow"/>
-          <p:cNvCxnSpPr/>
-          <p:nvPr/>
-        </p:nvCxnSpPr>
-        <p:spPr>
-          <a:xfrm flipH="1">
-            <a:off x="3200400" y="3886200"/>
-            <a:ext cx="558800" cy="0"/>
-          </a:xfrm>
-          <a:prstGeom prst="line">
-            <a:avLst/>
-          </a:prstGeom>
-          <a:ln w="19050">
-            <a:solidFill>
-              <a:srgbClr val="9B9B9B"/>
-            </a:solidFill>
-            <a:prstDash val="dash"/>
-          </a:ln>
-        </p:spPr>
-      </p:cxnSp>
-      <p:sp>
-        <p:nvSpPr>
-          <p:cNvPr id="1213" name="X"/>
+              <a:t>REBASELINING</a:t>
+            </a:r>
+          </a:p>
+        </p:txBody>
+      </p:sp>
+      <p:sp>
+        <p:nvSpPr>
+          <p:cNvPr id="1018" name="Panel"/>
           <p:cNvSpPr txBox="1"/>
           <p:nvPr/>
         </p:nvSpPr>
         <p:spPr>
           <a:xfrm>
-            <a:off x="3581400" y="3632200"/>
-            <a:ext cx="355600" cy="355600"/>
-          </a:xfrm>
-          <a:prstGeom prst="rect">
-            <a:avLst/>
-          </a:prstGeom>
-          <a:noFill/>
-          <a:ln>
-            <a:noFill/>
-          </a:ln>
-        </p:spPr>
-        <p:txBody>
-          <a:bodyPr lIns="114300" tIns="45720" rIns="114300" bIns="45720" anchor="ctr">
-            <a:noAutofit/>
-          </a:bodyPr>
-          <a:lstStyle/>
-          <a:p>
-            <a:pPr algn="ctr">
-              <a:buNone/>
-            </a:pPr>
-            <a:r>
-              <a:rPr lang="en-US" sz="1800" b="1" dirty="0">
-                <a:solidFill>
-                  <a:srgbClr val="9B9B9B"/>
-                </a:solidFill>
-              </a:rPr>
-              <a:t>✕</a:t>
-            </a:r>
-          </a:p>
-        </p:txBody>
-      </p:sp>
-      <p:sp>
-        <p:nvSpPr>
-          <p:cNvPr id="1214" name="XLb"/>
-          <p:cNvSpPr txBox="1"/>
-          <p:nvPr/>
-        </p:nvSpPr>
-        <p:spPr>
-          <a:xfrm>
-            <a:off x="279400" y="4267200"/>
-            <a:ext cx="5207000" cy="330200"/>
-          </a:xfrm>
-          <a:prstGeom prst="rect">
-            <a:avLst/>
-          </a:prstGeom>
-          <a:noFill/>
-          <a:ln>
-            <a:noFill/>
-          </a:ln>
-        </p:spPr>
-        <p:txBody>
-          <a:bodyPr lIns="0" tIns="45720" rIns="114300" bIns="45720" anchor="t">
-            <a:noAutofit/>
-          </a:bodyPr>
-          <a:lstStyle/>
-          <a:p>
-            <a:pPr>
-              <a:buNone/>
-            </a:pPr>
-            <a:r>
-              <a:rPr lang="en-US" sz="1500" dirty="0">
-                <a:solidFill>
-                  <a:srgbClr val="555960"/>
-                </a:solidFill>
-              </a:rPr>
-              <a:t>The dashed path must never occur.</a:t>
-            </a:r>
-          </a:p>
-        </p:txBody>
-      </p:sp>
-      <p:sp>
-        <p:nvSpPr>
-          <p:cNvPr id="1215" name="Dist"/>
-          <p:cNvSpPr txBox="1"/>
-          <p:nvPr/>
-        </p:nvSpPr>
-        <p:spPr>
-          <a:xfrm>
-            <a:off x="279400" y="4673600"/>
-            <a:ext cx="5207000" cy="838200"/>
-          </a:xfrm>
-          <a:prstGeom prst="rect">
-            <a:avLst/>
-          </a:prstGeom>
-          <a:noFill/>
-          <a:ln>
-            <a:noFill/>
-          </a:ln>
-        </p:spPr>
-        <p:txBody>
-          <a:bodyPr lIns="0" tIns="45720" rIns="114300" bIns="45720" anchor="t">
-            <a:noAutofit/>
-          </a:bodyPr>
-          <a:lstStyle/>
-          <a:p>
-            <a:pPr>
-              <a:buNone/>
-            </a:pPr>
-            <a:r>
-              <a:rPr lang="en-US" sz="1500" dirty="0">
-                <a:solidFill>
-                  <a:srgbClr val="3A3A3A"/>
-                </a:solidFill>
-              </a:rPr>
-              <a:t>State model: which situations may exist.</a:t>
-            </a:r>
-          </a:p>
-          <a:p>
-            <a:pPr>
-              <a:spcBef>
-                <a:spcPts val="200"/>
-              </a:spcBef>
-              <a:buNone/>
-            </a:pPr>
-            <a:r>
-              <a:rPr lang="en-US" sz="1500" dirty="0">
-                <a:solidFill>
-                  <a:srgbClr val="3A3A3A"/>
-                </a:solidFill>
-              </a:rPr>
-              <a:t>Activity view: which orderings are permitted.</a:t>
-            </a:r>
-          </a:p>
-        </p:txBody>
-      </p:sp>
-      <p:sp>
-        <p:nvSpPr>
-          <p:cNvPr id="1216" name="Panel"/>
-          <p:cNvSpPr txBox="1"/>
-          <p:nvPr/>
-        </p:nvSpPr>
-        <p:spPr>
-          <a:xfrm>
             <a:off x="5740400" y="1270000"/>
-            <a:ext cx="3098800" cy="4064000"/>
+            <a:ext cx="3098800" cy="3810000"/>
           </a:xfrm>
           <a:prstGeom prst="rect">
             <a:avLst/>
@@ -13268,7 +12437,7 @@
           </a:ln>
         </p:spPr>
         <p:txBody>
-          <a:bodyPr lIns="114300" tIns="45720" rIns="114300" bIns="45720" anchor="t">
+          <a:bodyPr lIns="114300" tIns="68580" rIns="114300" bIns="68580" anchor="t">
             <a:noAutofit/>
           </a:bodyPr>
           <a:lstStyle/>
@@ -13298,7 +12467,7 @@
                   <a:srgbClr val="1A1A1A"/>
                 </a:solidFill>
               </a:rPr>
-              <a:t>What must happen before what?</a:t>
+              <a:t>What may happen next?</a:t>
             </a:r>
           </a:p>
           <a:p>
@@ -13330,7 +12499,7 @@
                   <a:srgbClr val="3A3A3A"/>
                 </a:solidFill>
               </a:rPr>
-              <a:t>· required ordering</a:t>
+              <a:t>· allowable states</a:t>
             </a:r>
           </a:p>
           <a:p>
@@ -13346,7 +12515,7 @@
                   <a:srgbClr val="3A3A3A"/>
                 </a:solidFill>
               </a:rPr>
-              <a:t>· allowed branches</a:t>
+              <a:t>· permitted transitions</a:t>
             </a:r>
           </a:p>
           <a:p>
@@ -13362,7 +12531,7 @@
                   <a:srgbClr val="3A3A3A"/>
                 </a:solidFill>
               </a:rPr>
-              <a:t>· required responses to events</a:t>
+              <a:t>· forbidden transitions</a:t>
             </a:r>
           </a:p>
           <a:p>
@@ -13378,7 +12547,7 @@
                   <a:srgbClr val="3A3A3A"/>
                 </a:solidFill>
               </a:rPr>
-              <a:t>· paths that must never occur</a:t>
+              <a:t>· conditions under which they occur</a:t>
             </a:r>
           </a:p>
           <a:p>
@@ -13410,14 +12579,400 @@
                   <a:srgbClr val="1A1A1A"/>
                 </a:solidFill>
               </a:rPr>
-              <a:t>Do not issue an advisory until the night's observations have been classified.</a:t>
+              <a:t>An advisory may be issued only in MONITORING or SUSPECT.</a:t>
+            </a:r>
+          </a:p>
+        </p:txBody>
+      </p:sp>
+      <p:sp>
+        <p:nvSpPr>
+          <p:cNvPr id="1020" name="Src"/>
+          <p:cNvSpPr txBox="1"/>
+          <p:nvPr/>
+        </p:nvSpPr>
+        <p:spPr>
+          <a:xfrm>
+            <a:off x="279400" y="6070600"/>
+            <a:ext cx="5969000" cy="254000"/>
+          </a:xfrm>
+          <a:prstGeom prst="rect">
+            <a:avLst/>
+          </a:prstGeom>
+          <a:noFill/>
+          <a:ln>
+            <a:noFill/>
+          </a:ln>
+        </p:spPr>
+        <p:txBody>
+          <a:bodyPr lIns="0" tIns="68580" rIns="114300" bIns="68580" anchor="t">
+            <a:noAutofit/>
+          </a:bodyPr>
+          <a:lstStyle/>
+          <a:p>
+            <a:pPr>
+              <a:buNone/>
+            </a:pPr>
+            <a:r>
+              <a:rPr lang="en-US" sz="1100" dirty="0">
+                <a:solidFill>
+                  <a:srgbClr val="555960"/>
+                </a:solidFill>
+              </a:rPr>
+              <a:t>Representation form: MAGE Part II, Figure 2.1-3, finite-state model</a:t>
+            </a:r>
+          </a:p>
+        </p:txBody>
+      </p:sp>
+      <p:cxnSp>
+        <p:nvCxnSpPr>
+          <p:cNvPr id="1101" name="Flow"/>
+          <p:cNvCxnSpPr/>
+          <p:nvPr/>
+        </p:nvCxnSpPr>
+        <p:spPr>
+          <a:xfrm>
+            <a:off x="1803400" y="1676400"/>
+            <a:ext cx="304800" cy="0"/>
+          </a:xfrm>
+          <a:prstGeom prst="line">
+            <a:avLst/>
+          </a:prstGeom>
+          <a:ln w="19050">
+            <a:solidFill>
+              <a:srgbClr val="8E6F3E"/>
+            </a:solidFill>
+            <a:tailEnd type="triangle"/>
+          </a:ln>
+        </p:spPr>
+      </p:cxnSp>
+      <p:cxnSp>
+        <p:nvCxnSpPr>
+          <p:cNvPr id="1102" name="Flow"/>
+          <p:cNvCxnSpPr/>
+          <p:nvPr/>
+        </p:nvCxnSpPr>
+        <p:spPr>
+          <a:xfrm>
+            <a:off x="3632200" y="1524000"/>
+            <a:ext cx="304800" cy="0"/>
+          </a:xfrm>
+          <a:prstGeom prst="line">
+            <a:avLst/>
+          </a:prstGeom>
+          <a:ln w="19050">
+            <a:solidFill>
+              <a:srgbClr val="8E6F3E"/>
+            </a:solidFill>
+            <a:tailEnd type="triangle"/>
+          </a:ln>
+        </p:spPr>
+      </p:cxnSp>
+      <p:cxnSp>
+        <p:nvCxnSpPr>
+          <p:cNvPr id="1120" name="Flow"/>
+          <p:cNvCxnSpPr/>
+          <p:nvPr/>
+        </p:nvCxnSpPr>
+        <p:spPr>
+          <a:xfrm flipH="1">
+            <a:off x="3632200" y="1828800"/>
+            <a:ext cx="304800" cy="0"/>
+          </a:xfrm>
+          <a:prstGeom prst="line">
+            <a:avLst/>
+          </a:prstGeom>
+          <a:ln w="19050">
+            <a:solidFill>
+              <a:srgbClr val="8E6F3E"/>
+            </a:solidFill>
+            <a:tailEnd type="triangle"/>
+          </a:ln>
+        </p:spPr>
+      </p:cxnSp>
+      <p:sp>
+        <p:nvSpPr>
+          <p:cNvPr id="1103" name="Lb"/>
+          <p:cNvSpPr txBox="1"/>
+          <p:nvPr/>
+        </p:nvSpPr>
+        <p:spPr>
+          <a:xfrm>
+            <a:off x="1155700" y="1092200"/>
+            <a:ext cx="1600200" cy="254000"/>
+          </a:xfrm>
+          <a:prstGeom prst="rect">
+            <a:avLst/>
+          </a:prstGeom>
+          <a:noFill/>
+          <a:ln>
+            <a:noFill/>
+          </a:ln>
+        </p:spPr>
+        <p:txBody>
+          <a:bodyPr lIns="0" tIns="0" rIns="0" bIns="0" anchor="ctr">
+            <a:noAutofit/>
+          </a:bodyPr>
+          <a:lstStyle/>
+          <a:p>
+            <a:pPr algn="ctr">
+              <a:buNone/>
+            </a:pPr>
+            <a:r>
+              <a:rPr lang="en-US" sz="1000" dirty="0">
+                <a:solidFill>
+                  <a:srgbClr val="555960"/>
+                </a:solidFill>
+              </a:rPr>
+              <a:t>baseline established</a:t>
+            </a:r>
+          </a:p>
+        </p:txBody>
+      </p:sp>
+      <p:sp>
+        <p:nvSpPr>
+          <p:cNvPr id="1121" name="Lb"/>
+          <p:cNvSpPr txBox="1"/>
+          <p:nvPr/>
+        </p:nvSpPr>
+        <p:spPr>
+          <a:xfrm>
+            <a:off x="2882900" y="2019300"/>
+            <a:ext cx="1803400" cy="254000"/>
+          </a:xfrm>
+          <a:prstGeom prst="rect">
+            <a:avLst/>
+          </a:prstGeom>
+          <a:noFill/>
+          <a:ln>
+            <a:noFill/>
+          </a:ln>
+        </p:spPr>
+        <p:txBody>
+          <a:bodyPr lIns="0" tIns="0" rIns="0" bIns="0" anchor="ctr">
+            <a:noAutofit/>
+          </a:bodyPr>
+          <a:lstStyle/>
+          <a:p>
+            <a:pPr algn="ctr">
+              <a:buNone/>
+            </a:pPr>
+            <a:r>
+              <a:rPr lang="en-US" sz="1000" dirty="0">
+                <a:solidFill>
+                  <a:srgbClr val="555960"/>
+                </a:solidFill>
+              </a:rPr>
+              <a:t>pattern returns to normal</a:t>
+            </a:r>
+          </a:p>
+        </p:txBody>
+      </p:sp>
+      <p:sp>
+        <p:nvSpPr>
+          <p:cNvPr id="1104" name="Lb"/>
+          <p:cNvSpPr txBox="1"/>
+          <p:nvPr/>
+        </p:nvSpPr>
+        <p:spPr>
+          <a:xfrm>
+            <a:off x="2641600" y="1092200"/>
+            <a:ext cx="2286000" cy="254000"/>
+          </a:xfrm>
+          <a:prstGeom prst="rect">
+            <a:avLst/>
+          </a:prstGeom>
+          <a:noFill/>
+          <a:ln>
+            <a:noFill/>
+          </a:ln>
+        </p:spPr>
+        <p:txBody>
+          <a:bodyPr lIns="0" tIns="0" rIns="0" bIns="0" anchor="ctr">
+            <a:noAutofit/>
+          </a:bodyPr>
+          <a:lstStyle/>
+          <a:p>
+            <a:pPr algn="ctr">
+              <a:buNone/>
+            </a:pPr>
+            <a:r>
+              <a:rPr lang="en-US" sz="1000" dirty="0">
+                <a:solidFill>
+                  <a:srgbClr val="555960"/>
+                </a:solidFill>
+              </a:rPr>
+              <a:t>meaningful departure detected</a:t>
+            </a:r>
+          </a:p>
+        </p:txBody>
+      </p:sp>
+      <p:cxnSp>
+        <p:nvCxnSpPr>
+          <p:cNvPr id="1105" name="Flow"/>
+          <p:cNvCxnSpPr/>
+          <p:nvPr/>
+        </p:nvCxnSpPr>
+        <p:spPr>
+          <a:xfrm>
+            <a:off x="4699000" y="1955800"/>
+            <a:ext cx="0" cy="1041400"/>
+          </a:xfrm>
+          <a:prstGeom prst="line">
+            <a:avLst/>
+          </a:prstGeom>
+          <a:ln w="19050">
+            <a:solidFill>
+              <a:srgbClr val="8E6F3E"/>
+            </a:solidFill>
+            <a:tailEnd type="triangle"/>
+          </a:ln>
+        </p:spPr>
+      </p:cxnSp>
+      <p:sp>
+        <p:nvSpPr>
+          <p:cNvPr id="1106" name="Lb"/>
+          <p:cNvSpPr txBox="1"/>
+          <p:nvPr/>
+        </p:nvSpPr>
+        <p:spPr>
+          <a:xfrm>
+            <a:off x="2921000" y="2620000"/>
+            <a:ext cx="1651000" cy="254000"/>
+          </a:xfrm>
+          <a:prstGeom prst="rect">
+            <a:avLst/>
+          </a:prstGeom>
+          <a:noFill/>
+          <a:ln>
+            <a:noFill/>
+          </a:ln>
+        </p:spPr>
+        <p:txBody>
+          <a:bodyPr lIns="0" tIns="0" rIns="0" bIns="0" anchor="ctr">
+            <a:noAutofit/>
+          </a:bodyPr>
+          <a:lstStyle/>
+          <a:p>
+            <a:pPr algn="r">
+              <a:buNone/>
+            </a:pPr>
+            <a:r>
+              <a:rPr lang="en-US" sz="1000" dirty="0">
+                <a:solidFill>
+                  <a:srgbClr val="555960"/>
+                </a:solidFill>
+              </a:rPr>
+              <a:t>change appears persistent</a:t>
+            </a:r>
+          </a:p>
+        </p:txBody>
+      </p:sp>
+      <p:cxnSp>
+        <p:nvCxnSpPr>
+          <p:cNvPr id="1107" name="Flow"/>
+          <p:cNvCxnSpPr/>
+          <p:nvPr/>
+        </p:nvCxnSpPr>
+        <p:spPr>
+          <a:xfrm>
+            <a:off x="4699000" y="3556000"/>
+            <a:ext cx="0" cy="279400"/>
+          </a:xfrm>
+          <a:prstGeom prst="line">
+            <a:avLst/>
+          </a:prstGeom>
+          <a:ln w="19050">
+            <a:solidFill>
+              <a:srgbClr val="8E6F3E"/>
+            </a:solidFill>
+          </a:ln>
+        </p:spPr>
+      </p:cxnSp>
+      <p:cxnSp>
+        <p:nvCxnSpPr>
+          <p:cNvPr id="1108" name="Flow"/>
+          <p:cNvCxnSpPr/>
+          <p:nvPr/>
+        </p:nvCxnSpPr>
+        <p:spPr>
+          <a:xfrm flipH="1">
+            <a:off x="2870200" y="3835400"/>
+            <a:ext cx="1828800" cy="0"/>
+          </a:xfrm>
+          <a:prstGeom prst="line">
+            <a:avLst/>
+          </a:prstGeom>
+          <a:ln w="19050">
+            <a:solidFill>
+              <a:srgbClr val="8E6F3E"/>
+            </a:solidFill>
+          </a:ln>
+        </p:spPr>
+      </p:cxnSp>
+      <p:cxnSp>
+        <p:nvCxnSpPr>
+          <p:cNvPr id="1109" name="Flow"/>
+          <p:cNvCxnSpPr/>
+          <p:nvPr/>
+        </p:nvCxnSpPr>
+        <p:spPr>
+          <a:xfrm flipV="1">
+            <a:off x="2870200" y="1955800"/>
+            <a:ext cx="0" cy="1879600"/>
+          </a:xfrm>
+          <a:prstGeom prst="line">
+            <a:avLst/>
+          </a:prstGeom>
+          <a:ln w="19050">
+            <a:solidFill>
+              <a:srgbClr val="8E6F3E"/>
+            </a:solidFill>
+            <a:tailEnd type="triangle"/>
+          </a:ln>
+        </p:spPr>
+      </p:cxnSp>
+      <p:sp>
+        <p:nvSpPr>
+          <p:cNvPr id="1110" name="Lb"/>
+          <p:cNvSpPr txBox="1"/>
+          <p:nvPr/>
+        </p:nvSpPr>
+        <p:spPr>
+          <a:xfrm>
+            <a:off x="2997200" y="3886200"/>
+            <a:ext cx="2032000" cy="254000"/>
+          </a:xfrm>
+          <a:prstGeom prst="rect">
+            <a:avLst/>
+          </a:prstGeom>
+          <a:noFill/>
+          <a:ln>
+            <a:noFill/>
+          </a:ln>
+        </p:spPr>
+        <p:txBody>
+          <a:bodyPr lIns="0" tIns="0" rIns="0" bIns="0" anchor="ctr">
+            <a:noAutofit/>
+          </a:bodyPr>
+          <a:lstStyle/>
+          <a:p>
+            <a:pPr algn="l">
+              <a:buNone/>
+            </a:pPr>
+            <a:r>
+              <a:rPr lang="en-US" sz="1000" dirty="0">
+                <a:solidFill>
+                  <a:srgbClr val="555960"/>
+                </a:solidFill>
+              </a:rPr>
+              <a:t>new baseline established</a:t>
             </a:r>
           </a:p>
         </p:txBody>
       </p:sp>
       <p:pic>
         <p:nvPicPr>
-          <p:cNvPr id="1218" name="Graphic 1218" descr="Sleep Advisor running example"/>
+          <p:cNvPr id="1111" name="Graphic 1111" descr="Sleep Advisor running example"/>
           <p:cNvPicPr>
             <a:picLocks noChangeAspect="1"/>
           </p:cNvPicPr>
@@ -13448,7 +13003,7 @@
     </p:spTree>
     <p:extLst>
       <p:ext uri="{BB962C8B-B14F-4D97-AF65-F5344CB8AC3E}">
-        <p14:creationId xmlns:p14="http://schemas.microsoft.com/office/powerpoint/2010/main" val="3891913808"/>
+        <p14:creationId xmlns:p14="http://schemas.microsoft.com/office/powerpoint/2010/main" val="2557942607"/>
       </p:ext>
     </p:extLst>
   </p:cSld>
@@ -13480,7 +13035,7 @@
           <p:cNvPr id="3" name="Title 2">
             <a:extLst>
               <a:ext uri="{FF2B5EF4-FFF2-40B4-BE49-F238E27FC236}">
-                <a16:creationId xmlns:a16="http://schemas.microsoft.com/office/drawing/2014/main" id="{389681D3-D446-27C2-276C-CF4321A81393}"/>
+                <a16:creationId xmlns:a16="http://schemas.microsoft.com/office/drawing/2014/main" id="{2DF60F6E-C9B1-1E9C-96AF-C50583935092}"/>
               </a:ext>
             </a:extLst>
           </p:cNvPr>
@@ -13503,7 +13058,7 @@
             </a:pPr>
             <a:r>
               <a:rPr lang="en-US" b="1" dirty="0"/>
-              <a:t>Schemas expose permitted structure</a:t>
+              <a:t>Sequence and activity models expose ordering</a:t>
             </a:r>
           </a:p>
         </p:txBody>
@@ -13513,7 +13068,7 @@
           <p:cNvPr id="4" name="Slide Number Placeholder 3">
             <a:extLst>
               <a:ext uri="{FF2B5EF4-FFF2-40B4-BE49-F238E27FC236}">
-                <a16:creationId xmlns:a16="http://schemas.microsoft.com/office/drawing/2014/main" id="{7C3B98D8-8C39-55B7-1C16-1A710D845914}"/>
+                <a16:creationId xmlns:a16="http://schemas.microsoft.com/office/drawing/2014/main" id="{7B08B967-8335-AADD-8367-B66EA3BE2AC4}"/>
               </a:ext>
             </a:extLst>
           </p:cNvPr>
@@ -13531,7 +13086,7 @@
           <a:p>
             <a:fld id="{B7EB45DA-9A0D-DC49-8E02-F30A5DDC21C3}" type="slidenum">
               <a:rPr lang="en-US" smtClean="0"/>
-              <a:t>19</a:t>
+              <a:t>18</a:t>
             </a:fld>
             <a:endParaRPr lang="en-US"/>
           </a:p>
@@ -13539,7 +13094,7 @@
       </p:sp>
       <p:sp>
         <p:nvSpPr>
-          <p:cNvPr id="1401" name="Kicker"/>
+          <p:cNvPr id="1201" name="Kicker"/>
           <p:cNvSpPr txBox="1"/>
           <p:nvPr/>
         </p:nvSpPr>
@@ -13571,21 +13126,478 @@
                   <a:srgbClr val="8E6F3E"/>
                 </a:solidFill>
               </a:rPr>
-              <a:t>Sleep advisor · what crosses the machine boundary</a:t>
-            </a:r>
-          </a:p>
-        </p:txBody>
-      </p:sp>
-      <p:sp>
-        <p:nvSpPr>
-          <p:cNvPr id="1402" name="Schema"/>
+              <a:t>Sleep Advisor · one night, activity view</a:t>
+            </a:r>
+          </a:p>
+        </p:txBody>
+      </p:sp>
+      <p:sp>
+        <p:nvSpPr>
+          <p:cNvPr id="1202" name="Act"/>
           <p:cNvSpPr txBox="1"/>
           <p:nvPr/>
         </p:nvSpPr>
         <p:spPr>
           <a:xfrm>
-            <a:off x="279400" y="1270000"/>
-            <a:ext cx="3175000" cy="2413000"/>
+            <a:off x="279400" y="1320800"/>
+            <a:ext cx="2921000" cy="558800"/>
+          </a:xfrm>
+          <a:prstGeom prst="rect">
+            <a:avLst/>
+          </a:prstGeom>
+          <a:solidFill>
+            <a:srgbClr val="F4EFE7"/>
+          </a:solidFill>
+          <a:ln w="9525">
+            <a:solidFill>
+              <a:srgbClr val="8E6F3E"/>
+            </a:solidFill>
+          </a:ln>
+        </p:spPr>
+        <p:txBody>
+          <a:bodyPr lIns="114300" tIns="45720" rIns="114300" bIns="45720" anchor="ctr">
+            <a:noAutofit/>
+          </a:bodyPr>
+          <a:lstStyle/>
+          <a:p>
+            <a:pPr algn="ctr">
+              <a:buNone/>
+            </a:pPr>
+            <a:r>
+              <a:rPr lang="en-US" sz="1500" dirty="0">
+                <a:solidFill>
+                  <a:srgbClr val="3A3A3A"/>
+                </a:solidFill>
+              </a:rPr>
+              <a:t>Record the night's observations</a:t>
+            </a:r>
+          </a:p>
+        </p:txBody>
+      </p:sp>
+      <p:cxnSp>
+        <p:nvCxnSpPr>
+          <p:cNvPr id="1203" name="Flow"/>
+          <p:cNvCxnSpPr/>
+          <p:nvPr/>
+        </p:nvCxnSpPr>
+        <p:spPr>
+          <a:xfrm>
+            <a:off x="1739900" y="1879600"/>
+            <a:ext cx="0" cy="203200"/>
+          </a:xfrm>
+          <a:prstGeom prst="line">
+            <a:avLst/>
+          </a:prstGeom>
+          <a:ln w="19050">
+            <a:solidFill>
+              <a:srgbClr val="8E6F3E"/>
+            </a:solidFill>
+            <a:tailEnd type="triangle"/>
+          </a:ln>
+        </p:spPr>
+      </p:cxnSp>
+      <p:sp>
+        <p:nvSpPr>
+          <p:cNvPr id="1204" name="Act"/>
+          <p:cNvSpPr txBox="1"/>
+          <p:nvPr/>
+        </p:nvSpPr>
+        <p:spPr>
+          <a:xfrm>
+            <a:off x="279400" y="2082800"/>
+            <a:ext cx="2921000" cy="558800"/>
+          </a:xfrm>
+          <a:prstGeom prst="rect">
+            <a:avLst/>
+          </a:prstGeom>
+          <a:solidFill>
+            <a:srgbClr val="F4EFE7"/>
+          </a:solidFill>
+          <a:ln w="9525">
+            <a:solidFill>
+              <a:srgbClr val="8E6F3E"/>
+            </a:solidFill>
+          </a:ln>
+        </p:spPr>
+        <p:txBody>
+          <a:bodyPr lIns="114300" tIns="45720" rIns="114300" bIns="45720" anchor="ctr">
+            <a:noAutofit/>
+          </a:bodyPr>
+          <a:lstStyle/>
+          <a:p>
+            <a:pPr algn="ctr">
+              <a:buNone/>
+            </a:pPr>
+            <a:r>
+              <a:rPr lang="en-US" sz="1500" dirty="0">
+                <a:solidFill>
+                  <a:srgbClr val="3A3A3A"/>
+                </a:solidFill>
+              </a:rPr>
+              <a:t>Classify the night</a:t>
+            </a:r>
+          </a:p>
+        </p:txBody>
+      </p:sp>
+      <p:cxnSp>
+        <p:nvCxnSpPr>
+          <p:cNvPr id="1205" name="Flow"/>
+          <p:cNvCxnSpPr/>
+          <p:nvPr/>
+        </p:nvCxnSpPr>
+        <p:spPr>
+          <a:xfrm>
+            <a:off x="1739900" y="2641600"/>
+            <a:ext cx="0" cy="203200"/>
+          </a:xfrm>
+          <a:prstGeom prst="line">
+            <a:avLst/>
+          </a:prstGeom>
+          <a:ln w="19050">
+            <a:solidFill>
+              <a:srgbClr val="8E6F3E"/>
+            </a:solidFill>
+            <a:tailEnd type="triangle"/>
+          </a:ln>
+        </p:spPr>
+      </p:cxnSp>
+      <p:sp>
+        <p:nvSpPr>
+          <p:cNvPr id="1206" name="Act"/>
+          <p:cNvSpPr txBox="1"/>
+          <p:nvPr/>
+        </p:nvSpPr>
+        <p:spPr>
+          <a:xfrm>
+            <a:off x="279400" y="2844800"/>
+            <a:ext cx="2921000" cy="558800"/>
+          </a:xfrm>
+          <a:prstGeom prst="rect">
+            <a:avLst/>
+          </a:prstGeom>
+          <a:solidFill>
+            <a:srgbClr val="F4EFE7"/>
+          </a:solidFill>
+          <a:ln w="9525">
+            <a:solidFill>
+              <a:srgbClr val="8E6F3E"/>
+            </a:solidFill>
+          </a:ln>
+        </p:spPr>
+        <p:txBody>
+          <a:bodyPr lIns="114300" tIns="45720" rIns="114300" bIns="45720" anchor="ctr">
+            <a:noAutofit/>
+          </a:bodyPr>
+          <a:lstStyle/>
+          <a:p>
+            <a:pPr algn="ctr">
+              <a:buNone/>
+            </a:pPr>
+            <a:r>
+              <a:rPr lang="en-US" sz="1500" dirty="0">
+                <a:solidFill>
+                  <a:srgbClr val="3A3A3A"/>
+                </a:solidFill>
+              </a:rPr>
+              <a:t>Compare with the baseline</a:t>
+            </a:r>
+          </a:p>
+        </p:txBody>
+      </p:sp>
+      <p:cxnSp>
+        <p:nvCxnSpPr>
+          <p:cNvPr id="1207" name="Flow"/>
+          <p:cNvCxnSpPr/>
+          <p:nvPr/>
+        </p:nvCxnSpPr>
+        <p:spPr>
+          <a:xfrm>
+            <a:off x="1739900" y="3403600"/>
+            <a:ext cx="0" cy="203200"/>
+          </a:xfrm>
+          <a:prstGeom prst="line">
+            <a:avLst/>
+          </a:prstGeom>
+          <a:ln w="19050">
+            <a:solidFill>
+              <a:srgbClr val="8E6F3E"/>
+            </a:solidFill>
+            <a:tailEnd type="triangle"/>
+          </a:ln>
+        </p:spPr>
+      </p:cxnSp>
+      <p:sp>
+        <p:nvSpPr>
+          <p:cNvPr id="1208" name="Act"/>
+          <p:cNvSpPr txBox="1"/>
+          <p:nvPr/>
+        </p:nvSpPr>
+        <p:spPr>
+          <a:xfrm>
+            <a:off x="279400" y="3606800"/>
+            <a:ext cx="2921000" cy="558800"/>
+          </a:xfrm>
+          <a:prstGeom prst="rect">
+            <a:avLst/>
+          </a:prstGeom>
+          <a:solidFill>
+            <a:srgbClr val="8E6F3E"/>
+          </a:solidFill>
+          <a:ln>
+            <a:noFill/>
+          </a:ln>
+        </p:spPr>
+        <p:txBody>
+          <a:bodyPr lIns="114300" tIns="45720" rIns="114300" bIns="45720" anchor="ctr">
+            <a:noAutofit/>
+          </a:bodyPr>
+          <a:lstStyle/>
+          <a:p>
+            <a:pPr algn="ctr">
+              <a:buNone/>
+            </a:pPr>
+            <a:r>
+              <a:rPr lang="en-US" sz="1500" b="1" dirty="0">
+                <a:solidFill>
+                  <a:srgbClr val="FFFFFF"/>
+                </a:solidFill>
+              </a:rPr>
+              <a:t>Issue advisory at wake</a:t>
+            </a:r>
+          </a:p>
+        </p:txBody>
+      </p:sp>
+      <p:cxnSp>
+        <p:nvCxnSpPr>
+          <p:cNvPr id="1209" name="Flow"/>
+          <p:cNvCxnSpPr/>
+          <p:nvPr/>
+        </p:nvCxnSpPr>
+        <p:spPr>
+          <a:xfrm>
+            <a:off x="1739900" y="3403600"/>
+            <a:ext cx="0" cy="203200"/>
+          </a:xfrm>
+          <a:prstGeom prst="line">
+            <a:avLst/>
+          </a:prstGeom>
+          <a:ln w="19050">
+            <a:solidFill>
+              <a:srgbClr val="8E6F3E"/>
+            </a:solidFill>
+            <a:tailEnd type="triangle"/>
+          </a:ln>
+        </p:spPr>
+      </p:cxnSp>
+      <p:cxnSp>
+        <p:nvCxnSpPr>
+          <p:cNvPr id="1210" name="Flow"/>
+          <p:cNvCxnSpPr/>
+          <p:nvPr/>
+        </p:nvCxnSpPr>
+        <p:spPr>
+          <a:xfrm>
+            <a:off x="3200400" y="1600200"/>
+            <a:ext cx="558800" cy="0"/>
+          </a:xfrm>
+          <a:prstGeom prst="line">
+            <a:avLst/>
+          </a:prstGeom>
+          <a:ln w="19050">
+            <a:solidFill>
+              <a:srgbClr val="9B9B9B"/>
+            </a:solidFill>
+            <a:prstDash val="dash"/>
+          </a:ln>
+        </p:spPr>
+      </p:cxnSp>
+      <p:cxnSp>
+        <p:nvCxnSpPr>
+          <p:cNvPr id="1211" name="Flow"/>
+          <p:cNvCxnSpPr/>
+          <p:nvPr/>
+        </p:nvCxnSpPr>
+        <p:spPr>
+          <a:xfrm>
+            <a:off x="3759200" y="1600200"/>
+            <a:ext cx="0" cy="2286000"/>
+          </a:xfrm>
+          <a:prstGeom prst="line">
+            <a:avLst/>
+          </a:prstGeom>
+          <a:ln w="19050">
+            <a:solidFill>
+              <a:srgbClr val="9B9B9B"/>
+            </a:solidFill>
+            <a:prstDash val="dash"/>
+          </a:ln>
+        </p:spPr>
+      </p:cxnSp>
+      <p:cxnSp>
+        <p:nvCxnSpPr>
+          <p:cNvPr id="1212" name="Flow"/>
+          <p:cNvCxnSpPr/>
+          <p:nvPr/>
+        </p:nvCxnSpPr>
+        <p:spPr>
+          <a:xfrm flipH="1">
+            <a:off x="3200400" y="3886200"/>
+            <a:ext cx="558800" cy="0"/>
+          </a:xfrm>
+          <a:prstGeom prst="line">
+            <a:avLst/>
+          </a:prstGeom>
+          <a:ln w="19050">
+            <a:solidFill>
+              <a:srgbClr val="9B9B9B"/>
+            </a:solidFill>
+            <a:prstDash val="dash"/>
+          </a:ln>
+        </p:spPr>
+      </p:cxnSp>
+      <p:sp>
+        <p:nvSpPr>
+          <p:cNvPr id="1213" name="X"/>
+          <p:cNvSpPr txBox="1"/>
+          <p:nvPr/>
+        </p:nvSpPr>
+        <p:spPr>
+          <a:xfrm>
+            <a:off x="3581400" y="3632200"/>
+            <a:ext cx="355600" cy="355600"/>
+          </a:xfrm>
+          <a:prstGeom prst="rect">
+            <a:avLst/>
+          </a:prstGeom>
+          <a:noFill/>
+          <a:ln>
+            <a:noFill/>
+          </a:ln>
+        </p:spPr>
+        <p:txBody>
+          <a:bodyPr lIns="114300" tIns="45720" rIns="114300" bIns="45720" anchor="ctr">
+            <a:noAutofit/>
+          </a:bodyPr>
+          <a:lstStyle/>
+          <a:p>
+            <a:pPr algn="ctr">
+              <a:buNone/>
+            </a:pPr>
+            <a:r>
+              <a:rPr lang="en-US" sz="1800" b="1" dirty="0">
+                <a:solidFill>
+                  <a:srgbClr val="9B9B9B"/>
+                </a:solidFill>
+              </a:rPr>
+              <a:t>✕</a:t>
+            </a:r>
+          </a:p>
+        </p:txBody>
+      </p:sp>
+      <p:sp>
+        <p:nvSpPr>
+          <p:cNvPr id="1214" name="XLb"/>
+          <p:cNvSpPr txBox="1"/>
+          <p:nvPr/>
+        </p:nvSpPr>
+        <p:spPr>
+          <a:xfrm>
+            <a:off x="279400" y="4267200"/>
+            <a:ext cx="5207000" cy="330200"/>
+          </a:xfrm>
+          <a:prstGeom prst="rect">
+            <a:avLst/>
+          </a:prstGeom>
+          <a:noFill/>
+          <a:ln>
+            <a:noFill/>
+          </a:ln>
+        </p:spPr>
+        <p:txBody>
+          <a:bodyPr lIns="0" tIns="45720" rIns="114300" bIns="45720" anchor="t">
+            <a:noAutofit/>
+          </a:bodyPr>
+          <a:lstStyle/>
+          <a:p>
+            <a:pPr>
+              <a:buNone/>
+            </a:pPr>
+            <a:r>
+              <a:rPr lang="en-US" sz="1500" dirty="0">
+                <a:solidFill>
+                  <a:srgbClr val="555960"/>
+                </a:solidFill>
+              </a:rPr>
+              <a:t>The dashed path must never occur.</a:t>
+            </a:r>
+          </a:p>
+        </p:txBody>
+      </p:sp>
+      <p:sp>
+        <p:nvSpPr>
+          <p:cNvPr id="1215" name="Dist"/>
+          <p:cNvSpPr txBox="1"/>
+          <p:nvPr/>
+        </p:nvSpPr>
+        <p:spPr>
+          <a:xfrm>
+            <a:off x="279400" y="4673600"/>
+            <a:ext cx="5207000" cy="838200"/>
+          </a:xfrm>
+          <a:prstGeom prst="rect">
+            <a:avLst/>
+          </a:prstGeom>
+          <a:noFill/>
+          <a:ln>
+            <a:noFill/>
+          </a:ln>
+        </p:spPr>
+        <p:txBody>
+          <a:bodyPr lIns="0" tIns="45720" rIns="114300" bIns="45720" anchor="t">
+            <a:noAutofit/>
+          </a:bodyPr>
+          <a:lstStyle/>
+          <a:p>
+            <a:pPr>
+              <a:buNone/>
+            </a:pPr>
+            <a:r>
+              <a:rPr lang="en-US" sz="1500" dirty="0">
+                <a:solidFill>
+                  <a:srgbClr val="3A3A3A"/>
+                </a:solidFill>
+              </a:rPr>
+              <a:t>State model: which situations may exist.</a:t>
+            </a:r>
+          </a:p>
+          <a:p>
+            <a:pPr>
+              <a:spcBef>
+                <a:spcPts val="200"/>
+              </a:spcBef>
+              <a:buNone/>
+            </a:pPr>
+            <a:r>
+              <a:rPr lang="en-US" sz="1500" dirty="0">
+                <a:solidFill>
+                  <a:srgbClr val="3A3A3A"/>
+                </a:solidFill>
+              </a:rPr>
+              <a:t>Activity view: which orderings are permitted.</a:t>
+            </a:r>
+          </a:p>
+        </p:txBody>
+      </p:sp>
+      <p:sp>
+        <p:nvSpPr>
+          <p:cNvPr id="1216" name="Panel"/>
+          <p:cNvSpPr txBox="1"/>
+          <p:nvPr/>
+        </p:nvSpPr>
+        <p:spPr>
+          <a:xfrm>
+            <a:off x="5740400" y="1270000"/>
+            <a:ext cx="3098800" cy="4064000"/>
           </a:xfrm>
           <a:prstGeom prst="rect">
             <a:avLst/>
@@ -13609,30 +13621,44 @@
               <a:buNone/>
             </a:pPr>
             <a:r>
-              <a:rPr lang="en-US" sz="1600" b="1" dirty="0">
-                <a:solidFill>
-                  <a:srgbClr val="1A1A1A"/>
-                </a:solidFill>
-                <a:latin typeface="Consolas"/>
-              </a:rPr>
-              <a:t>WEEKLY SUMMARY</a:t>
+              <a:rPr lang="en-US" sz="1300" b="1" spc="80" dirty="0">
+                <a:solidFill>
+                  <a:srgbClr val="8E6F3E"/>
+                </a:solidFill>
+              </a:rPr>
+              <a:t>QUESTION</a:t>
             </a:r>
           </a:p>
           <a:p>
             <a:pPr>
               <a:spcBef>
-                <a:spcPts val="400"/>
+                <a:spcPts val="200"/>
               </a:spcBef>
               <a:buNone/>
             </a:pPr>
             <a:r>
-              <a:rPr lang="en-US" sz="1500" dirty="0">
-                <a:solidFill>
-                  <a:srgbClr val="3A3A3A"/>
-                </a:solidFill>
-                <a:latin typeface="Consolas"/>
-              </a:rPr>
-              <a:t>├── start_date</a:t>
+              <a:rPr lang="en-US" sz="1700" dirty="0">
+                <a:solidFill>
+                  <a:srgbClr val="1A1A1A"/>
+                </a:solidFill>
+              </a:rPr>
+              <a:t>What must happen before what?</a:t>
+            </a:r>
+          </a:p>
+          <a:p>
+            <a:pPr>
+              <a:spcBef>
+                <a:spcPts val="700"/>
+              </a:spcBef>
+              <a:buNone/>
+            </a:pPr>
+            <a:r>
+              <a:rPr lang="en-US" sz="1300" b="1" spc="80" dirty="0">
+                <a:solidFill>
+                  <a:srgbClr val="8E6F3E"/>
+                </a:solidFill>
+              </a:rPr>
+              <a:t>CONSTRAINABLE PROPERTIES</a:t>
             </a:r>
           </a:p>
           <a:p>
@@ -13647,9 +13673,72 @@
                 <a:solidFill>
                   <a:srgbClr val="3A3A3A"/>
                 </a:solidFill>
-                <a:latin typeface="Consolas"/>
-              </a:rPr>
-              <a:t>├── end_date</a:t>
+              </a:rPr>
+              <a:t>· required ordering</a:t>
+            </a:r>
+          </a:p>
+          <a:p>
+            <a:pPr>
+              <a:spcBef>
+                <a:spcPts val="150"/>
+              </a:spcBef>
+              <a:buNone/>
+            </a:pPr>
+            <a:r>
+              <a:rPr lang="en-US" sz="1500" dirty="0">
+                <a:solidFill>
+                  <a:srgbClr val="3A3A3A"/>
+                </a:solidFill>
+              </a:rPr>
+              <a:t>· allowed branches</a:t>
+            </a:r>
+          </a:p>
+          <a:p>
+            <a:pPr>
+              <a:spcBef>
+                <a:spcPts val="150"/>
+              </a:spcBef>
+              <a:buNone/>
+            </a:pPr>
+            <a:r>
+              <a:rPr lang="en-US" sz="1500" dirty="0">
+                <a:solidFill>
+                  <a:srgbClr val="3A3A3A"/>
+                </a:solidFill>
+              </a:rPr>
+              <a:t>· required responses to events</a:t>
+            </a:r>
+          </a:p>
+          <a:p>
+            <a:pPr>
+              <a:spcBef>
+                <a:spcPts val="150"/>
+              </a:spcBef>
+              <a:buNone/>
+            </a:pPr>
+            <a:r>
+              <a:rPr lang="en-US" sz="1500" dirty="0">
+                <a:solidFill>
+                  <a:srgbClr val="3A3A3A"/>
+                </a:solidFill>
+              </a:rPr>
+              <a:t>· paths that must never occur</a:t>
+            </a:r>
+          </a:p>
+          <a:p>
+            <a:pPr>
+              <a:spcBef>
+                <a:spcPts val="700"/>
+              </a:spcBef>
+              <a:buNone/>
+            </a:pPr>
+            <a:r>
+              <a:rPr lang="en-US" sz="1300" b="1" spc="80" dirty="0">
+                <a:solidFill>
+                  <a:srgbClr val="8E6F3E"/>
+                </a:solidFill>
+              </a:rPr>
+              <a:t>EXAMPLE INVARIANT</a:t>
             </a:r>
           </a:p>
           <a:p>
@@ -13660,362 +13749,19 @@
               <a:buNone/>
             </a:pPr>
             <a:r>
-              <a:rPr lang="en-US" sz="1500" dirty="0">
-                <a:solidFill>
-                  <a:srgbClr val="3A3A3A"/>
-                </a:solidFill>
-                <a:latin typeface="Consolas"/>
-              </a:rPr>
-              <a:t>├── nightly_duration[ ]</a:t>
-            </a:r>
-          </a:p>
-          <a:p>
-            <a:pPr>
-              <a:spcBef>
-                <a:spcPts val="250"/>
-              </a:spcBef>
-              <a:buNone/>
-            </a:pPr>
-            <a:r>
-              <a:rPr lang="en-US" sz="1500" dirty="0">
-                <a:solidFill>
-                  <a:srgbClr val="3A3A3A"/>
-                </a:solidFill>
-                <a:latin typeface="Consolas"/>
-              </a:rPr>
-              <a:t>└── advisory?</a:t>
-            </a:r>
-          </a:p>
-        </p:txBody>
-      </p:sp>
-      <p:sp>
-        <p:nvSpPr>
-          <p:cNvPr id="1403" name="Types"/>
-          <p:cNvSpPr txBox="1"/>
-          <p:nvPr/>
-        </p:nvSpPr>
-        <p:spPr>
-          <a:xfrm>
-            <a:off x="3556000" y="1270000"/>
-            <a:ext cx="1778000" cy="2413000"/>
-          </a:xfrm>
-          <a:prstGeom prst="rect">
-            <a:avLst/>
-          </a:prstGeom>
-          <a:noFill/>
-          <a:ln>
-            <a:noFill/>
-          </a:ln>
-        </p:spPr>
-        <p:txBody>
-          <a:bodyPr lIns="0" tIns="45720" rIns="114300" bIns="45720" anchor="t">
-            <a:noAutofit/>
-          </a:bodyPr>
-          <a:lstStyle/>
-          <a:p>
-            <a:pPr>
-              <a:buNone/>
-            </a:pPr>
-            <a:r>
-              <a:rPr lang="en-US" sz="1600" dirty="0"/>
-              <a:t> </a:t>
-            </a:r>
-          </a:p>
-          <a:p>
-            <a:pPr>
-              <a:spcBef>
-                <a:spcPts val="400"/>
-              </a:spcBef>
-              <a:buNone/>
-            </a:pPr>
-            <a:r>
-              <a:rPr lang="en-US" sz="1400" dirty="0">
-                <a:solidFill>
-                  <a:srgbClr val="555960"/>
-                </a:solidFill>
-              </a:rPr>
-              <a:t>date · required</a:t>
-            </a:r>
-          </a:p>
-          <a:p>
-            <a:pPr>
-              <a:spcBef>
-                <a:spcPts val="250"/>
-              </a:spcBef>
-              <a:buNone/>
-            </a:pPr>
-            <a:r>
-              <a:rPr lang="en-US" sz="1400" dirty="0">
-                <a:solidFill>
-                  <a:srgbClr val="555960"/>
-                </a:solidFill>
-              </a:rPr>
-              <a:t>date · required</a:t>
-            </a:r>
-          </a:p>
-          <a:p>
-            <a:pPr>
-              <a:spcBef>
-                <a:spcPts val="250"/>
-              </a:spcBef>
-              <a:buNone/>
-            </a:pPr>
-            <a:r>
-              <a:rPr lang="en-US" sz="1400" b="1" dirty="0">
-                <a:solidFill>
-                  <a:srgbClr val="8E6F3E"/>
-                </a:solidFill>
-              </a:rPr>
-              <a:t>exactly 7 entries</a:t>
-            </a:r>
-          </a:p>
-          <a:p>
-            <a:pPr>
-              <a:spcBef>
-                <a:spcPts val="250"/>
-              </a:spcBef>
-              <a:buNone/>
-            </a:pPr>
-            <a:r>
-              <a:rPr lang="en-US" sz="1400" dirty="0">
-                <a:solidFill>
-                  <a:srgbClr val="555960"/>
-                </a:solidFill>
-              </a:rPr>
-              <a:t>string · optional</a:t>
-            </a:r>
-          </a:p>
-        </p:txBody>
-      </p:sp>
-      <p:sp>
-        <p:nvSpPr>
-          <p:cNvPr id="1404" name="Bound"/>
-          <p:cNvSpPr txBox="1"/>
-          <p:nvPr/>
-        </p:nvSpPr>
-        <p:spPr>
-          <a:xfrm>
-            <a:off x="279400" y="3860800"/>
-            <a:ext cx="5054600" cy="685800"/>
-          </a:xfrm>
-          <a:prstGeom prst="rect">
-            <a:avLst/>
-          </a:prstGeom>
-          <a:noFill/>
-          <a:ln>
-            <a:noFill/>
-          </a:ln>
-        </p:spPr>
-        <p:txBody>
-          <a:bodyPr lIns="0" tIns="45720" rIns="114300" bIns="45720" anchor="t">
-            <a:noAutofit/>
-          </a:bodyPr>
-          <a:lstStyle/>
-          <a:p>
-            <a:pPr>
-              <a:buNone/>
-            </a:pPr>
-            <a:r>
-              <a:rPr lang="en-US" sz="1500" dirty="0">
-                <a:solidFill>
-                  <a:srgbClr val="3A3A3A"/>
-                </a:solidFill>
-              </a:rPr>
-              <a:t>A schema constrains the information crossing the boundary, not the parts inside the machine.</a:t>
-            </a:r>
-          </a:p>
-        </p:txBody>
-      </p:sp>
-      <p:sp>
-        <p:nvSpPr>
-          <p:cNvPr id="1405" name="Panel"/>
-          <p:cNvSpPr txBox="1"/>
-          <p:nvPr/>
-        </p:nvSpPr>
-        <p:spPr>
-          <a:xfrm>
-            <a:off x="5740400" y="1270000"/>
-            <a:ext cx="3098800" cy="4064000"/>
-          </a:xfrm>
-          <a:prstGeom prst="rect">
-            <a:avLst/>
-          </a:prstGeom>
-          <a:solidFill>
-            <a:srgbClr val="F9F6F1"/>
-          </a:solidFill>
-          <a:ln w="9525">
-            <a:solidFill>
-              <a:srgbClr val="C9C4BB"/>
-            </a:solidFill>
-          </a:ln>
-        </p:spPr>
-        <p:txBody>
-          <a:bodyPr lIns="114300" tIns="45720" rIns="114300" bIns="45720" anchor="t">
-            <a:noAutofit/>
-          </a:bodyPr>
-          <a:lstStyle/>
-          <a:p>
-            <a:pPr>
-              <a:buNone/>
-            </a:pPr>
-            <a:r>
-              <a:rPr lang="en-US" sz="1300" b="1" spc="80" dirty="0">
-                <a:solidFill>
-                  <a:srgbClr val="8E6F3E"/>
-                </a:solidFill>
-              </a:rPr>
-              <a:t>QUESTION</a:t>
-            </a:r>
-          </a:p>
-          <a:p>
-            <a:pPr>
-              <a:spcBef>
-                <a:spcPts val="200"/>
-              </a:spcBef>
-              <a:buNone/>
-            </a:pPr>
-            <a:r>
-              <a:rPr lang="en-US" sz="1700" dirty="0">
+              <a:rPr lang="en-US" sz="1600" b="1" dirty="0">
                 <a:solidFill>
                   <a:srgbClr val="1A1A1A"/>
                 </a:solidFill>
               </a:rPr>
-              <a:t>What information is valid?</a:t>
-            </a:r>
-          </a:p>
-          <a:p>
-            <a:pPr>
-              <a:spcBef>
-                <a:spcPts val="700"/>
-              </a:spcBef>
-              <a:buNone/>
-            </a:pPr>
-            <a:r>
-              <a:rPr lang="en-US" sz="1300" b="1" spc="80" dirty="0">
-                <a:solidFill>
-                  <a:srgbClr val="8E6F3E"/>
-                </a:solidFill>
-              </a:rPr>
-              <a:t>CONSTRAINABLE PROPERTIES</a:t>
-            </a:r>
-          </a:p>
-          <a:p>
-            <a:pPr>
-              <a:spcBef>
-                <a:spcPts val="250"/>
-              </a:spcBef>
-              <a:buNone/>
-            </a:pPr>
-            <a:r>
-              <a:rPr lang="en-US" sz="1500" dirty="0">
-                <a:solidFill>
-                  <a:srgbClr val="3A3A3A"/>
-                </a:solidFill>
-              </a:rPr>
-              <a:t>· required fields</a:t>
-            </a:r>
-          </a:p>
-          <a:p>
-            <a:pPr>
-              <a:spcBef>
-                <a:spcPts val="150"/>
-              </a:spcBef>
-              <a:buNone/>
-            </a:pPr>
-            <a:r>
-              <a:rPr lang="en-US" sz="1500" dirty="0">
-                <a:solidFill>
-                  <a:srgbClr val="3A3A3A"/>
-                </a:solidFill>
-              </a:rPr>
-              <a:t>· types</a:t>
-            </a:r>
-          </a:p>
-          <a:p>
-            <a:pPr>
-              <a:spcBef>
-                <a:spcPts val="150"/>
-              </a:spcBef>
-              <a:buNone/>
-            </a:pPr>
-            <a:r>
-              <a:rPr lang="en-US" sz="1500" dirty="0">
-                <a:solidFill>
-                  <a:srgbClr val="3A3A3A"/>
-                </a:solidFill>
-              </a:rPr>
-              <a:t>· cardinality</a:t>
-            </a:r>
-          </a:p>
-          <a:p>
-            <a:pPr>
-              <a:spcBef>
-                <a:spcPts val="150"/>
-              </a:spcBef>
-              <a:buNone/>
-            </a:pPr>
-            <a:r>
-              <a:rPr lang="en-US" sz="1500" dirty="0">
-                <a:solidFill>
-                  <a:srgbClr val="3A3A3A"/>
-                </a:solidFill>
-              </a:rPr>
-              <a:t>· ranges</a:t>
-            </a:r>
-          </a:p>
-          <a:p>
-            <a:pPr>
-              <a:spcBef>
-                <a:spcPts val="150"/>
-              </a:spcBef>
-              <a:buNone/>
-            </a:pPr>
-            <a:r>
-              <a:rPr lang="en-US" sz="1500" dirty="0">
-                <a:solidFill>
-                  <a:srgbClr val="3A3A3A"/>
-                </a:solidFill>
-              </a:rPr>
-              <a:t>· referential relationships</a:t>
-            </a:r>
-          </a:p>
-          <a:p>
-            <a:pPr>
-              <a:spcBef>
-                <a:spcPts val="700"/>
-              </a:spcBef>
-              <a:buNone/>
-            </a:pPr>
-            <a:r>
-              <a:rPr lang="en-US" sz="1300" b="1" spc="80" dirty="0">
-                <a:solidFill>
-                  <a:srgbClr val="8E6F3E"/>
-                </a:solidFill>
-              </a:rPr>
-              <a:t>EXAMPLE INVARIANT</a:t>
-            </a:r>
-          </a:p>
-          <a:p>
-            <a:pPr>
-              <a:spcBef>
-                <a:spcPts val="250"/>
-              </a:spcBef>
-              <a:buNone/>
-            </a:pPr>
-            <a:r>
-              <a:rPr lang="en-US" sz="1600" b="1" dirty="0">
-                <a:solidFill>
-                  <a:srgbClr val="1A1A1A"/>
-                </a:solidFill>
-              </a:rPr>
-              <a:t>A weekly summary contains exactly seven nightly entries.</a:t>
+              <a:t>Do not issue an advisory until the night's observations have been classified.</a:t>
             </a:r>
           </a:p>
         </p:txBody>
       </p:sp>
       <p:pic>
         <p:nvPicPr>
-          <p:cNvPr id="1407" name="Graphic 1407" descr="Sleep Advisor running example"/>
+          <p:cNvPr id="1218" name="Graphic 1218" descr="Sleep Advisor running example"/>
           <p:cNvPicPr>
             <a:picLocks noChangeAspect="1"/>
           </p:cNvPicPr>
@@ -14046,7 +13792,7 @@
     </p:spTree>
     <p:extLst>
       <p:ext uri="{BB962C8B-B14F-4D97-AF65-F5344CB8AC3E}">
-        <p14:creationId xmlns:p14="http://schemas.microsoft.com/office/powerpoint/2010/main" val="4041321106"/>
+        <p14:creationId xmlns:p14="http://schemas.microsoft.com/office/powerpoint/2010/main" val="3891913808"/>
       </p:ext>
     </p:extLst>
   </p:cSld>
@@ -15388,6 +15134,604 @@
           <p:cNvPr id="3" name="Title 2">
             <a:extLst>
               <a:ext uri="{FF2B5EF4-FFF2-40B4-BE49-F238E27FC236}">
+                <a16:creationId xmlns:a16="http://schemas.microsoft.com/office/drawing/2014/main" id="{389681D3-D446-27C2-276C-CF4321A81393}"/>
+              </a:ext>
+            </a:extLst>
+          </p:cNvPr>
+          <p:cNvSpPr>
+            <a:spLocks noGrp="1"/>
+          </p:cNvSpPr>
+          <p:nvPr>
+            <p:ph type="title"/>
+          </p:nvPr>
+        </p:nvSpPr>
+        <p:spPr/>
+        <p:txBody>
+          <a:bodyPr>
+            <a:normAutofit fontScale="90000"/>
+          </a:bodyPr>
+          <a:lstStyle/>
+          <a:p>
+            <a:pPr>
+              <a:buNone/>
+            </a:pPr>
+            <a:r>
+              <a:rPr lang="en-US" b="1" dirty="0"/>
+              <a:t>Schemas expose permitted structure</a:t>
+            </a:r>
+          </a:p>
+        </p:txBody>
+      </p:sp>
+      <p:sp>
+        <p:nvSpPr>
+          <p:cNvPr id="4" name="Slide Number Placeholder 3">
+            <a:extLst>
+              <a:ext uri="{FF2B5EF4-FFF2-40B4-BE49-F238E27FC236}">
+                <a16:creationId xmlns:a16="http://schemas.microsoft.com/office/drawing/2014/main" id="{7C3B98D8-8C39-55B7-1C16-1A710D845914}"/>
+              </a:ext>
+            </a:extLst>
+          </p:cNvPr>
+          <p:cNvSpPr>
+            <a:spLocks noGrp="1"/>
+          </p:cNvSpPr>
+          <p:nvPr>
+            <p:ph type="sldNum" sz="quarter" idx="4"/>
+          </p:nvPr>
+        </p:nvSpPr>
+        <p:spPr/>
+        <p:txBody>
+          <a:bodyPr/>
+          <a:lstStyle/>
+          <a:p>
+            <a:fld id="{B7EB45DA-9A0D-DC49-8E02-F30A5DDC21C3}" type="slidenum">
+              <a:rPr lang="en-US" smtClean="0"/>
+              <a:t>19</a:t>
+            </a:fld>
+            <a:endParaRPr lang="en-US"/>
+          </a:p>
+        </p:txBody>
+      </p:sp>
+      <p:sp>
+        <p:nvSpPr>
+          <p:cNvPr id="1401" name="Kicker"/>
+          <p:cNvSpPr txBox="1"/>
+          <p:nvPr/>
+        </p:nvSpPr>
+        <p:spPr>
+          <a:xfrm>
+            <a:off x="635000" y="812800"/>
+            <a:ext cx="5588000" cy="279400"/>
+          </a:xfrm>
+          <a:prstGeom prst="rect">
+            <a:avLst/>
+          </a:prstGeom>
+          <a:noFill/>
+          <a:ln>
+            <a:noFill/>
+          </a:ln>
+        </p:spPr>
+        <p:txBody>
+          <a:bodyPr lIns="0" tIns="45720" rIns="114300" bIns="45720" anchor="t">
+            <a:noAutofit/>
+          </a:bodyPr>
+          <a:lstStyle/>
+          <a:p>
+            <a:pPr>
+              <a:buNone/>
+            </a:pPr>
+            <a:r>
+              <a:rPr lang="en-US" sz="1400" b="1" dirty="0">
+                <a:solidFill>
+                  <a:srgbClr val="8E6F3E"/>
+                </a:solidFill>
+              </a:rPr>
+              <a:t>Sleep Advisor · what crosses the machine boundary</a:t>
+            </a:r>
+          </a:p>
+        </p:txBody>
+      </p:sp>
+      <p:sp>
+        <p:nvSpPr>
+          <p:cNvPr id="1402" name="Schema"/>
+          <p:cNvSpPr txBox="1"/>
+          <p:nvPr/>
+        </p:nvSpPr>
+        <p:spPr>
+          <a:xfrm>
+            <a:off x="279400" y="1270000"/>
+            <a:ext cx="3175000" cy="2413000"/>
+          </a:xfrm>
+          <a:prstGeom prst="rect">
+            <a:avLst/>
+          </a:prstGeom>
+          <a:solidFill>
+            <a:srgbClr val="F9F6F1"/>
+          </a:solidFill>
+          <a:ln w="9525">
+            <a:solidFill>
+              <a:srgbClr val="C9C4BB"/>
+            </a:solidFill>
+          </a:ln>
+        </p:spPr>
+        <p:txBody>
+          <a:bodyPr lIns="114300" tIns="45720" rIns="114300" bIns="45720" anchor="t">
+            <a:noAutofit/>
+          </a:bodyPr>
+          <a:lstStyle/>
+          <a:p>
+            <a:pPr>
+              <a:buNone/>
+            </a:pPr>
+            <a:r>
+              <a:rPr lang="en-US" sz="1600" b="1" dirty="0">
+                <a:solidFill>
+                  <a:srgbClr val="1A1A1A"/>
+                </a:solidFill>
+                <a:latin typeface="Consolas"/>
+              </a:rPr>
+              <a:t>WEEKLY SUMMARY</a:t>
+            </a:r>
+          </a:p>
+          <a:p>
+            <a:pPr>
+              <a:spcBef>
+                <a:spcPts val="400"/>
+              </a:spcBef>
+              <a:buNone/>
+            </a:pPr>
+            <a:r>
+              <a:rPr lang="en-US" sz="1500" dirty="0">
+                <a:solidFill>
+                  <a:srgbClr val="3A3A3A"/>
+                </a:solidFill>
+                <a:latin typeface="Consolas"/>
+              </a:rPr>
+              <a:t>├── start_date</a:t>
+            </a:r>
+          </a:p>
+          <a:p>
+            <a:pPr>
+              <a:spcBef>
+                <a:spcPts val="250"/>
+              </a:spcBef>
+              <a:buNone/>
+            </a:pPr>
+            <a:r>
+              <a:rPr lang="en-US" sz="1500" dirty="0">
+                <a:solidFill>
+                  <a:srgbClr val="3A3A3A"/>
+                </a:solidFill>
+                <a:latin typeface="Consolas"/>
+              </a:rPr>
+              <a:t>├── end_date</a:t>
+            </a:r>
+          </a:p>
+          <a:p>
+            <a:pPr>
+              <a:spcBef>
+                <a:spcPts val="250"/>
+              </a:spcBef>
+              <a:buNone/>
+            </a:pPr>
+            <a:r>
+              <a:rPr lang="en-US" sz="1500" dirty="0">
+                <a:solidFill>
+                  <a:srgbClr val="3A3A3A"/>
+                </a:solidFill>
+                <a:latin typeface="Consolas"/>
+              </a:rPr>
+              <a:t>├── nightly_duration[ ]</a:t>
+            </a:r>
+          </a:p>
+          <a:p>
+            <a:pPr>
+              <a:spcBef>
+                <a:spcPts val="250"/>
+              </a:spcBef>
+              <a:buNone/>
+            </a:pPr>
+            <a:r>
+              <a:rPr lang="en-US" sz="1500" dirty="0">
+                <a:solidFill>
+                  <a:srgbClr val="3A3A3A"/>
+                </a:solidFill>
+                <a:latin typeface="Consolas"/>
+              </a:rPr>
+              <a:t>└── advisory?</a:t>
+            </a:r>
+          </a:p>
+        </p:txBody>
+      </p:sp>
+      <p:sp>
+        <p:nvSpPr>
+          <p:cNvPr id="1403" name="Types"/>
+          <p:cNvSpPr txBox="1"/>
+          <p:nvPr/>
+        </p:nvSpPr>
+        <p:spPr>
+          <a:xfrm>
+            <a:off x="3556000" y="1270000"/>
+            <a:ext cx="1778000" cy="2413000"/>
+          </a:xfrm>
+          <a:prstGeom prst="rect">
+            <a:avLst/>
+          </a:prstGeom>
+          <a:noFill/>
+          <a:ln>
+            <a:noFill/>
+          </a:ln>
+        </p:spPr>
+        <p:txBody>
+          <a:bodyPr lIns="0" tIns="45720" rIns="114300" bIns="45720" anchor="t">
+            <a:noAutofit/>
+          </a:bodyPr>
+          <a:lstStyle/>
+          <a:p>
+            <a:pPr>
+              <a:buNone/>
+            </a:pPr>
+            <a:r>
+              <a:rPr lang="en-US" sz="1600" dirty="0"/>
+              <a:t> </a:t>
+            </a:r>
+          </a:p>
+          <a:p>
+            <a:pPr>
+              <a:spcBef>
+                <a:spcPts val="400"/>
+              </a:spcBef>
+              <a:buNone/>
+            </a:pPr>
+            <a:r>
+              <a:rPr lang="en-US" sz="1400" dirty="0">
+                <a:solidFill>
+                  <a:srgbClr val="555960"/>
+                </a:solidFill>
+              </a:rPr>
+              <a:t>date · required</a:t>
+            </a:r>
+          </a:p>
+          <a:p>
+            <a:pPr>
+              <a:spcBef>
+                <a:spcPts val="250"/>
+              </a:spcBef>
+              <a:buNone/>
+            </a:pPr>
+            <a:r>
+              <a:rPr lang="en-US" sz="1400" dirty="0">
+                <a:solidFill>
+                  <a:srgbClr val="555960"/>
+                </a:solidFill>
+              </a:rPr>
+              <a:t>date · required</a:t>
+            </a:r>
+          </a:p>
+          <a:p>
+            <a:pPr>
+              <a:spcBef>
+                <a:spcPts val="250"/>
+              </a:spcBef>
+              <a:buNone/>
+            </a:pPr>
+            <a:r>
+              <a:rPr lang="en-US" sz="1400" b="1" dirty="0">
+                <a:solidFill>
+                  <a:srgbClr val="8E6F3E"/>
+                </a:solidFill>
+              </a:rPr>
+              <a:t>exactly 7 entries</a:t>
+            </a:r>
+          </a:p>
+          <a:p>
+            <a:pPr>
+              <a:spcBef>
+                <a:spcPts val="250"/>
+              </a:spcBef>
+              <a:buNone/>
+            </a:pPr>
+            <a:r>
+              <a:rPr lang="en-US" sz="1400" dirty="0">
+                <a:solidFill>
+                  <a:srgbClr val="555960"/>
+                </a:solidFill>
+              </a:rPr>
+              <a:t>string · optional</a:t>
+            </a:r>
+          </a:p>
+        </p:txBody>
+      </p:sp>
+      <p:sp>
+        <p:nvSpPr>
+          <p:cNvPr id="1404" name="Bound"/>
+          <p:cNvSpPr txBox="1"/>
+          <p:nvPr/>
+        </p:nvSpPr>
+        <p:spPr>
+          <a:xfrm>
+            <a:off x="279400" y="3860800"/>
+            <a:ext cx="5054600" cy="685800"/>
+          </a:xfrm>
+          <a:prstGeom prst="rect">
+            <a:avLst/>
+          </a:prstGeom>
+          <a:noFill/>
+          <a:ln>
+            <a:noFill/>
+          </a:ln>
+        </p:spPr>
+        <p:txBody>
+          <a:bodyPr lIns="0" tIns="45720" rIns="114300" bIns="45720" anchor="t">
+            <a:noAutofit/>
+          </a:bodyPr>
+          <a:lstStyle/>
+          <a:p>
+            <a:pPr>
+              <a:buNone/>
+            </a:pPr>
+            <a:r>
+              <a:rPr lang="en-US" sz="1500" dirty="0">
+                <a:solidFill>
+                  <a:srgbClr val="3A3A3A"/>
+                </a:solidFill>
+              </a:rPr>
+              <a:t>A schema constrains the information crossing the boundary, not the parts inside the machine.</a:t>
+            </a:r>
+          </a:p>
+        </p:txBody>
+      </p:sp>
+      <p:sp>
+        <p:nvSpPr>
+          <p:cNvPr id="1405" name="Panel"/>
+          <p:cNvSpPr txBox="1"/>
+          <p:nvPr/>
+        </p:nvSpPr>
+        <p:spPr>
+          <a:xfrm>
+            <a:off x="5740400" y="1270000"/>
+            <a:ext cx="3098800" cy="4064000"/>
+          </a:xfrm>
+          <a:prstGeom prst="rect">
+            <a:avLst/>
+          </a:prstGeom>
+          <a:solidFill>
+            <a:srgbClr val="F9F6F1"/>
+          </a:solidFill>
+          <a:ln w="9525">
+            <a:solidFill>
+              <a:srgbClr val="C9C4BB"/>
+            </a:solidFill>
+          </a:ln>
+        </p:spPr>
+        <p:txBody>
+          <a:bodyPr lIns="114300" tIns="45720" rIns="114300" bIns="45720" anchor="t">
+            <a:noAutofit/>
+          </a:bodyPr>
+          <a:lstStyle/>
+          <a:p>
+            <a:pPr>
+              <a:buNone/>
+            </a:pPr>
+            <a:r>
+              <a:rPr lang="en-US" sz="1300" b="1" spc="80" dirty="0">
+                <a:solidFill>
+                  <a:srgbClr val="8E6F3E"/>
+                </a:solidFill>
+              </a:rPr>
+              <a:t>QUESTION</a:t>
+            </a:r>
+          </a:p>
+          <a:p>
+            <a:pPr>
+              <a:spcBef>
+                <a:spcPts val="200"/>
+              </a:spcBef>
+              <a:buNone/>
+            </a:pPr>
+            <a:r>
+              <a:rPr lang="en-US" sz="1700" dirty="0">
+                <a:solidFill>
+                  <a:srgbClr val="1A1A1A"/>
+                </a:solidFill>
+              </a:rPr>
+              <a:t>What information is valid?</a:t>
+            </a:r>
+          </a:p>
+          <a:p>
+            <a:pPr>
+              <a:spcBef>
+                <a:spcPts val="700"/>
+              </a:spcBef>
+              <a:buNone/>
+            </a:pPr>
+            <a:r>
+              <a:rPr lang="en-US" sz="1300" b="1" spc="80" dirty="0">
+                <a:solidFill>
+                  <a:srgbClr val="8E6F3E"/>
+                </a:solidFill>
+              </a:rPr>
+              <a:t>CONSTRAINABLE PROPERTIES</a:t>
+            </a:r>
+          </a:p>
+          <a:p>
+            <a:pPr>
+              <a:spcBef>
+                <a:spcPts val="250"/>
+              </a:spcBef>
+              <a:buNone/>
+            </a:pPr>
+            <a:r>
+              <a:rPr lang="en-US" sz="1500" dirty="0">
+                <a:solidFill>
+                  <a:srgbClr val="3A3A3A"/>
+                </a:solidFill>
+              </a:rPr>
+              <a:t>· required fields</a:t>
+            </a:r>
+          </a:p>
+          <a:p>
+            <a:pPr>
+              <a:spcBef>
+                <a:spcPts val="150"/>
+              </a:spcBef>
+              <a:buNone/>
+            </a:pPr>
+            <a:r>
+              <a:rPr lang="en-US" sz="1500" dirty="0">
+                <a:solidFill>
+                  <a:srgbClr val="3A3A3A"/>
+                </a:solidFill>
+              </a:rPr>
+              <a:t>· types</a:t>
+            </a:r>
+          </a:p>
+          <a:p>
+            <a:pPr>
+              <a:spcBef>
+                <a:spcPts val="150"/>
+              </a:spcBef>
+              <a:buNone/>
+            </a:pPr>
+            <a:r>
+              <a:rPr lang="en-US" sz="1500" dirty="0">
+                <a:solidFill>
+                  <a:srgbClr val="3A3A3A"/>
+                </a:solidFill>
+              </a:rPr>
+              <a:t>· cardinality</a:t>
+            </a:r>
+          </a:p>
+          <a:p>
+            <a:pPr>
+              <a:spcBef>
+                <a:spcPts val="150"/>
+              </a:spcBef>
+              <a:buNone/>
+            </a:pPr>
+            <a:r>
+              <a:rPr lang="en-US" sz="1500" dirty="0">
+                <a:solidFill>
+                  <a:srgbClr val="3A3A3A"/>
+                </a:solidFill>
+              </a:rPr>
+              <a:t>· ranges</a:t>
+            </a:r>
+          </a:p>
+          <a:p>
+            <a:pPr>
+              <a:spcBef>
+                <a:spcPts val="150"/>
+              </a:spcBef>
+              <a:buNone/>
+            </a:pPr>
+            <a:r>
+              <a:rPr lang="en-US" sz="1500" dirty="0">
+                <a:solidFill>
+                  <a:srgbClr val="3A3A3A"/>
+                </a:solidFill>
+              </a:rPr>
+              <a:t>· referential relationships</a:t>
+            </a:r>
+          </a:p>
+          <a:p>
+            <a:pPr>
+              <a:spcBef>
+                <a:spcPts val="700"/>
+              </a:spcBef>
+              <a:buNone/>
+            </a:pPr>
+            <a:r>
+              <a:rPr lang="en-US" sz="1300" b="1" spc="80" dirty="0">
+                <a:solidFill>
+                  <a:srgbClr val="8E6F3E"/>
+                </a:solidFill>
+              </a:rPr>
+              <a:t>EXAMPLE INVARIANT</a:t>
+            </a:r>
+          </a:p>
+          <a:p>
+            <a:pPr>
+              <a:spcBef>
+                <a:spcPts val="250"/>
+              </a:spcBef>
+              <a:buNone/>
+            </a:pPr>
+            <a:r>
+              <a:rPr lang="en-US" sz="1600" b="1" dirty="0">
+                <a:solidFill>
+                  <a:srgbClr val="1A1A1A"/>
+                </a:solidFill>
+              </a:rPr>
+              <a:t>A weekly summary contains exactly seven nightly entries.</a:t>
+            </a:r>
+          </a:p>
+        </p:txBody>
+      </p:sp>
+      <p:pic>
+        <p:nvPicPr>
+          <p:cNvPr id="1407" name="Graphic 1407" descr="Sleep Advisor running example"/>
+          <p:cNvPicPr>
+            <a:picLocks noChangeAspect="1"/>
+          </p:cNvPicPr>
+          <p:nvPr/>
+        </p:nvPicPr>
+        <p:blipFill>
+          <a:blip>
+            <a:extLst>
+              <a:ext uri="{96DAC541-7B7A-43D3-8B79-37D633B846F1}">
+                <asvg:svgBlip xmlns:asvg="http://schemas.microsoft.com/office/drawing/2016/SVG/main" r:embed="rId3"/>
+              </a:ext>
+            </a:extLst>
+          </a:blip>
+          <a:stretch>
+            <a:fillRect/>
+          </a:stretch>
+        </p:blipFill>
+        <p:spPr>
+          <a:xfrm>
+            <a:off x="279400" y="800100"/>
+            <a:ext cx="279400" cy="279400"/>
+          </a:xfrm>
+          <a:prstGeom prst="rect">
+            <a:avLst/>
+          </a:prstGeom>
+        </p:spPr>
+      </p:pic>
+    </p:spTree>
+    <p:extLst>
+      <p:ext uri="{BB962C8B-B14F-4D97-AF65-F5344CB8AC3E}">
+        <p14:creationId xmlns:p14="http://schemas.microsoft.com/office/powerpoint/2010/main" val="4041321106"/>
+      </p:ext>
+    </p:extLst>
+  </p:cSld>
+  <p:clrMapOvr>
+    <a:masterClrMapping/>
+  </p:clrMapOvr>
+</p:sld>
+</file>
+
+<file path=ppt/slides/slide21.xml><?xml version="1.0" encoding="utf-8"?>
+<p:sld xmlns:a="http://schemas.openxmlformats.org/drawingml/2006/main" xmlns:r="http://schemas.openxmlformats.org/officeDocument/2006/relationships" xmlns:p="http://schemas.openxmlformats.org/presentationml/2006/main">
+  <p:cSld>
+    <p:spTree>
+      <p:nvGrpSpPr>
+        <p:cNvPr id="1" name=""/>
+        <p:cNvGrpSpPr/>
+        <p:nvPr/>
+      </p:nvGrpSpPr>
+      <p:grpSpPr>
+        <a:xfrm>
+          <a:off x="0" y="0"/>
+          <a:ext cx="0" cy="0"/>
+          <a:chOff x="0" y="0"/>
+          <a:chExt cx="0" cy="0"/>
+        </a:xfrm>
+      </p:grpSpPr>
+      <p:sp>
+        <p:nvSpPr>
+          <p:cNvPr id="3" name="Title 2">
+            <a:extLst>
+              <a:ext uri="{FF2B5EF4-FFF2-40B4-BE49-F238E27FC236}">
                 <a16:creationId xmlns:a16="http://schemas.microsoft.com/office/drawing/2014/main" id="{5CFABCEC-B97C-8B46-01A8-04193FDAD2E2}"/>
               </a:ext>
             </a:extLst>
@@ -15540,7 +15884,7 @@
                   <a:srgbClr val="3A3A3A"/>
                 </a:solidFill>
               </a:rPr>
-              <a:t>legal behavior</a:t>
+              <a:t>allowable behavior</a:t>
             </a:r>
           </a:p>
         </p:txBody>
@@ -15855,7 +16199,7 @@
                   <a:srgbClr val="8E6F3E"/>
                 </a:solidFill>
               </a:rPr>
-              <a:t>Sleep advisor · three representations of one system</a:t>
+              <a:t>Sleep Advisor · three representations of one system</a:t>
             </a:r>
           </a:p>
         </p:txBody>
@@ -16091,7 +16435,7 @@
 </p:sld>
 </file>
 
-<file path=ppt/slides/slide21.xml><?xml version="1.0" encoding="utf-8"?>
+<file path=ppt/slides/slide22.xml><?xml version="1.0" encoding="utf-8"?>
 <p:sld xmlns:a="http://schemas.openxmlformats.org/drawingml/2006/main" xmlns:r="http://schemas.openxmlformats.org/officeDocument/2006/relationships" xmlns:p="http://schemas.openxmlformats.org/presentationml/2006/main">
   <p:cSld>
     <p:spTree>
@@ -16301,7 +16645,7 @@
 </p:sld>
 </file>
 
-<file path=ppt/slides/slide22.xml><?xml version="1.0" encoding="utf-8"?>
+<file path=ppt/slides/slide23.xml><?xml version="1.0" encoding="utf-8"?>
 <p:sld xmlns:a="http://schemas.openxmlformats.org/drawingml/2006/main" xmlns:r="http://schemas.openxmlformats.org/officeDocument/2006/relationships" xmlns:p="http://schemas.openxmlformats.org/presentationml/2006/main">
   <p:cSld>
     <p:spTree>
@@ -18363,7 +18707,7 @@
 </p:sld>
 </file>
 
-<file path=ppt/slides/slide23.xml><?xml version="1.0" encoding="utf-8"?>
+<file path=ppt/slides/slide24.xml><?xml version="1.0" encoding="utf-8"?>
 <p:sld xmlns:a="http://schemas.openxmlformats.org/drawingml/2006/main" xmlns:r="http://schemas.openxmlformats.org/officeDocument/2006/relationships" xmlns:p="http://schemas.openxmlformats.org/presentationml/2006/main">
   <p:cSld>
     <p:spTree>
@@ -19359,7 +19703,7 @@
 </p:sld>
 </file>
 
-<file path=ppt/slides/slide24.xml><?xml version="1.0" encoding="utf-8"?>
+<file path=ppt/slides/slide25.xml><?xml version="1.0" encoding="utf-8"?>
 <p:sld xmlns:a="http://schemas.openxmlformats.org/drawingml/2006/main" xmlns:r="http://schemas.openxmlformats.org/officeDocument/2006/relationships" xmlns:p="http://schemas.openxmlformats.org/presentationml/2006/main">
   <p:cSld>
     <p:spTree>
@@ -19619,7 +19963,7 @@
                   <a:srgbClr val="000000"/>
                 </a:solidFill>
               </a:rPr>
-              <a:t>How fast does the weekly summary load?</a:t>
+              <a:t>How sensitive should illness detection be?</a:t>
             </a:r>
           </a:p>
         </p:txBody>
@@ -19834,7 +20178,7 @@
 </p:sld>
 </file>
 
-<file path=ppt/slides/slide25.xml><?xml version="1.0" encoding="utf-8"?>
+<file path=ppt/slides/slide26.xml><?xml version="1.0" encoding="utf-8"?>
 <p:sld xmlns:a="http://schemas.openxmlformats.org/drawingml/2006/main" xmlns:r="http://schemas.openxmlformats.org/officeDocument/2006/relationships" xmlns:p="http://schemas.openxmlformats.org/presentationml/2006/main">
   <p:cSld>
     <p:spTree>
@@ -20264,7 +20608,7 @@
 </p:sld>
 </file>
 
-<file path=ppt/slides/slide26.xml><?xml version="1.0" encoding="utf-8"?>
+<file path=ppt/slides/slide27.xml><?xml version="1.0" encoding="utf-8"?>
 <p:sld xmlns:a="http://schemas.openxmlformats.org/drawingml/2006/main" xmlns:r="http://schemas.openxmlformats.org/officeDocument/2006/relationships" xmlns:p="http://schemas.openxmlformats.org/presentationml/2006/main">
   <p:cSld>
     <p:spTree>
@@ -21063,562 +21407,6 @@
 </p:sld>
 </file>
 
-<file path=ppt/slides/slide27.xml><?xml version="1.0" encoding="utf-8"?>
-<p:sld xmlns:a="http://schemas.openxmlformats.org/drawingml/2006/main" xmlns:r="http://schemas.openxmlformats.org/officeDocument/2006/relationships" xmlns:p="http://schemas.openxmlformats.org/presentationml/2006/main">
-  <p:cSld>
-    <p:spTree>
-      <p:nvGrpSpPr>
-        <p:cNvPr id="1" name=""/>
-        <p:cNvGrpSpPr/>
-        <p:nvPr/>
-      </p:nvGrpSpPr>
-      <p:grpSpPr>
-        <a:xfrm>
-          <a:off x="0" y="0"/>
-          <a:ext cx="0" cy="0"/>
-          <a:chOff x="0" y="0"/>
-          <a:chExt cx="0" cy="0"/>
-        </a:xfrm>
-      </p:grpSpPr>
-      <p:sp>
-        <p:nvSpPr>
-          <p:cNvPr id="3" name="Title 2">
-            <a:extLst>
-              <a:ext uri="{FF2B5EF4-FFF2-40B4-BE49-F238E27FC236}">
-                <a16:creationId xmlns:a16="http://schemas.microsoft.com/office/drawing/2014/main" id="{B54B42C9-A3AD-963A-5E54-9AED2B510950}"/>
-              </a:ext>
-            </a:extLst>
-          </p:cNvPr>
-          <p:cNvSpPr>
-            <a:spLocks noGrp="1"/>
-          </p:cNvSpPr>
-          <p:nvPr>
-            <p:ph type="title"/>
-          </p:nvPr>
-        </p:nvSpPr>
-        <p:spPr/>
-        <p:txBody>
-          <a:bodyPr>
-            <a:normAutofit fontScale="90000"/>
-          </a:bodyPr>
-          <a:lstStyle/>
-          <a:p>
-            <a:pPr algn="l">
-              <a:buNone/>
-            </a:pPr>
-            <a:r>
-              <a:rPr lang="en-US" sz="3000" b="1" i="0" dirty="0">
-                <a:solidFill>
-                  <a:srgbClr val="000000"/>
-                </a:solidFill>
-              </a:rPr>
-              <a:t>Specification through iteration</a:t>
-            </a:r>
-          </a:p>
-        </p:txBody>
-      </p:sp>
-      <p:sp>
-        <p:nvSpPr>
-          <p:cNvPr id="4" name="Slide Number Placeholder 3">
-            <a:extLst>
-              <a:ext uri="{FF2B5EF4-FFF2-40B4-BE49-F238E27FC236}">
-                <a16:creationId xmlns:a16="http://schemas.microsoft.com/office/drawing/2014/main" id="{EEA122E0-7821-B2B9-D047-4DFAC1A33775}"/>
-              </a:ext>
-            </a:extLst>
-          </p:cNvPr>
-          <p:cNvSpPr>
-            <a:spLocks noGrp="1"/>
-          </p:cNvSpPr>
-          <p:nvPr>
-            <p:ph type="sldNum" sz="quarter" idx="4"/>
-          </p:nvPr>
-        </p:nvSpPr>
-        <p:spPr/>
-        <p:txBody>
-          <a:bodyPr/>
-          <a:lstStyle/>
-          <a:p>
-            <a:fld id="{B7EB45DA-9A0D-DC49-8E02-F30A5DDC21C3}" type="slidenum">
-              <a:rPr lang="en-US" smtClean="0"/>
-              <a:t>27</a:t>
-            </a:fld>
-            <a:endParaRPr lang="en-US"/>
-          </a:p>
-        </p:txBody>
-      </p:sp>
-      <p:sp>
-        <p:nvSpPr>
-          <p:cNvPr id="60" name="S60"/>
-          <p:cNvSpPr/>
-          <p:nvPr/>
-        </p:nvSpPr>
-        <p:spPr>
-          <a:xfrm>
-            <a:off x="279400" y="1219200"/>
-            <a:ext cx="1930400" cy="1778000"/>
-          </a:xfrm>
-          <a:prstGeom prst="rect">
-            <a:avLst/>
-          </a:prstGeom>
-          <a:solidFill>
-            <a:srgbClr val="F5F1E8"/>
-          </a:solidFill>
-          <a:ln w="12700">
-            <a:solidFill>
-              <a:srgbClr val="C9B991"/>
-            </a:solidFill>
-          </a:ln>
-        </p:spPr>
-        <p:txBody>
-          <a:bodyPr wrap="square" lIns="109728" tIns="82296" rIns="109728" bIns="82296" anchor="t">
-            <a:normAutofit/>
-          </a:bodyPr>
-          <a:lstStyle/>
-          <a:p>
-            <a:pPr algn="l">
-              <a:buNone/>
-            </a:pPr>
-            <a:r>
-              <a:rPr lang="en-US" sz="2200" b="1" i="0" dirty="0">
-                <a:solidFill>
-                  <a:srgbClr val="5C4826"/>
-                </a:solidFill>
-              </a:rPr>
-              <a:t>SPECIFY</a:t>
-            </a:r>
-          </a:p>
-          <a:p>
-            <a:pPr algn="l">
-              <a:spcBef>
-                <a:spcPts val="200"/>
-              </a:spcBef>
-              <a:buNone/>
-            </a:pPr>
-            <a:r>
-              <a:rPr lang="en-US" sz="2000" b="0" i="0" dirty="0">
-                <a:solidFill>
-                  <a:srgbClr val="000000"/>
-                </a:solidFill>
-              </a:rPr>
-              <a:t>Baseline at install.</a:t>
-            </a:r>
-          </a:p>
-        </p:txBody>
-      </p:sp>
-      <p:cxnSp>
-        <p:nvCxnSpPr>
-          <p:cNvPr id="70" name="L70"/>
-          <p:cNvCxnSpPr/>
-          <p:nvPr/>
-        </p:nvCxnSpPr>
-        <p:spPr>
-          <a:xfrm>
-            <a:off x="2235200" y="2108200"/>
-            <a:ext cx="228600" cy="0"/>
-          </a:xfrm>
-          <a:prstGeom prst="line">
-            <a:avLst/>
-          </a:prstGeom>
-          <a:ln w="19050">
-            <a:solidFill>
-              <a:srgbClr val="8E6F3E"/>
-            </a:solidFill>
-            <a:tailEnd type="triangle" w="med" len="med"/>
-          </a:ln>
-        </p:spPr>
-      </p:cxnSp>
-      <p:sp>
-        <p:nvSpPr>
-          <p:cNvPr id="61" name="S61"/>
-          <p:cNvSpPr/>
-          <p:nvPr/>
-        </p:nvSpPr>
-        <p:spPr>
-          <a:xfrm>
-            <a:off x="2489200" y="1219200"/>
-            <a:ext cx="1930400" cy="1778000"/>
-          </a:xfrm>
-          <a:prstGeom prst="rect">
-            <a:avLst/>
-          </a:prstGeom>
-          <a:solidFill>
-            <a:srgbClr val="F5F1E8"/>
-          </a:solidFill>
-          <a:ln w="12700">
-            <a:solidFill>
-              <a:srgbClr val="C9B991"/>
-            </a:solidFill>
-          </a:ln>
-        </p:spPr>
-        <p:txBody>
-          <a:bodyPr wrap="square" lIns="109728" tIns="82296" rIns="109728" bIns="82296" anchor="t">
-            <a:normAutofit/>
-          </a:bodyPr>
-          <a:lstStyle/>
-          <a:p>
-            <a:pPr algn="l">
-              <a:buNone/>
-            </a:pPr>
-            <a:r>
-              <a:rPr lang="en-US" sz="2200" b="1" i="0" dirty="0">
-                <a:solidFill>
-                  <a:srgbClr val="5C4826"/>
-                </a:solidFill>
-              </a:rPr>
-              <a:t>BUILD</a:t>
-            </a:r>
-          </a:p>
-          <a:p>
-            <a:pPr algn="l">
-              <a:spcBef>
-                <a:spcPts val="200"/>
-              </a:spcBef>
-              <a:buNone/>
-            </a:pPr>
-            <a:r>
-              <a:rPr lang="en-US" sz="2000" b="0" i="0" dirty="0">
-                <a:solidFill>
-                  <a:srgbClr val="000000"/>
-                </a:solidFill>
-              </a:rPr>
-              <a:t>Ships. Works for most.</a:t>
-            </a:r>
-          </a:p>
-        </p:txBody>
-      </p:sp>
-      <p:cxnSp>
-        <p:nvCxnSpPr>
-          <p:cNvPr id="71" name="L71"/>
-          <p:cNvCxnSpPr/>
-          <p:nvPr/>
-        </p:nvCxnSpPr>
-        <p:spPr>
-          <a:xfrm>
-            <a:off x="4445000" y="2108200"/>
-            <a:ext cx="228600" cy="0"/>
-          </a:xfrm>
-          <a:prstGeom prst="line">
-            <a:avLst/>
-          </a:prstGeom>
-          <a:ln w="19050">
-            <a:solidFill>
-              <a:srgbClr val="8E6F3E"/>
-            </a:solidFill>
-            <a:tailEnd type="triangle" w="med" len="med"/>
-          </a:ln>
-        </p:spPr>
-      </p:cxnSp>
-      <p:sp>
-        <p:nvSpPr>
-          <p:cNvPr id="62" name="S62"/>
-          <p:cNvSpPr/>
-          <p:nvPr/>
-        </p:nvSpPr>
-        <p:spPr>
-          <a:xfrm>
-            <a:off x="4699000" y="1219200"/>
-            <a:ext cx="1930400" cy="1778000"/>
-          </a:xfrm>
-          <a:prstGeom prst="rect">
-            <a:avLst/>
-          </a:prstGeom>
-          <a:solidFill>
-            <a:srgbClr val="F5F1E8"/>
-          </a:solidFill>
-          <a:ln w="12700">
-            <a:solidFill>
-              <a:srgbClr val="C9B991"/>
-            </a:solidFill>
-          </a:ln>
-        </p:spPr>
-        <p:txBody>
-          <a:bodyPr wrap="square" lIns="109728" tIns="82296" rIns="109728" bIns="82296" anchor="t">
-            <a:normAutofit/>
-          </a:bodyPr>
-          <a:lstStyle/>
-          <a:p>
-            <a:pPr algn="l">
-              <a:buNone/>
-            </a:pPr>
-            <a:r>
-              <a:rPr lang="en-US" sz="2200" b="1" i="0" dirty="0">
-                <a:solidFill>
-                  <a:srgbClr val="5C4826"/>
-                </a:solidFill>
-              </a:rPr>
-              <a:t>OBSERVE</a:t>
-            </a:r>
-          </a:p>
-          <a:p>
-            <a:pPr algn="l">
-              <a:spcBef>
-                <a:spcPts val="200"/>
-              </a:spcBef>
-              <a:buNone/>
-            </a:pPr>
-            <a:r>
-              <a:rPr lang="en-US" sz="2000" b="0" i="0" dirty="0">
-                <a:solidFill>
-                  <a:srgbClr val="000000"/>
-                </a:solidFill>
-              </a:rPr>
-              <a:t>A cohort is warned daily, for months.</a:t>
-            </a:r>
-          </a:p>
-        </p:txBody>
-      </p:sp>
-      <p:cxnSp>
-        <p:nvCxnSpPr>
-          <p:cNvPr id="72" name="L72"/>
-          <p:cNvCxnSpPr/>
-          <p:nvPr/>
-        </p:nvCxnSpPr>
-        <p:spPr>
-          <a:xfrm>
-            <a:off x="6654800" y="2108200"/>
-            <a:ext cx="228600" cy="0"/>
-          </a:xfrm>
-          <a:prstGeom prst="line">
-            <a:avLst/>
-          </a:prstGeom>
-          <a:ln w="19050">
-            <a:solidFill>
-              <a:srgbClr val="8E6F3E"/>
-            </a:solidFill>
-            <a:tailEnd type="triangle" w="med" len="med"/>
-          </a:ln>
-        </p:spPr>
-      </p:cxnSp>
-      <p:sp>
-        <p:nvSpPr>
-          <p:cNvPr id="63" name="S63"/>
-          <p:cNvSpPr/>
-          <p:nvPr/>
-        </p:nvSpPr>
-        <p:spPr>
-          <a:xfrm>
-            <a:off x="6908800" y="1219200"/>
-            <a:ext cx="1930400" cy="1778000"/>
-          </a:xfrm>
-          <a:prstGeom prst="rect">
-            <a:avLst/>
-          </a:prstGeom>
-          <a:solidFill>
-            <a:srgbClr val="8E6F3E"/>
-          </a:solidFill>
-          <a:ln>
-            <a:noFill/>
-          </a:ln>
-        </p:spPr>
-        <p:txBody>
-          <a:bodyPr wrap="square" lIns="109728" tIns="82296" rIns="109728" bIns="82296" anchor="t">
-            <a:normAutofit/>
-          </a:bodyPr>
-          <a:lstStyle/>
-          <a:p>
-            <a:pPr algn="l">
-              <a:buNone/>
-            </a:pPr>
-            <a:r>
-              <a:rPr lang="en-US" sz="2200" b="1" i="0" dirty="0">
-                <a:solidFill>
-                  <a:srgbClr val="FFFFFF"/>
-                </a:solidFill>
-              </a:rPr>
-              <a:t>LEARN</a:t>
-            </a:r>
-          </a:p>
-          <a:p>
-            <a:pPr algn="l">
-              <a:spcBef>
-                <a:spcPts val="200"/>
-              </a:spcBef>
-              <a:buNone/>
-            </a:pPr>
-            <a:r>
-              <a:rPr lang="en-US" sz="2000" b="0" i="0" dirty="0">
-                <a:solidFill>
-                  <a:srgbClr val="FFFFFF"/>
-                </a:solidFill>
-              </a:rPr>
-              <a:t>A baseline can shift for good.</a:t>
-            </a:r>
-          </a:p>
-        </p:txBody>
-      </p:sp>
-      <p:cxnSp>
-        <p:nvCxnSpPr>
-          <p:cNvPr id="80" name="L80"/>
-          <p:cNvCxnSpPr/>
-          <p:nvPr/>
-        </p:nvCxnSpPr>
-        <p:spPr>
-          <a:xfrm>
-            <a:off x="7874000" y="2997200"/>
-            <a:ext cx="0" cy="406400"/>
-          </a:xfrm>
-          <a:prstGeom prst="line">
-            <a:avLst/>
-          </a:prstGeom>
-          <a:ln w="19050">
-            <a:solidFill>
-              <a:srgbClr val="8E6F3E"/>
-            </a:solidFill>
-          </a:ln>
-        </p:spPr>
-      </p:cxnSp>
-      <p:cxnSp>
-        <p:nvCxnSpPr>
-          <p:cNvPr id="81" name="L81"/>
-          <p:cNvCxnSpPr/>
-          <p:nvPr/>
-        </p:nvCxnSpPr>
-        <p:spPr>
-          <a:xfrm>
-            <a:off x="1244600" y="3403600"/>
-            <a:ext cx="6629400" cy="0"/>
-          </a:xfrm>
-          <a:prstGeom prst="line">
-            <a:avLst/>
-          </a:prstGeom>
-          <a:ln w="19050">
-            <a:solidFill>
-              <a:srgbClr val="8E6F3E"/>
-            </a:solidFill>
-          </a:ln>
-        </p:spPr>
-      </p:cxnSp>
-      <p:cxnSp>
-        <p:nvCxnSpPr>
-          <p:cNvPr id="82" name="L82"/>
-          <p:cNvCxnSpPr/>
-          <p:nvPr/>
-        </p:nvCxnSpPr>
-        <p:spPr>
-          <a:xfrm flipV="1">
-            <a:off x="1244600" y="2997200"/>
-            <a:ext cx="0" cy="406400"/>
-          </a:xfrm>
-          <a:prstGeom prst="line">
-            <a:avLst/>
-          </a:prstGeom>
-          <a:ln w="19050">
-            <a:solidFill>
-              <a:srgbClr val="8E6F3E"/>
-            </a:solidFill>
-            <a:tailEnd type="triangle" w="med" len="med"/>
-          </a:ln>
-        </p:spPr>
-      </p:cxnSp>
-      <p:sp>
-        <p:nvSpPr>
-          <p:cNvPr id="83" name="T83"/>
-          <p:cNvSpPr txBox="1"/>
-          <p:nvPr/>
-        </p:nvSpPr>
-        <p:spPr>
-          <a:xfrm>
-            <a:off x="2286000" y="3505200"/>
-            <a:ext cx="4572000" cy="381000"/>
-          </a:xfrm>
-          <a:prstGeom prst="rect">
-            <a:avLst/>
-          </a:prstGeom>
-          <a:noFill/>
-          <a:ln>
-            <a:noFill/>
-          </a:ln>
-        </p:spPr>
-        <p:txBody>
-          <a:bodyPr wrap="square" lIns="0" tIns="0" rIns="0" bIns="0" anchor="t">
-            <a:normAutofit/>
-          </a:bodyPr>
-          <a:lstStyle/>
-          <a:p>
-            <a:pPr algn="ctr">
-              <a:buNone/>
-            </a:pPr>
-            <a:r>
-              <a:rPr lang="en-US" sz="2000" b="1" i="0" dirty="0">
-                <a:solidFill>
-                  <a:srgbClr val="5C4826"/>
-                </a:solidFill>
-              </a:rPr>
-              <a:t>and the specification changes</a:t>
-            </a:r>
-          </a:p>
-        </p:txBody>
-      </p:sp>
-      <p:sp>
-        <p:nvSpPr>
-          <p:cNvPr id="84" name="S84"/>
-          <p:cNvSpPr/>
-          <p:nvPr/>
-        </p:nvSpPr>
-        <p:spPr>
-          <a:xfrm>
-            <a:off x="279400" y="4064000"/>
-            <a:ext cx="8559800" cy="914400"/>
-          </a:xfrm>
-          <a:prstGeom prst="rect">
-            <a:avLst/>
-          </a:prstGeom>
-          <a:solidFill>
-            <a:srgbClr val="8E6F3E"/>
-          </a:solidFill>
-          <a:ln>
-            <a:noFill/>
-          </a:ln>
-        </p:spPr>
-        <p:txBody>
-          <a:bodyPr wrap="square" lIns="109728" tIns="82296" rIns="109728" bIns="82296" anchor="ctr">
-            <a:normAutofit/>
-          </a:bodyPr>
-          <a:lstStyle/>
-          <a:p>
-            <a:pPr algn="ctr">
-              <a:buNone/>
-            </a:pPr>
-            <a:r>
-              <a:rPr lang="en-US" sz="2200" b="0" i="0" dirty="0">
-                <a:solidFill>
-                  <a:srgbClr val="FFFFFF"/>
-                </a:solidFill>
-              </a:rPr>
-              <a:t>The code did exactly what the specification said.</a:t>
-            </a:r>
-          </a:p>
-          <a:p>
-            <a:pPr algn="ctr">
-              <a:spcBef>
-                <a:spcPts val="180"/>
-              </a:spcBef>
-              <a:buNone/>
-            </a:pPr>
-            <a:r>
-              <a:rPr lang="en-US" sz="2200" b="1" i="0" dirty="0">
-                <a:solidFill>
-                  <a:srgbClr val="FFFFFF"/>
-                </a:solidFill>
-              </a:rPr>
-              <a:t>The specification had no concept of a shifting baseline.</a:t>
-            </a:r>
-          </a:p>
-        </p:txBody>
-      </p:sp>
-    </p:spTree>
-    <p:extLst>
-      <p:ext uri="{BB962C8B-B14F-4D97-AF65-F5344CB8AC3E}">
-        <p14:creationId xmlns:p14="http://schemas.microsoft.com/office/powerpoint/2010/main" val="326971963"/>
-      </p:ext>
-    </p:extLst>
-  </p:cSld>
-  <p:clrMapOvr>
-    <a:masterClrMapping/>
-  </p:clrMapOvr>
-</p:sld>
-</file>
-
 <file path=ppt/slides/slide28.xml><?xml version="1.0" encoding="utf-8"?>
 <p:sld xmlns:a="http://schemas.openxmlformats.org/drawingml/2006/main" xmlns:r="http://schemas.openxmlformats.org/officeDocument/2006/relationships" xmlns:p="http://schemas.openxmlformats.org/presentationml/2006/main">
   <p:cSld>
@@ -21641,6 +21429,562 @@
           <p:cNvPr id="3" name="Title 2">
             <a:extLst>
               <a:ext uri="{FF2B5EF4-FFF2-40B4-BE49-F238E27FC236}">
+                <a16:creationId xmlns:a16="http://schemas.microsoft.com/office/drawing/2014/main" id="{B54B42C9-A3AD-963A-5E54-9AED2B510950}"/>
+              </a:ext>
+            </a:extLst>
+          </p:cNvPr>
+          <p:cNvSpPr>
+            <a:spLocks noGrp="1"/>
+          </p:cNvSpPr>
+          <p:nvPr>
+            <p:ph type="title"/>
+          </p:nvPr>
+        </p:nvSpPr>
+        <p:spPr/>
+        <p:txBody>
+          <a:bodyPr>
+            <a:normAutofit fontScale="90000"/>
+          </a:bodyPr>
+          <a:lstStyle/>
+          <a:p>
+            <a:pPr algn="l">
+              <a:buNone/>
+            </a:pPr>
+            <a:r>
+              <a:rPr lang="en-US" sz="3000" b="1" i="0" dirty="0">
+                <a:solidFill>
+                  <a:srgbClr val="000000"/>
+                </a:solidFill>
+              </a:rPr>
+              <a:t>Specification through iteration</a:t>
+            </a:r>
+          </a:p>
+        </p:txBody>
+      </p:sp>
+      <p:sp>
+        <p:nvSpPr>
+          <p:cNvPr id="4" name="Slide Number Placeholder 3">
+            <a:extLst>
+              <a:ext uri="{FF2B5EF4-FFF2-40B4-BE49-F238E27FC236}">
+                <a16:creationId xmlns:a16="http://schemas.microsoft.com/office/drawing/2014/main" id="{EEA122E0-7821-B2B9-D047-4DFAC1A33775}"/>
+              </a:ext>
+            </a:extLst>
+          </p:cNvPr>
+          <p:cNvSpPr>
+            <a:spLocks noGrp="1"/>
+          </p:cNvSpPr>
+          <p:nvPr>
+            <p:ph type="sldNum" sz="quarter" idx="4"/>
+          </p:nvPr>
+        </p:nvSpPr>
+        <p:spPr/>
+        <p:txBody>
+          <a:bodyPr/>
+          <a:lstStyle/>
+          <a:p>
+            <a:fld id="{B7EB45DA-9A0D-DC49-8E02-F30A5DDC21C3}" type="slidenum">
+              <a:rPr lang="en-US" smtClean="0"/>
+              <a:t>27</a:t>
+            </a:fld>
+            <a:endParaRPr lang="en-US"/>
+          </a:p>
+        </p:txBody>
+      </p:sp>
+      <p:sp>
+        <p:nvSpPr>
+          <p:cNvPr id="60" name="S60"/>
+          <p:cNvSpPr/>
+          <p:nvPr/>
+        </p:nvSpPr>
+        <p:spPr>
+          <a:xfrm>
+            <a:off x="279400" y="1219200"/>
+            <a:ext cx="1930400" cy="1778000"/>
+          </a:xfrm>
+          <a:prstGeom prst="rect">
+            <a:avLst/>
+          </a:prstGeom>
+          <a:solidFill>
+            <a:srgbClr val="F5F1E8"/>
+          </a:solidFill>
+          <a:ln w="12700">
+            <a:solidFill>
+              <a:srgbClr val="C9B991"/>
+            </a:solidFill>
+          </a:ln>
+        </p:spPr>
+        <p:txBody>
+          <a:bodyPr wrap="square" lIns="109728" tIns="82296" rIns="109728" bIns="82296" anchor="t">
+            <a:normAutofit/>
+          </a:bodyPr>
+          <a:lstStyle/>
+          <a:p>
+            <a:pPr algn="l">
+              <a:buNone/>
+            </a:pPr>
+            <a:r>
+              <a:rPr lang="en-US" sz="2200" b="1" i="0" dirty="0">
+                <a:solidFill>
+                  <a:srgbClr val="5C4826"/>
+                </a:solidFill>
+              </a:rPr>
+              <a:t>SPECIFY</a:t>
+            </a:r>
+          </a:p>
+          <a:p>
+            <a:pPr algn="l">
+              <a:spcBef>
+                <a:spcPts val="200"/>
+              </a:spcBef>
+              <a:buNone/>
+            </a:pPr>
+            <a:r>
+              <a:rPr lang="en-US" sz="2000" b="0" i="0" dirty="0">
+                <a:solidFill>
+                  <a:srgbClr val="000000"/>
+                </a:solidFill>
+              </a:rPr>
+              <a:t>Rebaseline after a persistent shift.</a:t>
+            </a:r>
+          </a:p>
+        </p:txBody>
+      </p:sp>
+      <p:cxnSp>
+        <p:nvCxnSpPr>
+          <p:cNvPr id="70" name="L70"/>
+          <p:cNvCxnSpPr/>
+          <p:nvPr/>
+        </p:nvCxnSpPr>
+        <p:spPr>
+          <a:xfrm>
+            <a:off x="2235200" y="2108200"/>
+            <a:ext cx="228600" cy="0"/>
+          </a:xfrm>
+          <a:prstGeom prst="line">
+            <a:avLst/>
+          </a:prstGeom>
+          <a:ln w="19050">
+            <a:solidFill>
+              <a:srgbClr val="8E6F3E"/>
+            </a:solidFill>
+            <a:tailEnd type="triangle" w="med" len="med"/>
+          </a:ln>
+        </p:spPr>
+      </p:cxnSp>
+      <p:sp>
+        <p:nvSpPr>
+          <p:cNvPr id="61" name="S61"/>
+          <p:cNvSpPr/>
+          <p:nvPr/>
+        </p:nvSpPr>
+        <p:spPr>
+          <a:xfrm>
+            <a:off x="2489200" y="1219200"/>
+            <a:ext cx="1930400" cy="1778000"/>
+          </a:xfrm>
+          <a:prstGeom prst="rect">
+            <a:avLst/>
+          </a:prstGeom>
+          <a:solidFill>
+            <a:srgbClr val="F5F1E8"/>
+          </a:solidFill>
+          <a:ln w="12700">
+            <a:solidFill>
+              <a:srgbClr val="C9B991"/>
+            </a:solidFill>
+          </a:ln>
+        </p:spPr>
+        <p:txBody>
+          <a:bodyPr wrap="square" lIns="109728" tIns="82296" rIns="109728" bIns="82296" anchor="t">
+            <a:normAutofit/>
+          </a:bodyPr>
+          <a:lstStyle/>
+          <a:p>
+            <a:pPr algn="l">
+              <a:buNone/>
+            </a:pPr>
+            <a:r>
+              <a:rPr lang="en-US" sz="2200" b="1" i="0" dirty="0">
+                <a:solidFill>
+                  <a:srgbClr val="5C4826"/>
+                </a:solidFill>
+              </a:rPr>
+              <a:t>BUILD</a:t>
+            </a:r>
+          </a:p>
+          <a:p>
+            <a:pPr algn="l">
+              <a:spcBef>
+                <a:spcPts val="200"/>
+              </a:spcBef>
+              <a:buNone/>
+            </a:pPr>
+            <a:r>
+              <a:rPr lang="en-US" sz="2000" b="0" i="0" dirty="0">
+                <a:solidFill>
+                  <a:srgbClr val="000000"/>
+                </a:solidFill>
+              </a:rPr>
+              <a:t>Ships. Works for most.</a:t>
+            </a:r>
+          </a:p>
+        </p:txBody>
+      </p:sp>
+      <p:cxnSp>
+        <p:nvCxnSpPr>
+          <p:cNvPr id="71" name="L71"/>
+          <p:cNvCxnSpPr/>
+          <p:nvPr/>
+        </p:nvCxnSpPr>
+        <p:spPr>
+          <a:xfrm>
+            <a:off x="4445000" y="2108200"/>
+            <a:ext cx="228600" cy="0"/>
+          </a:xfrm>
+          <a:prstGeom prst="line">
+            <a:avLst/>
+          </a:prstGeom>
+          <a:ln w="19050">
+            <a:solidFill>
+              <a:srgbClr val="8E6F3E"/>
+            </a:solidFill>
+            <a:tailEnd type="triangle" w="med" len="med"/>
+          </a:ln>
+        </p:spPr>
+      </p:cxnSp>
+      <p:sp>
+        <p:nvSpPr>
+          <p:cNvPr id="62" name="S62"/>
+          <p:cNvSpPr/>
+          <p:nvPr/>
+        </p:nvSpPr>
+        <p:spPr>
+          <a:xfrm>
+            <a:off x="4699000" y="1219200"/>
+            <a:ext cx="1930400" cy="1778000"/>
+          </a:xfrm>
+          <a:prstGeom prst="rect">
+            <a:avLst/>
+          </a:prstGeom>
+          <a:solidFill>
+            <a:srgbClr val="F5F1E8"/>
+          </a:solidFill>
+          <a:ln w="12700">
+            <a:solidFill>
+              <a:srgbClr val="C9B991"/>
+            </a:solidFill>
+          </a:ln>
+        </p:spPr>
+        <p:txBody>
+          <a:bodyPr wrap="square" lIns="109728" tIns="82296" rIns="109728" bIns="82296" anchor="t">
+            <a:normAutofit/>
+          </a:bodyPr>
+          <a:lstStyle/>
+          <a:p>
+            <a:pPr algn="l">
+              <a:buNone/>
+            </a:pPr>
+            <a:r>
+              <a:rPr lang="en-US" sz="2200" b="1" i="0" dirty="0">
+                <a:solidFill>
+                  <a:srgbClr val="5C4826"/>
+                </a:solidFill>
+              </a:rPr>
+              <a:t>OBSERVE</a:t>
+            </a:r>
+          </a:p>
+          <a:p>
+            <a:pPr algn="l">
+              <a:spcBef>
+                <a:spcPts val="200"/>
+              </a:spcBef>
+              <a:buNone/>
+            </a:pPr>
+            <a:r>
+              <a:rPr lang="en-US" sz="2000" b="0" i="0" dirty="0">
+                <a:solidFill>
+                  <a:srgbClr val="000000"/>
+                </a:solidFill>
+              </a:rPr>
+              <a:t>Temporary changes sometimes become the new baseline.</a:t>
+            </a:r>
+          </a:p>
+        </p:txBody>
+      </p:sp>
+      <p:cxnSp>
+        <p:nvCxnSpPr>
+          <p:cNvPr id="72" name="L72"/>
+          <p:cNvCxnSpPr/>
+          <p:nvPr/>
+        </p:nvCxnSpPr>
+        <p:spPr>
+          <a:xfrm>
+            <a:off x="6654800" y="2108200"/>
+            <a:ext cx="228600" cy="0"/>
+          </a:xfrm>
+          <a:prstGeom prst="line">
+            <a:avLst/>
+          </a:prstGeom>
+          <a:ln w="19050">
+            <a:solidFill>
+              <a:srgbClr val="8E6F3E"/>
+            </a:solidFill>
+            <a:tailEnd type="triangle" w="med" len="med"/>
+          </a:ln>
+        </p:spPr>
+      </p:cxnSp>
+      <p:sp>
+        <p:nvSpPr>
+          <p:cNvPr id="63" name="S63"/>
+          <p:cNvSpPr/>
+          <p:nvPr/>
+        </p:nvSpPr>
+        <p:spPr>
+          <a:xfrm>
+            <a:off x="6908800" y="1219200"/>
+            <a:ext cx="1930400" cy="1778000"/>
+          </a:xfrm>
+          <a:prstGeom prst="rect">
+            <a:avLst/>
+          </a:prstGeom>
+          <a:solidFill>
+            <a:srgbClr val="8E6F3E"/>
+          </a:solidFill>
+          <a:ln>
+            <a:noFill/>
+          </a:ln>
+        </p:spPr>
+        <p:txBody>
+          <a:bodyPr wrap="square" lIns="109728" tIns="82296" rIns="109728" bIns="82296" anchor="t">
+            <a:normAutofit/>
+          </a:bodyPr>
+          <a:lstStyle/>
+          <a:p>
+            <a:pPr algn="l">
+              <a:buNone/>
+            </a:pPr>
+            <a:r>
+              <a:rPr lang="en-US" sz="2200" b="1" i="0" dirty="0">
+                <a:solidFill>
+                  <a:srgbClr val="FFFFFF"/>
+                </a:solidFill>
+              </a:rPr>
+              <a:t>LEARN</a:t>
+            </a:r>
+          </a:p>
+          <a:p>
+            <a:pPr algn="l">
+              <a:spcBef>
+                <a:spcPts val="200"/>
+              </a:spcBef>
+              <a:buNone/>
+            </a:pPr>
+            <a:r>
+              <a:rPr lang="en-US" sz="2000" b="0" i="0" dirty="0">
+                <a:solidFill>
+                  <a:srgbClr val="FFFFFF"/>
+                </a:solidFill>
+              </a:rPr>
+              <a:t>Persistence alone does not tell us what “normal” means.</a:t>
+            </a:r>
+          </a:p>
+        </p:txBody>
+      </p:sp>
+      <p:cxnSp>
+        <p:nvCxnSpPr>
+          <p:cNvPr id="80" name="L80"/>
+          <p:cNvCxnSpPr/>
+          <p:nvPr/>
+        </p:nvCxnSpPr>
+        <p:spPr>
+          <a:xfrm>
+            <a:off x="7874000" y="2997200"/>
+            <a:ext cx="0" cy="406400"/>
+          </a:xfrm>
+          <a:prstGeom prst="line">
+            <a:avLst/>
+          </a:prstGeom>
+          <a:ln w="19050">
+            <a:solidFill>
+              <a:srgbClr val="8E6F3E"/>
+            </a:solidFill>
+          </a:ln>
+        </p:spPr>
+      </p:cxnSp>
+      <p:cxnSp>
+        <p:nvCxnSpPr>
+          <p:cNvPr id="81" name="L81"/>
+          <p:cNvCxnSpPr/>
+          <p:nvPr/>
+        </p:nvCxnSpPr>
+        <p:spPr>
+          <a:xfrm>
+            <a:off x="1244600" y="3403600"/>
+            <a:ext cx="6629400" cy="0"/>
+          </a:xfrm>
+          <a:prstGeom prst="line">
+            <a:avLst/>
+          </a:prstGeom>
+          <a:ln w="19050">
+            <a:solidFill>
+              <a:srgbClr val="8E6F3E"/>
+            </a:solidFill>
+          </a:ln>
+        </p:spPr>
+      </p:cxnSp>
+      <p:cxnSp>
+        <p:nvCxnSpPr>
+          <p:cNvPr id="82" name="L82"/>
+          <p:cNvCxnSpPr/>
+          <p:nvPr/>
+        </p:nvCxnSpPr>
+        <p:spPr>
+          <a:xfrm flipV="1">
+            <a:off x="1244600" y="2997200"/>
+            <a:ext cx="0" cy="406400"/>
+          </a:xfrm>
+          <a:prstGeom prst="line">
+            <a:avLst/>
+          </a:prstGeom>
+          <a:ln w="19050">
+            <a:solidFill>
+              <a:srgbClr val="8E6F3E"/>
+            </a:solidFill>
+            <a:tailEnd type="triangle" w="med" len="med"/>
+          </a:ln>
+        </p:spPr>
+      </p:cxnSp>
+      <p:sp>
+        <p:nvSpPr>
+          <p:cNvPr id="83" name="T83"/>
+          <p:cNvSpPr txBox="1"/>
+          <p:nvPr/>
+        </p:nvSpPr>
+        <p:spPr>
+          <a:xfrm>
+            <a:off x="2286000" y="3505200"/>
+            <a:ext cx="4572000" cy="381000"/>
+          </a:xfrm>
+          <a:prstGeom prst="rect">
+            <a:avLst/>
+          </a:prstGeom>
+          <a:noFill/>
+          <a:ln>
+            <a:noFill/>
+          </a:ln>
+        </p:spPr>
+        <p:txBody>
+          <a:bodyPr wrap="square" lIns="0" tIns="0" rIns="0" bIns="0" anchor="t">
+            <a:normAutofit/>
+          </a:bodyPr>
+          <a:lstStyle/>
+          <a:p>
+            <a:pPr algn="ctr">
+              <a:buNone/>
+            </a:pPr>
+            <a:r>
+              <a:rPr lang="en-US" sz="2000" b="1" i="0" dirty="0">
+                <a:solidFill>
+                  <a:srgbClr val="5C4826"/>
+                </a:solidFill>
+              </a:rPr>
+              <a:t>and the specification changes</a:t>
+            </a:r>
+          </a:p>
+        </p:txBody>
+      </p:sp>
+      <p:sp>
+        <p:nvSpPr>
+          <p:cNvPr id="84" name="S84"/>
+          <p:cNvSpPr/>
+          <p:nvPr/>
+        </p:nvSpPr>
+        <p:spPr>
+          <a:xfrm>
+            <a:off x="279400" y="4064000"/>
+            <a:ext cx="8559800" cy="914400"/>
+          </a:xfrm>
+          <a:prstGeom prst="rect">
+            <a:avLst/>
+          </a:prstGeom>
+          <a:solidFill>
+            <a:srgbClr val="8E6F3E"/>
+          </a:solidFill>
+          <a:ln>
+            <a:noFill/>
+          </a:ln>
+        </p:spPr>
+        <p:txBody>
+          <a:bodyPr wrap="square" lIns="109728" tIns="82296" rIns="109728" bIns="82296" anchor="ctr">
+            <a:normAutofit/>
+          </a:bodyPr>
+          <a:lstStyle/>
+          <a:p>
+            <a:pPr algn="ctr">
+              <a:buNone/>
+            </a:pPr>
+            <a:r>
+              <a:rPr lang="en-US" sz="2200" b="0" i="0" dirty="0">
+                <a:solidFill>
+                  <a:srgbClr val="FFFFFF"/>
+                </a:solidFill>
+              </a:rPr>
+              <a:t>The code did what we specified.</a:t>
+            </a:r>
+          </a:p>
+          <a:p>
+            <a:pPr algn="ctr">
+              <a:spcBef>
+                <a:spcPts val="180"/>
+              </a:spcBef>
+              <a:buNone/>
+            </a:pPr>
+            <a:r>
+              <a:rPr lang="en-US" sz="2200" b="1" i="0" dirty="0">
+                <a:solidFill>
+                  <a:srgbClr val="FFFFFF"/>
+                </a:solidFill>
+              </a:rPr>
+              <a:t>Use taught us that the boundary was wrong.</a:t>
+            </a:r>
+          </a:p>
+        </p:txBody>
+      </p:sp>
+    </p:spTree>
+    <p:extLst>
+      <p:ext uri="{BB962C8B-B14F-4D97-AF65-F5344CB8AC3E}">
+        <p14:creationId xmlns:p14="http://schemas.microsoft.com/office/powerpoint/2010/main" val="326971963"/>
+      </p:ext>
+    </p:extLst>
+  </p:cSld>
+  <p:clrMapOvr>
+    <a:masterClrMapping/>
+  </p:clrMapOvr>
+</p:sld>
+</file>
+
+<file path=ppt/slides/slide29.xml><?xml version="1.0" encoding="utf-8"?>
+<p:sld xmlns:a="http://schemas.openxmlformats.org/drawingml/2006/main" xmlns:r="http://schemas.openxmlformats.org/officeDocument/2006/relationships" xmlns:p="http://schemas.openxmlformats.org/presentationml/2006/main">
+  <p:cSld>
+    <p:spTree>
+      <p:nvGrpSpPr>
+        <p:cNvPr id="1" name=""/>
+        <p:cNvGrpSpPr/>
+        <p:nvPr/>
+      </p:nvGrpSpPr>
+      <p:grpSpPr>
+        <a:xfrm>
+          <a:off x="0" y="0"/>
+          <a:ext cx="0" cy="0"/>
+          <a:chOff x="0" y="0"/>
+          <a:chExt cx="0" cy="0"/>
+        </a:xfrm>
+      </p:grpSpPr>
+      <p:sp>
+        <p:nvSpPr>
+          <p:cNvPr id="3" name="Title 2">
+            <a:extLst>
+              <a:ext uri="{FF2B5EF4-FFF2-40B4-BE49-F238E27FC236}">
                 <a16:creationId xmlns:a16="http://schemas.microsoft.com/office/drawing/2014/main" id="{D7148685-A5A9-0DEB-687B-1A4E954B04B5}"/>
               </a:ext>
             </a:extLst>
@@ -21967,7 +22311,217 @@
 </p:sld>
 </file>
 
-<file path=ppt/slides/slide29.xml><?xml version="1.0" encoding="utf-8"?>
+<file path=ppt/slides/slide3.xml><?xml version="1.0" encoding="utf-8"?>
+<p:sld xmlns:a="http://schemas.openxmlformats.org/drawingml/2006/main" xmlns:r="http://schemas.openxmlformats.org/officeDocument/2006/relationships" xmlns:p="http://schemas.openxmlformats.org/presentationml/2006/main">
+  <p:cSld>
+    <p:spTree>
+      <p:nvGrpSpPr>
+        <p:cNvPr id="1" name=""/>
+        <p:cNvGrpSpPr/>
+        <p:nvPr/>
+      </p:nvGrpSpPr>
+      <p:grpSpPr>
+        <a:xfrm>
+          <a:off x="0" y="0"/>
+          <a:ext cx="0" cy="0"/>
+          <a:chOff x="0" y="0"/>
+          <a:chExt cx="0" cy="0"/>
+        </a:xfrm>
+      </p:grpSpPr>
+      <p:sp>
+        <p:nvSpPr>
+          <p:cNvPr id="2" name="Title 1">
+            <a:extLst>
+              <a:ext uri="{FF2B5EF4-FFF2-40B4-BE49-F238E27FC236}">
+                <a16:creationId xmlns:a16="http://schemas.microsoft.com/office/drawing/2014/main" id="{53AD71CC-2D99-58B7-128A-D2E025CA744E}"/>
+              </a:ext>
+            </a:extLst>
+          </p:cNvPr>
+          <p:cNvSpPr>
+            <a:spLocks noGrp="1"/>
+          </p:cNvSpPr>
+          <p:nvPr>
+            <p:ph type="title"/>
+          </p:nvPr>
+        </p:nvSpPr>
+        <p:spPr>
+          <a:xfrm>
+            <a:off x="685800" y="1879600"/>
+            <a:ext cx="7772400" cy="838200"/>
+          </a:xfrm>
+        </p:spPr>
+        <p:txBody>
+          <a:bodyPr>
+            <a:normAutofit fontScale="90000"/>
+          </a:bodyPr>
+          <a:lstStyle/>
+          <a:p>
+            <a:pPr algn="ctr">
+              <a:buNone/>
+            </a:pPr>
+            <a:r>
+              <a:rPr lang="en-US" sz="3600" b="1" i="0" dirty="0">
+                <a:solidFill>
+                  <a:srgbClr val="000000"/>
+                </a:solidFill>
+              </a:rPr>
+              <a:t>Specification</a:t>
+            </a:r>
+          </a:p>
+        </p:txBody>
+      </p:sp>
+      <p:sp>
+        <p:nvSpPr>
+          <p:cNvPr id="3" name="Slide Number Placeholder 2">
+            <a:extLst>
+              <a:ext uri="{FF2B5EF4-FFF2-40B4-BE49-F238E27FC236}">
+                <a16:creationId xmlns:a16="http://schemas.microsoft.com/office/drawing/2014/main" id="{61C980F7-CD42-F0F4-9D51-7D42498354DC}"/>
+              </a:ext>
+            </a:extLst>
+          </p:cNvPr>
+          <p:cNvSpPr>
+            <a:spLocks noGrp="1"/>
+          </p:cNvSpPr>
+          <p:nvPr>
+            <p:ph type="sldNum" sz="quarter" idx="4"/>
+          </p:nvPr>
+        </p:nvSpPr>
+        <p:spPr/>
+        <p:txBody>
+          <a:bodyPr/>
+          <a:lstStyle/>
+          <a:p>
+            <a:fld id="{B7EB45DA-9A0D-DC49-8E02-F30A5DDC21C3}" type="slidenum">
+              <a:rPr lang="en-US" smtClean="0"/>
+              <a:t>3</a:t>
+            </a:fld>
+            <a:endParaRPr lang="en-US"/>
+          </a:p>
+        </p:txBody>
+      </p:sp>
+      <p:sp>
+        <p:nvSpPr>
+          <p:cNvPr id="50" name="T50"/>
+          <p:cNvSpPr txBox="1"/>
+          <p:nvPr/>
+        </p:nvSpPr>
+        <p:spPr>
+          <a:xfrm>
+            <a:off x="685800" y="1397000"/>
+            <a:ext cx="7772400" cy="355600"/>
+          </a:xfrm>
+          <a:prstGeom prst="rect">
+            <a:avLst/>
+          </a:prstGeom>
+          <a:noFill/>
+          <a:ln>
+            <a:noFill/>
+          </a:ln>
+        </p:spPr>
+        <p:txBody>
+          <a:bodyPr wrap="square" lIns="0" tIns="0" rIns="0" bIns="0" anchor="t">
+            <a:normAutofit/>
+          </a:bodyPr>
+          <a:lstStyle/>
+          <a:p>
+            <a:pPr algn="ctr">
+              <a:buNone/>
+            </a:pPr>
+            <a:r>
+              <a:rPr lang="en-US" sz="2000" b="1" i="0" dirty="0">
+                <a:solidFill>
+                  <a:srgbClr val="8E6F3E"/>
+                </a:solidFill>
+              </a:rPr>
+              <a:t>SECTION 1</a:t>
+            </a:r>
+          </a:p>
+        </p:txBody>
+      </p:sp>
+      <p:sp>
+        <p:nvSpPr>
+          <p:cNvPr id="51" name="S51"/>
+          <p:cNvSpPr/>
+          <p:nvPr/>
+        </p:nvSpPr>
+        <p:spPr>
+          <a:xfrm>
+            <a:off x="3429000" y="2844800"/>
+            <a:ext cx="2286000" cy="50800"/>
+          </a:xfrm>
+          <a:prstGeom prst="rect">
+            <a:avLst/>
+          </a:prstGeom>
+          <a:solidFill>
+            <a:srgbClr val="8E6F3E"/>
+          </a:solidFill>
+          <a:ln>
+            <a:noFill/>
+          </a:ln>
+        </p:spPr>
+        <p:txBody>
+          <a:bodyPr wrap="square" lIns="109728" tIns="82296" rIns="109728" bIns="82296" anchor="t">
+            <a:normAutofit fontScale="25000" lnSpcReduction="20000"/>
+          </a:bodyPr>
+          <a:lstStyle/>
+          <a:p>
+            <a:endParaRPr/>
+          </a:p>
+        </p:txBody>
+      </p:sp>
+      <p:sp>
+        <p:nvSpPr>
+          <p:cNvPr id="52" name="T52"/>
+          <p:cNvSpPr txBox="1"/>
+          <p:nvPr/>
+        </p:nvSpPr>
+        <p:spPr>
+          <a:xfrm>
+            <a:off x="1887483" y="3429000"/>
+            <a:ext cx="5369034" cy="889000"/>
+          </a:xfrm>
+          <a:prstGeom prst="rect">
+            <a:avLst/>
+          </a:prstGeom>
+          <a:noFill/>
+          <a:ln>
+            <a:noFill/>
+          </a:ln>
+        </p:spPr>
+        <p:txBody>
+          <a:bodyPr wrap="square" lIns="0" tIns="0" rIns="0" bIns="0" anchor="t">
+            <a:normAutofit/>
+          </a:bodyPr>
+          <a:lstStyle/>
+          <a:p>
+            <a:pPr algn="ctr">
+              <a:buNone/>
+            </a:pPr>
+            <a:r>
+              <a:rPr lang="en-US" sz="2200" b="0" i="0" dirty="0">
+                <a:solidFill>
+                  <a:srgbClr val="555960"/>
+                </a:solidFill>
+              </a:rPr>
+              <a:t>What must we make explicit so that an acceptable system can be built?</a:t>
+            </a:r>
+          </a:p>
+        </p:txBody>
+      </p:sp>
+    </p:spTree>
+    <p:extLst>
+      <p:ext uri="{BB962C8B-B14F-4D97-AF65-F5344CB8AC3E}">
+        <p14:creationId xmlns:p14="http://schemas.microsoft.com/office/powerpoint/2010/main" val="238252463"/>
+      </p:ext>
+    </p:extLst>
+  </p:cSld>
+  <p:clrMapOvr>
+    <a:masterClrMapping/>
+  </p:clrMapOvr>
+</p:sld>
+</file>
+
+<file path=ppt/slides/slide30.xml><?xml version="1.0" encoding="utf-8"?>
 <p:sld xmlns:a="http://schemas.openxmlformats.org/drawingml/2006/main" xmlns:r="http://schemas.openxmlformats.org/officeDocument/2006/relationships" xmlns:p="http://schemas.openxmlformats.org/presentationml/2006/main">
   <p:cSld>
     <p:spTree>
@@ -22958,7 +23512,7 @@
 </p:sld>
 </file>
 
-<file path=ppt/slides/slide3.xml><?xml version="1.0" encoding="utf-8"?>
+<file path=ppt/slides/slide4.xml><?xml version="1.0" encoding="utf-8"?>
 <p:sld xmlns:a="http://schemas.openxmlformats.org/drawingml/2006/main" xmlns:r="http://schemas.openxmlformats.org/officeDocument/2006/relationships" xmlns:p="http://schemas.openxmlformats.org/presentationml/2006/main">
   <p:cSld>
     <p:spTree>
@@ -22977,216 +23531,6 @@
       </p:grpSpPr>
       <p:sp>
         <p:nvSpPr>
-          <p:cNvPr id="2" name="Title 1">
-            <a:extLst>
-              <a:ext uri="{FF2B5EF4-FFF2-40B4-BE49-F238E27FC236}">
-                <a16:creationId xmlns:a16="http://schemas.microsoft.com/office/drawing/2014/main" id="{53AD71CC-2D99-58B7-128A-D2E025CA744E}"/>
-              </a:ext>
-            </a:extLst>
-          </p:cNvPr>
-          <p:cNvSpPr>
-            <a:spLocks noGrp="1"/>
-          </p:cNvSpPr>
-          <p:nvPr>
-            <p:ph type="title"/>
-          </p:nvPr>
-        </p:nvSpPr>
-        <p:spPr>
-          <a:xfrm>
-            <a:off x="685800" y="1879600"/>
-            <a:ext cx="7772400" cy="838200"/>
-          </a:xfrm>
-        </p:spPr>
-        <p:txBody>
-          <a:bodyPr>
-            <a:normAutofit fontScale="90000"/>
-          </a:bodyPr>
-          <a:lstStyle/>
-          <a:p>
-            <a:pPr algn="ctr">
-              <a:buNone/>
-            </a:pPr>
-            <a:r>
-              <a:rPr lang="en-US" sz="3600" b="1" i="0" dirty="0">
-                <a:solidFill>
-                  <a:srgbClr val="000000"/>
-                </a:solidFill>
-              </a:rPr>
-              <a:t>Specification</a:t>
-            </a:r>
-          </a:p>
-        </p:txBody>
-      </p:sp>
-      <p:sp>
-        <p:nvSpPr>
-          <p:cNvPr id="3" name="Slide Number Placeholder 2">
-            <a:extLst>
-              <a:ext uri="{FF2B5EF4-FFF2-40B4-BE49-F238E27FC236}">
-                <a16:creationId xmlns:a16="http://schemas.microsoft.com/office/drawing/2014/main" id="{61C980F7-CD42-F0F4-9D51-7D42498354DC}"/>
-              </a:ext>
-            </a:extLst>
-          </p:cNvPr>
-          <p:cNvSpPr>
-            <a:spLocks noGrp="1"/>
-          </p:cNvSpPr>
-          <p:nvPr>
-            <p:ph type="sldNum" sz="quarter" idx="4"/>
-          </p:nvPr>
-        </p:nvSpPr>
-        <p:spPr/>
-        <p:txBody>
-          <a:bodyPr/>
-          <a:lstStyle/>
-          <a:p>
-            <a:fld id="{B7EB45DA-9A0D-DC49-8E02-F30A5DDC21C3}" type="slidenum">
-              <a:rPr lang="en-US" smtClean="0"/>
-              <a:t>3</a:t>
-            </a:fld>
-            <a:endParaRPr lang="en-US"/>
-          </a:p>
-        </p:txBody>
-      </p:sp>
-      <p:sp>
-        <p:nvSpPr>
-          <p:cNvPr id="50" name="T50"/>
-          <p:cNvSpPr txBox="1"/>
-          <p:nvPr/>
-        </p:nvSpPr>
-        <p:spPr>
-          <a:xfrm>
-            <a:off x="685800" y="1397000"/>
-            <a:ext cx="7772400" cy="355600"/>
-          </a:xfrm>
-          <a:prstGeom prst="rect">
-            <a:avLst/>
-          </a:prstGeom>
-          <a:noFill/>
-          <a:ln>
-            <a:noFill/>
-          </a:ln>
-        </p:spPr>
-        <p:txBody>
-          <a:bodyPr wrap="square" lIns="0" tIns="0" rIns="0" bIns="0" anchor="t">
-            <a:normAutofit/>
-          </a:bodyPr>
-          <a:lstStyle/>
-          <a:p>
-            <a:pPr algn="ctr">
-              <a:buNone/>
-            </a:pPr>
-            <a:r>
-              <a:rPr lang="en-US" sz="2000" b="1" i="0" dirty="0">
-                <a:solidFill>
-                  <a:srgbClr val="8E6F3E"/>
-                </a:solidFill>
-              </a:rPr>
-              <a:t>SECTION 1</a:t>
-            </a:r>
-          </a:p>
-        </p:txBody>
-      </p:sp>
-      <p:sp>
-        <p:nvSpPr>
-          <p:cNvPr id="51" name="S51"/>
-          <p:cNvSpPr/>
-          <p:nvPr/>
-        </p:nvSpPr>
-        <p:spPr>
-          <a:xfrm>
-            <a:off x="3429000" y="2844800"/>
-            <a:ext cx="2286000" cy="50800"/>
-          </a:xfrm>
-          <a:prstGeom prst="rect">
-            <a:avLst/>
-          </a:prstGeom>
-          <a:solidFill>
-            <a:srgbClr val="8E6F3E"/>
-          </a:solidFill>
-          <a:ln>
-            <a:noFill/>
-          </a:ln>
-        </p:spPr>
-        <p:txBody>
-          <a:bodyPr wrap="square" lIns="109728" tIns="82296" rIns="109728" bIns="82296" anchor="t">
-            <a:normAutofit fontScale="25000" lnSpcReduction="20000"/>
-          </a:bodyPr>
-          <a:lstStyle/>
-          <a:p>
-            <a:endParaRPr/>
-          </a:p>
-        </p:txBody>
-      </p:sp>
-      <p:sp>
-        <p:nvSpPr>
-          <p:cNvPr id="52" name="T52"/>
-          <p:cNvSpPr txBox="1"/>
-          <p:nvPr/>
-        </p:nvSpPr>
-        <p:spPr>
-          <a:xfrm>
-            <a:off x="1887483" y="3429000"/>
-            <a:ext cx="5369034" cy="889000"/>
-          </a:xfrm>
-          <a:prstGeom prst="rect">
-            <a:avLst/>
-          </a:prstGeom>
-          <a:noFill/>
-          <a:ln>
-            <a:noFill/>
-          </a:ln>
-        </p:spPr>
-        <p:txBody>
-          <a:bodyPr wrap="square" lIns="0" tIns="0" rIns="0" bIns="0" anchor="t">
-            <a:normAutofit/>
-          </a:bodyPr>
-          <a:lstStyle/>
-          <a:p>
-            <a:pPr algn="ctr">
-              <a:buNone/>
-            </a:pPr>
-            <a:r>
-              <a:rPr lang="en-US" sz="2200" b="0" i="0" dirty="0">
-                <a:solidFill>
-                  <a:srgbClr val="555960"/>
-                </a:solidFill>
-              </a:rPr>
-              <a:t>What must we make explicit so that an acceptable system can be built?</a:t>
-            </a:r>
-          </a:p>
-        </p:txBody>
-      </p:sp>
-    </p:spTree>
-    <p:extLst>
-      <p:ext uri="{BB962C8B-B14F-4D97-AF65-F5344CB8AC3E}">
-        <p14:creationId xmlns:p14="http://schemas.microsoft.com/office/powerpoint/2010/main" val="238252463"/>
-      </p:ext>
-    </p:extLst>
-  </p:cSld>
-  <p:clrMapOvr>
-    <a:masterClrMapping/>
-  </p:clrMapOvr>
-</p:sld>
-</file>
-
-<file path=ppt/slides/slide30.xml><?xml version="1.0" encoding="utf-8"?>
-<p:sld xmlns:a="http://schemas.openxmlformats.org/drawingml/2006/main" xmlns:r="http://schemas.openxmlformats.org/officeDocument/2006/relationships" xmlns:p="http://schemas.openxmlformats.org/presentationml/2006/main">
-  <p:cSld>
-    <p:spTree>
-      <p:nvGrpSpPr>
-        <p:cNvPr id="1" name=""/>
-        <p:cNvGrpSpPr/>
-        <p:nvPr/>
-      </p:nvGrpSpPr>
-      <p:grpSpPr>
-        <a:xfrm>
-          <a:off x="0" y="0"/>
-          <a:ext cx="0" cy="0"/>
-          <a:chOff x="0" y="0"/>
-          <a:chExt cx="0" cy="0"/>
-        </a:xfrm>
-      </p:grpSpPr>
-      <p:sp>
-        <p:nvSpPr>
           <p:cNvPr id="3" name="Title 2"/>
           <p:cNvSpPr>
             <a:spLocks noGrp="1"/>
@@ -23920,7 +24264,7 @@
 </p:sld>
 </file>
 
-<file path=ppt/slides/slide4.xml><?xml version="1.0" encoding="utf-8"?>
+<file path=ppt/slides/slide5.xml><?xml version="1.0" encoding="utf-8"?>
 <p:sld xmlns:a="http://schemas.openxmlformats.org/drawingml/2006/main" xmlns:r="http://schemas.openxmlformats.org/officeDocument/2006/relationships" xmlns:p="http://schemas.openxmlformats.org/presentationml/2006/main">
   <p:cSld>
     <p:spTree>
@@ -24516,7 +24860,7 @@
 </p:sld>
 </file>
 
-<file path=ppt/slides/slide5.xml><?xml version="1.0" encoding="utf-8"?>
+<file path=ppt/slides/slide6.xml><?xml version="1.0" encoding="utf-8"?>
 <p:sld xmlns:a="http://schemas.openxmlformats.org/drawingml/2006/main" xmlns:r="http://schemas.openxmlformats.org/officeDocument/2006/relationships" xmlns:p="http://schemas.openxmlformats.org/presentationml/2006/main">
   <p:cSld>
     <p:spTree>
@@ -25288,7 +25632,7 @@
 </p:sld>
 </file>
 
-<file path=ppt/slides/slide6.xml><?xml version="1.0" encoding="utf-8"?>
+<file path=ppt/slides/slide7.xml><?xml version="1.0" encoding="utf-8"?>
 <p:sld xmlns:a="http://schemas.openxmlformats.org/drawingml/2006/main" xmlns:r="http://schemas.openxmlformats.org/officeDocument/2006/relationships" xmlns:p="http://schemas.openxmlformats.org/presentationml/2006/main">
   <p:cSld>
     <p:spTree>
@@ -25998,7 +26342,7 @@
 </p:sld>
 </file>
 
-<file path=ppt/slides/slide7.xml><?xml version="1.0" encoding="utf-8"?>
+<file path=ppt/slides/slide8.xml><?xml version="1.0" encoding="utf-8"?>
 <p:sld xmlns:a="http://schemas.openxmlformats.org/drawingml/2006/main" xmlns:r="http://schemas.openxmlformats.org/officeDocument/2006/relationships" xmlns:p="http://schemas.openxmlformats.org/presentationml/2006/main">
   <p:cSld>
     <p:spTree>
@@ -26561,7 +26905,7 @@
 </p:sld>
 </file>
 
-<file path=ppt/slides/slide8.xml><?xml version="1.0" encoding="utf-8"?>
+<file path=ppt/slides/slide9.xml><?xml version="1.0" encoding="utf-8"?>
 <p:sld xmlns:a="http://schemas.openxmlformats.org/drawingml/2006/main" xmlns:r="http://schemas.openxmlformats.org/officeDocument/2006/relationships" xmlns:p="http://schemas.openxmlformats.org/presentationml/2006/main">
   <p:cSld>
     <p:spTree>
@@ -27041,485 +27385,6 @@
     <p:extLst>
       <p:ext uri="{BB962C8B-B14F-4D97-AF65-F5344CB8AC3E}">
         <p14:creationId xmlns:p14="http://schemas.microsoft.com/office/powerpoint/2010/main" val="267570089"/>
-      </p:ext>
-    </p:extLst>
-  </p:cSld>
-  <p:clrMapOvr>
-    <a:masterClrMapping/>
-  </p:clrMapOvr>
-</p:sld>
-</file>
-
-<file path=ppt/slides/slide9.xml><?xml version="1.0" encoding="utf-8"?>
-<p:sld xmlns:a="http://schemas.openxmlformats.org/drawingml/2006/main" xmlns:r="http://schemas.openxmlformats.org/officeDocument/2006/relationships" xmlns:p="http://schemas.openxmlformats.org/presentationml/2006/main">
-  <p:cSld>
-    <p:spTree>
-      <p:nvGrpSpPr>
-        <p:cNvPr id="1" name=""/>
-        <p:cNvGrpSpPr/>
-        <p:nvPr/>
-      </p:nvGrpSpPr>
-      <p:grpSpPr>
-        <a:xfrm>
-          <a:off x="0" y="0"/>
-          <a:ext cx="0" cy="0"/>
-          <a:chOff x="0" y="0"/>
-          <a:chExt cx="0" cy="0"/>
-        </a:xfrm>
-      </p:grpSpPr>
-      <p:sp>
-        <p:nvSpPr>
-          <p:cNvPr id="3" name="Title 2">
-            <a:extLst>
-              <a:ext uri="{FF2B5EF4-FFF2-40B4-BE49-F238E27FC236}">
-                <a16:creationId xmlns:a16="http://schemas.microsoft.com/office/drawing/2014/main" id="{742BD16B-B74A-660F-AAAE-24045A33683D}"/>
-              </a:ext>
-            </a:extLst>
-          </p:cNvPr>
-          <p:cNvSpPr>
-            <a:spLocks noGrp="1"/>
-          </p:cNvSpPr>
-          <p:nvPr>
-            <p:ph type="title"/>
-          </p:nvPr>
-        </p:nvSpPr>
-        <p:spPr/>
-        <p:txBody>
-          <a:bodyPr>
-            <a:normAutofit fontScale="90000"/>
-          </a:bodyPr>
-          <a:lstStyle/>
-          <a:p>
-            <a:pPr>
-              <a:buNone/>
-            </a:pPr>
-            <a:r>
-              <a:rPr lang="en-US" b="1" dirty="0"/>
-              <a:t>A real software specification: the A-7E aircraft</a:t>
-            </a:r>
-          </a:p>
-        </p:txBody>
-      </p:sp>
-      <p:sp>
-        <p:nvSpPr>
-          <p:cNvPr id="4" name="Slide Number Placeholder 3">
-            <a:extLst>
-              <a:ext uri="{FF2B5EF4-FFF2-40B4-BE49-F238E27FC236}">
-                <a16:creationId xmlns:a16="http://schemas.microsoft.com/office/drawing/2014/main" id="{24CAFB3C-B634-E09C-E7C6-7A9A685898FD}"/>
-              </a:ext>
-            </a:extLst>
-          </p:cNvPr>
-          <p:cNvSpPr>
-            <a:spLocks noGrp="1"/>
-          </p:cNvSpPr>
-          <p:nvPr>
-            <p:ph type="sldNum" sz="quarter" idx="4"/>
-          </p:nvPr>
-        </p:nvSpPr>
-        <p:spPr/>
-        <p:txBody>
-          <a:bodyPr/>
-          <a:lstStyle/>
-          <a:p>
-            <a:fld id="{B7EB45DA-9A0D-DC49-8E02-F30A5DDC21C3}" type="slidenum">
-              <a:rPr lang="en-US" smtClean="0"/>
-              <a:t>9</a:t>
-            </a:fld>
-            <a:endParaRPr lang="en-US"/>
-          </a:p>
-        </p:txBody>
-      </p:sp>
-      <p:sp>
-        <p:nvSpPr>
-          <p:cNvPr id="201" name="Kicker"/>
-          <p:cNvSpPr txBox="1"/>
-          <p:nvPr/>
-        </p:nvSpPr>
-        <p:spPr>
-          <a:xfrm>
-            <a:off x="279400" y="812800"/>
-            <a:ext cx="5969000" cy="279400"/>
-          </a:xfrm>
-          <a:prstGeom prst="rect">
-            <a:avLst/>
-          </a:prstGeom>
-          <a:noFill/>
-          <a:ln>
-            <a:noFill/>
-          </a:ln>
-        </p:spPr>
-        <p:txBody>
-          <a:bodyPr lIns="0" tIns="91440" rIns="0" bIns="91440" anchor="t">
-            <a:noAutofit/>
-          </a:bodyPr>
-          <a:lstStyle/>
-          <a:p>
-            <a:pPr>
-              <a:buNone/>
-            </a:pPr>
-            <a:r>
-              <a:rPr lang="en-US" sz="1400" b="1" dirty="0">
-                <a:solidFill>
-                  <a:srgbClr val="8E6F3E"/>
-                </a:solidFill>
-              </a:rPr>
-              <a:t>Alspaugh et al., 1992 · Software Requirements for the A-7E Aircraft</a:t>
-            </a:r>
-          </a:p>
-        </p:txBody>
-      </p:sp>
-      <p:sp>
-        <p:nvSpPr>
-          <p:cNvPr id="202" name="CaseLabel"/>
-          <p:cNvSpPr txBox="1"/>
-          <p:nvPr/>
-        </p:nvSpPr>
-        <p:spPr>
-          <a:xfrm>
-            <a:off x="6350000" y="812800"/>
-            <a:ext cx="2489200" cy="279400"/>
-          </a:xfrm>
-          <a:prstGeom prst="rect">
-            <a:avLst/>
-          </a:prstGeom>
-          <a:noFill/>
-          <a:ln>
-            <a:noFill/>
-          </a:ln>
-        </p:spPr>
-        <p:txBody>
-          <a:bodyPr lIns="0" tIns="91440" rIns="0" bIns="91440" anchor="t">
-            <a:noAutofit/>
-          </a:bodyPr>
-          <a:lstStyle/>
-          <a:p>
-            <a:pPr algn="r">
-              <a:buNone/>
-            </a:pPr>
-            <a:r>
-              <a:rPr lang="en-US" sz="1200" b="1" spc="100" dirty="0">
-                <a:solidFill>
-                  <a:srgbClr val="8E6F3E"/>
-                </a:solidFill>
-              </a:rPr>
-              <a:t>A-7E CASE · 1 OF 5</a:t>
-            </a:r>
-          </a:p>
-        </p:txBody>
-      </p:sp>
-      <p:sp>
-        <p:nvSpPr>
-          <p:cNvPr id="203" name="Point"/>
-          <p:cNvSpPr txBox="1"/>
-          <p:nvPr/>
-        </p:nvSpPr>
-        <p:spPr>
-          <a:xfrm>
-            <a:off x="279400" y="1576556"/>
-            <a:ext cx="4267200" cy="1219200"/>
-          </a:xfrm>
-          <a:prstGeom prst="rect">
-            <a:avLst/>
-          </a:prstGeom>
-          <a:noFill/>
-          <a:ln>
-            <a:noFill/>
-          </a:ln>
-        </p:spPr>
-        <p:txBody>
-          <a:bodyPr lIns="0" tIns="91440" rIns="0" bIns="91440" anchor="t">
-            <a:noAutofit/>
-          </a:bodyPr>
-          <a:lstStyle/>
-          <a:p>
-            <a:pPr>
-              <a:buNone/>
-            </a:pPr>
-            <a:r>
-              <a:rPr lang="en-US" sz="2000" b="1" dirty="0">
-                <a:solidFill>
-                  <a:srgbClr val="1A1A1A"/>
-                </a:solidFill>
-              </a:rPr>
-              <a:t>A substantial specification of externally visible behavior</a:t>
-            </a:r>
-          </a:p>
-          <a:p>
-            <a:pPr>
-              <a:spcBef>
-                <a:spcPts val="300"/>
-              </a:spcBef>
-              <a:buNone/>
-            </a:pPr>
-            <a:r>
-              <a:rPr lang="en-US" sz="1600" dirty="0">
-                <a:solidFill>
-                  <a:srgbClr val="555960"/>
-                </a:solidFill>
-              </a:rPr>
-              <a:t>472 pages · nine chapters</a:t>
-            </a:r>
-          </a:p>
-        </p:txBody>
-      </p:sp>
-      <p:sp>
-        <p:nvSpPr>
-          <p:cNvPr id="204" name="Point"/>
-          <p:cNvSpPr txBox="1"/>
-          <p:nvPr/>
-        </p:nvSpPr>
-        <p:spPr>
-          <a:xfrm>
-            <a:off x="279400" y="2973556"/>
-            <a:ext cx="4267200" cy="1219200"/>
-          </a:xfrm>
-          <a:prstGeom prst="rect">
-            <a:avLst/>
-          </a:prstGeom>
-          <a:noFill/>
-          <a:ln>
-            <a:noFill/>
-          </a:ln>
-        </p:spPr>
-        <p:txBody>
-          <a:bodyPr lIns="0" tIns="91440" rIns="0" bIns="91440" anchor="t">
-            <a:noAutofit/>
-          </a:bodyPr>
-          <a:lstStyle/>
-          <a:p>
-            <a:pPr>
-              <a:buNone/>
-            </a:pPr>
-            <a:r>
-              <a:rPr lang="en-US" sz="2000" b="1" dirty="0">
-                <a:solidFill>
-                  <a:srgbClr val="1A1A1A"/>
-                </a:solidFill>
-              </a:rPr>
-              <a:t>Multiple representations</a:t>
-            </a:r>
-          </a:p>
-          <a:p>
-            <a:pPr>
-              <a:spcBef>
-                <a:spcPts val="300"/>
-              </a:spcBef>
-              <a:buNone/>
-            </a:pPr>
-            <a:r>
-              <a:rPr lang="en-US" sz="1600" dirty="0">
-                <a:solidFill>
-                  <a:srgbClr val="555960"/>
-                </a:solidFill>
-              </a:rPr>
-              <a:t>prose · defined data · tables · modes · timing constraints</a:t>
-            </a:r>
-          </a:p>
-        </p:txBody>
-      </p:sp>
-      <p:sp>
-        <p:nvSpPr>
-          <p:cNvPr id="205" name="Point"/>
-          <p:cNvSpPr txBox="1"/>
-          <p:nvPr/>
-        </p:nvSpPr>
-        <p:spPr>
-          <a:xfrm>
-            <a:off x="279400" y="4370556"/>
-            <a:ext cx="4267200" cy="889000"/>
-          </a:xfrm>
-          <a:prstGeom prst="rect">
-            <a:avLst/>
-          </a:prstGeom>
-          <a:noFill/>
-          <a:ln>
-            <a:noFill/>
-          </a:ln>
-        </p:spPr>
-        <p:txBody>
-          <a:bodyPr lIns="0" tIns="91440" rIns="0" bIns="91440" anchor="t">
-            <a:noAutofit/>
-          </a:bodyPr>
-          <a:lstStyle/>
-          <a:p>
-            <a:pPr>
-              <a:buNone/>
-            </a:pPr>
-            <a:r>
-              <a:rPr lang="en-US" sz="2000" b="1" dirty="0">
-                <a:solidFill>
-                  <a:srgbClr val="1A1A1A"/>
-                </a:solidFill>
-              </a:rPr>
-              <a:t>Deliberately avoids unnecessary implementation decisions</a:t>
-            </a:r>
-          </a:p>
-        </p:txBody>
-      </p:sp>
-      <p:sp>
-        <p:nvSpPr>
-          <p:cNvPr id="206" name="DocPage"/>
-          <p:cNvSpPr txBox="1"/>
-          <p:nvPr/>
-        </p:nvSpPr>
-        <p:spPr>
-          <a:xfrm>
-            <a:off x="4775200" y="1474956"/>
-            <a:ext cx="4064000" cy="4140200"/>
-          </a:xfrm>
-          <a:prstGeom prst="rect">
-            <a:avLst/>
-          </a:prstGeom>
-          <a:solidFill>
-            <a:srgbClr val="FFFFFF"/>
-          </a:solidFill>
-          <a:ln w="9525">
-            <a:solidFill>
-              <a:srgbClr val="BFB8A8"/>
-            </a:solidFill>
-          </a:ln>
-        </p:spPr>
-        <p:txBody>
-          <a:bodyPr lIns="182880" tIns="91440" rIns="182880" bIns="91440" anchor="ctr">
-            <a:noAutofit/>
-          </a:bodyPr>
-          <a:lstStyle/>
-          <a:p>
-            <a:pPr algn="ctr">
-              <a:buNone/>
-            </a:pPr>
-            <a:r>
-              <a:rPr lang="en-US" sz="1100" b="1" spc="120" dirty="0">
-                <a:solidFill>
-                  <a:srgbClr val="3A3A3A"/>
-                </a:solidFill>
-                <a:latin typeface="Times New Roman"/>
-              </a:rPr>
-              <a:t>NAVAL RESEARCH LABORATORY</a:t>
-            </a:r>
-          </a:p>
-          <a:p>
-            <a:pPr algn="ctr">
-              <a:spcBef>
-                <a:spcPts val="200"/>
-              </a:spcBef>
-              <a:buNone/>
-            </a:pPr>
-            <a:r>
-              <a:rPr lang="en-US" sz="1000" dirty="0">
-                <a:solidFill>
-                  <a:srgbClr val="555960"/>
-                </a:solidFill>
-                <a:latin typeface="Times New Roman"/>
-              </a:rPr>
-              <a:t>Washington, DC 20375-5000  ·  NRL/FR/5530-92-9194</a:t>
-            </a:r>
-          </a:p>
-          <a:p>
-            <a:pPr algn="ctr">
-              <a:spcBef>
-                <a:spcPts val="900"/>
-              </a:spcBef>
-              <a:buNone/>
-            </a:pPr>
-            <a:r>
-              <a:rPr lang="en-US" sz="1700" b="1" dirty="0">
-                <a:solidFill>
-                  <a:srgbClr val="1A1A1A"/>
-                </a:solidFill>
-                <a:latin typeface="Times New Roman"/>
-              </a:rPr>
-              <a:t>Software Requirements for the A-7E Aircraft</a:t>
-            </a:r>
-          </a:p>
-          <a:p>
-            <a:pPr algn="ctr">
-              <a:spcBef>
-                <a:spcPts val="700"/>
-              </a:spcBef>
-              <a:buNone/>
-            </a:pPr>
-            <a:r>
-              <a:rPr lang="en-US" sz="1100" dirty="0">
-                <a:solidFill>
-                  <a:srgbClr val="3A3A3A"/>
-                </a:solidFill>
-                <a:latin typeface="Times New Roman"/>
-              </a:rPr>
-              <a:t>Thomas A. Alspaugh, Stuart R. Faulk, Kathryn Heninger Britton, R. Alan Parker, David L. Parnas, and John E. Shore</a:t>
-            </a:r>
-          </a:p>
-          <a:p>
-            <a:pPr algn="ctr">
-              <a:spcBef>
-                <a:spcPts val="600"/>
-              </a:spcBef>
-              <a:buNone/>
-            </a:pPr>
-            <a:r>
-              <a:rPr lang="en-US" sz="1100" i="1" dirty="0">
-                <a:solidFill>
-                  <a:srgbClr val="555960"/>
-                </a:solidFill>
-                <a:latin typeface="Times New Roman"/>
-              </a:rPr>
-              <a:t>Human Computer Interaction Laboratory Branch</a:t>
-            </a:r>
-          </a:p>
-          <a:p>
-            <a:pPr algn="ctr">
-              <a:buNone/>
-            </a:pPr>
-            <a:r>
-              <a:rPr lang="en-US" sz="1100" i="1" dirty="0">
-                <a:solidFill>
-                  <a:srgbClr val="555960"/>
-                </a:solidFill>
-                <a:latin typeface="Times New Roman"/>
-              </a:rPr>
-              <a:t>Information Technology Division</a:t>
-            </a:r>
-          </a:p>
-          <a:p>
-            <a:pPr algn="ctr">
-              <a:spcBef>
-                <a:spcPts val="600"/>
-              </a:spcBef>
-              <a:buNone/>
-            </a:pPr>
-            <a:r>
-              <a:rPr lang="en-US" sz="1100" dirty="0">
-                <a:solidFill>
-                  <a:srgbClr val="3A3A3A"/>
-                </a:solidFill>
-                <a:latin typeface="Times New Roman"/>
-              </a:rPr>
-              <a:t>August 31, 1992</a:t>
-            </a:r>
-          </a:p>
-          <a:p>
-            <a:pPr algn="ctr">
-              <a:spcBef>
-                <a:spcPts val="900"/>
-              </a:spcBef>
-              <a:buNone/>
-            </a:pPr>
-            <a:r>
-              <a:rPr lang="en-US" sz="1000" dirty="0">
-                <a:solidFill>
-                  <a:srgbClr val="555960"/>
-                </a:solidFill>
-                <a:latin typeface="Times New Roman"/>
-              </a:rPr>
-              <a:t>Approved for public release; distribution unlimited.</a:t>
-            </a:r>
-          </a:p>
-        </p:txBody>
-      </p:sp>
-    </p:spTree>
-    <p:extLst>
-      <p:ext uri="{BB962C8B-B14F-4D97-AF65-F5344CB8AC3E}">
-        <p14:creationId xmlns:p14="http://schemas.microsoft.com/office/powerpoint/2010/main" val="1222234180"/>
       </p:ext>
     </p:extLst>
   </p:cSld>

--- a/course/lectures/act-1-foundations/05-specification/slides/1-5-Specification.pptx
+++ b/course/lectures/act-1-foundations/05-specification/slides/1-5-Specification.pptx
@@ -908,44 +908,37 @@
           <a:lstStyle/>
           <a:p>
             <a:r>
-              <a:rPr lang="en-US" dirty="0"/>
               <a:t>There is one more unusual thing in this document: it explicitly discusses expected types of future changes.</a:t>
             </a:r>
           </a:p>
           <a:p>
             <a:r>
-              <a:rPr lang="en-US" dirty="0"/>
               <a:t>Why would that belong in a specification?</a:t>
             </a:r>
           </a:p>
           <a:p>
             <a:r>
-              <a:rPr lang="en-US" dirty="0"/>
               <a:t>Suppose two implementations satisfy every behavioral requirement today. One bakes an assumption throughout the system. The other isolates it behind a boundary because the designers know it is likely to change. Today both may be correct. But they are not equally good realizations once the expected change arrives.</a:t>
             </a:r>
           </a:p>
           <a:p>
             <a:r>
-              <a:rPr lang="en-US" dirty="0"/>
               <a:t>So the specification gives designers another kind of information: what can I safely treat as stable, and where should I preserve flexibility? Chapter 9 lists the fundamental assumptions first, then computer changes, interface changes, and function changes.</a:t>
             </a:r>
           </a:p>
           <a:p>
             <a:r>
-              <a:rPr lang="en-US" dirty="0"/>
               <a:t>Notice again what the authors are not doing. They are not prescribing every internal decision. They are telling the implementor which decisions are consequential.</a:t>
             </a:r>
           </a:p>
           <a:p>
             <a:r>
-              <a:rPr lang="en-US" dirty="0"/>
               <a:t>Synthesis of the case: the A-7E specification constrains behavior, makes timing bounds explicit, requires useful subsets, and communicates expected change. Those obligations are different, and the representations used to express them differ too. It is detailed where the engineering consequences demand detail, while leaving other realization choices open.</a:t>
             </a:r>
           </a:p>
           <a:p>
             <a:r>
-              <a:rPr lang="en-US" dirty="0"/>
-              <a:t>Transition: which brings us back to representation. These obligations do not all look alike, so neither do the representations we use to express them.</a:t>
+              <a:t>Transition: The larger lesson is that these obligations do not all look alike, so neither do the representations used to express them. Let's leave the aircraft and generalize.</a:t>
             </a:r>
           </a:p>
         </p:txBody>
@@ -1003,38 +996,32 @@
           <a:lstStyle/>
           <a:p>
             <a:r>
-              <a:rPr lang="en-US" dirty="0"/>
-              <a:t>We can now step away from the aircraft. What should we generalize from what we just saw?</a:t>
-            </a:r>
-          </a:p>
-          <a:p>
-            <a:r>
-              <a:rPr lang="en-US" dirty="0"/>
+              <a:t>What should we generalize from what we just saw?</a:t>
+            </a:r>
+          </a:p>
+          <a:p>
+            <a:r>
               <a:t>One thing is that there was no single representation capable of doing all the useful work. The transition table made one kind of question answerable. The subset requirement made another property visible. The discussion of expected change exposed something else again.</a:t>
             </a:r>
           </a:p>
           <a:p>
             <a:r>
-              <a:rPr lang="en-US" dirty="0"/>
-              <a:t>We have learned what we wanted from the A-7E, so I am going to leave the aircraft here. To generalize the lesson we are going back to our Sleep Advisor running example. The system is changing, but the modeling question is the same: what representation makes the property we care about visible?</a:t>
-            </a:r>
-          </a:p>
-          <a:p>
-            <a:r>
-              <a:rPr lang="en-US" dirty="0"/>
+              <a:t>We'll switch systems, back to the Sleep Advisor, but keep the same modeling question: what representation makes the property we care about visible?</a:t>
+            </a:r>
+          </a:p>
+          <a:p>
+            <a:r>
               <a:t>The A-7E needed several representations because different obligations required us to see different things. The same thing happens in our much simpler system.</a:t>
             </a:r>
           </a:p>
           <a:p>
             <a:r>
-              <a:rPr lang="en-US" dirty="0"/>
-              <a:t>This idea has a long history in software engineering. Kruchten's 4+1 view model is a famous example of reasoning about one system through multiple complementary views. MAGE generalizes the move rather than inheriting it: hold the system constant, change the engineering question, and the useful model changes.</a:t>
-            </a:r>
-          </a:p>
-          <a:p>
-            <a:r>
-              <a:rPr lang="en-US" dirty="0"/>
-              <a:t>So for the next few slides we will hold the Sleep Advisor constant and deliberately change the question.</a:t>
+              <a:t>This idea has a long history in software engineering. Kruchten's 4+1 view model is a famous example of reasoning about one system through multiple complementary views.</a:t>
+            </a:r>
+          </a:p>
+          <a:p>
+            <a:r>
+              <a:t>So for the next few slides, we will hold the Sleep Advisor fixed and deliberately change the engineering question.</a:t>
             </a:r>
           </a:p>
         </p:txBody>
@@ -1092,25 +1079,21 @@
           <a:lstStyle/>
           <a:p>
             <a:r>
-              <a:rPr lang="en-US" dirty="0"/>
               <a:t>A specification is not a notation. We can state obligations in prose, tables, diagrams, equations, schemas, and many other forms. The engineering question determines which representation helps.</a:t>
             </a:r>
           </a:p>
           <a:p>
             <a:r>
-              <a:rPr lang="en-US" dirty="0"/>
-              <a:t>Part II makes the point sharply: a model is a purposeful reduction. It represents the distinctions the engineering question requires, and it declines to settle choices that do not matter to that question.</a:t>
-            </a:r>
-          </a:p>
-          <a:p>
-            <a:r>
-              <a:rPr lang="en-US" dirty="0"/>
-              <a:t>So hold the system constant and change the question. The useful view changes with it. That is the move we are going to make four times in the next few slides.</a:t>
-            </a:r>
-          </a:p>
-          <a:p>
-            <a:r>
-              <a:rPr lang="en-US" dirty="0"/>
+              <a:t>A model is a purposeful reduction. It represents the distinctions the engineering question requires, and it declines to settle choices that do not matter to that question.</a:t>
+            </a:r>
+          </a:p>
+          <a:p>
+            <a:r>
+              <a:t>So hold the system constant and change the question. The useful view changes with it. That is the move we are going to make over the next few slides.</a:t>
+            </a:r>
+          </a:p>
+          <a:p>
+            <a:r>
               <a:t>Notice what this rules out: a view that kept everything would be the system itself, and it would answer no question more cheaply than the system does. Completeness is not what makes a model useful.</a:t>
             </a:r>
           </a:p>
@@ -1169,43 +1152,36 @@
           <a:lstStyle/>
           <a:p>
             <a:r>
-              <a:rPr lang="en-US" dirty="0"/>
-              <a:t>This slide is the reason the next four exist.</a:t>
-            </a:r>
-          </a:p>
-          <a:p>
-            <a:r>
-              <a:rPr lang="en-US" dirty="0"/>
+              <a:t>This slide is the reason the next few exist.</a:t>
+            </a:r>
+          </a:p>
+          <a:p>
+            <a:r>
               <a:t>An engineering question comes first. The representation we choose determines which properties we can state at all, and which analyses become tractable. The analysis then produces evidence about whether the property holds.</a:t>
             </a:r>
           </a:p>
           <a:p>
             <a:r>
-              <a:rPr lang="en-US" dirty="0"/>
               <a:t>Three words worth keeping distinct. A property is a claim we can express over the model. An invariant is a property required to hold over its declared domain. A check or analysis is evidence about whether it holds.</a:t>
             </a:r>
           </a:p>
           <a:p>
             <a:r>
-              <a:rPr lang="en-US" dirty="0"/>
               <a:t>The representation does not create the obligation. The obligation comes from the world and from what we have promised. What the representation gives us is a vocabulary in which the obligation becomes easier to state and reason about.</a:t>
             </a:r>
           </a:p>
           <a:p>
             <a:r>
-              <a:rPr lang="en-US" dirty="0"/>
               <a:t>We are not doing formal methods here. We are noticing that an obligation you cannot express is an obligation you cannot check.</a:t>
             </a:r>
           </a:p>
           <a:p>
             <a:r>
-              <a:rPr lang="en-US" dirty="0"/>
-              <a:t>Part II crops here for us on purpose: analysis can also inform architecture and design, but that is next week's question.</a:t>
-            </a:r>
-          </a:p>
-          <a:p>
-            <a:r>
-              <a:rPr lang="en-US" dirty="0"/>
+              <a:t>Analysis can also inform architecture and design, but that is next week's question.</a:t>
+            </a:r>
+          </a:p>
+          <a:p>
+            <a:r>
               <a:t>Say aloud, do not put on the slide: the representation does not create the obligation; it gives us a vocabulary in which the obligation is easier to state and check.</a:t>
             </a:r>
           </a:p>
@@ -1264,7 +1240,7 @@
           <a:lstStyle/>
           <a:p>
             <a:r>
-              <a:t>Go back to the requirements we started with. R2 says the app must learn what is normal. R3 says it must identify meaningful departures. R5 says it must adapt when normal changes. Those requirements tell us what the product must accomplish, but they do not yet tell an implementor what behavioral situations the system recognizes or which transitions are allowable.</a:t>
+              <a:t>Start with R2, R3, and R5. What may happen next? R2 says the app must learn what is normal. R3 says it must identify meaningful departures. R5 says it must adapt when normal changes. Those requirements tell us what the product must accomplish, but they do not yet tell an implementor what behavioral situations the system recognizes or which transitions are allowable.</a:t>
             </a:r>
           </a:p>
           <a:p/>
@@ -1346,7 +1322,7 @@
           <a:lstStyle/>
           <a:p>
             <a:r>
-              <a:t>Now hold the Sleep Advisor fixed and change the engineering question. R1 says to track sleep, R3 says to identify departures, and R4 says to alert the user. The requirements do not establish every allowable ordering among those activities. Suppose the specification adds this ordering constraint.</a:t>
+              <a:t>Hold the system fixed and change the question. What must happen before what? R1 says to track sleep, R3 says to identify departures, and R4 says to alert the user. The requirements do not establish every allowable ordering among those activities. Suppose the specification adds this ordering constraint.</a:t>
             </a:r>
           </a:p>
           <a:p/>
@@ -1422,7 +1398,7 @@
           <a:lstStyle/>
           <a:p>
             <a:r>
-              <a:t>Now take R6: provide the user with a weekly sleep summary. That tells us something important about the product, but it does not yet tell an implementor — or another system consuming the summary — what constitutes a valid weekly summary.</a:t>
+              <a:t>Change the question again. What information counts as a valid weekly summary? Take R6: provide the user with a weekly sleep summary. That tells us something important about the product, but it does not yet tell an implementor — or another system consuming the summary — what constitutes a valid weekly summary.</a:t>
             </a:r>
           </a:p>
           <a:p/>
@@ -1644,13 +1620,19 @@
           <a:p/>
           <a:p>
             <a:r>
-              <a:t>And the reason this matters beyond today: the system did not change across those four slides. The engineering question changed, so the model changed.</a:t>
+              <a:t>And the reason this matters beyond today: the system did not change across these examples. The engineering question changed, so the model changed.</a:t>
             </a:r>
           </a:p>
           <a:p/>
           <a:p>
             <a:r>
               <a:t>Next week the questions change again, to how the system should be structured, and the useful views will change with them. Same move, different questions.</a:t>
+            </a:r>
+          </a:p>
+          <a:p/>
+          <a:p>
+            <a:r>
+              <a:t>So far we have asked how to represent an obligation once we know it matters. The next question is harder: which obligations should we impose at all?</a:t>
             </a:r>
           </a:p>
         </p:txBody>
@@ -1794,32 +1776,33 @@
           <a:lstStyle/>
           <a:p>
             <a:r>
-              <a:rPr lang="en-US" dirty="0"/>
               <a:t>This is the picture behind everything we have said about freedom.</a:t>
             </a:r>
           </a:p>
           <a:p>
             <a:r>
-              <a:rPr lang="en-US" dirty="0"/>
               <a:t>The outer box is the space of programs someone could write. Each obligation we state carves out a region: the realizations that satisfy it. The intersection is the acceptable set.</a:t>
             </a:r>
           </a:p>
           <a:p>
             <a:r>
-              <a:rPr lang="en-US" dirty="0"/>
-              <a:t>Two things to notice. First, the obligations bound a region; they do not select a point. The realizations inside that intersection can differ substantially and all remain acceptable. MAGE Part II calls those remaining choices degrees of freedom, and a tolerance is what bounds the permitted variation.</a:t>
-            </a:r>
-          </a:p>
-          <a:p>
-            <a:r>
-              <a:rPr lang="en-US" dirty="0"/>
+              <a:t>Two things to notice. First, the obligations bound a region; they do not select a point. The realizations inside that intersection can differ substantially and all remain acceptable. Those remaining choices are degrees of freedom, and a tolerance bounds the permitted variation.</a:t>
+            </a:r>
+          </a:p>
+          <a:p>
+            <a:r>
               <a:t>Second, every obligation we add shrinks the region. That is the cost side. So the question is never how much can we specify. It is which eliminated alternatives actually mattered.</a:t>
             </a:r>
           </a:p>
           <a:p>
             <a:r>
-              <a:rPr lang="en-US" dirty="0"/>
               <a:t>Narrowing is valuable only when the eliminated alternatives matter. If two realizations are equally acceptable, a specification that forbids one has spent constraint and bought nothing.</a:t>
+            </a:r>
+          </a:p>
+          <a:p/>
+          <a:p>
+            <a:r>
+              <a:t>But there is a trap in calling everything outside those obligations a degree of freedom. Some choices are open because we forgot something—or because we don't yet know what matters.</a:t>
             </a:r>
           </a:p>
         </p:txBody>
@@ -1877,32 +1860,33 @@
           <a:lstStyle/>
           <a:p>
             <a:r>
-              <a:rPr lang="en-US" dirty="0"/>
               <a:t>The previous slide said obligations bound a region. This one says the unbounded part is not one thing.</a:t>
             </a:r>
           </a:p>
           <a:p>
             <a:r>
-              <a:rPr lang="en-US" dirty="0"/>
               <a:t>An unmodeled choice can mean three different situations. The consequence may not yet be understood: that is uncertainty, and the answer is to learn. A boundary may already exist in someone's judgment without being written down: that is tacit, and the answer is to externalize it. Or the alternatives may be genuinely acceptable: that is a degree of freedom, and the answer is to leave it open.</a:t>
             </a:r>
           </a:p>
           <a:p>
             <a:r>
-              <a:rPr lang="en-US" dirty="0"/>
-              <a:t>MAGE Part II's diagnostic is the useful one to give students. If a proposed realization would provoke not that, then some consequential boundary remains, whether or not anyone has written it down. The choice was never wholly free.</a:t>
-            </a:r>
-          </a:p>
-          <a:p>
-            <a:r>
-              <a:rPr lang="en-US" dirty="0"/>
+              <a:t>Here is the useful diagnostic: if a proposed realization would provoke ‘not that,’ then some consequential boundary remains, whether or not anyone has written it down. The choice was never wholly free.</a:t>
+            </a:r>
+          </a:p>
+          <a:p>
+            <a:r>
               <a:t>And for the unknown case, notice what the response is. We do not specify harder. We build, observe, and then decide, because sometimes the system is how we learn which property mattered. A degree of freedom is known freedom; uncertainty is not.</a:t>
             </a:r>
           </a:p>
           <a:p>
             <a:r>
-              <a:rPr lang="en-US" dirty="0"/>
               <a:t>That is why modeling can precede specification. Sometimes we model because we know which property must hold; sometimes we model to discover which properties matter.</a:t>
+            </a:r>
+          </a:p>
+          <a:p/>
+          <a:p>
+            <a:r>
+              <a:t>Let's see whether that distinction survives contact with an actual system.</a:t>
             </a:r>
           </a:p>
         </p:txBody>
@@ -1984,7 +1968,7 @@
           <a:p/>
           <a:p>
             <a:r>
-              <a:t>- Ask what the system would have to be for them to change their answer. That question is the learning objective.</a:t>
+              <a:t>- Ask what additional context would change their classification. That question is the learning objective.</a:t>
             </a:r>
           </a:p>
           <a:p/>
@@ -2003,6 +1987,12 @@
           <a:p>
             <a:r>
               <a:t>Take answers on the last one first — it produces the strongest disagreement. Then close: where you disagreed is where the engineering is. The label depends on what the system owes people, not on the words in the document.</a:t>
+            </a:r>
+          </a:p>
+          <a:p/>
+          <a:p>
+            <a:r>
+              <a:t>One of those cases is worth following. Suppose we decide the bounced-email behavior wasn't free at all—it was tacit.</a:t>
             </a:r>
           </a:p>
         </p:txBody>
@@ -2105,6 +2095,12 @@
               <a:t>Say aloud rather than showing: the agent does not share the team's unstated context, and what changed is the cost of leaving context unsaid.</a:t>
             </a:r>
           </a:p>
+          <a:p/>
+          <a:p>
+            <a:r>
+              <a:t>So why not eliminate this problem by specifying everything? Because constraints have a cost too—and software changes the economics of when we need to commit.</a:t>
+            </a:r>
+          </a:p>
         </p:txBody>
       </p:sp>
     </p:spTree>
@@ -2160,32 +2156,33 @@
           <a:lstStyle/>
           <a:p>
             <a:r>
-              <a:rPr lang="en-US" dirty="0"/>
               <a:t>You have seen this bridge before. In Process, we asked why you might organize the work differently when building a bridge. The answer included changeability: concrete is expensive to revisit after realization. Here the same property answers a different question. It tells us how much reason we have to commit choices in the specification before we build.</a:t>
             </a:r>
           </a:p>
           <a:p>
             <a:r>
-              <a:rPr lang="en-US" dirty="0"/>
               <a:t>The circuit is the middle case. A circuit design is highly changeable before fabrication. The physical board is much less so. Software is unusual because the realized artifact itself often remains changeable.</a:t>
             </a:r>
           </a:p>
           <a:p>
             <a:r>
-              <a:rPr lang="en-US" dirty="0"/>
               <a:t>Qualification: software choices can become expensive commitments too.</a:t>
             </a:r>
           </a:p>
           <a:p>
             <a:r>
-              <a:rPr lang="en-US" dirty="0"/>
               <a:t>Orally: APIs acquire clients. Data models acquire data. Architectures acquire dependencies. Certification creates obligations.</a:t>
             </a:r>
           </a:p>
           <a:p>
             <a:r>
-              <a:rPr lang="en-US" dirty="0"/>
               <a:t>Callback to changeability in 1-2-SEProcessesAndMethodologies.pptx; seeds Architecture, Design, Engineering Capital, and Maintenance.</a:t>
+            </a:r>
+          </a:p>
+          <a:p/>
+          <a:p>
+            <a:r>
+              <a:t>If changing software is relatively cheap, building can sometimes be part of how we learn what should have been constrained.</a:t>
             </a:r>
           </a:p>
         </p:txBody>
@@ -2288,6 +2285,12 @@
               <a:t>Do not turn this into an anti-specification argument. R5 remained valid. What changed was our specification of how that requirement should be realized.</a:t>
             </a:r>
           </a:p>
+          <a:p/>
+          <a:p>
+            <a:r>
+              <a:t>That gives us the third response to an unsettled choice: not constrain, not leave open—explore.</a:t>
+            </a:r>
+          </a:p>
         </p:txBody>
       </p:sp>
     </p:spTree>
@@ -2331,102 +2334,74 @@
           <a:lstStyle/>
           <a:p>
             <a:r>
-              <a:rPr lang="en-US" sz="1200" dirty="0"/>
               <a:t>3 minutes — Hand students the practical rule the whole lecture was arguing for.</a:t>
             </a:r>
           </a:p>
-          <a:p>
-            <a:endParaRPr lang="en-US" sz="1200"/>
-          </a:p>
-          <a:p>
-            <a:r>
-              <a:rPr lang="en-US" sz="1200" dirty="0"/>
+          <a:p/>
+          <a:p>
+            <a:r>
               <a:t>- Deliver slowly; three sentences. This is the slide where you say less than you want to.</a:t>
             </a:r>
           </a:p>
-          <a:p>
-            <a:endParaRPr lang="en-US" sz="1200"/>
-          </a:p>
-          <a:p>
-            <a:r>
-              <a:rPr lang="en-US" sz="1200" dirty="0"/>
+          <a:p/>
+          <a:p>
+            <a:r>
               <a:t>- EXPLORE is the third answer the degrees-of-freedom section earned. It is not a euphemism for failing to decide.</a:t>
             </a:r>
           </a:p>
-          <a:p>
-            <a:endParaRPr lang="en-US" sz="1200"/>
-          </a:p>
-          <a:p>
-            <a:r>
-              <a:rPr lang="en-US" sz="1200" dirty="0"/>
+          <a:p/>
+          <a:p>
+            <a:r>
               <a:t>- Line one answers the obligations side of the model, line two the freedom side, line three the unknown category.</a:t>
             </a:r>
           </a:p>
-          <a:p>
-            <a:endParaRPr lang="en-US" sz="1200"/>
-          </a:p>
-          <a:p>
-            <a:r>
-              <a:rPr lang="en-US" sz="1200" dirty="0"/>
+          <a:p/>
+          <a:p>
+            <a:r>
               <a:t>- Protect this slide's time even if earlier sections ran long.</a:t>
             </a:r>
           </a:p>
-          <a:p>
-            <a:endParaRPr lang="en-US" sz="1200"/>
-          </a:p>
-          <a:p>
-            <a:r>
-              <a:rPr lang="en-US" sz="1200" dirty="0"/>
+          <a:p/>
+          <a:p>
+            <a:r>
               <a:t>=====</a:t>
             </a:r>
           </a:p>
-          <a:p>
-            <a:endParaRPr lang="en-US" sz="1200"/>
-          </a:p>
-          <a:p>
-            <a:r>
-              <a:rPr lang="en-US" sz="1200" dirty="0"/>
+          <a:p/>
+          <a:p>
+            <a:r>
               <a:t>Constrain when two reasonable answers would produce products a user could tell apart, or different risk. Build A versus Build B was exactly this.</a:t>
             </a:r>
           </a:p>
-          <a:p>
-            <a:endParaRPr lang="en-US" sz="1200"/>
-          </a:p>
-          <a:p>
-            <a:r>
-              <a:rPr lang="en-US" sz="1200" dirty="0"/>
+          <a:p/>
+          <a:p>
+            <a:r>
               <a:t>Leave open when every answer is acceptable. Say so in writing if you can — marking something deliberately open stops the next reader treating it as an oversight, and stops an agent treating it as an invitation.</a:t>
             </a:r>
           </a:p>
-          <a:p>
-            <a:endParaRPr lang="en-US" sz="1200"/>
-          </a:p>
-          <a:p>
-            <a:r>
-              <a:rPr lang="en-US" sz="1200" dirty="0"/>
+          <a:p/>
+          <a:p>
+            <a:r>
               <a:t>Explore when you do not yet know which of those two it is. Build something, look, then decide.</a:t>
             </a:r>
           </a:p>
-          <a:p>
-            <a:endParaRPr lang="en-US" sz="1200"/>
-          </a:p>
-          <a:p>
-            <a:r>
-              <a:rPr lang="en-US" sz="1200" dirty="0"/>
-              <a:t>Read the three rules slowly and stop. They are the practical synthesis of the lecture. If students remember one artifact from this lecture, it should be this box and the degrees-of-freedom figure.</a:t>
-            </a:r>
-          </a:p>
-          <a:p>
-            <a:endParaRPr lang="en-US" sz="1200"/>
-          </a:p>
-          <a:p>
-            <a:r>
-              <a:rPr lang="en-US" sz="1200" dirty="0"/>
+          <a:p/>
+          <a:p>
+            <a:r>
+              <a:t>Read the three rules slowly and stop. They are the practical synthesis of the lecture.</a:t>
+            </a:r>
+          </a:p>
+          <a:p/>
+          <a:p>
+            <a:r>
               <a:t>Check the room: ask someone to state the rule applied to their project. If what comes back is "write more requirements", it has not landed.</a:t>
             </a:r>
           </a:p>
-          <a:p>
-            <a:endParaRPr lang="en-US" sz="1200"/>
+          <a:p/>
+          <a:p>
+            <a:r>
+              <a:t>One last distinction: once we've bounded the acceptable realizations, specification is not the rest of software engineering.</a:t>
+            </a:r>
           </a:p>
         </p:txBody>
       </p:sp>
@@ -2543,7 +2518,7 @@
           <a:p/>
           <a:p>
             <a:r>
-              <a:t>Today we asked what makes a realization acceptable. Next we start choosing how one of those systems should be structured.</a:t>
+              <a:t>Today we asked which realizations are acceptable. Next we start choosing how one of those acceptable systems should be structured.</a:t>
             </a:r>
           </a:p>
           <a:p/>
@@ -2595,48 +2570,38 @@
           <a:lstStyle/>
           <a:p>
             <a:r>
-              <a:rPr lang="en-US" sz="1200" dirty="0"/>
               <a:t>20 seconds — Give the lecture a visible hierarchy; name the first movement and move on.</a:t>
             </a:r>
           </a:p>
-          <a:p>
-            <a:endParaRPr lang="en-US" sz="1200"/>
-          </a:p>
-          <a:p>
-            <a:r>
-              <a:rPr lang="en-US" sz="1200" dirty="0"/>
+          <a:p/>
+          <a:p>
+            <a:r>
               <a:t>- Deliberately brief. Do not add content; the slide's job is structural.</a:t>
             </a:r>
           </a:p>
-          <a:p>
-            <a:endParaRPr lang="en-US" sz="1200"/>
-          </a:p>
-          <a:p>
-            <a:r>
-              <a:rPr lang="en-US" sz="1200" dirty="0"/>
+          <a:p/>
+          <a:p>
+            <a:r>
               <a:t>- The four section names match the footer on slide 2: specification, representation, freedom, learning.</a:t>
             </a:r>
           </a:p>
-          <a:p>
-            <a:endParaRPr lang="en-US" sz="1200"/>
-          </a:p>
-          <a:p>
-            <a:r>
-              <a:rPr lang="en-US" sz="1200" dirty="0"/>
+          <a:p/>
+          <a:p>
+            <a:r>
               <a:t>=====</a:t>
             </a:r>
           </a:p>
-          <a:p>
-            <a:endParaRPr lang="en-US" sz="1200"/>
-          </a:p>
-          <a:p>
-            <a:r>
-              <a:rPr lang="en-US" sz="1200" dirty="0"/>
+          <a:p/>
+          <a:p>
+            <a:r>
               <a:t>Section one. The opening slide gave us a model of moving from requirements to acceptable realizations. Now we ask the first question: what does specification add?</a:t>
             </a:r>
           </a:p>
-          <a:p>
-            <a:endParaRPr lang="en-US" sz="1200"/>
+          <a:p/>
+          <a:p>
+            <a:r>
+              <a:t>Let's make that question concrete with one small system we'll use throughout the lecture.</a:t>
+            </a:r>
           </a:p>
         </p:txBody>
       </p:sp>
@@ -2681,8 +2646,7 @@
           <a:lstStyle/>
           <a:p>
             <a:r>
-              <a:rPr lang="en-US" sz="1200" dirty="0"/>
-              <a:t>This system is fictional. We will use it throughout the lecture because it is complicated enough to have real specification questions, but small enough that we can keep the whole problem in our heads. These are its requirements. Notice that they sound perfectly reasonable. The question for today is whether they are enough.</a:t>
+              <a:t>This system is fictional. We will use it throughout the lecture because it is complicated enough to have real specification questions, but small enough that we can keep the whole problem in our heads. These requirements sound reasonable. But reasonable requirements are not yet enough to tell an implementor which realizations we would accept. Take R4.</a:t>
             </a:r>
           </a:p>
         </p:txBody>
@@ -2758,7 +2722,7 @@
           <a:p/>
           <a:p>
             <a:r>
-              <a:t>Take just one of those requirements: R4. Three teams receive exactly that sentence and nothing more. Team A captures a baseline once, at install, and compares last night to it, every morning. Team B keeps a rolling thirty-day baseline and sends a weekly digest. Team C runs a heart-rate variability model and only speaks up above ninety percent confidence.</a:t>
+              <a:t>Three teams receive exactly that sentence and nothing more. Team A captures a baseline once, at install, and compares last night to it, every morning. Team B keeps a rolling thirty-day baseline and sends a weekly digest. Team C runs a heart-rate variability model and only speaks up above ninety percent confidence.</a:t>
             </a:r>
           </a:p>
           <a:p/>
@@ -2770,7 +2734,7 @@
           <a:p/>
           <a:p>
             <a:r>
-              <a:t>So which differences did we actually mean to constrain? That question is what specification is for, and it is the rest of the hour.</a:t>
+              <a:t>So what does specification add that R4 did not tell us? Start with the boundary between the world we care about and the machine we can build.</a:t>
             </a:r>
           </a:p>
         </p:txBody>
@@ -2816,84 +2780,62 @@
           <a:lstStyle/>
           <a:p>
             <a:r>
-              <a:rPr lang="en-US" sz="1200" dirty="0"/>
               <a:t>3 minutes — Install the world/machine boundary as a working distinction, not a formalism.</a:t>
             </a:r>
           </a:p>
-          <a:p>
-            <a:endParaRPr lang="en-US" sz="1200"/>
-          </a:p>
-          <a:p>
-            <a:r>
-              <a:rPr lang="en-US" sz="1200" dirty="0"/>
+          <a:p/>
+          <a:p>
+            <a:r>
               <a:t>- This is the slide that carries Zave &amp; Jackson. The next one only consolidates it visually.</a:t>
             </a:r>
           </a:p>
-          <a:p>
-            <a:endParaRPr lang="en-US" sz="1200"/>
-          </a:p>
-          <a:p>
-            <a:r>
-              <a:rPr lang="en-US" sz="1200" dirty="0"/>
+          <a:p/>
+          <a:p>
+            <a:r>
               <a:t>- The concrete pair is the whole lesson: same intent, two vocabularies.</a:t>
             </a:r>
           </a:p>
-          <a:p>
-            <a:endParaRPr lang="en-US" sz="1200"/>
-          </a:p>
-          <a:p>
-            <a:r>
-              <a:rPr lang="en-US" sz="1200" dirty="0"/>
+          <a:p/>
+          <a:p>
+            <a:r>
               <a:t>- Students read the paper. Do not lecture the taxonomy; make its central insight usable.</a:t>
             </a:r>
           </a:p>
-          <a:p>
-            <a:endParaRPr lang="en-US" sz="1200"/>
-          </a:p>
-          <a:p>
-            <a:r>
-              <a:rPr lang="en-US" sz="1200" dirty="0"/>
+          <a:p/>
+          <a:p>
+            <a:r>
               <a:t>=====</a:t>
             </a:r>
           </a:p>
-          <a:p>
-            <a:endParaRPr lang="en-US" sz="1200"/>
-          </a:p>
-          <a:p>
-            <a:r>
-              <a:rPr lang="en-US" sz="1200" dirty="0"/>
+          <a:p/>
+          <a:p>
+            <a:r>
               <a:t>Read the left card. Users are warned before illness affects their day. Notice the vocabulary: users, illness, days. None of those are things a program can touch.</a:t>
             </a:r>
           </a:p>
-          <a:p>
-            <a:endParaRPr lang="en-US" sz="1200"/>
-          </a:p>
-          <a:p>
-            <a:r>
-              <a:rPr lang="en-US" sz="1200" dirty="0"/>
+          <a:p/>
+          <a:p>
+            <a:r>
               <a:t>Now the right card. Emit one advisory within sixty seconds of wake detection. Sleep data in, advisory out. Every term is something the machine can sense or emit.</a:t>
             </a:r>
           </a:p>
-          <a:p>
-            <a:endParaRPr lang="en-US" sz="1200"/>
-          </a:p>
-          <a:p>
-            <a:r>
-              <a:rPr lang="en-US" sz="1200" dirty="0"/>
+          <a:p/>
+          <a:p>
+            <a:r>
               <a:t>That is the boundary. A requirement is about the world; a specification constrains the machine at its interface with the world.</a:t>
             </a:r>
           </a:p>
-          <a:p>
-            <a:endParaRPr lang="en-US" sz="1200"/>
-          </a:p>
-          <a:p>
-            <a:r>
-              <a:rPr lang="en-US" sz="1200" dirty="0"/>
+          <a:p/>
+          <a:p>
+            <a:r>
               <a:t>Zave and Jackson's point is that confusing the two is the most common way this work goes wrong. You end up with a document that reads like a requirement and is handed over as if it were buildable — or one that reads like code and no longer says what anyone wanted.</a:t>
             </a:r>
           </a:p>
-          <a:p>
-            <a:endParaRPr lang="en-US" sz="1200"/>
+          <a:p/>
+          <a:p>
+            <a:r>
+              <a:t>That gives us the distinction. Now let's make the relationship precise.</a:t>
+            </a:r>
           </a:p>
         </p:txBody>
       </p:sp>
@@ -2950,38 +2892,38 @@
           <a:lstStyle/>
           <a:p>
             <a:r>
-              <a:rPr lang="en-US" dirty="0"/>
               <a:t>This diagram is the Zave and Jackson picture of the relationship between the world and the machine.</a:t>
             </a:r>
           </a:p>
           <a:p>
             <a:r>
-              <a:rPr lang="en-US" dirty="0"/>
               <a:t>Read it left to right. The requirement is a statement about the world. The specification constrains the machine, and it can only be written in terms of phenomena shared between the world and the machine. Domain assumptions are what connect machine behavior back to the world.</a:t>
             </a:r>
           </a:p>
           <a:p>
             <a:r>
-              <a:rPr lang="en-US" dirty="0"/>
               <a:t>Put together: specification plus domain assumptions should imply the requirement.</a:t>
             </a:r>
           </a:p>
           <a:p>
             <a:r>
-              <a:rPr lang="en-US" dirty="0"/>
               <a:t>So there are two ways to fail. The machine may not meet the specification, which is a software problem. Or the specification may be met and the requirement still not hold, because a domain assumption did not describe the world. Correct software is not enough if our assumptions about the world are wrong.</a:t>
             </a:r>
           </a:p>
           <a:p>
             <a:r>
-              <a:rPr lang="en-US" dirty="0"/>
               <a:t>Zave and Jackson call the problems clustered around these relationships the four dark corners of requirements engineering. You do not need the terminology; you need the relationship.</a:t>
             </a:r>
           </a:p>
           <a:p>
             <a:r>
-              <a:rPr lang="en-US" dirty="0"/>
               <a:t>If the requirement does not follow, inspect both the specification and the domain assumptions.</a:t>
+            </a:r>
+          </a:p>
+          <a:p/>
+          <a:p>
+            <a:r>
+              <a:t>That is the theory. Now try doing it yourself for another Sleep Advisor requirement.</a:t>
             </a:r>
           </a:p>
         </p:txBody>
@@ -3139,25 +3081,16 @@
           <a:lstStyle/>
           <a:p>
             <a:r>
-              <a:rPr lang="en-US" dirty="0"/>
-              <a:t>So far we have been talking abstractly about what a specification does.</a:t>
-            </a:r>
-          </a:p>
-          <a:p>
-            <a:r>
-              <a:rPr lang="en-US" dirty="0"/>
-              <a:t>Let us look at what happens when somebody actually has to do this for a complicated engineered system.</a:t>
-            </a:r>
-          </a:p>
-          <a:p>
-            <a:r>
-              <a:rPr lang="en-US" dirty="0"/>
-              <a:t>We are going to spend a few slides with one real specification: the A-7E aircraft software specification.</a:t>
-            </a:r>
-          </a:p>
-          <a:p>
-            <a:r>
-              <a:rPr lang="en-US" dirty="0"/>
+              <a:t>You just tried this for one requirement in a much smaller system. What happens when engineers have to answer the same question for a much more complex system?</a:t>
+            </a:r>
+          </a:p>
+          <a:p>
+            <a:r>
+              <a:t>Let's look at one substantial example: the A-7E aircraft software specification.</a:t>
+            </a:r>
+          </a:p>
+          <a:p>
+            <a:r>
               <a:t>Do not read it as a historical curiosity, and do not look for one particular specification notation. Instead ask: what did these engineers decide needed to be made explicit, and how did they represent it?</a:t>
             </a:r>
           </a:p>
@@ -3216,31 +3149,26 @@
           <a:lstStyle/>
           <a:p>
             <a:r>
-              <a:rPr lang="en-US" dirty="0"/>
-              <a:t>I want to stop showing you toy specifications for a few minutes and show you a real one.</a:t>
-            </a:r>
-          </a:p>
-          <a:p>
-            <a:r>
-              <a:rPr lang="en-US" dirty="0"/>
+              <a:t>For the next few minutes, I want to show you a real specification at full scale.</a:t>
+            </a:r>
+          </a:p>
+          <a:p>
+            <a:r>
               <a:t>This is Alspaugh's Software Requirements for the A-7E Aircraft, Naval Research Laboratory, 1992. It is a substantial specification for aircraft software. What is useful for us is not the age of the system or the particular aircraft. It is that the authors had to make a complicated set of behavioral obligations precise enough for engineers to build against.</a:t>
             </a:r>
           </a:p>
           <a:p>
             <a:r>
-              <a:rPr lang="en-US" dirty="0"/>
               <a:t>As we look at it, do not ask which specification language they chose. They did not choose one. They use prose, defined data, tables, modes, timing constraints, and other forms.</a:t>
             </a:r>
           </a:p>
           <a:p>
             <a:r>
-              <a:rPr lang="en-US" dirty="0"/>
               <a:t>Instead ask the question we have been asking throughout this lecture: what did they need to constrain, and what could they safely leave to the implementor?</a:t>
             </a:r>
           </a:p>
           <a:p>
             <a:r>
-              <a:rPr lang="en-US" dirty="0"/>
               <a:t>We are going to look at four kinds of information the specification makes explicit. First: they needed to specify complicated behavior without unnecessarily specifying how that behavior was implemented.</a:t>
             </a:r>
           </a:p>
@@ -7182,7 +7110,7 @@
           <a:p>
             <a:fld id="{B7EB45DA-9A0D-DC49-8E02-F30A5DDC21C3}" type="slidenum">
               <a:rPr lang="en-US" smtClean="0"/>
-              <a:t>9</a:t>
+              <a:t>10</a:t>
             </a:fld>
             <a:endParaRPr lang="en-US"/>
           </a:p>
@@ -7666,7 +7594,7 @@
           <a:p>
             <a:fld id="{B7EB45DA-9A0D-DC49-8E02-F30A5DDC21C3}" type="slidenum">
               <a:rPr lang="en-US" smtClean="0"/>
-              <a:t>10</a:t>
+              <a:t>11</a:t>
             </a:fld>
             <a:endParaRPr lang="en-US"/>
           </a:p>
@@ -8350,7 +8278,7 @@
           <a:p>
             <a:fld id="{B7EB45DA-9A0D-DC49-8E02-F30A5DDC21C3}" type="slidenum">
               <a:rPr lang="en-US" smtClean="0"/>
-              <a:t>11</a:t>
+              <a:t>12</a:t>
             </a:fld>
             <a:endParaRPr lang="en-US"/>
           </a:p>
@@ -8835,7 +8763,7 @@
           <a:p>
             <a:fld id="{B7EB45DA-9A0D-DC49-8E02-F30A5DDC21C3}" type="slidenum">
               <a:rPr lang="en-US" smtClean="0"/>
-              <a:t>12</a:t>
+              <a:t>13</a:t>
             </a:fld>
             <a:endParaRPr lang="en-US"/>
           </a:p>
@@ -9501,7 +9429,7 @@
           <a:p>
             <a:fld id="{B7EB45DA-9A0D-DC49-8E02-F30A5DDC21C3}" type="slidenum">
               <a:rPr lang="en-US" smtClean="0"/>
-              <a:t>13</a:t>
+              <a:t>14</a:t>
             </a:fld>
             <a:endParaRPr lang="en-US"/>
           </a:p>
@@ -10103,7 +10031,7 @@
           <a:p>
             <a:fld id="{B7EB45DA-9A0D-DC49-8E02-F30A5DDC21C3}" type="slidenum">
               <a:rPr lang="en-US" smtClean="0"/>
-              <a:t>14</a:t>
+              <a:t>15</a:t>
             </a:fld>
             <a:endParaRPr lang="en-US"/>
           </a:p>
@@ -10511,7 +10439,7 @@
           <a:p>
             <a:fld id="{B7EB45DA-9A0D-DC49-8E02-F30A5DDC21C3}" type="slidenum">
               <a:rPr lang="en-US" smtClean="0"/>
-              <a:t>15</a:t>
+              <a:t>16</a:t>
             </a:fld>
             <a:endParaRPr lang="en-US"/>
           </a:p>
@@ -11106,7 +11034,7 @@
           <a:p>
             <a:fld id="{B7EB45DA-9A0D-DC49-8E02-F30A5DDC21C3}" type="slidenum">
               <a:rPr lang="en-US" smtClean="0"/>
-              <a:t>16</a:t>
+              <a:t>17</a:t>
             </a:fld>
             <a:endParaRPr lang="en-US"/>
           </a:p>
@@ -12198,7 +12126,7 @@
           <a:p>
             <a:fld id="{B7EB45DA-9A0D-DC49-8E02-F30A5DDC21C3}" type="slidenum">
               <a:rPr lang="en-US" smtClean="0"/>
-              <a:t>17</a:t>
+              <a:t>18</a:t>
             </a:fld>
             <a:endParaRPr lang="en-US"/>
           </a:p>
@@ -13086,7 +13014,7 @@
           <a:p>
             <a:fld id="{B7EB45DA-9A0D-DC49-8E02-F30A5DDC21C3}" type="slidenum">
               <a:rPr lang="en-US" smtClean="0"/>
-              <a:t>18</a:t>
+              <a:t>19</a:t>
             </a:fld>
             <a:endParaRPr lang="en-US"/>
           </a:p>
@@ -15185,7 +15113,7 @@
           <a:p>
             <a:fld id="{B7EB45DA-9A0D-DC49-8E02-F30A5DDC21C3}" type="slidenum">
               <a:rPr lang="en-US" smtClean="0"/>
-              <a:t>19</a:t>
+              <a:t>20</a:t>
             </a:fld>
             <a:endParaRPr lang="en-US"/>
           </a:p>
@@ -15783,7 +15711,7 @@
           <a:p>
             <a:fld id="{B7EB45DA-9A0D-DC49-8E02-F30A5DDC21C3}" type="slidenum">
               <a:rPr lang="en-US" smtClean="0"/>
-              <a:t>20</a:t>
+              <a:t>21</a:t>
             </a:fld>
             <a:endParaRPr lang="en-US"/>
           </a:p>
@@ -16517,7 +16445,7 @@
           <a:p>
             <a:fld id="{B7EB45DA-9A0D-DC49-8E02-F30A5DDC21C3}" type="slidenum">
               <a:rPr lang="en-US" smtClean="0"/>
-              <a:t>21</a:t>
+              <a:t>22</a:t>
             </a:fld>
             <a:endParaRPr lang="en-US"/>
           </a:p>
@@ -16718,7 +16646,7 @@
           <a:p>
             <a:fld id="{B7EB45DA-9A0D-DC49-8E02-F30A5DDC21C3}" type="slidenum">
               <a:rPr lang="en-US" smtClean="0"/>
-              <a:t>22</a:t>
+              <a:t>23</a:t>
             </a:fld>
             <a:endParaRPr lang="en-US"/>
           </a:p>
@@ -18780,7 +18708,7 @@
           <a:p>
             <a:fld id="{B7EB45DA-9A0D-DC49-8E02-F30A5DDC21C3}" type="slidenum">
               <a:rPr lang="en-US" smtClean="0"/>
-              <a:t>23</a:t>
+              <a:t>24</a:t>
             </a:fld>
             <a:endParaRPr lang="en-US"/>
           </a:p>
@@ -19780,7 +19708,7 @@
           <a:p>
             <a:fld id="{B7EB45DA-9A0D-DC49-8E02-F30A5DDC21C3}" type="slidenum">
               <a:rPr lang="en-US" smtClean="0"/>
-              <a:t>24</a:t>
+              <a:t>25</a:t>
             </a:fld>
             <a:endParaRPr lang="en-US"/>
           </a:p>
@@ -20255,7 +20183,7 @@
           <a:p>
             <a:fld id="{B7EB45DA-9A0D-DC49-8E02-F30A5DDC21C3}" type="slidenum">
               <a:rPr lang="en-US" smtClean="0"/>
-              <a:t>25</a:t>
+              <a:t>26</a:t>
             </a:fld>
             <a:endParaRPr lang="en-US"/>
           </a:p>
@@ -20685,7 +20613,7 @@
           <a:p>
             <a:fld id="{B7EB45DA-9A0D-DC49-8E02-F30A5DDC21C3}" type="slidenum">
               <a:rPr lang="en-US" smtClean="0"/>
-              <a:t>26</a:t>
+              <a:t>27</a:t>
             </a:fld>
             <a:endParaRPr lang="en-US"/>
           </a:p>
@@ -21484,7 +21412,7 @@
           <a:p>
             <a:fld id="{B7EB45DA-9A0D-DC49-8E02-F30A5DDC21C3}" type="slidenum">
               <a:rPr lang="en-US" smtClean="0"/>
-              <a:t>27</a:t>
+              <a:t>28</a:t>
             </a:fld>
             <a:endParaRPr lang="en-US"/>
           </a:p>
@@ -21706,7 +21634,7 @@
                   <a:srgbClr val="000000"/>
                 </a:solidFill>
               </a:rPr>
-              <a:t>Temporary changes sometimes become the new baseline.</a:t>
+              <a:t>Long temporary changes are mistaken for a new normal.</a:t>
             </a:r>
           </a:p>
         </p:txBody>
@@ -22040,7 +21968,7 @@
           <a:p>
             <a:fld id="{B7EB45DA-9A0D-DC49-8E02-F30A5DDC21C3}" type="slidenum">
               <a:rPr lang="en-US" smtClean="0"/>
-              <a:t>28</a:t>
+              <a:t>29</a:t>
             </a:fld>
             <a:endParaRPr lang="en-US"/>
           </a:p>
@@ -22598,7 +22526,7 @@
           <a:p>
             <a:fld id="{B7EB45DA-9A0D-DC49-8E02-F30A5DDC21C3}" type="slidenum">
               <a:rPr lang="en-US" smtClean="0"/>
-              <a:t>29</a:t>
+              <a:t>30</a:t>
             </a:fld>
             <a:endParaRPr lang="en-US"/>
           </a:p>
@@ -24341,7 +24269,7 @@
           <a:p>
             <a:fld id="{B7EB45DA-9A0D-DC49-8E02-F30A5DDC21C3}" type="slidenum">
               <a:rPr lang="en-US" smtClean="0"/>
-              <a:t>4</a:t>
+              <a:t>5</a:t>
             </a:fld>
             <a:endParaRPr lang="en-US"/>
           </a:p>
@@ -24937,7 +24865,7 @@
           <a:p>
             <a:fld id="{B7EB45DA-9A0D-DC49-8E02-F30A5DDC21C3}" type="slidenum">
               <a:rPr lang="en-US" smtClean="0"/>
-              <a:t>5</a:t>
+              <a:t>6</a:t>
             </a:fld>
             <a:endParaRPr lang="en-US"/>
           </a:p>
@@ -25705,7 +25633,7 @@
           <a:p>
             <a:fld id="{B7EB45DA-9A0D-DC49-8E02-F30A5DDC21C3}" type="slidenum">
               <a:rPr lang="en-US" smtClean="0"/>
-              <a:t>6</a:t>
+              <a:t>7</a:t>
             </a:fld>
             <a:endParaRPr lang="en-US"/>
           </a:p>
@@ -26419,7 +26347,7 @@
           <a:p>
             <a:fld id="{B7EB45DA-9A0D-DC49-8E02-F30A5DDC21C3}" type="slidenum">
               <a:rPr lang="en-US" smtClean="0"/>
-              <a:t>7</a:t>
+              <a:t>8</a:t>
             </a:fld>
             <a:endParaRPr lang="en-US"/>
           </a:p>
@@ -26983,7 +26911,7 @@
           <a:p>
             <a:fld id="{B7EB45DA-9A0D-DC49-8E02-F30A5DDC21C3}" type="slidenum">
               <a:rPr lang="en-US" smtClean="0"/>
-              <a:t>8</a:t>
+              <a:t>9</a:t>
             </a:fld>
             <a:endParaRPr lang="en-US"/>
           </a:p>

--- a/course/lectures/act-1-foundations/05-specification/slides/1-5-Specification.pptx
+++ b/course/lectures/act-1-foundations/05-specification/slides/1-5-Specification.pptx
@@ -1011,7 +1011,7 @@
           </a:p>
           <a:p>
             <a:r>
-              <a:t>The A-7E needed several representations because different obligations required us to see different things. The same thing happens in our much simpler system.</a:t>
+              <a:t>The A-7E needed several representations because different obligations required us to see different things. The same thing happens in the Sleep Advisor.</a:t>
             </a:r>
           </a:p>
           <a:p>
@@ -1678,49 +1678,34 @@
           <a:lstStyle/>
           <a:p>
             <a:r>
-              <a:rPr lang="en-US" sz="1200" dirty="0"/>
               <a:t>20 seconds — Mark the turn from how we represent obligations to how many we should impose.</a:t>
             </a:r>
           </a:p>
-          <a:p>
-            <a:endParaRPr lang="en-US" sz="1200"/>
-          </a:p>
-          <a:p>
-            <a:r>
-              <a:rPr lang="en-US" sz="1200" dirty="0"/>
+          <a:p/>
+          <a:p>
+            <a:r>
               <a:t>- Sections 1 and 2 were about making obligations explicit and visible. This section asks how many there should be.</a:t>
             </a:r>
           </a:p>
-          <a:p>
-            <a:endParaRPr lang="en-US" sz="1200"/>
-          </a:p>
-          <a:p>
-            <a:r>
-              <a:rPr lang="en-US" sz="1200" dirty="0"/>
-              <a:t>- Leads straight into the first MAGE Moment. Do not pause for discussion here.</a:t>
-            </a:r>
-          </a:p>
-          <a:p>
-            <a:endParaRPr lang="en-US" sz="1200"/>
-          </a:p>
-          <a:p>
-            <a:r>
-              <a:rPr lang="en-US" sz="1200" dirty="0"/>
+          <a:p/>
+          <a:p>
+            <a:r>
+              <a:t>- Do not pause for discussion here.</a:t>
+            </a:r>
+          </a:p>
+          <a:p/>
+          <a:p>
+            <a:r>
               <a:t>=====</a:t>
             </a:r>
           </a:p>
-          <a:p>
-            <a:endParaRPr lang="en-US" sz="1200"/>
-          </a:p>
-          <a:p>
-            <a:r>
-              <a:rPr lang="en-US" sz="1200" dirty="0"/>
+          <a:p/>
+          <a:p>
+            <a:r>
               <a:t>Section three. We now know how to write obligations down and how to choose a representation that makes them visible. The harder question is how much of the realization we should be deciding at all.</a:t>
             </a:r>
           </a:p>
-          <a:p>
-            <a:endParaRPr lang="en-US" sz="1200"/>
-          </a:p>
+          <a:p/>
         </p:txBody>
       </p:sp>
     </p:spTree>
@@ -2600,7 +2585,7 @@
           <a:p/>
           <a:p>
             <a:r>
-              <a:t>Let's make that question concrete with one small system we'll use throughout the lecture.</a:t>
+              <a:t>Let's make that question concrete with one system we'll use throughout the lecture.</a:t>
             </a:r>
           </a:p>
         </p:txBody>
@@ -3149,7 +3134,7 @@
           <a:lstStyle/>
           <a:p>
             <a:r>
-              <a:t>For the next few minutes, I want to show you a real specification at full scale.</a:t>
+              <a:t>For the next few minutes, I want to show you a substantial real specification.</a:t>
             </a:r>
           </a:p>
           <a:p>

--- a/course/lectures/act-1-foundations/05-specification/slides/1-5-Specification.pptx
+++ b/course/lectures/act-1-foundations/05-specification/slides/1-5-Specification.pptx
@@ -20435,89 +20435,6 @@
   <p:clrMapOvr>
     <a:masterClrMapping/>
   </p:clrMapOvr>
-  <p:timing>
-    <p:tnLst>
-      <p:par>
-        <p:cTn id="1" dur="indefinite" restart="never" nodeType="tmRoot">
-          <p:childTnLst>
-            <p:seq concurrent="1" nextAc="seek">
-              <p:cTn id="2" dur="indefinite" nodeType="mainSeq">
-                <p:childTnLst>
-                  <p:par>
-                    <p:cTn id="3" fill="hold">
-                      <p:stCondLst>
-                        <p:cond delay="indefinite"/>
-                      </p:stCondLst>
-                      <p:childTnLst>
-                        <p:par>
-                          <p:cTn id="4" fill="hold">
-                            <p:stCondLst>
-                              <p:cond delay="0"/>
-                            </p:stCondLst>
-                            <p:childTnLst>
-                              <p:par>
-                                <p:cTn id="5" presetID="10" presetClass="entr" presetSubtype="0" fill="hold" nodeType="clickEffect">
-                                  <p:stCondLst>
-                                    <p:cond delay="0"/>
-                                  </p:stCondLst>
-                                  <p:childTnLst>
-                                    <p:set>
-                                      <p:cBhvr>
-                                        <p:cTn id="6" dur="1" fill="hold">
-                                          <p:stCondLst>
-                                            <p:cond delay="0"/>
-                                          </p:stCondLst>
-                                        </p:cTn>
-                                        <p:tgtEl>
-                                          <p:spTgt spid="71"/>
-                                        </p:tgtEl>
-                                        <p:attrNameLst>
-                                          <p:attrName>style.visibility</p:attrName>
-                                        </p:attrNameLst>
-                                      </p:cBhvr>
-                                      <p:to>
-                                        <p:strVal val="visible"/>
-                                      </p:to>
-                                    </p:set>
-                                    <p:animEffect transition="in" filter="fade">
-                                      <p:cBhvr>
-                                        <p:cTn id="7" dur="400"/>
-                                        <p:tgtEl>
-                                          <p:spTgt spid="71"/>
-                                        </p:tgtEl>
-                                      </p:cBhvr>
-                                    </p:animEffect>
-                                  </p:childTnLst>
-                                </p:cTn>
-                              </p:par>
-                            </p:childTnLst>
-                          </p:cTn>
-                        </p:par>
-                      </p:childTnLst>
-                    </p:cTn>
-                  </p:par>
-                </p:childTnLst>
-              </p:cTn>
-              <p:prevCondLst>
-                <p:cond evt="onPrev" delay="0">
-                  <p:tgtEl>
-                    <p:sldTgt/>
-                  </p:tgtEl>
-                </p:cond>
-              </p:prevCondLst>
-              <p:nextCondLst>
-                <p:cond evt="onNext" delay="0">
-                  <p:tgtEl>
-                    <p:sldTgt/>
-                  </p:tgtEl>
-                </p:cond>
-              </p:nextCondLst>
-            </p:seq>
-          </p:childTnLst>
-        </p:cTn>
-      </p:par>
-    </p:tnLst>
-  </p:timing>
 </p:sld>
 </file>
 

--- a/course/lectures/act-1-foundations/05-specification/slides/1-5-Specification.pptx
+++ b/course/lectures/act-1-foundations/05-specification/slides/1-5-Specification.pptx
@@ -6710,8 +6710,11 @@
           </a:bodyPr>
           <a:lstStyle/>
           <a:p>
-            <a:r>
-              <a:rPr lang="en-US" sz="2000" i="1" dirty="0"/>
+            <a:pPr>
+              <a:defRPr b="0"/>
+            </a:pPr>
+            <a:r>
+              <a:rPr lang="en-US" sz="2000" i="1" dirty="0" b="0"/>
               <a:t>ECE 30861/46100: Software Engineering</a:t>
             </a:r>
           </a:p>
@@ -7064,9 +7067,10 @@
           <a:p>
             <a:pPr>
               <a:buNone/>
-            </a:pPr>
-            <a:r>
-              <a:rPr lang="en-US" b="1" dirty="0"/>
+              <a:defRPr b="0"/>
+            </a:pPr>
+            <a:r>
+              <a:rPr lang="en-US" b="0" dirty="0"/>
               <a:t>A real software specification: the A-7E aircraft</a:t>
             </a:r>
           </a:p>
@@ -7284,7 +7288,7 @@
                   <a:srgbClr val="555960"/>
                 </a:solidFill>
               </a:rPr>
-              <a:t>prose · defined data · tables · modes · timing constraints</a:t>
+              <a:t>prose · defined data · tables · modes · timing constraints</a:t>
             </a:r>
           </a:p>
         </p:txBody>
@@ -7548,9 +7552,10 @@
           <a:p>
             <a:pPr>
               <a:buNone/>
-            </a:pPr>
-            <a:r>
-              <a:rPr lang="en-US" b="1" dirty="0"/>
+              <a:defRPr b="0"/>
+            </a:pPr>
+            <a:r>
+              <a:rPr lang="en-US" b="0" dirty="0"/>
               <a:t>Specifies behavior, not the implementation</a:t>
             </a:r>
           </a:p>
@@ -8232,9 +8237,10 @@
           <a:p>
             <a:pPr>
               <a:buNone/>
-            </a:pPr>
-            <a:r>
-              <a:rPr lang="en-US" b="1" dirty="0"/>
+              <a:defRPr b="0"/>
+            </a:pPr>
+            <a:r>
+              <a:rPr lang="en-US" b="0" dirty="0"/>
               <a:t>Timing requirements: Responsiveness of functions</a:t>
             </a:r>
           </a:p>
@@ -8501,7 +8507,7 @@
                   <a:srgbClr val="8E6F3E"/>
                 </a:solidFill>
               </a:rPr>
-              <a:t>AND SOMETIMES THE CONSTRAINT IS: NONE</a:t>
+              <a:t>AND SOMETIMES THE CONSTRAINT IS: NONE</a:t>
             </a:r>
           </a:p>
           <a:p>
@@ -8717,9 +8723,10 @@
           <a:p>
             <a:pPr>
               <a:buNone/>
-            </a:pPr>
-            <a:r>
-              <a:rPr lang="en-US" b="1" dirty="0"/>
+              <a:defRPr b="0"/>
+            </a:pPr>
+            <a:r>
+              <a:rPr lang="en-US" b="0" dirty="0"/>
               <a:t>The system must work in useful subsets</a:t>
             </a:r>
           </a:p>
@@ -8909,7 +8916,7 @@
         <p:spPr>
           <a:xfrm>
             <a:off x="2311400" y="3352800"/>
-            <a:ext cx="2540000" cy="431800"/>
+            <a:ext cx="3291840" cy="431800"/>
           </a:xfrm>
           <a:prstGeom prst="rect">
             <a:avLst/>
@@ -9383,9 +9390,10 @@
           <a:p>
             <a:pPr>
               <a:buNone/>
-            </a:pPr>
-            <a:r>
-              <a:rPr lang="en-US" b="1" dirty="0"/>
+              <a:defRPr b="0"/>
+            </a:pPr>
+            <a:r>
+              <a:rPr lang="en-US" b="0" dirty="0"/>
               <a:t>The specification acknowledges what may change</a:t>
             </a:r>
           </a:p>
@@ -9709,7 +9717,7 @@
                   <a:srgbClr val="3A3A3A"/>
                 </a:solidFill>
               </a:rPr>
-              <a:t>· The computer might be replaced by a TC-2A (9.2.1)</a:t>
+              <a:t>· The computer might be replaced by a TC-2A (9.2.1)</a:t>
             </a:r>
           </a:p>
           <a:p>
@@ -9757,7 +9765,7 @@
                   <a:srgbClr val="3A3A3A"/>
                 </a:solidFill>
               </a:rPr>
-              <a:t>· New weapons and HUD functions may be added (9.4)</a:t>
+              <a:t>· New weapons and HUD functions may be added (9.4)</a:t>
             </a:r>
           </a:p>
         </p:txBody>
@@ -9985,9 +9993,10 @@
           <a:p>
             <a:pPr algn="ctr">
               <a:buNone/>
-            </a:pPr>
-            <a:r>
-              <a:rPr lang="en-US" b="1" dirty="0"/>
+              <a:defRPr b="0"/>
+            </a:pPr>
+            <a:r>
+              <a:rPr lang="en-US" b="0" dirty="0"/>
               <a:t>One system, many views</a:t>
             </a:r>
           </a:p>
@@ -10393,9 +10402,10 @@
           <a:p>
             <a:pPr>
               <a:buNone/>
-            </a:pPr>
-            <a:r>
-              <a:rPr lang="en-US" b="1" dirty="0"/>
+              <a:defRPr b="0"/>
+            </a:pPr>
+            <a:r>
+              <a:rPr lang="en-US" b="0" dirty="0"/>
               <a:t>A model is a purposeful view</a:t>
             </a:r>
           </a:p>
@@ -10988,9 +10998,10 @@
           <a:p>
             <a:pPr>
               <a:buNone/>
-            </a:pPr>
-            <a:r>
-              <a:rPr lang="en-US" b="1" dirty="0"/>
+              <a:defRPr b="0"/>
+            </a:pPr>
+            <a:r>
+              <a:rPr lang="en-US" b="0" dirty="0"/>
               <a:t>Representations make different properties expressible</a:t>
             </a:r>
           </a:p>
@@ -11364,7 +11375,7 @@
                   <a:srgbClr val="3A3A3A"/>
                 </a:solidFill>
               </a:rPr>
-              <a:t>A property required to hold over its declared domain.</a:t>
+              <a:t>A property required to hold over its declared domain.</a:t>
             </a:r>
           </a:p>
         </p:txBody>
@@ -12080,9 +12091,10 @@
           <a:p>
             <a:pPr>
               <a:buNone/>
-            </a:pPr>
-            <a:r>
-              <a:rPr lang="en-US" b="1" dirty="0"/>
+              <a:defRPr b="0"/>
+            </a:pPr>
+            <a:r>
+              <a:rPr lang="en-US" b="0" dirty="0"/>
               <a:t>State models expose allowable behavior</a:t>
             </a:r>
           </a:p>
@@ -12968,9 +12980,10 @@
           <a:p>
             <a:pPr>
               <a:buNone/>
-            </a:pPr>
-            <a:r>
-              <a:rPr lang="en-US" b="1" dirty="0"/>
+              <a:defRPr b="0"/>
+            </a:pPr>
+            <a:r>
+              <a:rPr lang="en-US" b="0" dirty="0"/>
               <a:t>Sequence and activity models expose ordering</a:t>
             </a:r>
           </a:p>
@@ -13555,7 +13568,7 @@
                   <a:srgbClr val="1A1A1A"/>
                 </a:solidFill>
               </a:rPr>
-              <a:t>What must happen before what?</a:t>
+              <a:t>What must happen before what?</a:t>
             </a:r>
           </a:p>
           <a:p>
@@ -13667,7 +13680,7 @@
                   <a:srgbClr val="1A1A1A"/>
                 </a:solidFill>
               </a:rPr>
-              <a:t>Do not issue an advisory until the night's observations have been classified.</a:t>
+              <a:t>Do not issue an advisory until the night's observations have been classified.</a:t>
             </a:r>
           </a:p>
         </p:txBody>
@@ -13757,9 +13770,10 @@
           <a:p>
             <a:pPr algn="l">
               <a:buNone/>
-            </a:pPr>
-            <a:r>
-              <a:rPr lang="en-US" sz="2400" b="1" i="0" dirty="0">
+              <a:defRPr b="0"/>
+            </a:pPr>
+            <a:r>
+              <a:rPr lang="en-US" sz="2400" b="0" i="0" dirty="0">
                 <a:solidFill>
                   <a:srgbClr val="000000"/>
                 </a:solidFill>
@@ -15067,9 +15081,10 @@
           <a:p>
             <a:pPr>
               <a:buNone/>
-            </a:pPr>
-            <a:r>
-              <a:rPr lang="en-US" b="1" dirty="0"/>
+              <a:defRPr b="0"/>
+            </a:pPr>
+            <a:r>
+              <a:rPr lang="en-US" b="0" dirty="0"/>
               <a:t>Schemas expose permitted structure</a:t>
             </a:r>
           </a:p>
@@ -15665,9 +15680,10 @@
           <a:p>
             <a:pPr>
               <a:buNone/>
-            </a:pPr>
-            <a:r>
-              <a:rPr lang="en-US" b="1" dirty="0"/>
+              <a:defRPr b="0"/>
+            </a:pPr>
+            <a:r>
+              <a:rPr lang="en-US" b="0" dirty="0"/>
               <a:t>Three views of one system</a:t>
             </a:r>
           </a:p>
@@ -16395,9 +16411,10 @@
           <a:p>
             <a:pPr algn="ctr">
               <a:buNone/>
-            </a:pPr>
-            <a:r>
-              <a:rPr lang="en-US" sz="3600" b="1" i="0" dirty="0">
+              <a:defRPr b="0"/>
+            </a:pPr>
+            <a:r>
+              <a:rPr lang="en-US" sz="3600" b="0" i="0" dirty="0">
                 <a:solidFill>
                   <a:srgbClr val="000000"/>
                 </a:solidFill>
@@ -16600,9 +16617,10 @@
           <a:p>
             <a:pPr>
               <a:buNone/>
-            </a:pPr>
-            <a:r>
-              <a:rPr lang="en-US" b="1" dirty="0"/>
+              <a:defRPr b="0"/>
+            </a:pPr>
+            <a:r>
+              <a:rPr lang="en-US" b="0" dirty="0"/>
               <a:t>Specification bounds a realization space</a:t>
             </a:r>
           </a:p>
@@ -18662,9 +18680,10 @@
           <a:p>
             <a:pPr>
               <a:buNone/>
-            </a:pPr>
-            <a:r>
-              <a:rPr lang="en-US" b="1" dirty="0"/>
+              <a:defRPr b="0"/>
+            </a:pPr>
+            <a:r>
+              <a:rPr lang="en-US" b="0" dirty="0"/>
               <a:t>Not constrained is not the same as free</a:t>
             </a:r>
           </a:p>
@@ -18887,7 +18906,7 @@
                   <a:srgbClr val="555960"/>
                 </a:solidFill>
               </a:rPr>
-              <a:t>the consequence is not yet understood</a:t>
+              <a:t>the consequence is not yet understood</a:t>
             </a:r>
           </a:p>
         </p:txBody>
@@ -19129,7 +19148,7 @@
                   <a:srgbClr val="555960"/>
                 </a:solidFill>
               </a:rPr>
-              <a:t>the alternatives are genuinely acceptable</a:t>
+              <a:t>the alternatives are genuinely acceptable</a:t>
             </a:r>
           </a:p>
         </p:txBody>
@@ -19658,9 +19677,10 @@
           <a:p>
             <a:pPr algn="l">
               <a:buNone/>
-            </a:pPr>
-            <a:r>
-              <a:rPr lang="en-US" sz="3200" b="1" i="0" dirty="0">
+              <a:defRPr b="0"/>
+            </a:pPr>
+            <a:r>
+              <a:rPr lang="en-US" sz="3200" b="0" i="0" dirty="0">
                 <a:solidFill>
                   <a:srgbClr val="000000"/>
                 </a:solidFill>
@@ -19833,7 +19853,7 @@
                   <a:srgbClr val="000000"/>
                 </a:solidFill>
               </a:rPr>
-              <a:t>What color for the advisory banner?</a:t>
+              <a:t>What color for the advisory banner?</a:t>
             </a:r>
           </a:p>
         </p:txBody>
@@ -19919,7 +19939,7 @@
                   <a:srgbClr val="000000"/>
                 </a:solidFill>
               </a:rPr>
-              <a:t>Which database stores sleep history?</a:t>
+              <a:t>Which database for sleep data?</a:t>
             </a:r>
           </a:p>
         </p:txBody>
@@ -19962,7 +19982,7 @@
                   <a:srgbClr val="000000"/>
                 </a:solidFill>
               </a:rPr>
-              <a:t>What if the doctor’s email bounces?</a:t>
+              <a:t>What if the doctor’s email bounces?</a:t>
             </a:r>
           </a:p>
         </p:txBody>
@@ -20133,9 +20153,10 @@
           <a:p>
             <a:pPr algn="l">
               <a:buNone/>
-            </a:pPr>
-            <a:r>
-              <a:rPr lang="en-US" sz="3000" b="1" i="0" dirty="0">
+              <a:defRPr b="0"/>
+            </a:pPr>
+            <a:r>
+              <a:rPr lang="en-US" sz="3000" b="0" i="0" dirty="0">
                 <a:solidFill>
                   <a:srgbClr val="000000"/>
                 </a:solidFill>
@@ -20212,7 +20233,7 @@
                   <a:srgbClr val="000000"/>
                 </a:solidFill>
               </a:rPr>
-              <a:t>R7   Let the user share a weekly summary with their doctor.</a:t>
+              <a:t>R7   Let the user share a weekly sleep summary with their doctor.</a:t>
             </a:r>
           </a:p>
         </p:txBody>
@@ -20347,7 +20368,7 @@
                   <a:srgbClr val="000000"/>
                 </a:solidFill>
               </a:rPr>
-              <a:t>Mail bounces, so it logs and returns success.</a:t>
+              <a:t>Mail bounces, so it logs and returns success.</a:t>
             </a:r>
           </a:p>
           <a:p>
@@ -20480,9 +20501,10 @@
           <a:p>
             <a:pPr algn="l">
               <a:buNone/>
-            </a:pPr>
-            <a:r>
-              <a:rPr lang="en-US" sz="3000" b="1" i="0" dirty="0">
+              <a:defRPr b="0"/>
+            </a:pPr>
+            <a:r>
+              <a:rPr lang="en-US" sz="3000" b="0" i="0" dirty="0">
                 <a:solidFill>
                   <a:srgbClr val="000000"/>
                 </a:solidFill>
@@ -20816,7 +20838,7 @@
                   <a:srgbClr val="000000"/>
                 </a:solidFill>
               </a:rPr>
-              <a:t>Decide enough to proceed.</a:t>
+              <a:t>Decide enough to proceed.</a:t>
             </a:r>
           </a:p>
         </p:txBody>
@@ -20896,7 +20918,7 @@
                   <a:srgbClr val="3A3A3A"/>
                 </a:solidFill>
               </a:rPr>
-              <a:t>Changing it means concrete.</a:t>
+              <a:t>Changing it means concrete.</a:t>
             </a:r>
           </a:p>
         </p:txBody>
@@ -21279,9 +21301,10 @@
           <a:p>
             <a:pPr algn="l">
               <a:buNone/>
-            </a:pPr>
-            <a:r>
-              <a:rPr lang="en-US" sz="3000" b="1" i="0" dirty="0">
+              <a:defRPr b="0"/>
+            </a:pPr>
+            <a:r>
+              <a:rPr lang="en-US" sz="3000" b="0" i="0" dirty="0">
                 <a:solidFill>
                   <a:srgbClr val="000000"/>
                 </a:solidFill>
@@ -21374,7 +21397,7 @@
                   <a:srgbClr val="000000"/>
                 </a:solidFill>
               </a:rPr>
-              <a:t>Rebaseline after a persistent shift.</a:t>
+              <a:t>Rebaseline after a persistent shift.</a:t>
             </a:r>
           </a:p>
         </p:txBody>
@@ -21455,7 +21478,7 @@
                   <a:srgbClr val="000000"/>
                 </a:solidFill>
               </a:rPr>
-              <a:t>Ships. Works for most.</a:t>
+              <a:t>Ships. Works for most.</a:t>
             </a:r>
           </a:p>
         </p:txBody>
@@ -21615,7 +21638,7 @@
                   <a:srgbClr val="FFFFFF"/>
                 </a:solidFill>
               </a:rPr>
-              <a:t>Persistence alone does not tell us what “normal” means.</a:t>
+              <a:t>Persistence alone does not tell us what “normal” means.</a:t>
             </a:r>
           </a:p>
         </p:txBody>
@@ -21835,9 +21858,10 @@
           <a:p>
             <a:pPr algn="l">
               <a:buNone/>
-            </a:pPr>
-            <a:r>
-              <a:rPr lang="en-US" sz="3200" b="1" i="0" dirty="0">
+              <a:defRPr b="0"/>
+            </a:pPr>
+            <a:r>
+              <a:rPr lang="en-US" sz="3200" b="0" i="0" dirty="0">
                 <a:solidFill>
                   <a:srgbClr val="000000"/>
                 </a:solidFill>
@@ -22188,9 +22212,10 @@
           <a:p>
             <a:pPr algn="ctr">
               <a:buNone/>
-            </a:pPr>
-            <a:r>
-              <a:rPr lang="en-US" sz="3600" b="1" i="0" dirty="0">
+              <a:defRPr b="0"/>
+            </a:pPr>
+            <a:r>
+              <a:rPr lang="en-US" sz="3600" b="0" i="0" dirty="0">
                 <a:solidFill>
                   <a:srgbClr val="000000"/>
                 </a:solidFill>
@@ -22393,9 +22418,10 @@
           <a:p>
             <a:pPr algn="l">
               <a:buNone/>
-            </a:pPr>
-            <a:r>
-              <a:rPr lang="en-US" sz="2400" b="1" i="0" dirty="0">
+              <a:defRPr b="0"/>
+            </a:pPr>
+            <a:r>
+              <a:rPr lang="en-US" sz="2400" b="0" i="0" dirty="0">
                 <a:solidFill>
                   <a:srgbClr val="000000"/>
                 </a:solidFill>
@@ -22997,7 +23023,7 @@
                   <a:srgbClr val="5C4826"/>
                 </a:solidFill>
               </a:rPr>
-              <a:t>Choices inside the acceptable space.</a:t>
+              <a:t>Choices inside the acceptable space.</a:t>
             </a:r>
           </a:p>
           <a:p>
@@ -23013,7 +23039,7 @@
                   <a:srgbClr val="000000"/>
                 </a:solidFill>
               </a:rPr>
-              <a:t>Not more specification. We pick one of the systems the specification already accepts.</a:t>
+              <a:t>Not more specification. We pick one of the systems the specification already accepts.</a:t>
             </a:r>
           </a:p>
         </p:txBody>
@@ -23378,9 +23404,10 @@
           <a:p>
             <a:pPr algn="l">
               <a:buNone/>
-            </a:pPr>
-            <a:r>
-              <a:rPr lang="en-US" sz="3000" b="1" i="0" dirty="0">
+              <a:defRPr b="0"/>
+            </a:pPr>
+            <a:r>
+              <a:rPr lang="en-US" sz="3000" b="0" i="0" dirty="0">
                 <a:solidFill>
                   <a:srgbClr val="000000"/>
                 </a:solidFill>
@@ -24136,9 +24163,10 @@
           <a:p>
             <a:pPr algn="l">
               <a:buNone/>
-            </a:pPr>
-            <a:r>
-              <a:rPr lang="en-US" sz="3000" b="1" i="0" dirty="0">
+              <a:defRPr b="0"/>
+            </a:pPr>
+            <a:r>
+              <a:rPr lang="en-US" sz="3000" b="0" i="0" dirty="0">
                 <a:solidFill>
                   <a:srgbClr val="000000"/>
                 </a:solidFill>
@@ -24215,7 +24243,7 @@
                   <a:srgbClr val="000000"/>
                 </a:solidFill>
               </a:rPr>
-              <a:t>R4   The app shall alert the user when their sleep pattern suggests illness.</a:t>
+              <a:t>R4   Alert the user when their sleep pattern suggests illness.</a:t>
             </a:r>
           </a:p>
         </p:txBody>
@@ -24440,7 +24468,7 @@
                   <a:srgbClr val="000000"/>
                 </a:solidFill>
               </a:rPr>
-              <a:t>alert above 90% confidence</a:t>
+              <a:t>alert above 90% confidence</a:t>
             </a:r>
           </a:p>
         </p:txBody>
@@ -24732,9 +24760,10 @@
           <a:p>
             <a:pPr algn="l">
               <a:buNone/>
-            </a:pPr>
-            <a:r>
-              <a:rPr lang="en-US" sz="3200" b="1" i="0" dirty="0">
+              <a:defRPr b="0"/>
+            </a:pPr>
+            <a:r>
+              <a:rPr lang="en-US" sz="3200" b="0" i="0" dirty="0">
                 <a:solidFill>
                   <a:srgbClr val="000000"/>
                 </a:solidFill>
@@ -24910,7 +24939,7 @@
                   <a:srgbClr val="000000"/>
                 </a:solidFill>
               </a:rPr>
-              <a:t>“Emit one advisory within 60 s of wake detection.”</a:t>
+              <a:t>“Emit one advisory within 60 s of wake detection.”</a:t>
             </a:r>
           </a:p>
         </p:txBody>
@@ -25076,7 +25105,7 @@
                   <a:srgbClr val="000000"/>
                 </a:solidFill>
               </a:rPr>
-              <a:t>Confusing the two is a common way requirements work goes wrong.</a:t>
+              <a:t>Confusing the two is a common way requirements work goes wrong.</a:t>
             </a:r>
           </a:p>
         </p:txBody>
@@ -25504,9 +25533,10 @@
           <a:p>
             <a:pPr>
               <a:buNone/>
-            </a:pPr>
-            <a:r>
-              <a:rPr lang="en-US" b="1" dirty="0"/>
+              <a:defRPr b="0"/>
+            </a:pPr>
+            <a:r>
+              <a:rPr lang="en-US" b="0" dirty="0"/>
               <a:t>A specification connects the machine to the requirement</a:t>
             </a:r>
           </a:p>
@@ -26214,9 +26244,10 @@
           <a:p>
             <a:pPr algn="l">
               <a:buNone/>
-            </a:pPr>
-            <a:r>
-              <a:rPr lang="en-US" sz="2800" b="1" i="0" dirty="0">
+              <a:defRPr b="0"/>
+            </a:pPr>
+            <a:r>
+              <a:rPr lang="en-US" sz="2800" b="0" i="0" dirty="0">
                 <a:solidFill>
                   <a:srgbClr val="000000"/>
                 </a:solidFill>
@@ -26405,7 +26436,7 @@
                   <a:srgbClr val="000000"/>
                 </a:solidFill>
               </a:rPr>
-              <a:t>What must the app do?</a:t>
+              <a:t>What must the app do?</a:t>
             </a:r>
           </a:p>
         </p:txBody>
@@ -26464,7 +26495,7 @@
                   <a:srgbClr val="000000"/>
                 </a:solidFill>
               </a:rPr>
-              <a:t>What facts are missing?</a:t>
+              <a:t>What facts are missing?</a:t>
             </a:r>
           </a:p>
         </p:txBody>
@@ -26523,7 +26554,7 @@
                   <a:srgbClr val="000000"/>
                 </a:solidFill>
               </a:rPr>
-              <a:t>What can remain unspecified?</a:t>
+              <a:t>What can remain unspecified?</a:t>
             </a:r>
           </a:p>
         </p:txBody>
@@ -26782,9 +26813,10 @@
           <a:p>
             <a:pPr algn="ctr">
               <a:buNone/>
-            </a:pPr>
-            <a:r>
-              <a:rPr lang="en-US" b="1" dirty="0"/>
+              <a:defRPr b="0"/>
+            </a:pPr>
+            <a:r>
+              <a:rPr lang="en-US" b="0" dirty="0"/>
               <a:t>A real software specification</a:t>
             </a:r>
           </a:p>

--- a/course/lectures/act-1-foundations/05-specification/slides/1-5-Specification.pptx
+++ b/course/lectures/act-1-foundations/05-specification/slides/1-5-Specification.pptx
@@ -5,7 +5,7 @@
     <p:sldMasterId id="2147483708" r:id="rId1"/>
   </p:sldMasterIdLst>
   <p:notesMasterIdLst>
-    <p:notesMasterId r:id="rId34"/>
+    <p:notesMasterId r:id="rId33"/>
   </p:notesMasterIdLst>
   <p:sldIdLst>
     <p:sldId id="517" r:id="rId2"/>
@@ -38,7 +38,7 @@
     <p:sldId id="757" r:id="rId29"/>
     <p:sldId id="739" r:id="rId30"/>
     <p:sldId id="740" r:id="rId31"/>
-    <p:sldId id="741" r:id="rId33"/>
+    <p:sldId id="741" r:id="rId32"/>
   </p:sldIdLst>
   <p:sldSz cx="9144000" cy="6858000" type="screen4x3"/>
   <p:notesSz cx="6858000" cy="9144000"/>
@@ -229,7 +229,7 @@
           </a:lstStyle>
           <a:p>
             <a:fld id="{27E8B4C4-0720-F64E-9EEE-9472CF165DC6}" type="datetimeFigureOut">
-              <a:t>9/9/26</a:t>
+              <a:t>9/10/26</a:t>
             </a:fld>
             <a:endParaRPr lang="en-US"/>
           </a:p>
@@ -624,26 +624,31 @@
           <a:lstStyle/>
           <a:p>
             <a:r>
+              <a:rPr dirty="0"/>
               <a:t>For the next few minutes, I want to show you a substantial real specification.</a:t>
             </a:r>
           </a:p>
           <a:p>
             <a:r>
+              <a:rPr dirty="0"/>
               <a:t>This is Alspaugh's Software Requirements for the A-7E Aircraft, Naval Research Laboratory, 1992. It is a substantial specification for aircraft software. What is useful for us is not the age of the system or the particular aircraft. It is that the authors had to make a complicated set of behavioral obligations precise enough for engineers to build against.</a:t>
             </a:r>
           </a:p>
           <a:p>
             <a:r>
+              <a:rPr dirty="0"/>
               <a:t>As we look at it, do not ask which specification language they chose. They did not choose one. They use prose, defined data, tables, modes, timing constraints, and other forms.</a:t>
             </a:r>
           </a:p>
           <a:p>
             <a:r>
+              <a:rPr dirty="0"/>
               <a:t>Instead ask the question we have been asking throughout this lecture: what did they need to constrain, and what could they safely leave to the implementor?</a:t>
             </a:r>
           </a:p>
           <a:p>
             <a:r>
+              <a:rPr dirty="0"/>
               <a:t>We are going to look at four kinds of information the specification makes explicit. First: they needed to specify complicated behavior without unnecessarily specifying how that behavior was implemented.</a:t>
             </a:r>
           </a:p>
@@ -1882,34 +1887,40 @@
           <a:lstStyle/>
           <a:p>
             <a:r>
+              <a:rPr dirty="0"/>
               <a:t>This is the picture behind everything we have said about freedom.</a:t>
             </a:r>
           </a:p>
           <a:p>
             <a:r>
+              <a:rPr dirty="0"/>
               <a:t>The outer box is the space of programs someone could write. Each obligation we state carves out a region: the realizations that satisfy it. The intersection is the acceptable set.</a:t>
             </a:r>
           </a:p>
           <a:p>
             <a:r>
+              <a:rPr dirty="0"/>
               <a:t>Two things to notice. First, the obligations bound a region; they do not select a point. The realizations inside that intersection can differ substantially and all remain acceptable. Those remaining choices are degrees of freedom, and a tolerance bounds the permitted variation.</a:t>
             </a:r>
           </a:p>
           <a:p>
             <a:r>
+              <a:rPr dirty="0"/>
               <a:t>Second, every obligation we add shrinks the region. That is the cost side. So the question is never how much can we specify. It is which eliminated alternatives actually mattered.</a:t>
             </a:r>
           </a:p>
           <a:p>
             <a:r>
+              <a:rPr dirty="0"/>
               <a:t>Narrowing is valuable only when the eliminated alternatives matter. If two realizations are equally acceptable, a specification that forbids one has spent constraint and bought nothing.</a:t>
             </a:r>
           </a:p>
           <a:p>
-            <a:endParaRPr/>
-          </a:p>
-          <a:p>
-            <a:r>
+            <a:endParaRPr dirty="0"/>
+          </a:p>
+          <a:p>
+            <a:r>
+              <a:rPr dirty="0"/>
               <a:t>But there is a trap in calling everything outside those obligations a degree of freedom. Some choices are open because we forgot something—or because we don't yet know what matters.</a:t>
             </a:r>
           </a:p>
@@ -2042,86 +2053,97 @@
           <a:lstStyle/>
           <a:p>
             <a:r>
+              <a:rPr dirty="0"/>
               <a:t>5 minutes — Force engineering judgment rather than vocabulary recall.</a:t>
             </a:r>
           </a:p>
           <a:p>
-            <a:endParaRPr/>
-          </a:p>
-          <a:p>
-            <a:r>
+            <a:endParaRPr dirty="0"/>
+          </a:p>
+          <a:p>
+            <a:r>
+              <a:rPr dirty="0"/>
               <a:t>- Hold the timing. Cut the share short rather than letting it run; the disagreement is the point, not resolving it.</a:t>
             </a:r>
           </a:p>
           <a:p>
-            <a:endParaRPr/>
-          </a:p>
-          <a:p>
-            <a:r>
-              <a:t>- Banner colour: usually free — unless colour-blind users or a clinic house style make it consequential. Then tacit.</a:t>
-            </a:r>
-          </a:p>
-          <a:p>
-            <a:endParaRPr/>
-          </a:p>
-          <a:p>
-            <a:r>
+            <a:endParaRPr dirty="0"/>
+          </a:p>
+          <a:p>
+            <a:r>
+              <a:rPr dirty="0"/>
+              <a:t>- Banner color: usually free — unless color-blind users or a clinic house style make it consequential. Then tacit.</a:t>
+            </a:r>
+          </a:p>
+          <a:p>
+            <a:endParaRPr dirty="0"/>
+          </a:p>
+          <a:p>
+            <a:r>
+              <a:rPr dirty="0"/>
               <a:t>- Detection sensitivity: the clearest UNKNOWN candidate. We may not yet know what tradeoff users will tolerate between missed events and false alarms. The response is not to invent a number because a specification needs one. The response may be to learn.</a:t>
             </a:r>
           </a:p>
           <a:p>
-            <a:endParaRPr/>
-          </a:p>
-          <a:p>
-            <a:r>
+            <a:endParaRPr dirty="0"/>
+          </a:p>
+          <a:p>
+            <a:r>
+              <a:rPr dirty="0"/>
               <a:t>- Database: usually free — unless hosting location is regulated, in which case tacit.</a:t>
             </a:r>
           </a:p>
           <a:p>
-            <a:endParaRPr/>
-          </a:p>
-          <a:p>
-            <a:r>
+            <a:endParaRPr dirty="0"/>
+          </a:p>
+          <a:p>
+            <a:r>
+              <a:rPr dirty="0"/>
               <a:t>- Bounced mail: almost always tacit, and the most interesting one. Nobody wrote down that the user must find out.</a:t>
             </a:r>
           </a:p>
           <a:p>
-            <a:endParaRPr/>
-          </a:p>
-          <a:p>
-            <a:r>
+            <a:endParaRPr dirty="0"/>
+          </a:p>
+          <a:p>
+            <a:r>
+              <a:rPr dirty="0"/>
               <a:t>- Ask what additional context would change their classification. That question is the learning objective.</a:t>
             </a:r>
           </a:p>
           <a:p>
-            <a:endParaRPr/>
-          </a:p>
-          <a:p>
-            <a:r>
+            <a:endParaRPr dirty="0"/>
+          </a:p>
+          <a:p>
+            <a:r>
+              <a:rPr dirty="0"/>
               <a:t>=====</a:t>
             </a:r>
           </a:p>
           <a:p>
-            <a:endParaRPr/>
-          </a:p>
-          <a:p>
-            <a:r>
-              <a:t>One minute alone, then two with a neighbour. Argue for a classification, then say what additional context would change your classification.</a:t>
-            </a:r>
-          </a:p>
-          <a:p>
-            <a:endParaRPr/>
-          </a:p>
-          <a:p>
-            <a:r>
+            <a:endParaRPr dirty="0"/>
+          </a:p>
+          <a:p>
+            <a:r>
+              <a:rPr dirty="0"/>
+              <a:t>One minute alone, then two with a neighbor. Argue for a classification, then say what additional context would change your classification.</a:t>
+            </a:r>
+          </a:p>
+          <a:p>
+            <a:endParaRPr dirty="0"/>
+          </a:p>
+          <a:p>
+            <a:r>
+              <a:rPr dirty="0"/>
               <a:t>Take answers on the last one first — it produces the strongest disagreement. Then close: where you disagreed is where the engineering is. The label depends on what the system owes people, not on the words in the document.</a:t>
             </a:r>
           </a:p>
           <a:p>
-            <a:endParaRPr/>
-          </a:p>
-          <a:p>
-            <a:r>
+            <a:endParaRPr dirty="0"/>
+          </a:p>
+          <a:p>
+            <a:r>
+              <a:rPr dirty="0"/>
               <a:t>One of those cases is worth following. Suppose we decide the bounced-email behavior wasn't free at all—it was tacit.</a:t>
             </a:r>
           </a:p>
@@ -2168,86 +2190,105 @@
           <a:lstStyle/>
           <a:p>
             <a:r>
+              <a:rPr dirty="0"/>
               <a:t>2.5 minutes — Show that agents change the economics of omitted context, not the nature of specification.</a:t>
             </a:r>
           </a:p>
           <a:p>
-            <a:endParaRPr/>
-          </a:p>
-          <a:p>
-            <a:r>
+            <a:endParaRPr dirty="0"/>
+          </a:p>
+          <a:p>
+            <a:r>
+              <a:rPr dirty="0"/>
               <a:t>- This slide is about the TACIT category specifically. The general freedom argument is already made; do not repeat it.</a:t>
             </a:r>
           </a:p>
           <a:p>
-            <a:endParaRPr/>
-          </a:p>
-          <a:p>
-            <a:r>
+            <a:endParaRPr dirty="0"/>
+          </a:p>
+          <a:p>
+            <a:r>
+              <a:rPr dirty="0"/>
               <a:t>- Candidate D callback: the specification appears to permit D, an agent builds it, a human objects — and the objection IS the unrepresented obligation.</a:t>
             </a:r>
           </a:p>
           <a:p>
-            <a:endParaRPr/>
-          </a:p>
-          <a:p>
-            <a:r>
+            <a:endParaRPr dirty="0"/>
+          </a:p>
+          <a:p>
+            <a:r>
+              <a:rPr dirty="0"/>
               <a:t>- Keep it concrete and lightly funny. Avoid generic AI alarmism.</a:t>
             </a:r>
           </a:p>
           <a:p>
-            <a:endParaRPr/>
-          </a:p>
-          <a:p>
-            <a:r>
+            <a:endParaRPr dirty="0"/>
+          </a:p>
+          <a:p>
+            <a:r>
+              <a:rPr dirty="0"/>
               <a:t>=====</a:t>
             </a:r>
           </a:p>
           <a:p>
-            <a:endParaRPr/>
-          </a:p>
-          <a:p>
-            <a:r>
+            <a:endParaRPr dirty="0"/>
+          </a:p>
+          <a:p>
+            <a:r>
+              <a:rPr dirty="0"/>
               <a:t>Return to R7 one last time. Earlier you tried to decide what an implementor would need to know. Here is what happens when one of those consequential facts stays in someone's head.</a:t>
             </a:r>
           </a:p>
           <a:p>
-            <a:endParaRPr/>
-          </a:p>
-          <a:p>
-            <a:r>
+            <a:endParaRPr dirty="0"/>
+          </a:p>
+          <a:p>
+            <a:r>
+              <a:rPr dirty="0"/>
               <a:t>A teammate who sits near you gets a bounced mail and tells the user, because obviously. An agent gets a bounced mail, logs a warning, and returns success. Nothing in R7 forbids that.</a:t>
             </a:r>
           </a:p>
           <a:p>
-            <a:endParaRPr/>
-          </a:p>
-          <a:p>
-            <a:r>
-              <a:t>That objection — obviously not that — is the sound of an obligation nobody externalised. It was real; it just was not written anywhere.</a:t>
-            </a:r>
-          </a:p>
-          <a:p>
-            <a:endParaRPr/>
-          </a:p>
-          <a:p>
-            <a:r>
+            <a:endParaRPr dirty="0"/>
+          </a:p>
+          <a:p>
+            <a:r>
+              <a:rPr dirty="0"/>
+              <a:t>That objection — obviously not that — is the sound of an obligation nobody </a:t>
+            </a:r>
+            <a:r>
+              <a:rPr dirty="0" err="1"/>
+              <a:t>externalised</a:t>
+            </a:r>
+            <a:r>
+              <a:rPr dirty="0"/>
+              <a:t>. It was real; it just was not written anywhere.</a:t>
+            </a:r>
+          </a:p>
+          <a:p>
+            <a:endParaRPr dirty="0"/>
+          </a:p>
+          <a:p>
+            <a:r>
+              <a:rPr dirty="0"/>
               <a:t>The agent is not stupid, it is unopinionated. It will pick a locally plausible point in the apparent realization space every time you leave one open. A human who shares your context reconstructed the missing constraint for free — and we never noticed we were relying on that.</a:t>
             </a:r>
           </a:p>
           <a:p>
-            <a:endParaRPr/>
-          </a:p>
-          <a:p>
-            <a:r>
+            <a:endParaRPr dirty="0"/>
+          </a:p>
+          <a:p>
+            <a:r>
+              <a:rPr dirty="0"/>
               <a:t>Say aloud rather than showing: the agent does not share the team's unstated context, and what changed is the cost of leaving context unsaid.</a:t>
             </a:r>
           </a:p>
           <a:p>
-            <a:endParaRPr/>
-          </a:p>
-          <a:p>
-            <a:r>
+            <a:endParaRPr dirty="0"/>
+          </a:p>
+          <a:p>
+            <a:r>
+              <a:rPr dirty="0"/>
               <a:t>So why not eliminate this problem by specifying everything? Because constraints have a cost too—and software changes the economics of when we need to commit.</a:t>
             </a:r>
           </a:p>
@@ -2313,7 +2354,7 @@
           <a:p>
             <a:r>
               <a:rPr lang="en-US" dirty="0"/>
-              <a:t>So there is a tempting conclusion: </a:t>
+              <a:t>So, there is a tempting conclusion: </a:t>
             </a:r>
             <a:r>
               <a:rPr lang="en-US" b="1" dirty="0"/>
@@ -2342,6 +2383,9 @@
             </a:r>
           </a:p>
           <a:p>
+            <a:endParaRPr lang="en-US" dirty="0"/>
+          </a:p>
+          <a:p>
             <a:r>
               <a:rPr lang="en-US" dirty="0"/>
               <a:t>But there is a problem. </a:t>
@@ -2367,7 +2411,7 @@
           <a:p>
             <a:r>
               <a:rPr lang="en-US" dirty="0"/>
-              <a:t>So this last section asks when implementation should follow specification—and when implementation can help us </a:t>
+              <a:t>So, this last section asks when implementation should follow specification—and when implementation can help us </a:t>
             </a:r>
             <a:r>
               <a:rPr lang="en-US" i="1" dirty="0"/>
@@ -2512,86 +2556,105 @@
           <a:lstStyle/>
           <a:p>
             <a:r>
+              <a:rPr dirty="0"/>
               <a:t>2.5 minutes — Convert iteration from a scheduling habit into an epistemic claim.</a:t>
             </a:r>
           </a:p>
           <a:p>
-            <a:endParaRPr/>
-          </a:p>
-          <a:p>
-            <a:r>
+            <a:endParaRPr dirty="0"/>
+          </a:p>
+          <a:p>
+            <a:r>
+              <a:rPr dirty="0"/>
               <a:t>- Second half of a pair with the not-constrained-is-not-free slide: that carried the principle, this is the story. Tell it once.</a:t>
             </a:r>
           </a:p>
           <a:p>
-            <a:endParaRPr/>
-          </a:p>
-          <a:p>
-            <a:r>
+            <a:endParaRPr dirty="0"/>
+          </a:p>
+          <a:p>
+            <a:r>
+              <a:rPr dirty="0"/>
               <a:t>- This is the UNKNOWN case: the requirement (R5) was known from the beginning; the right specification of it was not.</a:t>
             </a:r>
           </a:p>
           <a:p>
-            <a:endParaRPr/>
-          </a:p>
-          <a:p>
-            <a:r>
+            <a:endParaRPr dirty="0"/>
+          </a:p>
+          <a:p>
+            <a:r>
+              <a:rPr dirty="0"/>
               <a:t>- The state model already made REBASELINING explicit; this story is about learning that the boundary we specified for it was drawn wrong.</a:t>
             </a:r>
           </a:p>
           <a:p>
-            <a:endParaRPr/>
-          </a:p>
-          <a:p>
-            <a:r>
+            <a:endParaRPr dirty="0"/>
+          </a:p>
+          <a:p>
+            <a:r>
+              <a:rPr dirty="0"/>
               <a:t>=====</a:t>
             </a:r>
           </a:p>
           <a:p>
-            <a:endParaRPr/>
-          </a:p>
-          <a:p>
-            <a:r>
-              <a:t>Go back to R5. We knew from the beginning that the app must adapt when a user's normal changes. So the problem here is not that we forgot the requirement.</a:t>
-            </a:r>
-          </a:p>
-          <a:p>
-            <a:endParaRPr/>
-          </a:p>
-          <a:p>
-            <a:r>
+            <a:endParaRPr dirty="0"/>
+          </a:p>
+          <a:p>
+            <a:r>
+              <a:rPr dirty="0"/>
+              <a:t>Go back to R5. We knew from the beginning that the app must adapt when a user's normal changes. So</a:t>
+            </a:r>
+            <a:r>
+              <a:rPr lang="en-US" dirty="0"/>
+              <a:t>, </a:t>
+            </a:r>
+            <a:r>
+              <a:rPr dirty="0"/>
+              <a:t>the problem here is not that we forgot the requirement.</a:t>
+            </a:r>
+          </a:p>
+          <a:p>
+            <a:endParaRPr dirty="0"/>
+          </a:p>
+          <a:p>
+            <a:r>
+              <a:rPr dirty="0"/>
               <a:t>The problem is that knowing the requirement does not mean we already know the right specification. Suppose we decide that a sufficiently persistent shift should cause the system to establish a new baseline. We build that rule and put it into use.</a:t>
             </a:r>
           </a:p>
           <a:p>
-            <a:endParaRPr/>
-          </a:p>
-          <a:p>
-            <a:r>
+            <a:endParaRPr dirty="0"/>
+          </a:p>
+          <a:p>
+            <a:r>
+              <a:rPr dirty="0"/>
               <a:t>Then observation teaches us that persistence alone does not capture the distinction we actually care about. The implementation may have done exactly what the specification required. What changed was our understanding of the acceptable boundary.</a:t>
             </a:r>
           </a:p>
           <a:p>
-            <a:endParaRPr/>
-          </a:p>
-          <a:p>
-            <a:r>
+            <a:endParaRPr dirty="0"/>
+          </a:p>
+          <a:p>
+            <a:r>
+              <a:rPr dirty="0"/>
               <a:t>This is the UNKNOWN case from a few slides ago. The answer was not to specify harder before we had evidence. We specified enough to proceed, built, observed, and learned.</a:t>
             </a:r>
           </a:p>
           <a:p>
-            <a:endParaRPr/>
-          </a:p>
-          <a:p>
-            <a:r>
+            <a:endParaRPr dirty="0"/>
+          </a:p>
+          <a:p>
+            <a:r>
+              <a:rPr dirty="0"/>
               <a:t>Do not turn this into an anti-specification argument. R5 remained valid. What changed was our specification of how that requirement should be realized.</a:t>
             </a:r>
           </a:p>
           <a:p>
-            <a:endParaRPr/>
-          </a:p>
-          <a:p>
-            <a:r>
+            <a:endParaRPr dirty="0"/>
+          </a:p>
+          <a:p>
+            <a:r>
+              <a:rPr dirty="0"/>
               <a:t>That gives us the third response to an unsettled choice: not constrain, not leave open—explore.</a:t>
             </a:r>
           </a:p>
@@ -2788,7 +2851,15 @@
           <a:p>
             <a:r>
               <a:rPr dirty="0"/>
-              <a:t>Leave open when every answer is acceptable. Say so in writing if you can — marking something deliberately open stops the next reader treating it as an oversight, and stops an agent treating it as an invitation.</a:t>
+              <a:t>Leave open when every answer is acceptable. Say so in writing if you can — marking something deliberately open stops the next reader treating it as an oversight</a:t>
+            </a:r>
+            <a:r>
+              <a:rPr lang="en-US" dirty="0"/>
+              <a:t> </a:t>
+            </a:r>
+            <a:r>
+              <a:rPr dirty="0"/>
+              <a:t>and stops an agent treating it as an invitation.</a:t>
             </a:r>
           </a:p>
           <a:p>
@@ -2855,7 +2926,7 @@
 </p:notes>
 </file>
 
-<file path=ppt/notesSlides/notesSlide32.xml><?xml version="1.0" encoding="utf-8"?>
+<file path=ppt/notesSlides/notesSlide31.xml><?xml version="1.0" encoding="utf-8"?>
 <p:notes xmlns:a="http://schemas.openxmlformats.org/drawingml/2006/main" xmlns:r="http://schemas.openxmlformats.org/officeDocument/2006/relationships" xmlns:p="http://schemas.openxmlformats.org/presentationml/2006/main">
   <p:cSld>
     <p:spTree>
@@ -2888,110 +2959,140 @@
           <a:lstStyle/>
           <a:p>
             <a:r>
+              <a:rPr dirty="0"/>
               <a:t>2 minutes — Close by locating today inside the course, and correct the ladder misconception.</a:t>
             </a:r>
           </a:p>
           <a:p>
-            <a:endParaRPr/>
-          </a:p>
-          <a:p>
-            <a:r>
-              <a:t>- It is the model from slide 2, extended forward. Students should recognise it instantly.</a:t>
-            </a:r>
-          </a:p>
-          <a:p>
-            <a:endParaRPr/>
-          </a:p>
-          <a:p>
-            <a:r>
+            <a:endParaRPr dirty="0"/>
+          </a:p>
+          <a:p>
+            <a:r>
+              <a:rPr dirty="0"/>
+              <a:t>- It is the model from slide 2, extended forward. Students should </a:t>
+            </a:r>
+            <a:r>
+              <a:rPr dirty="0" err="1"/>
+              <a:t>recognise</a:t>
+            </a:r>
+            <a:r>
+              <a:rPr dirty="0"/>
+              <a:t> it instantly.</a:t>
+            </a:r>
+          </a:p>
+          <a:p>
+            <a:endParaRPr dirty="0"/>
+          </a:p>
+          <a:p>
+            <a:r>
+              <a:rPr dirty="0"/>
               <a:t>- Architecture and design hang under A, not under SPECIFICATION. That is the argument.</a:t>
             </a:r>
           </a:p>
           <a:p>
-            <a:endParaRPr/>
-          </a:p>
-          <a:p>
-            <a:r>
+            <a:endParaRPr dirty="0"/>
+          </a:p>
+          <a:p>
+            <a:r>
+              <a:rPr dirty="0"/>
               <a:t>- Students picture requirements to design as one ladder of increasing detail. If architecture were more specification, every architectural decision would be an obligation on the implementor — which is not how anyone works.</a:t>
             </a:r>
           </a:p>
           <a:p>
-            <a:endParaRPr/>
-          </a:p>
-          <a:p>
-            <a:r>
+            <a:endParaRPr dirty="0"/>
+          </a:p>
+          <a:p>
+            <a:r>
+              <a:rPr dirty="0"/>
               <a:t>- If over time: skip the second build and say the closing line.</a:t>
             </a:r>
           </a:p>
           <a:p>
-            <a:endParaRPr/>
-          </a:p>
-          <a:p>
-            <a:r>
+            <a:endParaRPr dirty="0"/>
+          </a:p>
+          <a:p>
+            <a:r>
+              <a:rPr dirty="0"/>
               <a:t>- Check: can they say why requirements alone may not be buildable, what a specification adds, why more than one representation, what a degree of freedom is, why unspecified is not free, why not specify everything, and how iteration discovers specification?</a:t>
             </a:r>
           </a:p>
           <a:p>
-            <a:endParaRPr/>
-          </a:p>
-          <a:p>
-            <a:r>
+            <a:endParaRPr dirty="0"/>
+          </a:p>
+          <a:p>
+            <a:r>
+              <a:rPr dirty="0"/>
               <a:t>=====</a:t>
             </a:r>
           </a:p>
           <a:p>
-            <a:endParaRPr/>
-          </a:p>
-          <a:p>
-            <a:r>
+            <a:endParaRPr dirty="0"/>
+          </a:p>
+          <a:p>
+            <a:r>
+              <a:rPr dirty="0"/>
               <a:t>We opened with this picture and we are closing with it. Requirements: what should be true. Specification: which realizations we are willing to accept. R4 allowed Builds A, B, and C until we stated more obligations. R6 became concrete when we defined the weekly-summary boundary. R5 remained a requirement even when use taught us to revise the specification.</a:t>
             </a:r>
           </a:p>
           <a:p>
-            <a:endParaRPr/>
-          </a:p>
-          <a:p>
-            <a:r>
+            <a:endParaRPr dirty="0"/>
+          </a:p>
+          <a:p>
+            <a:r>
+              <a:rPr dirty="0"/>
               <a:t>ANIMATE</a:t>
             </a:r>
           </a:p>
           <a:p>
-            <a:endParaRPr/>
-          </a:p>
-          <a:p>
-            <a:r>
-              <a:t>Architecture asks how the system is structured. Design asks how each part is realised inside. Both hang under one candidate.</a:t>
-            </a:r>
-          </a:p>
-          <a:p>
-            <a:endParaRPr/>
-          </a:p>
-          <a:p>
-            <a:r>
+            <a:endParaRPr dirty="0"/>
+          </a:p>
+          <a:p>
+            <a:r>
+              <a:rPr dirty="0"/>
+              <a:t>Architecture asks how the system is structured. Design asks how each part is </a:t>
+            </a:r>
+            <a:r>
+              <a:rPr dirty="0" err="1"/>
+              <a:t>realised</a:t>
+            </a:r>
+            <a:r>
+              <a:rPr dirty="0"/>
+              <a:t> inside. Both hang under one candidate.</a:t>
+            </a:r>
+          </a:p>
+          <a:p>
+            <a:endParaRPr dirty="0"/>
+          </a:p>
+          <a:p>
+            <a:r>
+              <a:rPr dirty="0"/>
               <a:t>ANIMATE</a:t>
             </a:r>
           </a:p>
           <a:p>
-            <a:endParaRPr/>
-          </a:p>
-          <a:p>
-            <a:r>
+            <a:endParaRPr dirty="0"/>
+          </a:p>
+          <a:p>
+            <a:r>
+              <a:rPr dirty="0"/>
               <a:t>They are mostly choices inside the acceptable space rather than further specification, though a specification can reach them, as the A-7E subset requirement did. We pick one of the systems the specification was already willing to accept, and then decide how to structure and build it.</a:t>
             </a:r>
           </a:p>
           <a:p>
-            <a:endParaRPr/>
-          </a:p>
-          <a:p>
-            <a:r>
+            <a:endParaRPr dirty="0"/>
+          </a:p>
+          <a:p>
+            <a:r>
+              <a:rPr dirty="0"/>
               <a:t>Today we asked which realizations are acceptable. Next we start choosing how one of those acceptable systems should be structured.</a:t>
             </a:r>
           </a:p>
           <a:p>
-            <a:endParaRPr/>
-          </a:p>
-          <a:p>
-            <a:r>
+            <a:endParaRPr dirty="0"/>
+          </a:p>
+          <a:p>
+            <a:r>
+              <a:rPr dirty="0"/>
               <a:t>Constrain what matters. Leave acceptable alternatives open. Explore what you do not yet understand.</a:t>
             </a:r>
           </a:p>
@@ -3084,62 +3185,70 @@
           <a:lstStyle/>
           <a:p>
             <a:r>
+              <a:rPr dirty="0"/>
               <a:t>2 minutes — Show that reasonable requirements can still admit substantially different realizations.</a:t>
             </a:r>
           </a:p>
           <a:p>
-            <a:endParaRPr/>
-          </a:p>
-          <a:p>
-            <a:r>
+            <a:endParaRPr dirty="0"/>
+          </a:p>
+          <a:p>
+            <a:r>
+              <a:rPr dirty="0"/>
               <a:t>- Slide 2 already framed the model; do not re-explain it. This slide makes the abstract arrow concrete.</a:t>
             </a:r>
           </a:p>
           <a:p>
-            <a:endParaRPr/>
-          </a:p>
-          <a:p>
-            <a:r>
+            <a:endParaRPr dirty="0"/>
+          </a:p>
+          <a:p>
+            <a:r>
+              <a:rPr dirty="0"/>
               <a:t>- Name these Build A, B and C out loud. The letters carry through the lecture; later slides eliminate them one at a time.</a:t>
             </a:r>
           </a:p>
           <a:p>
-            <a:endParaRPr/>
-          </a:p>
-          <a:p>
-            <a:r>
+            <a:endParaRPr dirty="0"/>
+          </a:p>
+          <a:p>
+            <a:r>
+              <a:rPr dirty="0"/>
               <a:t>- Ask the closing question and take two answers before moving on.</a:t>
             </a:r>
           </a:p>
           <a:p>
-            <a:endParaRPr/>
-          </a:p>
-          <a:p>
-            <a:r>
+            <a:endParaRPr dirty="0"/>
+          </a:p>
+          <a:p>
+            <a:r>
+              <a:rPr dirty="0"/>
               <a:t>=====</a:t>
             </a:r>
           </a:p>
           <a:p>
-            <a:endParaRPr/>
-          </a:p>
-          <a:p>
-            <a:r>
+            <a:endParaRPr dirty="0"/>
+          </a:p>
+          <a:p>
+            <a:r>
+              <a:rPr dirty="0"/>
               <a:t>Three teams receive exactly that sentence and nothing more. Team A captures a baseline once, at install, and compares last night to it, every morning. Team B keeps a rolling thirty-day baseline and sends a weekly digest. Team C runs a heart-rate variability model and only speaks up above ninety percent confidence.</a:t>
             </a:r>
           </a:p>
           <a:p>
-            <a:endParaRPr/>
-          </a:p>
-          <a:p>
-            <a:r>
+            <a:endParaRPr dirty="0"/>
+          </a:p>
+          <a:p>
+            <a:r>
+              <a:rPr dirty="0"/>
               <a:t>Every one of those satisfies the sentence. None of them is the same product. A user would notice immediately which one they had.</a:t>
             </a:r>
           </a:p>
           <a:p>
-            <a:endParaRPr/>
-          </a:p>
-          <a:p>
-            <a:r>
+            <a:endParaRPr dirty="0"/>
+          </a:p>
+          <a:p>
+            <a:r>
+              <a:rPr dirty="0"/>
               <a:t>So what does specification add that R4 did not tell us? Start with the boundary between the world we care about and the machine we can build.</a:t>
             </a:r>
           </a:p>
@@ -3395,79 +3504,97 @@
           <a:lstStyle/>
           <a:p>
             <a:r>
+              <a:rPr dirty="0"/>
               <a:t>5 minutes — Students discover that omissions differ in kind before we give them the vocabulary.</a:t>
             </a:r>
           </a:p>
           <a:p>
-            <a:endParaRPr/>
-          </a:p>
-          <a:p>
-            <a:r>
+            <a:endParaRPr dirty="0"/>
+          </a:p>
+          <a:p>
+            <a:r>
+              <a:rPr dirty="0"/>
               <a:t>- Hold the timing firmly: 1 think, 2 pair, 2 share. Do not let the share run — the payoff is three slides away.</a:t>
             </a:r>
           </a:p>
           <a:p>
-            <a:endParaRPr/>
-          </a:p>
-          <a:p>
-            <a:r>
+            <a:endParaRPr dirty="0"/>
+          </a:p>
+          <a:p>
+            <a:r>
+              <a:rPr dirty="0"/>
               <a:t>- Likely answers to Q1: send it, let them pick a doctor, pick a format. Q2: consent, retention, revocation, what counts as a summary, what if sending fails. Q3: transport, file format, styling.</a:t>
             </a:r>
           </a:p>
           <a:p>
-            <a:endParaRPr/>
-          </a:p>
-          <a:p>
-            <a:r>
+            <a:endParaRPr dirty="0"/>
+          </a:p>
+          <a:p>
+            <a:r>
+              <a:rPr dirty="0"/>
               <a:t>- Do NOT introduce unknown / tacit / free here. Students must wrestle with the question first.</a:t>
             </a:r>
           </a:p>
           <a:p>
-            <a:endParaRPr/>
-          </a:p>
-          <a:p>
-            <a:r>
+            <a:endParaRPr dirty="0"/>
+          </a:p>
+          <a:p>
+            <a:r>
+              <a:rPr dirty="0"/>
               <a:t>- Close with the line on screen; that is the transition, not a summary.</a:t>
             </a:r>
           </a:p>
           <a:p>
-            <a:endParaRPr/>
-          </a:p>
-          <a:p>
-            <a:r>
+            <a:endParaRPr dirty="0"/>
+          </a:p>
+          <a:p>
+            <a:r>
+              <a:rPr dirty="0"/>
               <a:t>=====</a:t>
             </a:r>
           </a:p>
           <a:p>
-            <a:endParaRPr/>
-          </a:p>
-          <a:p>
-            <a:r>
+            <a:endParaRPr dirty="0"/>
+          </a:p>
+          <a:p>
+            <a:r>
+              <a:rPr dirty="0"/>
               <a:t>Now take another requirement from the same system: R7. Imagine handing exactly this requirement to an implementor who has never met the user and cannot ask you anything. One minute alone: write what the implementation must do, then everything you would still need to know.</a:t>
             </a:r>
           </a:p>
           <a:p>
-            <a:endParaRPr/>
-          </a:p>
-          <a:p>
-            <a:r>
-              <a:t>Now two minutes with a neighbour. Compare your missing-facts lists and mark the ones you would be content to let the implementor decide.</a:t>
-            </a:r>
-          </a:p>
-          <a:p>
-            <a:endParaRPr/>
-          </a:p>
-          <a:p>
-            <a:r>
+            <a:endParaRPr dirty="0"/>
+          </a:p>
+          <a:p>
+            <a:r>
+              <a:rPr dirty="0"/>
+              <a:t>Now two minutes with a neighbor. Compare your missing-facts lists and mark the ones you would be content to let the implementor decide.</a:t>
+            </a:r>
+          </a:p>
+          <a:p>
+            <a:endParaRPr dirty="0"/>
+          </a:p>
+          <a:p>
+            <a:r>
+              <a:rPr dirty="0"/>
               <a:t>Take three or four answers. Push on any two people who disagreed about whether something could be left open — that disagreement is the seed of the next section.</a:t>
             </a:r>
           </a:p>
           <a:p>
-            <a:endParaRPr/>
-          </a:p>
-          <a:p>
-            <a:r>
-              <a:t>Then close: notice that not every missing fact has the same status. Some you could answer today and did not. Some we do not yet know how to answer. Some you genuinely do not care about. We will come back to that.</a:t>
+            <a:endParaRPr dirty="0"/>
+          </a:p>
+          <a:p>
+            <a:r>
+              <a:rPr dirty="0"/>
+              <a:t>Then close: notice that not every missing </a:t>
+            </a:r>
+            <a:r>
+              <a:rPr lang="en-US" dirty="0"/>
+              <a:t>fact is handled the same way</a:t>
+            </a:r>
+            <a:r>
+              <a:rPr dirty="0"/>
+              <a:t>. Some you could answer today and did not. Some we do not yet know how to answer. Some you genuinely do not care about. We will come back to that.</a:t>
             </a:r>
           </a:p>
         </p:txBody>
@@ -3525,16 +3652,19 @@
           <a:lstStyle/>
           <a:p>
             <a:r>
+              <a:rPr dirty="0"/>
               <a:t>You just tried this for one requirement in a much smaller system. What happens when engineers have to answer the same question for a much more complex system?</a:t>
             </a:r>
           </a:p>
           <a:p>
             <a:r>
+              <a:rPr dirty="0"/>
               <a:t>Let's look at one substantial example: the A-7E aircraft software specification.</a:t>
             </a:r>
           </a:p>
           <a:p>
             <a:r>
+              <a:rPr dirty="0"/>
               <a:t>Do not read it as a historical curiosity, and do not look for one particular specification notation. Instead ask: what did these engineers decide needed to be made explicit, and how did they represent it?</a:t>
             </a:r>
           </a:p>
@@ -10511,7 +10641,7 @@
         </p:spPr>
         <p:txBody>
           <a:bodyPr wrap="square" lIns="0" tIns="0" rIns="0" bIns="0" anchor="t">
-            <a:normAutofit/>
+            <a:normAutofit fontScale="92500"/>
           </a:bodyPr>
           <a:lstStyle/>
           <a:p>
@@ -12500,7 +12630,7 @@
         </p:nvSpPr>
         <p:spPr>
           <a:xfrm>
-            <a:off x="2108200" y="1490472"/>
+            <a:off x="1515992" y="2524569"/>
             <a:ext cx="1524000" cy="658368"/>
           </a:xfrm>
           <a:prstGeom prst="rect">
@@ -12543,7 +12673,7 @@
         </p:nvSpPr>
         <p:spPr>
           <a:xfrm>
-            <a:off x="3937000" y="1490472"/>
+            <a:off x="3344792" y="2524569"/>
             <a:ext cx="1524000" cy="658368"/>
           </a:xfrm>
           <a:prstGeom prst="rect">
@@ -12586,7 +12716,7 @@
         </p:nvSpPr>
         <p:spPr>
           <a:xfrm>
-            <a:off x="3937000" y="3575304"/>
+            <a:off x="3344792" y="4609401"/>
             <a:ext cx="1524000" cy="658368"/>
           </a:xfrm>
           <a:prstGeom prst="rect">
@@ -12792,13 +12922,15 @@
       </p:sp>
       <p:cxnSp>
         <p:nvCxnSpPr>
-          <p:cNvPr id="1101" name="Flow"/>
-          <p:cNvCxnSpPr/>
+          <p:cNvPr id="1102" name="Flow"/>
+          <p:cNvCxnSpPr>
+            <a:cxnSpLocks/>
+          </p:cNvCxnSpPr>
           <p:nvPr/>
         </p:nvCxnSpPr>
         <p:spPr>
           <a:xfrm>
-            <a:off x="1803400" y="1819656"/>
+            <a:off x="3039992" y="2725737"/>
             <a:ext cx="304800" cy="0"/>
           </a:xfrm>
           <a:prstGeom prst="line">
@@ -12814,13 +12946,15 @@
       </p:cxnSp>
       <p:cxnSp>
         <p:nvCxnSpPr>
-          <p:cNvPr id="1102" name="Flow"/>
-          <p:cNvCxnSpPr/>
+          <p:cNvPr id="1120" name="Flow"/>
+          <p:cNvCxnSpPr>
+            <a:cxnSpLocks/>
+          </p:cNvCxnSpPr>
           <p:nvPr/>
         </p:nvCxnSpPr>
         <p:spPr>
-          <a:xfrm>
-            <a:off x="3632200" y="1691640"/>
+          <a:xfrm flipH="1">
+            <a:off x="3039992" y="3027489"/>
             <a:ext cx="304800" cy="0"/>
           </a:xfrm>
           <a:prstGeom prst="line">
@@ -12834,16 +12968,148 @@
           </a:ln>
         </p:spPr>
       </p:cxnSp>
+      <p:sp>
+        <p:nvSpPr>
+          <p:cNvPr id="1103" name="Lb"/>
+          <p:cNvSpPr txBox="1"/>
+          <p:nvPr/>
+        </p:nvSpPr>
+        <p:spPr>
+          <a:xfrm>
+            <a:off x="205207" y="2364232"/>
+            <a:ext cx="874981" cy="391160"/>
+          </a:xfrm>
+          <a:prstGeom prst="rect">
+            <a:avLst/>
+          </a:prstGeom>
+          <a:noFill/>
+          <a:ln>
+            <a:noFill/>
+          </a:ln>
+        </p:spPr>
+        <p:txBody>
+          <a:bodyPr lIns="0" tIns="0" rIns="0" bIns="0" anchor="ctr">
+            <a:noAutofit/>
+          </a:bodyPr>
+          <a:lstStyle/>
+          <a:p>
+            <a:pPr algn="ctr">
+              <a:buNone/>
+            </a:pPr>
+            <a:r>
+              <a:rPr lang="en-US" sz="1200" dirty="0">
+                <a:solidFill>
+                  <a:srgbClr val="555960"/>
+                </a:solidFill>
+              </a:rPr>
+              <a:t>baseline established</a:t>
+            </a:r>
+          </a:p>
+        </p:txBody>
+      </p:sp>
+      <p:sp>
+        <p:nvSpPr>
+          <p:cNvPr id="1121" name="Lb"/>
+          <p:cNvSpPr txBox="1"/>
+          <p:nvPr/>
+        </p:nvSpPr>
+        <p:spPr>
+          <a:xfrm>
+            <a:off x="2672650" y="3205421"/>
+            <a:ext cx="977358" cy="502863"/>
+          </a:xfrm>
+          <a:prstGeom prst="rect">
+            <a:avLst/>
+          </a:prstGeom>
+          <a:noFill/>
+          <a:ln>
+            <a:noFill/>
+          </a:ln>
+        </p:spPr>
+        <p:txBody>
+          <a:bodyPr lIns="0" tIns="0" rIns="0" bIns="0" anchor="ctr">
+            <a:noAutofit/>
+          </a:bodyPr>
+          <a:lstStyle/>
+          <a:p>
+            <a:pPr algn="ctr">
+              <a:buNone/>
+            </a:pPr>
+            <a:r>
+              <a:rPr lang="en-US" sz="1200" dirty="0">
+                <a:solidFill>
+                  <a:srgbClr val="555960"/>
+                </a:solidFill>
+              </a:rPr>
+              <a:t>pattern returns to normal</a:t>
+            </a:r>
+          </a:p>
+        </p:txBody>
+      </p:sp>
+      <p:sp>
+        <p:nvSpPr>
+          <p:cNvPr id="1104" name="Lb"/>
+          <p:cNvSpPr txBox="1"/>
+          <p:nvPr/>
+        </p:nvSpPr>
+        <p:spPr>
+          <a:xfrm>
+            <a:off x="2333996" y="2148377"/>
+            <a:ext cx="1742190" cy="343172"/>
+          </a:xfrm>
+          <a:prstGeom prst="rect">
+            <a:avLst/>
+          </a:prstGeom>
+          <a:noFill/>
+          <a:ln>
+            <a:noFill/>
+          </a:ln>
+        </p:spPr>
+        <p:txBody>
+          <a:bodyPr lIns="0" tIns="0" rIns="0" bIns="0" anchor="ctr">
+            <a:noAutofit/>
+          </a:bodyPr>
+          <a:lstStyle/>
+          <a:p>
+            <a:pPr algn="ctr">
+              <a:buNone/>
+            </a:pPr>
+            <a:r>
+              <a:rPr lang="en-US" sz="1200" dirty="0">
+                <a:solidFill>
+                  <a:srgbClr val="555960"/>
+                </a:solidFill>
+              </a:rPr>
+              <a:t>meaningful </a:t>
+            </a:r>
+          </a:p>
+          <a:p>
+            <a:pPr algn="ctr">
+              <a:buNone/>
+            </a:pPr>
+            <a:r>
+              <a:rPr lang="en-US" sz="1200" dirty="0">
+                <a:solidFill>
+                  <a:srgbClr val="555960"/>
+                </a:solidFill>
+              </a:rPr>
+              <a:t>departure detected</a:t>
+            </a:r>
+          </a:p>
+        </p:txBody>
+      </p:sp>
       <p:cxnSp>
         <p:nvCxnSpPr>
-          <p:cNvPr id="1120" name="Flow"/>
-          <p:cNvCxnSpPr/>
+          <p:cNvPr id="1105" name="Flow"/>
+          <p:cNvCxnSpPr>
+            <a:cxnSpLocks/>
+          </p:cNvCxnSpPr>
           <p:nvPr/>
         </p:nvCxnSpPr>
         <p:spPr>
-          <a:xfrm flipH="1">
-            <a:off x="3632200" y="1993392"/>
-            <a:ext cx="304800" cy="0"/>
+          <a:xfrm>
+            <a:off x="4106792" y="3256089"/>
+            <a:ext cx="0" cy="1353312"/>
           </a:xfrm>
           <a:prstGeom prst="line">
             <a:avLst/>
@@ -12858,14 +13124,14 @@
       </p:cxnSp>
       <p:sp>
         <p:nvSpPr>
-          <p:cNvPr id="1103" name="Lb"/>
+          <p:cNvPr id="1106" name="Lb"/>
           <p:cNvSpPr txBox="1"/>
           <p:nvPr/>
         </p:nvSpPr>
         <p:spPr>
           <a:xfrm>
-            <a:off x="1155700" y="1170432"/>
-            <a:ext cx="1600200" cy="254000"/>
+            <a:off x="3271506" y="3894099"/>
+            <a:ext cx="757003" cy="502920"/>
           </a:xfrm>
           <a:prstGeom prst="rect">
             <a:avLst/>
@@ -12881,7 +13147,7 @@
           </a:bodyPr>
           <a:lstStyle/>
           <a:p>
-            <a:pPr algn="ctr">
+            <a:pPr algn="r">
               <a:buNone/>
             </a:pPr>
             <a:r>
@@ -12890,99 +13156,69 @@
                   <a:srgbClr val="555960"/>
                 </a:solidFill>
               </a:rPr>
-              <a:t>baseline established</a:t>
-            </a:r>
-          </a:p>
-        </p:txBody>
-      </p:sp>
-      <p:sp>
-        <p:nvSpPr>
-          <p:cNvPr id="1121" name="Lb"/>
-          <p:cNvSpPr txBox="1"/>
-          <p:nvPr/>
-        </p:nvSpPr>
-        <p:spPr>
-          <a:xfrm>
-            <a:off x="3017520" y="2267712"/>
-            <a:ext cx="1600200" cy="502920"/>
-          </a:xfrm>
-          <a:prstGeom prst="rect">
-            <a:avLst/>
-          </a:prstGeom>
-          <a:noFill/>
-          <a:ln>
-            <a:noFill/>
-          </a:ln>
-        </p:spPr>
-        <p:txBody>
-          <a:bodyPr lIns="0" tIns="0" rIns="0" bIns="0" anchor="ctr">
-            <a:noAutofit/>
-          </a:bodyPr>
-          <a:lstStyle/>
-          <a:p>
-            <a:pPr algn="ctr">
-              <a:buNone/>
-            </a:pPr>
-            <a:r>
-              <a:rPr lang="en-US" sz="1200" dirty="0">
-                <a:solidFill>
-                  <a:srgbClr val="555960"/>
-                </a:solidFill>
-              </a:rPr>
-              <a:t>pattern returns to normal</a:t>
-            </a:r>
-          </a:p>
-        </p:txBody>
-      </p:sp>
-      <p:sp>
-        <p:nvSpPr>
-          <p:cNvPr id="1104" name="Lb"/>
-          <p:cNvSpPr txBox="1"/>
-          <p:nvPr/>
-        </p:nvSpPr>
-        <p:spPr>
-          <a:xfrm>
-            <a:off x="2641600" y="1170432"/>
-            <a:ext cx="2286000" cy="254000"/>
-          </a:xfrm>
-          <a:prstGeom prst="rect">
-            <a:avLst/>
-          </a:prstGeom>
-          <a:noFill/>
-          <a:ln>
-            <a:noFill/>
-          </a:ln>
-        </p:spPr>
-        <p:txBody>
-          <a:bodyPr lIns="0" tIns="0" rIns="0" bIns="0" anchor="ctr">
-            <a:noAutofit/>
-          </a:bodyPr>
-          <a:lstStyle/>
-          <a:p>
-            <a:pPr algn="ctr">
-              <a:buNone/>
-            </a:pPr>
-            <a:r>
-              <a:rPr lang="en-US" sz="1200" dirty="0">
-                <a:solidFill>
-                  <a:srgbClr val="555960"/>
-                </a:solidFill>
-              </a:rPr>
-              <a:t>meaningful departure detected</a:t>
+              <a:t>change appears persistent</a:t>
             </a:r>
           </a:p>
         </p:txBody>
       </p:sp>
       <p:cxnSp>
         <p:nvCxnSpPr>
-          <p:cNvPr id="1105" name="Flow"/>
-          <p:cNvCxnSpPr/>
+          <p:cNvPr id="1107" name="Flow"/>
+          <p:cNvCxnSpPr>
+            <a:cxnSpLocks/>
+          </p:cNvCxnSpPr>
           <p:nvPr/>
         </p:nvCxnSpPr>
         <p:spPr>
           <a:xfrm>
-            <a:off x="4699000" y="2221992"/>
-            <a:ext cx="0" cy="1353312"/>
+            <a:off x="4106792" y="5267769"/>
+            <a:ext cx="0" cy="365760"/>
+          </a:xfrm>
+          <a:prstGeom prst="line">
+            <a:avLst/>
+          </a:prstGeom>
+          <a:ln w="19050">
+            <a:solidFill>
+              <a:srgbClr val="8E6F3E"/>
+            </a:solidFill>
+          </a:ln>
+        </p:spPr>
+      </p:cxnSp>
+      <p:cxnSp>
+        <p:nvCxnSpPr>
+          <p:cNvPr id="1108" name="Flow"/>
+          <p:cNvCxnSpPr>
+            <a:cxnSpLocks/>
+          </p:cNvCxnSpPr>
+          <p:nvPr/>
+        </p:nvCxnSpPr>
+        <p:spPr>
+          <a:xfrm flipH="1">
+            <a:off x="2277992" y="5633529"/>
+            <a:ext cx="1828800" cy="0"/>
+          </a:xfrm>
+          <a:prstGeom prst="line">
+            <a:avLst/>
+          </a:prstGeom>
+          <a:ln w="19050">
+            <a:solidFill>
+              <a:srgbClr val="8E6F3E"/>
+            </a:solidFill>
+          </a:ln>
+        </p:spPr>
+      </p:cxnSp>
+      <p:cxnSp>
+        <p:nvCxnSpPr>
+          <p:cNvPr id="1109" name="Flow"/>
+          <p:cNvCxnSpPr>
+            <a:cxnSpLocks/>
+          </p:cNvCxnSpPr>
+          <p:nvPr/>
+        </p:nvCxnSpPr>
+        <p:spPr>
+          <a:xfrm flipV="1">
+            <a:off x="2277992" y="3182937"/>
+            <a:ext cx="0" cy="2450592"/>
           </a:xfrm>
           <a:prstGeom prst="line">
             <a:avLst/>
@@ -12997,116 +13233,13 @@
       </p:cxnSp>
       <p:sp>
         <p:nvSpPr>
-          <p:cNvPr id="1106" name="Lb"/>
-          <p:cNvSpPr txBox="1"/>
-          <p:nvPr/>
-        </p:nvSpPr>
-        <p:spPr>
-          <a:xfrm>
-            <a:off x="2907792" y="2971800"/>
-            <a:ext cx="1664208" cy="502920"/>
-          </a:xfrm>
-          <a:prstGeom prst="rect">
-            <a:avLst/>
-          </a:prstGeom>
-          <a:noFill/>
-          <a:ln>
-            <a:noFill/>
-          </a:ln>
-        </p:spPr>
-        <p:txBody>
-          <a:bodyPr lIns="0" tIns="0" rIns="0" bIns="0" anchor="ctr">
-            <a:noAutofit/>
-          </a:bodyPr>
-          <a:lstStyle/>
-          <a:p>
-            <a:pPr algn="r">
-              <a:buNone/>
-            </a:pPr>
-            <a:r>
-              <a:rPr lang="en-US" sz="1200" dirty="0">
-                <a:solidFill>
-                  <a:srgbClr val="555960"/>
-                </a:solidFill>
-              </a:rPr>
-              <a:t>change appears persistent</a:t>
-            </a:r>
-          </a:p>
-        </p:txBody>
-      </p:sp>
-      <p:cxnSp>
-        <p:nvCxnSpPr>
-          <p:cNvPr id="1107" name="Flow"/>
-          <p:cNvCxnSpPr/>
-          <p:nvPr/>
-        </p:nvCxnSpPr>
-        <p:spPr>
-          <a:xfrm>
-            <a:off x="4699000" y="4233672"/>
-            <a:ext cx="0" cy="365760"/>
-          </a:xfrm>
-          <a:prstGeom prst="line">
-            <a:avLst/>
-          </a:prstGeom>
-          <a:ln w="19050">
-            <a:solidFill>
-              <a:srgbClr val="8E6F3E"/>
-            </a:solidFill>
-          </a:ln>
-        </p:spPr>
-      </p:cxnSp>
-      <p:cxnSp>
-        <p:nvCxnSpPr>
-          <p:cNvPr id="1108" name="Flow"/>
-          <p:cNvCxnSpPr/>
-          <p:nvPr/>
-        </p:nvCxnSpPr>
-        <p:spPr>
-          <a:xfrm flipH="1">
-            <a:off x="2870200" y="4599432"/>
-            <a:ext cx="1828800" cy="0"/>
-          </a:xfrm>
-          <a:prstGeom prst="line">
-            <a:avLst/>
-          </a:prstGeom>
-          <a:ln w="19050">
-            <a:solidFill>
-              <a:srgbClr val="8E6F3E"/>
-            </a:solidFill>
-          </a:ln>
-        </p:spPr>
-      </p:cxnSp>
-      <p:cxnSp>
-        <p:nvCxnSpPr>
-          <p:cNvPr id="1109" name="Flow"/>
-          <p:cNvCxnSpPr/>
-          <p:nvPr/>
-        </p:nvCxnSpPr>
-        <p:spPr>
-          <a:xfrm flipV="1">
-            <a:off x="2870200" y="2148840"/>
-            <a:ext cx="0" cy="2450592"/>
-          </a:xfrm>
-          <a:prstGeom prst="line">
-            <a:avLst/>
-          </a:prstGeom>
-          <a:ln w="19050">
-            <a:solidFill>
-              <a:srgbClr val="8E6F3E"/>
-            </a:solidFill>
-            <a:tailEnd type="triangle"/>
-          </a:ln>
-        </p:spPr>
-      </p:cxnSp>
-      <p:sp>
-        <p:nvSpPr>
           <p:cNvPr id="1110" name="Lb"/>
           <p:cNvSpPr txBox="1"/>
           <p:nvPr/>
         </p:nvSpPr>
         <p:spPr>
           <a:xfrm>
-            <a:off x="2997200" y="4663440"/>
+            <a:off x="2404992" y="5697537"/>
             <a:ext cx="2032000" cy="254000"/>
           </a:xfrm>
           <a:prstGeom prst="rect">
@@ -13167,6 +13300,38 @@
           </a:prstGeom>
         </p:spPr>
       </p:pic>
+      <p:cxnSp>
+        <p:nvCxnSpPr>
+          <p:cNvPr id="7" name="Elbow Connector 6">
+            <a:extLst>
+              <a:ext uri="{FF2B5EF4-FFF2-40B4-BE49-F238E27FC236}">
+                <a16:creationId xmlns:a16="http://schemas.microsoft.com/office/drawing/2014/main" id="{EFE52EF8-AAD5-C64F-F173-00BC6D39E3B8}"/>
+              </a:ext>
+            </a:extLst>
+          </p:cNvPr>
+          <p:cNvCxnSpPr>
+            <a:cxnSpLocks/>
+            <a:stCxn id="1002" idx="2"/>
+            <a:endCxn id="1003" idx="1"/>
+          </p:cNvCxnSpPr>
+          <p:nvPr/>
+        </p:nvCxnSpPr>
+        <p:spPr>
+          <a:xfrm rot="16200000" flipH="1">
+            <a:off x="926240" y="2264000"/>
+            <a:ext cx="704913" cy="474592"/>
+          </a:xfrm>
+          <a:prstGeom prst="bentConnector2">
+            <a:avLst/>
+          </a:prstGeom>
+          <a:ln w="19050">
+            <a:solidFill>
+              <a:srgbClr val="8E6F3E"/>
+            </a:solidFill>
+            <a:tailEnd type="triangle"/>
+          </a:ln>
+        </p:spPr>
+      </p:cxnSp>
     </p:spTree>
     <p:extLst>
       <p:ext uri="{BB962C8B-B14F-4D97-AF65-F5344CB8AC3E}">
@@ -14142,7 +14307,7 @@
         </p:spPr>
         <p:txBody>
           <a:bodyPr wrap="square" lIns="109728" tIns="82296" rIns="109728" bIns="82296" anchor="ctr">
-            <a:normAutofit lnSpcReduction="10000"/>
+            <a:normAutofit fontScale="92500" lnSpcReduction="10000"/>
           </a:bodyPr>
           <a:lstStyle/>
           <a:p>
@@ -14503,7 +14668,7 @@
         </p:spPr>
         <p:txBody>
           <a:bodyPr wrap="square" lIns="109728" tIns="82296" rIns="109728" bIns="82296" anchor="ctr">
-            <a:normAutofit/>
+            <a:normAutofit lnSpcReduction="10000"/>
           </a:bodyPr>
           <a:lstStyle/>
           <a:p>
@@ -14546,7 +14711,7 @@
         </p:spPr>
         <p:txBody>
           <a:bodyPr wrap="square" lIns="109728" tIns="82296" rIns="109728" bIns="82296" anchor="ctr">
-            <a:normAutofit/>
+            <a:normAutofit lnSpcReduction="10000"/>
           </a:bodyPr>
           <a:lstStyle/>
           <a:p>
@@ -14589,7 +14754,7 @@
         </p:spPr>
         <p:txBody>
           <a:bodyPr wrap="square" lIns="109728" tIns="82296" rIns="109728" bIns="82296" anchor="ctr">
-            <a:normAutofit/>
+            <a:normAutofit lnSpcReduction="10000"/>
           </a:bodyPr>
           <a:lstStyle/>
           <a:p>
@@ -14633,7 +14798,7 @@
         </p:spPr>
         <p:txBody>
           <a:bodyPr wrap="square" lIns="109728" tIns="82296" rIns="109728" bIns="82296" anchor="ctr">
-            <a:normAutofit/>
+            <a:normAutofit lnSpcReduction="10000"/>
           </a:bodyPr>
           <a:lstStyle/>
           <a:p>
@@ -16747,7 +16912,7 @@
         </p:spPr>
         <p:txBody>
           <a:bodyPr wrap="square" lIns="0" tIns="0" rIns="0" bIns="0" anchor="t">
-            <a:normAutofit/>
+            <a:normAutofit fontScale="92500"/>
           </a:bodyPr>
           <a:lstStyle/>
           <a:p>
@@ -17070,8 +17235,8 @@
         </p:nvSpPr>
         <p:spPr>
           <a:xfrm>
-            <a:off x="5969000" y="1574800"/>
-            <a:ext cx="2794000" cy="508000"/>
+            <a:off x="6096000" y="1524000"/>
+            <a:ext cx="2305050" cy="508000"/>
           </a:xfrm>
           <a:prstGeom prst="rect">
             <a:avLst/>
@@ -17611,7 +17776,20 @@
                   <a:srgbClr val="3A3A3A"/>
                 </a:solidFill>
               </a:rPr>
-              <a:t>Each dot is a distinct possible realization. The obligations bound a region; they do not pick a point inside it.</a:t>
+              <a:t>Each dot is a distinct possible realization. </a:t>
+            </a:r>
+          </a:p>
+          <a:p>
+            <a:pPr algn="ctr">
+              <a:buNone/>
+            </a:pPr>
+            <a:r>
+              <a:rPr lang="en-US" sz="1700" dirty="0">
+                <a:solidFill>
+                  <a:srgbClr val="3A3A3A"/>
+                </a:solidFill>
+              </a:rPr>
+              <a:t>The obligations bound a region; they do not pick a point inside it.</a:t>
             </a:r>
           </a:p>
         </p:txBody>
@@ -19902,6 +20080,36 @@
           </a:p>
         </p:txBody>
       </p:sp>
+      <p:pic>
+        <p:nvPicPr>
+          <p:cNvPr id="2" name="Think Pair Share banner" descr="Think, Pair, Share">
+            <a:extLst>
+              <a:ext uri="{FF2B5EF4-FFF2-40B4-BE49-F238E27FC236}">
+                <a16:creationId xmlns:a16="http://schemas.microsoft.com/office/drawing/2014/main" id="{F5C909AE-DDFD-E290-3EEC-E98335FEB2A2}"/>
+              </a:ext>
+            </a:extLst>
+          </p:cNvPr>
+          <p:cNvPicPr>
+            <a:picLocks noChangeAspect="1"/>
+          </p:cNvPicPr>
+          <p:nvPr/>
+        </p:nvPicPr>
+        <p:blipFill>
+          <a:blip r:embed="rId3"/>
+          <a:stretch>
+            <a:fillRect/>
+          </a:stretch>
+        </p:blipFill>
+        <p:spPr>
+          <a:xfrm>
+            <a:off x="2476500" y="1008825"/>
+            <a:ext cx="4191000" cy="1206500"/>
+          </a:xfrm>
+          <a:prstGeom prst="rect">
+            <a:avLst/>
+          </a:prstGeom>
+        </p:spPr>
+      </p:pic>
     </p:spTree>
     <p:extLst>
       <p:ext uri="{BB962C8B-B14F-4D97-AF65-F5344CB8AC3E}">
@@ -22026,7 +22234,7 @@
         </p:spPr>
         <p:txBody>
           <a:bodyPr wrap="square" lIns="109728" tIns="82296" rIns="109728" bIns="82296" anchor="t">
-            <a:normAutofit fontScale="92500"/>
+            <a:normAutofit/>
           </a:bodyPr>
           <a:lstStyle/>
           <a:p>
@@ -22329,7 +22537,7 @@
         </p:spPr>
         <p:txBody>
           <a:bodyPr>
-            <a:normAutofit fontScale="90000"/>
+            <a:normAutofit/>
           </a:bodyPr>
           <a:lstStyle/>
           <a:p>
@@ -23032,7 +23240,7 @@
 </p:sld>
 </file>
 
-<file path=ppt/slides/slide32.xml><?xml version="1.0" encoding="utf-8"?>
+<file path=ppt/slides/slide31.xml><?xml version="1.0" encoding="utf-8"?>
 <p:sld xmlns:a="http://schemas.openxmlformats.org/drawingml/2006/main" xmlns:r="http://schemas.openxmlformats.org/officeDocument/2006/relationships" xmlns:p="http://schemas.openxmlformats.org/presentationml/2006/main">
   <p:cSld>
     <p:spTree>
@@ -23110,7 +23318,7 @@
           <a:p>
             <a:fld id="{B7EB45DA-9A0D-DC49-8E02-F30A5DDC21C3}" type="slidenum">
               <a:rPr lang="en-US" smtClean="0"/>
-              <a:t>32</a:t>
+              <a:t>31</a:t>
             </a:fld>
             <a:endParaRPr lang="en-US"/>
           </a:p>
@@ -23299,7 +23507,7 @@
         </p:spPr>
         <p:txBody>
           <a:bodyPr wrap="square" lIns="0" tIns="0" rIns="0" bIns="0" anchor="t">
-            <a:normAutofit/>
+            <a:normAutofit lnSpcReduction="10000"/>
           </a:bodyPr>
           <a:lstStyle/>
           <a:p>
@@ -23342,7 +23550,7 @@
         </p:spPr>
         <p:txBody>
           <a:bodyPr wrap="square" lIns="109728" tIns="82296" rIns="109728" bIns="82296" anchor="ctr">
-            <a:normAutofit/>
+            <a:normAutofit lnSpcReduction="10000"/>
           </a:bodyPr>
           <a:lstStyle/>
           <a:p>
@@ -23385,7 +23593,7 @@
         </p:spPr>
         <p:txBody>
           <a:bodyPr wrap="square" lIns="109728" tIns="82296" rIns="109728" bIns="82296" anchor="ctr">
-            <a:normAutofit/>
+            <a:normAutofit lnSpcReduction="10000"/>
           </a:bodyPr>
           <a:lstStyle/>
           <a:p>
@@ -23428,7 +23636,7 @@
         </p:spPr>
         <p:txBody>
           <a:bodyPr wrap="square" lIns="109728" tIns="82296" rIns="109728" bIns="82296" anchor="ctr">
-            <a:normAutofit/>
+            <a:normAutofit lnSpcReduction="10000"/>
           </a:bodyPr>
           <a:lstStyle/>
           <a:p>
@@ -23623,7 +23831,7 @@
         </p:spPr>
         <p:txBody>
           <a:bodyPr wrap="square" lIns="109728" tIns="82296" rIns="109728" bIns="82296" anchor="ctr">
-            <a:normAutofit fontScale="85000" lnSpcReduction="10000"/>
+            <a:normAutofit fontScale="92500"/>
           </a:bodyPr>
           <a:lstStyle/>
           <a:p>
@@ -24482,7 +24690,7 @@
         </p:spPr>
         <p:txBody>
           <a:bodyPr wrap="square" lIns="109728" tIns="82296" rIns="109728" bIns="82296" anchor="ctr">
-            <a:normAutofit/>
+            <a:normAutofit fontScale="92500" lnSpcReduction="10000"/>
           </a:bodyPr>
           <a:lstStyle/>
           <a:p>
@@ -24533,7 +24741,7 @@
         </p:spPr>
         <p:txBody>
           <a:bodyPr wrap="square" lIns="109728" tIns="82296" rIns="109728" bIns="82296" anchor="ctr">
-            <a:normAutofit/>
+            <a:normAutofit fontScale="92500" lnSpcReduction="10000"/>
           </a:bodyPr>
           <a:lstStyle/>
           <a:p>
@@ -24584,7 +24792,7 @@
         </p:spPr>
         <p:txBody>
           <a:bodyPr wrap="square" lIns="109728" tIns="82296" rIns="109728" bIns="82296" anchor="ctr">
-            <a:normAutofit/>
+            <a:normAutofit fontScale="92500"/>
           </a:bodyPr>
           <a:lstStyle/>
           <a:p>
@@ -24686,7 +24894,7 @@
         </p:spPr>
         <p:txBody>
           <a:bodyPr wrap="square" lIns="109728" tIns="82296" rIns="109728" bIns="82296" anchor="ctr">
-            <a:normAutofit/>
+            <a:normAutofit fontScale="92500"/>
           </a:bodyPr>
           <a:lstStyle/>
           <a:p>
@@ -24737,7 +24945,7 @@
         </p:spPr>
         <p:txBody>
           <a:bodyPr wrap="square" lIns="109728" tIns="82296" rIns="109728" bIns="82296" anchor="ctr">
-            <a:normAutofit/>
+            <a:normAutofit fontScale="92500" lnSpcReduction="10000"/>
           </a:bodyPr>
           <a:lstStyle/>
           <a:p>
@@ -25459,15 +25667,19 @@
             <p:ph type="title"/>
           </p:nvPr>
         </p:nvSpPr>
-        <p:spPr/>
+        <p:spPr>
+          <a:xfrm>
+            <a:off x="277148" y="118428"/>
+            <a:ext cx="8324254" cy="638175"/>
+          </a:xfrm>
+        </p:spPr>
         <p:txBody>
           <a:bodyPr>
             <a:normAutofit fontScale="90000"/>
           </a:bodyPr>
           <a:lstStyle/>
           <a:p>
-            <a:pPr algn="l">
-              <a:buNone/>
+            <a:pPr>
               <a:defRPr b="0"/>
             </a:pPr>
             <a:r>
@@ -25476,8 +25688,21 @@
                   <a:srgbClr val="000000"/>
                 </a:solidFill>
               </a:rPr>
-              <a:t>Requirements ≠ specification</a:t>
-            </a:r>
+              <a:t>Requirements ≠ S</a:t>
+            </a:r>
+            <a:r>
+              <a:rPr lang="en-US" sz="3200" dirty="0">
+                <a:solidFill>
+                  <a:srgbClr val="000000"/>
+                </a:solidFill>
+              </a:rPr>
+              <a:t>pecification ≠ Machine instr.</a:t>
+            </a:r>
+            <a:endParaRPr lang="en-US" sz="3200" b="0" i="0" dirty="0">
+              <a:solidFill>
+                <a:srgbClr val="000000"/>
+              </a:solidFill>
+            </a:endParaRPr>
           </a:p>
         </p:txBody>
       </p:sp>
@@ -26948,7 +27173,12 @@
             <p:ph type="title"/>
           </p:nvPr>
         </p:nvSpPr>
-        <p:spPr/>
+        <p:spPr>
+          <a:xfrm>
+            <a:off x="277148" y="118428"/>
+            <a:ext cx="8559800" cy="638175"/>
+          </a:xfrm>
+        </p:spPr>
         <p:txBody>
           <a:bodyPr>
             <a:normAutofit fontScale="90000"/>
@@ -26965,7 +27195,7 @@
                   <a:srgbClr val="000000"/>
                 </a:solidFill>
               </a:rPr>
-              <a:t>What would you tell the implementor?</a:t>
+              <a:t>How would you constrain the machine (implementation)?</a:t>
             </a:r>
           </a:p>
         </p:txBody>
@@ -27015,8 +27245,8 @@
         </p:blipFill>
         <p:spPr>
           <a:xfrm>
-            <a:off x="279400" y="762000"/>
-            <a:ext cx="4191000" cy="1206500"/>
+            <a:off x="279400" y="797706"/>
+            <a:ext cx="4066969" cy="1170794"/>
           </a:xfrm>
           <a:prstGeom prst="rect">
             <a:avLst/>
@@ -27120,7 +27350,7 @@
         </p:spPr>
         <p:txBody>
           <a:bodyPr wrap="square" lIns="109728" tIns="82296" rIns="109728" bIns="82296" anchor="ctr">
-            <a:normAutofit/>
+            <a:normAutofit lnSpcReduction="10000"/>
           </a:bodyPr>
           <a:lstStyle/>
           <a:p>
@@ -27149,7 +27379,39 @@
                   <a:srgbClr val="000000"/>
                 </a:solidFill>
               </a:rPr>
-              <a:t>What must the app do?</a:t>
+              <a:t>What </a:t>
+            </a:r>
+            <a:r>
+              <a:rPr lang="en-US" sz="2200" b="1" dirty="0">
+                <a:solidFill>
+                  <a:srgbClr val="000000"/>
+                </a:solidFill>
+              </a:rPr>
+              <a:t>must</a:t>
+            </a:r>
+            <a:r>
+              <a:rPr lang="en-US" sz="2200" b="1" i="0" dirty="0">
+                <a:solidFill>
+                  <a:srgbClr val="000000"/>
+                </a:solidFill>
+              </a:rPr>
+              <a:t> the app do?</a:t>
+            </a:r>
+          </a:p>
+          <a:p>
+            <a:pPr algn="l">
+              <a:spcBef>
+                <a:spcPts val="160"/>
+              </a:spcBef>
+              <a:buNone/>
+            </a:pPr>
+            <a:r>
+              <a:rPr lang="en-US" i="1" dirty="0">
+                <a:solidFill>
+                  <a:srgbClr val="000000"/>
+                </a:solidFill>
+              </a:rPr>
+              <a:t>required behavior</a:t>
             </a:r>
           </a:p>
         </p:txBody>
@@ -27179,7 +27441,7 @@
         </p:spPr>
         <p:txBody>
           <a:bodyPr wrap="square" lIns="109728" tIns="82296" rIns="109728" bIns="82296" anchor="ctr">
-            <a:normAutofit/>
+            <a:normAutofit lnSpcReduction="10000"/>
           </a:bodyPr>
           <a:lstStyle/>
           <a:p>
@@ -27209,6 +27471,21 @@
                 </a:solidFill>
               </a:rPr>
               <a:t>What facts are missing?</a:t>
+            </a:r>
+          </a:p>
+          <a:p>
+            <a:pPr>
+              <a:spcBef>
+                <a:spcPts val="160"/>
+              </a:spcBef>
+            </a:pPr>
+            <a:r>
+              <a:rPr lang="en-US" i="1" dirty="0">
+                <a:solidFill>
+                  <a:srgbClr val="000000"/>
+                </a:solidFill>
+              </a:rPr>
+              <a:t>domain assumptions</a:t>
             </a:r>
           </a:p>
         </p:txBody>
@@ -27238,7 +27515,7 @@
         </p:spPr>
         <p:txBody>
           <a:bodyPr wrap="square" lIns="109728" tIns="82296" rIns="109728" bIns="82296" anchor="ctr">
-            <a:normAutofit/>
+            <a:normAutofit fontScale="85000" lnSpcReduction="10000"/>
           </a:bodyPr>
           <a:lstStyle/>
           <a:p>
@@ -27262,12 +27539,28 @@
               <a:buNone/>
             </a:pPr>
             <a:r>
-              <a:rPr lang="en-US" sz="2200" b="1" i="0" dirty="0">
+              <a:rPr lang="en-US" sz="2600" b="1" i="0" dirty="0">
                 <a:solidFill>
                   <a:srgbClr val="000000"/>
                 </a:solidFill>
               </a:rPr>
               <a:t>What can remain unspecified?</a:t>
+            </a:r>
+          </a:p>
+          <a:p>
+            <a:pPr algn="l">
+              <a:spcBef>
+                <a:spcPts val="160"/>
+              </a:spcBef>
+              <a:buNone/>
+            </a:pPr>
+            <a:r>
+              <a:rPr lang="en-US" sz="2100" i="1" dirty="0">
+                <a:solidFill>
+                  <a:srgbClr val="000000"/>
+                </a:solidFill>
+              </a:rPr>
+              <a:t>implementor may choose</a:t>
             </a:r>
           </a:p>
         </p:txBody>
@@ -27378,7 +27671,7 @@
                   <a:srgbClr val="000000"/>
                 </a:solidFill>
               </a:rPr>
-              <a:t>Not every missing fact has the same status.</a:t>
+              <a:t>Not every missing fact is handled the same way.</a:t>
             </a:r>
           </a:p>
         </p:txBody>
@@ -27707,7 +28000,7 @@
         </p:spPr>
         <p:txBody>
           <a:bodyPr wrap="square" lIns="109728" tIns="82296" rIns="109728" bIns="82296" anchor="ctr">
-            <a:normAutofit fontScale="92500"/>
+            <a:normAutofit/>
           </a:bodyPr>
           <a:lstStyle/>
           <a:p>
@@ -27902,7 +28195,7 @@
         </p:spPr>
         <p:txBody>
           <a:bodyPr wrap="square" lIns="109728" tIns="82296" rIns="109728" bIns="82296" anchor="ctr">
-            <a:normAutofit fontScale="85000" lnSpcReduction="10000"/>
+            <a:normAutofit/>
           </a:bodyPr>
           <a:lstStyle/>
           <a:p>
